--- a/output/wordlabs-struct-3day.pptx
+++ b/output/wordlabs-struct-3day.pptx
@@ -6040,7 +6040,7 @@
                 <a:ea typeface="Calibri" pitchFamily="34" charset="-122"/>
                 <a:cs typeface="Calibri" pitchFamily="34" charset="-120"/>
               </a:rPr>
-              <a:t>The </a:t>
+              <a:t>The builder used careful </a:t>
             </a:r>
             <a:pPr algn="l" indent="0" marL="0">
               <a:buNone/>
@@ -6057,7 +6057,7 @@
                 <a:ea typeface="Calibri" pitchFamily="34" charset="-122"/>
                 <a:cs typeface="Calibri" pitchFamily="34" charset="-120"/>
               </a:rPr>
-              <a:t>instructor</a:t>
+              <a:t>instruction</a:t>
             </a:r>
             <a:pPr algn="l" indent="0" marL="0">
               <a:buNone/>
@@ -6071,7 +6071,7 @@
                 <a:ea typeface="Calibri" pitchFamily="34" charset="-122"/>
                 <a:cs typeface="Calibri" pitchFamily="34" charset="-120"/>
               </a:rPr>
-              <a:t> helped the students </a:t>
+              <a:t> to </a:t>
             </a:r>
             <a:pPr algn="l" indent="0" marL="0">
               <a:buNone/>
@@ -6102,7 +6102,7 @@
                 <a:ea typeface="Calibri" pitchFamily="34" charset="-122"/>
                 <a:cs typeface="Calibri" pitchFamily="34" charset="-120"/>
               </a:rPr>
-              <a:t> a model of the solar system.</a:t>
+              <a:t> the new school hall.</a:t>
             </a:r>
             <a:endParaRPr lang="en-US" sz="1800" dirty="0"/>
           </a:p>
@@ -6257,7 +6257,7 @@
                 <a:ea typeface="Trebuchet MS" pitchFamily="34" charset="-122"/>
                 <a:cs typeface="Trebuchet MS" pitchFamily="34" charset="-120"/>
               </a:rPr>
-              <a:t>instructor</a:t>
+              <a:t>instruction</a:t>
             </a:r>
             <a:endParaRPr lang="en-US" sz="1400" dirty="0"/>
           </a:p>
@@ -6855,7 +6855,7 @@
                 <a:ea typeface="Trebuchet MS" pitchFamily="34" charset="-122"/>
                 <a:cs typeface="Trebuchet MS" pitchFamily="34" charset="-120"/>
               </a:rPr>
-              <a:t>instructor</a:t>
+              <a:t>instruction</a:t>
             </a:r>
             <a:endParaRPr lang="en-US" sz="2800" dirty="0"/>
           </a:p>
@@ -7134,11 +7134,11 @@
         <p:spPr>
           <a:xfrm>
             <a:off x="365760" y="4096512"/>
-            <a:ext cx="1371600" cy="658368"/>
+            <a:ext cx="1371600" cy="804672"/>
           </a:xfrm>
           <a:prstGeom prst="rect">
             <a:avLst>
-              <a:gd name="adj" fmla="val 8333"/>
+              <a:gd name="adj" fmla="val 6818"/>
             </a:avLst>
           </a:prstGeom>
           <a:solidFill>
@@ -7161,7 +7161,7 @@
         <p:spPr>
           <a:xfrm>
             <a:off x="365760" y="4096512"/>
-            <a:ext cx="1371600" cy="658368"/>
+            <a:ext cx="1371600" cy="804672"/>
           </a:xfrm>
           <a:prstGeom prst="rect">
             <a:avLst/>
@@ -7200,11 +7200,11 @@
         <p:spPr>
           <a:xfrm>
             <a:off x="1874520" y="4096512"/>
-            <a:ext cx="6903720" cy="658368"/>
+            <a:ext cx="6903720" cy="804672"/>
           </a:xfrm>
           <a:prstGeom prst="rect">
             <a:avLst>
-              <a:gd name="adj" fmla="val 8333"/>
+              <a:gd name="adj" fmla="val 6818"/>
             </a:avLst>
           </a:prstGeom>
           <a:solidFill>
@@ -7227,7 +7227,7 @@
         <p:spPr>
           <a:xfrm>
             <a:off x="1874520" y="4096512"/>
-            <a:ext cx="6903720" cy="658368"/>
+            <a:ext cx="6903720" cy="804672"/>
           </a:xfrm>
           <a:prstGeom prst="rect">
             <a:avLst/>
@@ -7682,7 +7682,7 @@
                 <a:ea typeface="Trebuchet MS" pitchFamily="34" charset="-122"/>
                 <a:cs typeface="Trebuchet MS" pitchFamily="34" charset="-120"/>
               </a:rPr>
-              <a:t>instructor</a:t>
+              <a:t>instruction</a:t>
             </a:r>
             <a:endParaRPr lang="en-US" sz="2800" dirty="0"/>
           </a:p>
@@ -7972,7 +7972,7 @@
                 <a:ea typeface="Calibri" pitchFamily="34" charset="-122"/>
                 <a:cs typeface="Calibri" pitchFamily="34" charset="-120"/>
               </a:rPr>
-              <a:t>to build</a:t>
+              <a:t>to build or arrange</a:t>
             </a:r>
             <a:endParaRPr lang="en-US" sz="850" dirty="0"/>
           </a:p>
@@ -8045,7 +8045,7 @@
                 <a:ea typeface="Trebuchet MS" pitchFamily="34" charset="-122"/>
                 <a:cs typeface="Trebuchet MS" pitchFamily="34" charset="-120"/>
               </a:rPr>
-              <a:t>or</a:t>
+              <a:t>ion</a:t>
             </a:r>
             <a:endParaRPr lang="en-US" sz="1300" dirty="0"/>
           </a:p>
@@ -8084,7 +8084,7 @@
                 <a:ea typeface="Calibri" pitchFamily="34" charset="-122"/>
                 <a:cs typeface="Calibri" pitchFamily="34" charset="-120"/>
               </a:rPr>
-              <a:t>person who does something</a:t>
+              <a:t>act or result of</a:t>
             </a:r>
             <a:endParaRPr lang="en-US" sz="850" dirty="0"/>
           </a:p>
@@ -8231,11 +8231,11 @@
         <p:spPr>
           <a:xfrm>
             <a:off x="365760" y="4096512"/>
-            <a:ext cx="1371600" cy="658368"/>
+            <a:ext cx="1371600" cy="804672"/>
           </a:xfrm>
           <a:prstGeom prst="rect">
             <a:avLst>
-              <a:gd name="adj" fmla="val 8333"/>
+              <a:gd name="adj" fmla="val 6818"/>
             </a:avLst>
           </a:prstGeom>
           <a:solidFill>
@@ -8258,7 +8258,7 @@
         <p:spPr>
           <a:xfrm>
             <a:off x="365760" y="4096512"/>
-            <a:ext cx="1371600" cy="658368"/>
+            <a:ext cx="1371600" cy="804672"/>
           </a:xfrm>
           <a:prstGeom prst="rect">
             <a:avLst/>
@@ -8297,11 +8297,11 @@
         <p:spPr>
           <a:xfrm>
             <a:off x="1874520" y="4096512"/>
-            <a:ext cx="6903720" cy="658368"/>
+            <a:ext cx="6903720" cy="804672"/>
           </a:xfrm>
           <a:prstGeom prst="rect">
             <a:avLst>
-              <a:gd name="adj" fmla="val 8333"/>
+              <a:gd name="adj" fmla="val 6818"/>
             </a:avLst>
           </a:prstGeom>
           <a:solidFill>
@@ -8324,7 +8324,7 @@
         <p:spPr>
           <a:xfrm>
             <a:off x="1874520" y="4096512"/>
-            <a:ext cx="6903720" cy="658368"/>
+            <a:ext cx="6903720" cy="804672"/>
           </a:xfrm>
           <a:prstGeom prst="rect">
             <a:avLst/>
@@ -8779,7 +8779,7 @@
                 <a:ea typeface="Trebuchet MS" pitchFamily="34" charset="-122"/>
                 <a:cs typeface="Trebuchet MS" pitchFamily="34" charset="-120"/>
               </a:rPr>
-              <a:t>instructor</a:t>
+              <a:t>instruction</a:t>
             </a:r>
             <a:endParaRPr lang="en-US" sz="2800" dirty="0"/>
           </a:p>
@@ -9069,7 +9069,7 @@
                 <a:ea typeface="Calibri" pitchFamily="34" charset="-122"/>
                 <a:cs typeface="Calibri" pitchFamily="34" charset="-120"/>
               </a:rPr>
-              <a:t>to build</a:t>
+              <a:t>to build or arrange</a:t>
             </a:r>
             <a:endParaRPr lang="en-US" sz="850" dirty="0"/>
           </a:p>
@@ -9142,7 +9142,7 @@
                 <a:ea typeface="Trebuchet MS" pitchFamily="34" charset="-122"/>
                 <a:cs typeface="Trebuchet MS" pitchFamily="34" charset="-120"/>
               </a:rPr>
-              <a:t>or</a:t>
+              <a:t>ion</a:t>
             </a:r>
             <a:endParaRPr lang="en-US" sz="1300" dirty="0"/>
           </a:p>
@@ -9181,7 +9181,7 @@
                 <a:ea typeface="Calibri" pitchFamily="34" charset="-122"/>
                 <a:cs typeface="Calibri" pitchFamily="34" charset="-120"/>
               </a:rPr>
-              <a:t>person who does something</a:t>
+              <a:t>act or result of</a:t>
             </a:r>
             <a:endParaRPr lang="en-US" sz="850" dirty="0"/>
           </a:p>
@@ -9550,7 +9550,7 @@
                 <a:ea typeface="Trebuchet MS" pitchFamily="34" charset="-122"/>
                 <a:cs typeface="Trebuchet MS" pitchFamily="34" charset="-120"/>
               </a:rPr>
-              <a:t>tor</a:t>
+              <a:t>tion</a:t>
             </a:r>
             <a:endParaRPr lang="en-US" sz="1400" dirty="0"/>
           </a:p>
@@ -9565,11 +9565,11 @@
         <p:spPr>
           <a:xfrm>
             <a:off x="365760" y="4096512"/>
-            <a:ext cx="1371600" cy="658368"/>
+            <a:ext cx="1371600" cy="804672"/>
           </a:xfrm>
           <a:prstGeom prst="rect">
             <a:avLst>
-              <a:gd name="adj" fmla="val 8333"/>
+              <a:gd name="adj" fmla="val 6818"/>
             </a:avLst>
           </a:prstGeom>
           <a:solidFill>
@@ -9592,7 +9592,7 @@
         <p:spPr>
           <a:xfrm>
             <a:off x="365760" y="4096512"/>
-            <a:ext cx="1371600" cy="658368"/>
+            <a:ext cx="1371600" cy="804672"/>
           </a:xfrm>
           <a:prstGeom prst="rect">
             <a:avLst/>
@@ -9631,11 +9631,11 @@
         <p:spPr>
           <a:xfrm>
             <a:off x="1874520" y="4096512"/>
-            <a:ext cx="6903720" cy="658368"/>
+            <a:ext cx="6903720" cy="804672"/>
           </a:xfrm>
           <a:prstGeom prst="rect">
             <a:avLst>
-              <a:gd name="adj" fmla="val 8333"/>
+              <a:gd name="adj" fmla="val 6818"/>
             </a:avLst>
           </a:prstGeom>
           <a:solidFill>
@@ -9658,7 +9658,7 @@
         <p:spPr>
           <a:xfrm>
             <a:off x="1874520" y="4096512"/>
-            <a:ext cx="6903720" cy="658368"/>
+            <a:ext cx="6903720" cy="804672"/>
           </a:xfrm>
           <a:prstGeom prst="rect">
             <a:avLst/>
@@ -10113,7 +10113,7 @@
                 <a:ea typeface="Trebuchet MS" pitchFamily="34" charset="-122"/>
                 <a:cs typeface="Trebuchet MS" pitchFamily="34" charset="-120"/>
               </a:rPr>
-              <a:t>instructor</a:t>
+              <a:t>instruction</a:t>
             </a:r>
             <a:endParaRPr lang="en-US" sz="2800" dirty="0"/>
           </a:p>
@@ -10403,7 +10403,7 @@
                 <a:ea typeface="Calibri" pitchFamily="34" charset="-122"/>
                 <a:cs typeface="Calibri" pitchFamily="34" charset="-120"/>
               </a:rPr>
-              <a:t>to build</a:t>
+              <a:t>to build or arrange</a:t>
             </a:r>
             <a:endParaRPr lang="en-US" sz="850" dirty="0"/>
           </a:p>
@@ -10476,7 +10476,7 @@
                 <a:ea typeface="Trebuchet MS" pitchFamily="34" charset="-122"/>
                 <a:cs typeface="Trebuchet MS" pitchFamily="34" charset="-120"/>
               </a:rPr>
-              <a:t>or</a:t>
+              <a:t>ion</a:t>
             </a:r>
             <a:endParaRPr lang="en-US" sz="1300" dirty="0"/>
           </a:p>
@@ -10515,7 +10515,7 @@
                 <a:ea typeface="Calibri" pitchFamily="34" charset="-122"/>
                 <a:cs typeface="Calibri" pitchFamily="34" charset="-120"/>
               </a:rPr>
-              <a:t>person who does something</a:t>
+              <a:t>act or result of</a:t>
             </a:r>
             <a:endParaRPr lang="en-US" sz="850" dirty="0"/>
           </a:p>
@@ -10884,7 +10884,7 @@
                 <a:ea typeface="Trebuchet MS" pitchFamily="34" charset="-122"/>
                 <a:cs typeface="Trebuchet MS" pitchFamily="34" charset="-120"/>
               </a:rPr>
-              <a:t>tor</a:t>
+              <a:t>tion</a:t>
             </a:r>
             <a:endParaRPr lang="en-US" sz="1400" dirty="0"/>
           </a:p>
@@ -10899,11 +10899,11 @@
         <p:spPr>
           <a:xfrm>
             <a:off x="365760" y="4096512"/>
-            <a:ext cx="1371600" cy="658368"/>
+            <a:ext cx="1371600" cy="804672"/>
           </a:xfrm>
           <a:prstGeom prst="rect">
             <a:avLst>
-              <a:gd name="adj" fmla="val 8333"/>
+              <a:gd name="adj" fmla="val 6818"/>
             </a:avLst>
           </a:prstGeom>
           <a:solidFill>
@@ -10926,7 +10926,7 @@
         <p:spPr>
           <a:xfrm>
             <a:off x="365760" y="4096512"/>
-            <a:ext cx="1371600" cy="658368"/>
+            <a:ext cx="1371600" cy="804672"/>
           </a:xfrm>
           <a:prstGeom prst="rect">
             <a:avLst/>
@@ -10965,11 +10965,11 @@
         <p:spPr>
           <a:xfrm>
             <a:off x="1874520" y="4096512"/>
-            <a:ext cx="6903720" cy="658368"/>
+            <a:ext cx="6903720" cy="804672"/>
           </a:xfrm>
           <a:prstGeom prst="rect">
             <a:avLst>
-              <a:gd name="adj" fmla="val 8333"/>
+              <a:gd name="adj" fmla="val 6818"/>
             </a:avLst>
           </a:prstGeom>
           <a:solidFill>
@@ -10991,12 +10991,12 @@
         </p:nvSpPr>
         <p:spPr>
           <a:xfrm>
-            <a:off x="1951330" y="4187952"/>
-            <a:ext cx="676656" cy="475488"/>
+            <a:off x="1951828" y="4169664"/>
+            <a:ext cx="603504" cy="384048"/>
           </a:xfrm>
           <a:prstGeom prst="rect">
             <a:avLst>
-              <a:gd name="adj" fmla="val 7692"/>
+              <a:gd name="adj" fmla="val 9524"/>
             </a:avLst>
           </a:prstGeom>
           <a:solidFill>
@@ -11018,8 +11018,8 @@
         </p:nvSpPr>
         <p:spPr>
           <a:xfrm>
-            <a:off x="1951330" y="4187952"/>
-            <a:ext cx="676656" cy="475488"/>
+            <a:off x="1951828" y="4169664"/>
+            <a:ext cx="603504" cy="384048"/>
           </a:xfrm>
           <a:prstGeom prst="rect">
             <a:avLst/>
@@ -11057,12 +11057,12 @@
         </p:nvSpPr>
         <p:spPr>
           <a:xfrm>
-            <a:off x="2677363" y="4187952"/>
-            <a:ext cx="676656" cy="475488"/>
+            <a:off x="2605209" y="4169664"/>
+            <a:ext cx="603504" cy="384048"/>
           </a:xfrm>
           <a:prstGeom prst="rect">
             <a:avLst>
-              <a:gd name="adj" fmla="val 7692"/>
+              <a:gd name="adj" fmla="val 9524"/>
             </a:avLst>
           </a:prstGeom>
           <a:solidFill>
@@ -11084,8 +11084,8 @@
         </p:nvSpPr>
         <p:spPr>
           <a:xfrm>
-            <a:off x="2677363" y="4187952"/>
-            <a:ext cx="676656" cy="475488"/>
+            <a:off x="2605209" y="4169664"/>
+            <a:ext cx="603504" cy="384048"/>
           </a:xfrm>
           <a:prstGeom prst="rect">
             <a:avLst/>
@@ -11123,12 +11123,12 @@
         </p:nvSpPr>
         <p:spPr>
           <a:xfrm>
-            <a:off x="3403397" y="4187952"/>
-            <a:ext cx="676656" cy="475488"/>
+            <a:off x="3258589" y="4169664"/>
+            <a:ext cx="603504" cy="384048"/>
           </a:xfrm>
           <a:prstGeom prst="rect">
             <a:avLst>
-              <a:gd name="adj" fmla="val 7692"/>
+              <a:gd name="adj" fmla="val 9524"/>
             </a:avLst>
           </a:prstGeom>
           <a:solidFill>
@@ -11150,8 +11150,8 @@
         </p:nvSpPr>
         <p:spPr>
           <a:xfrm>
-            <a:off x="3403397" y="4187952"/>
-            <a:ext cx="676656" cy="475488"/>
+            <a:off x="3258589" y="4169664"/>
+            <a:ext cx="603504" cy="384048"/>
           </a:xfrm>
           <a:prstGeom prst="rect">
             <a:avLst/>
@@ -11189,12 +11189,12 @@
         </p:nvSpPr>
         <p:spPr>
           <a:xfrm>
-            <a:off x="4129430" y="4187952"/>
-            <a:ext cx="676656" cy="475488"/>
+            <a:off x="3911969" y="4169664"/>
+            <a:ext cx="603504" cy="384048"/>
           </a:xfrm>
           <a:prstGeom prst="rect">
             <a:avLst>
-              <a:gd name="adj" fmla="val 7692"/>
+              <a:gd name="adj" fmla="val 9524"/>
             </a:avLst>
           </a:prstGeom>
           <a:solidFill>
@@ -11216,8 +11216,8 @@
         </p:nvSpPr>
         <p:spPr>
           <a:xfrm>
-            <a:off x="4129430" y="4187952"/>
-            <a:ext cx="676656" cy="475488"/>
+            <a:off x="3911969" y="4169664"/>
+            <a:ext cx="603504" cy="384048"/>
           </a:xfrm>
           <a:prstGeom prst="rect">
             <a:avLst/>
@@ -11255,12 +11255,12 @@
         </p:nvSpPr>
         <p:spPr>
           <a:xfrm>
-            <a:off x="4855464" y="4187952"/>
-            <a:ext cx="676656" cy="475488"/>
+            <a:off x="4565350" y="4169664"/>
+            <a:ext cx="603504" cy="384048"/>
           </a:xfrm>
           <a:prstGeom prst="rect">
             <a:avLst>
-              <a:gd name="adj" fmla="val 7692"/>
+              <a:gd name="adj" fmla="val 9524"/>
             </a:avLst>
           </a:prstGeom>
           <a:solidFill>
@@ -11282,8 +11282,8 @@
         </p:nvSpPr>
         <p:spPr>
           <a:xfrm>
-            <a:off x="4855464" y="4187952"/>
-            <a:ext cx="676656" cy="475488"/>
+            <a:off x="4565350" y="4169664"/>
+            <a:ext cx="603504" cy="384048"/>
           </a:xfrm>
           <a:prstGeom prst="rect">
             <a:avLst/>
@@ -11321,12 +11321,12 @@
         </p:nvSpPr>
         <p:spPr>
           <a:xfrm>
-            <a:off x="5581498" y="4187952"/>
-            <a:ext cx="676656" cy="475488"/>
+            <a:off x="5218730" y="4169664"/>
+            <a:ext cx="603504" cy="384048"/>
           </a:xfrm>
           <a:prstGeom prst="rect">
             <a:avLst>
-              <a:gd name="adj" fmla="val 7692"/>
+              <a:gd name="adj" fmla="val 9524"/>
             </a:avLst>
           </a:prstGeom>
           <a:solidFill>
@@ -11348,8 +11348,8 @@
         </p:nvSpPr>
         <p:spPr>
           <a:xfrm>
-            <a:off x="5581498" y="4187952"/>
-            <a:ext cx="676656" cy="475488"/>
+            <a:off x="5218730" y="4169664"/>
+            <a:ext cx="603504" cy="384048"/>
           </a:xfrm>
           <a:prstGeom prst="rect">
             <a:avLst/>
@@ -11387,12 +11387,12 @@
         </p:nvSpPr>
         <p:spPr>
           <a:xfrm>
-            <a:off x="6307531" y="4187952"/>
-            <a:ext cx="676656" cy="475488"/>
+            <a:off x="5872111" y="4169664"/>
+            <a:ext cx="603504" cy="384048"/>
           </a:xfrm>
           <a:prstGeom prst="rect">
             <a:avLst>
-              <a:gd name="adj" fmla="val 7692"/>
+              <a:gd name="adj" fmla="val 9524"/>
             </a:avLst>
           </a:prstGeom>
           <a:solidFill>
@@ -11414,8 +11414,8 @@
         </p:nvSpPr>
         <p:spPr>
           <a:xfrm>
-            <a:off x="6307531" y="4187952"/>
-            <a:ext cx="676656" cy="475488"/>
+            <a:off x="5872111" y="4169664"/>
+            <a:ext cx="603504" cy="384048"/>
           </a:xfrm>
           <a:prstGeom prst="rect">
             <a:avLst/>
@@ -11453,12 +11453,12 @@
         </p:nvSpPr>
         <p:spPr>
           <a:xfrm>
-            <a:off x="7033565" y="4187952"/>
-            <a:ext cx="676656" cy="475488"/>
+            <a:off x="6525491" y="4169664"/>
+            <a:ext cx="603504" cy="384048"/>
           </a:xfrm>
           <a:prstGeom prst="rect">
             <a:avLst>
-              <a:gd name="adj" fmla="val 7692"/>
+              <a:gd name="adj" fmla="val 9524"/>
             </a:avLst>
           </a:prstGeom>
           <a:solidFill>
@@ -11480,8 +11480,8 @@
         </p:nvSpPr>
         <p:spPr>
           <a:xfrm>
-            <a:off x="7033565" y="4187952"/>
-            <a:ext cx="676656" cy="475488"/>
+            <a:off x="6525491" y="4169664"/>
+            <a:ext cx="603504" cy="384048"/>
           </a:xfrm>
           <a:prstGeom prst="rect">
             <a:avLst/>
@@ -11519,12 +11519,12 @@
         </p:nvSpPr>
         <p:spPr>
           <a:xfrm>
-            <a:off x="7759598" y="4187952"/>
-            <a:ext cx="676656" cy="475488"/>
+            <a:off x="7178871" y="4169664"/>
+            <a:ext cx="603504" cy="384048"/>
           </a:xfrm>
           <a:prstGeom prst="rect">
             <a:avLst>
-              <a:gd name="adj" fmla="val 7692"/>
+              <a:gd name="adj" fmla="val 9524"/>
             </a:avLst>
           </a:prstGeom>
           <a:solidFill>
@@ -11546,8 +11546,8 @@
         </p:nvSpPr>
         <p:spPr>
           <a:xfrm>
-            <a:off x="7759598" y="4187952"/>
-            <a:ext cx="676656" cy="475488"/>
+            <a:off x="7178871" y="4169664"/>
+            <a:ext cx="603504" cy="384048"/>
           </a:xfrm>
           <a:prstGeom prst="rect">
             <a:avLst/>
@@ -11571,7 +11571,112 @@
                 <a:ea typeface="Trebuchet MS" pitchFamily="34" charset="-122"/>
                 <a:cs typeface="Trebuchet MS" pitchFamily="34" charset="-120"/>
               </a:rPr>
-              <a:t>or</a:t>
+              <a:t>io</a:t>
+            </a:r>
+            <a:endParaRPr lang="en-US" sz="900" dirty="0"/>
+          </a:p>
+        </p:txBody>
+      </p:sp>
+      <p:sp>
+        <p:nvSpPr>
+          <p:cNvPr id="57" name="Text 55"/>
+          <p:cNvSpPr/>
+          <p:nvPr/>
+        </p:nvSpPr>
+        <p:spPr>
+          <a:xfrm>
+            <a:off x="7178871" y="4572000"/>
+            <a:ext cx="603504" cy="219456"/>
+          </a:xfrm>
+          <a:prstGeom prst="rect">
+            <a:avLst/>
+          </a:prstGeom>
+          <a:noFill/>
+          <a:ln/>
+        </p:spPr>
+        <p:txBody>
+          <a:bodyPr wrap="square" lIns="0" tIns="0" rIns="0" bIns="0" rtlCol="0" anchor="t"/>
+          <a:lstStyle/>
+          <a:p>
+            <a:pPr algn="ctr" indent="0" marL="0">
+              <a:buNone/>
+            </a:pPr>
+            <a:r>
+              <a:rPr lang="en-US" sz="750" i="1" dirty="0">
+                <a:solidFill>
+                  <a:srgbClr val="94A3B8"/>
+                </a:solidFill>
+                <a:latin typeface="Calibri" pitchFamily="34" charset="0"/>
+                <a:ea typeface="Calibri" pitchFamily="34" charset="-122"/>
+                <a:cs typeface="Calibri" pitchFamily="34" charset="-120"/>
+              </a:rPr>
+              <a:t>/sh/</a:t>
+            </a:r>
+            <a:endParaRPr lang="en-US" sz="750" dirty="0"/>
+          </a:p>
+        </p:txBody>
+      </p:sp>
+      <p:sp>
+        <p:nvSpPr>
+          <p:cNvPr id="58" name="Shape 56"/>
+          <p:cNvSpPr/>
+          <p:nvPr/>
+        </p:nvSpPr>
+        <p:spPr>
+          <a:xfrm>
+            <a:off x="7832252" y="4169664"/>
+            <a:ext cx="603504" cy="384048"/>
+          </a:xfrm>
+          <a:prstGeom prst="rect">
+            <a:avLst>
+              <a:gd name="adj" fmla="val 9524"/>
+            </a:avLst>
+          </a:prstGeom>
+          <a:solidFill>
+            <a:srgbClr val="FFFFFF"/>
+          </a:solidFill>
+          <a:ln w="12700">
+            <a:solidFill>
+              <a:srgbClr val="DB2777"/>
+            </a:solidFill>
+            <a:prstDash val="solid"/>
+          </a:ln>
+        </p:spPr>
+      </p:sp>
+      <p:sp>
+        <p:nvSpPr>
+          <p:cNvPr id="59" name="Text 57"/>
+          <p:cNvSpPr/>
+          <p:nvPr/>
+        </p:nvSpPr>
+        <p:spPr>
+          <a:xfrm>
+            <a:off x="7832252" y="4169664"/>
+            <a:ext cx="603504" cy="384048"/>
+          </a:xfrm>
+          <a:prstGeom prst="rect">
+            <a:avLst/>
+          </a:prstGeom>
+          <a:noFill/>
+          <a:ln/>
+        </p:spPr>
+        <p:txBody>
+          <a:bodyPr wrap="square" lIns="0" tIns="0" rIns="0" bIns="0" rtlCol="0" anchor="ctr"/>
+          <a:lstStyle/>
+          <a:p>
+            <a:pPr algn="ctr" indent="0" marL="0">
+              <a:buNone/>
+            </a:pPr>
+            <a:r>
+              <a:rPr lang="en-US" sz="900" b="1" dirty="0">
+                <a:solidFill>
+                  <a:srgbClr val="9D174D"/>
+                </a:solidFill>
+                <a:latin typeface="Trebuchet MS" pitchFamily="34" charset="0"/>
+                <a:ea typeface="Trebuchet MS" pitchFamily="34" charset="-122"/>
+                <a:cs typeface="Trebuchet MS" pitchFamily="34" charset="-120"/>
+              </a:rPr>
+              <a:t>n</a:t>
             </a:r>
             <a:endParaRPr lang="en-US" sz="900" dirty="0"/>
           </a:p>
@@ -12281,11 +12386,11 @@
         <p:spPr>
           <a:xfrm>
             <a:off x="365760" y="4096512"/>
-            <a:ext cx="1371600" cy="658368"/>
+            <a:ext cx="1371600" cy="804672"/>
           </a:xfrm>
           <a:prstGeom prst="rect">
             <a:avLst>
-              <a:gd name="adj" fmla="val 8333"/>
+              <a:gd name="adj" fmla="val 6818"/>
             </a:avLst>
           </a:prstGeom>
           <a:solidFill>
@@ -12308,7 +12413,7 @@
         <p:spPr>
           <a:xfrm>
             <a:off x="365760" y="4096512"/>
-            <a:ext cx="1371600" cy="658368"/>
+            <a:ext cx="1371600" cy="804672"/>
           </a:xfrm>
           <a:prstGeom prst="rect">
             <a:avLst/>
@@ -12347,11 +12452,11 @@
         <p:spPr>
           <a:xfrm>
             <a:off x="1874520" y="4096512"/>
-            <a:ext cx="6903720" cy="658368"/>
+            <a:ext cx="6903720" cy="804672"/>
           </a:xfrm>
           <a:prstGeom prst="rect">
             <a:avLst>
-              <a:gd name="adj" fmla="val 8333"/>
+              <a:gd name="adj" fmla="val 6818"/>
             </a:avLst>
           </a:prstGeom>
           <a:solidFill>
@@ -12374,7 +12479,7 @@
         <p:spPr>
           <a:xfrm>
             <a:off x="1874520" y="4096512"/>
-            <a:ext cx="6903720" cy="658368"/>
+            <a:ext cx="6903720" cy="804672"/>
           </a:xfrm>
           <a:prstGeom prst="rect">
             <a:avLst/>
@@ -13119,7 +13224,7 @@
                 <a:ea typeface="Calibri" pitchFamily="34" charset="-122"/>
                 <a:cs typeface="Calibri" pitchFamily="34" charset="-120"/>
               </a:rPr>
-              <a:t>to build</a:t>
+              <a:t>to build or arrange</a:t>
             </a:r>
             <a:endParaRPr lang="en-US" sz="850" dirty="0"/>
           </a:p>
@@ -13266,11 +13371,11 @@
         <p:spPr>
           <a:xfrm>
             <a:off x="365760" y="4096512"/>
-            <a:ext cx="1371600" cy="658368"/>
+            <a:ext cx="1371600" cy="804672"/>
           </a:xfrm>
           <a:prstGeom prst="rect">
             <a:avLst>
-              <a:gd name="adj" fmla="val 8333"/>
+              <a:gd name="adj" fmla="val 6818"/>
             </a:avLst>
           </a:prstGeom>
           <a:solidFill>
@@ -13293,7 +13398,7 @@
         <p:spPr>
           <a:xfrm>
             <a:off x="365760" y="4096512"/>
-            <a:ext cx="1371600" cy="658368"/>
+            <a:ext cx="1371600" cy="804672"/>
           </a:xfrm>
           <a:prstGeom prst="rect">
             <a:avLst/>
@@ -13332,11 +13437,11 @@
         <p:spPr>
           <a:xfrm>
             <a:off x="1874520" y="4096512"/>
-            <a:ext cx="6903720" cy="658368"/>
+            <a:ext cx="6903720" cy="804672"/>
           </a:xfrm>
           <a:prstGeom prst="rect">
             <a:avLst>
-              <a:gd name="adj" fmla="val 8333"/>
+              <a:gd name="adj" fmla="val 6818"/>
             </a:avLst>
           </a:prstGeom>
           <a:solidFill>
@@ -13359,7 +13464,7 @@
         <p:spPr>
           <a:xfrm>
             <a:off x="1874520" y="4096512"/>
-            <a:ext cx="6903720" cy="658368"/>
+            <a:ext cx="6903720" cy="804672"/>
           </a:xfrm>
           <a:prstGeom prst="rect">
             <a:avLst/>
@@ -14104,7 +14209,7 @@
                 <a:ea typeface="Calibri" pitchFamily="34" charset="-122"/>
                 <a:cs typeface="Calibri" pitchFamily="34" charset="-120"/>
               </a:rPr>
-              <a:t>to build</a:t>
+              <a:t>to build or arrange</a:t>
             </a:r>
             <a:endParaRPr lang="en-US" sz="850" dirty="0"/>
           </a:p>
@@ -14383,11 +14488,11 @@
         <p:spPr>
           <a:xfrm>
             <a:off x="365760" y="4096512"/>
-            <a:ext cx="1371600" cy="658368"/>
+            <a:ext cx="1371600" cy="804672"/>
           </a:xfrm>
           <a:prstGeom prst="rect">
             <a:avLst>
-              <a:gd name="adj" fmla="val 8333"/>
+              <a:gd name="adj" fmla="val 6818"/>
             </a:avLst>
           </a:prstGeom>
           <a:solidFill>
@@ -14410,7 +14515,7 @@
         <p:spPr>
           <a:xfrm>
             <a:off x="365760" y="4096512"/>
-            <a:ext cx="1371600" cy="658368"/>
+            <a:ext cx="1371600" cy="804672"/>
           </a:xfrm>
           <a:prstGeom prst="rect">
             <a:avLst/>
@@ -14449,11 +14554,11 @@
         <p:spPr>
           <a:xfrm>
             <a:off x="1874520" y="4096512"/>
-            <a:ext cx="6903720" cy="658368"/>
+            <a:ext cx="6903720" cy="804672"/>
           </a:xfrm>
           <a:prstGeom prst="rect">
             <a:avLst>
-              <a:gd name="adj" fmla="val 8333"/>
+              <a:gd name="adj" fmla="val 6818"/>
             </a:avLst>
           </a:prstGeom>
           <a:solidFill>
@@ -14476,7 +14581,7 @@
         <p:spPr>
           <a:xfrm>
             <a:off x="1874520" y="4096512"/>
-            <a:ext cx="6903720" cy="658368"/>
+            <a:ext cx="6903720" cy="804672"/>
           </a:xfrm>
           <a:prstGeom prst="rect">
             <a:avLst/>
@@ -15486,7 +15591,7 @@
                 <a:ea typeface="Calibri" pitchFamily="34" charset="-122"/>
                 <a:cs typeface="Calibri" pitchFamily="34" charset="-120"/>
               </a:rPr>
-              <a:t>to build</a:t>
+              <a:t>to build or arrange</a:t>
             </a:r>
             <a:endParaRPr lang="en-US" sz="850" dirty="0"/>
           </a:p>
@@ -15765,7 +15870,73 @@
         <p:spPr>
           <a:xfrm>
             <a:off x="365760" y="4096512"/>
-            <a:ext cx="1371600" cy="658368"/>
+            <a:ext cx="1371600" cy="804672"/>
+          </a:xfrm>
+          <a:prstGeom prst="rect">
+            <a:avLst>
+              <a:gd name="adj" fmla="val 6818"/>
+            </a:avLst>
+          </a:prstGeom>
+          <a:solidFill>
+            <a:srgbClr val="E2E8F0"/>
+          </a:solidFill>
+          <a:ln w="12700">
+            <a:solidFill>
+              <a:srgbClr val="E2E8F0"/>
+            </a:solidFill>
+            <a:prstDash val="solid"/>
+          </a:ln>
+        </p:spPr>
+      </p:sp>
+      <p:sp>
+        <p:nvSpPr>
+          <p:cNvPr id="31" name="Text 29"/>
+          <p:cNvSpPr/>
+          <p:nvPr/>
+        </p:nvSpPr>
+        <p:spPr>
+          <a:xfrm>
+            <a:off x="365760" y="4096512"/>
+            <a:ext cx="1371600" cy="804672"/>
+          </a:xfrm>
+          <a:prstGeom prst="rect">
+            <a:avLst/>
+          </a:prstGeom>
+          <a:noFill/>
+          <a:ln/>
+        </p:spPr>
+        <p:txBody>
+          <a:bodyPr wrap="square" lIns="0" tIns="0" rIns="0" bIns="0" rtlCol="0" anchor="ctr"/>
+          <a:lstStyle/>
+          <a:p>
+            <a:pPr algn="ctr" indent="0" marL="0">
+              <a:buNone/>
+            </a:pPr>
+            <a:r>
+              <a:rPr lang="en-US" sz="1100" b="1" dirty="0">
+                <a:solidFill>
+                  <a:srgbClr val="475569"/>
+                </a:solidFill>
+                <a:latin typeface="Trebuchet MS" pitchFamily="34" charset="0"/>
+                <a:ea typeface="Trebuchet MS" pitchFamily="34" charset="-122"/>
+                <a:cs typeface="Trebuchet MS" pitchFamily="34" charset="-120"/>
+              </a:rPr>
+              <a:t>Phonemes</a:t>
+            </a:r>
+            <a:endParaRPr lang="en-US" sz="1100" dirty="0"/>
+          </a:p>
+        </p:txBody>
+      </p:sp>
+      <p:sp>
+        <p:nvSpPr>
+          <p:cNvPr id="32" name="Shape 30"/>
+          <p:cNvSpPr/>
+          <p:nvPr/>
+        </p:nvSpPr>
+        <p:spPr>
+          <a:xfrm>
+            <a:off x="1874520" y="4096512"/>
+            <a:ext cx="6903720" cy="658368"/>
           </a:xfrm>
           <a:prstGeom prst="rect">
             <a:avLst>
@@ -15773,91 +15944,91 @@
             </a:avLst>
           </a:prstGeom>
           <a:solidFill>
-            <a:srgbClr val="E2E8F0"/>
-          </a:solidFill>
-          <a:ln w="12700">
-            <a:solidFill>
-              <a:srgbClr val="E2E8F0"/>
-            </a:solidFill>
-            <a:prstDash val="solid"/>
-          </a:ln>
-        </p:spPr>
-      </p:sp>
-      <p:sp>
-        <p:nvSpPr>
-          <p:cNvPr id="31" name="Text 29"/>
-          <p:cNvSpPr/>
-          <p:nvPr/>
-        </p:nvSpPr>
-        <p:spPr>
-          <a:xfrm>
-            <a:off x="365760" y="4096512"/>
-            <a:ext cx="1371600" cy="658368"/>
-          </a:xfrm>
-          <a:prstGeom prst="rect">
-            <a:avLst/>
-          </a:prstGeom>
-          <a:noFill/>
-          <a:ln/>
-        </p:spPr>
-        <p:txBody>
-          <a:bodyPr wrap="square" lIns="0" tIns="0" rIns="0" bIns="0" rtlCol="0" anchor="ctr"/>
-          <a:lstStyle/>
-          <a:p>
-            <a:pPr algn="ctr" indent="0" marL="0">
-              <a:buNone/>
-            </a:pPr>
-            <a:r>
-              <a:rPr lang="en-US" sz="1100" b="1" dirty="0">
-                <a:solidFill>
-                  <a:srgbClr val="475569"/>
+            <a:srgbClr val="FCE7F3"/>
+          </a:solidFill>
+          <a:ln w="12700">
+            <a:solidFill>
+              <a:srgbClr val="DB2777"/>
+            </a:solidFill>
+            <a:prstDash val="solid"/>
+          </a:ln>
+        </p:spPr>
+      </p:sp>
+      <p:sp>
+        <p:nvSpPr>
+          <p:cNvPr id="33" name="Shape 31"/>
+          <p:cNvSpPr/>
+          <p:nvPr/>
+        </p:nvSpPr>
+        <p:spPr>
+          <a:xfrm>
+            <a:off x="1951330" y="4169664"/>
+            <a:ext cx="676656" cy="475488"/>
+          </a:xfrm>
+          <a:prstGeom prst="rect">
+            <a:avLst>
+              <a:gd name="adj" fmla="val 7692"/>
+            </a:avLst>
+          </a:prstGeom>
+          <a:solidFill>
+            <a:srgbClr val="FFFFFF"/>
+          </a:solidFill>
+          <a:ln w="12700">
+            <a:solidFill>
+              <a:srgbClr val="DB2777"/>
+            </a:solidFill>
+            <a:prstDash val="solid"/>
+          </a:ln>
+        </p:spPr>
+      </p:sp>
+      <p:sp>
+        <p:nvSpPr>
+          <p:cNvPr id="34" name="Text 32"/>
+          <p:cNvSpPr/>
+          <p:nvPr/>
+        </p:nvSpPr>
+        <p:spPr>
+          <a:xfrm>
+            <a:off x="1951330" y="4169664"/>
+            <a:ext cx="676656" cy="475488"/>
+          </a:xfrm>
+          <a:prstGeom prst="rect">
+            <a:avLst/>
+          </a:prstGeom>
+          <a:noFill/>
+          <a:ln/>
+        </p:spPr>
+        <p:txBody>
+          <a:bodyPr wrap="square" lIns="0" tIns="0" rIns="0" bIns="0" rtlCol="0" anchor="ctr"/>
+          <a:lstStyle/>
+          <a:p>
+            <a:pPr algn="ctr" indent="0" marL="0">
+              <a:buNone/>
+            </a:pPr>
+            <a:r>
+              <a:rPr lang="en-US" sz="900" b="1" dirty="0">
+                <a:solidFill>
+                  <a:srgbClr val="9D174D"/>
                 </a:solidFill>
                 <a:latin typeface="Trebuchet MS" pitchFamily="34" charset="0"/>
                 <a:ea typeface="Trebuchet MS" pitchFamily="34" charset="-122"/>
                 <a:cs typeface="Trebuchet MS" pitchFamily="34" charset="-120"/>
               </a:rPr>
-              <a:t>Phonemes</a:t>
-            </a:r>
-            <a:endParaRPr lang="en-US" sz="1100" dirty="0"/>
-          </a:p>
-        </p:txBody>
-      </p:sp>
-      <p:sp>
-        <p:nvSpPr>
-          <p:cNvPr id="32" name="Shape 30"/>
-          <p:cNvSpPr/>
-          <p:nvPr/>
-        </p:nvSpPr>
-        <p:spPr>
-          <a:xfrm>
-            <a:off x="1874520" y="4096512"/>
-            <a:ext cx="6903720" cy="658368"/>
-          </a:xfrm>
-          <a:prstGeom prst="rect">
-            <a:avLst>
-              <a:gd name="adj" fmla="val 8333"/>
-            </a:avLst>
-          </a:prstGeom>
-          <a:solidFill>
-            <a:srgbClr val="FCE7F3"/>
-          </a:solidFill>
-          <a:ln w="12700">
-            <a:solidFill>
-              <a:srgbClr val="DB2777"/>
-            </a:solidFill>
-            <a:prstDash val="solid"/>
-          </a:ln>
-        </p:spPr>
-      </p:sp>
-      <p:sp>
-        <p:nvSpPr>
-          <p:cNvPr id="33" name="Shape 31"/>
-          <p:cNvSpPr/>
-          <p:nvPr/>
-        </p:nvSpPr>
-        <p:spPr>
-          <a:xfrm>
-            <a:off x="1951330" y="4187952"/>
+              <a:t>c</a:t>
+            </a:r>
+            <a:endParaRPr lang="en-US" sz="900" dirty="0"/>
+          </a:p>
+        </p:txBody>
+      </p:sp>
+      <p:sp>
+        <p:nvSpPr>
+          <p:cNvPr id="35" name="Shape 33"/>
+          <p:cNvSpPr/>
+          <p:nvPr/>
+        </p:nvSpPr>
+        <p:spPr>
+          <a:xfrm>
+            <a:off x="2677363" y="4169664"/>
             <a:ext cx="676656" cy="475488"/>
           </a:xfrm>
           <a:prstGeom prst="rect">
@@ -15878,13 +16049,13 @@
       </p:sp>
       <p:sp>
         <p:nvSpPr>
-          <p:cNvPr id="34" name="Text 32"/>
-          <p:cNvSpPr/>
-          <p:nvPr/>
-        </p:nvSpPr>
-        <p:spPr>
-          <a:xfrm>
-            <a:off x="1951330" y="4187952"/>
+          <p:cNvPr id="36" name="Text 34"/>
+          <p:cNvSpPr/>
+          <p:nvPr/>
+        </p:nvSpPr>
+        <p:spPr>
+          <a:xfrm>
+            <a:off x="2677363" y="4169664"/>
             <a:ext cx="676656" cy="475488"/>
           </a:xfrm>
           <a:prstGeom prst="rect">
@@ -15909,7 +16080,7 @@
                 <a:ea typeface="Trebuchet MS" pitchFamily="34" charset="-122"/>
                 <a:cs typeface="Trebuchet MS" pitchFamily="34" charset="-120"/>
               </a:rPr>
-              <a:t>c</a:t>
+              <a:t>o</a:t>
             </a:r>
             <a:endParaRPr lang="en-US" sz="900" dirty="0"/>
           </a:p>
@@ -15917,13 +16088,13 @@
       </p:sp>
       <p:sp>
         <p:nvSpPr>
-          <p:cNvPr id="35" name="Shape 33"/>
-          <p:cNvSpPr/>
-          <p:nvPr/>
-        </p:nvSpPr>
-        <p:spPr>
-          <a:xfrm>
-            <a:off x="2677363" y="4187952"/>
+          <p:cNvPr id="37" name="Shape 35"/>
+          <p:cNvSpPr/>
+          <p:nvPr/>
+        </p:nvSpPr>
+        <p:spPr>
+          <a:xfrm>
+            <a:off x="3403397" y="4169664"/>
             <a:ext cx="676656" cy="475488"/>
           </a:xfrm>
           <a:prstGeom prst="rect">
@@ -15944,13 +16115,13 @@
       </p:sp>
       <p:sp>
         <p:nvSpPr>
-          <p:cNvPr id="36" name="Text 34"/>
-          <p:cNvSpPr/>
-          <p:nvPr/>
-        </p:nvSpPr>
-        <p:spPr>
-          <a:xfrm>
-            <a:off x="2677363" y="4187952"/>
+          <p:cNvPr id="38" name="Text 36"/>
+          <p:cNvSpPr/>
+          <p:nvPr/>
+        </p:nvSpPr>
+        <p:spPr>
+          <a:xfrm>
+            <a:off x="3403397" y="4169664"/>
             <a:ext cx="676656" cy="475488"/>
           </a:xfrm>
           <a:prstGeom prst="rect">
@@ -15975,7 +16146,7 @@
                 <a:ea typeface="Trebuchet MS" pitchFamily="34" charset="-122"/>
                 <a:cs typeface="Trebuchet MS" pitchFamily="34" charset="-120"/>
               </a:rPr>
-              <a:t>o</a:t>
+              <a:t>n</a:t>
             </a:r>
             <a:endParaRPr lang="en-US" sz="900" dirty="0"/>
           </a:p>
@@ -15983,13 +16154,13 @@
       </p:sp>
       <p:sp>
         <p:nvSpPr>
-          <p:cNvPr id="37" name="Shape 35"/>
-          <p:cNvSpPr/>
-          <p:nvPr/>
-        </p:nvSpPr>
-        <p:spPr>
-          <a:xfrm>
-            <a:off x="3403397" y="4187952"/>
+          <p:cNvPr id="39" name="Shape 37"/>
+          <p:cNvSpPr/>
+          <p:nvPr/>
+        </p:nvSpPr>
+        <p:spPr>
+          <a:xfrm>
+            <a:off x="4129430" y="4169664"/>
             <a:ext cx="676656" cy="475488"/>
           </a:xfrm>
           <a:prstGeom prst="rect">
@@ -16010,13 +16181,13 @@
       </p:sp>
       <p:sp>
         <p:nvSpPr>
-          <p:cNvPr id="38" name="Text 36"/>
-          <p:cNvSpPr/>
-          <p:nvPr/>
-        </p:nvSpPr>
-        <p:spPr>
-          <a:xfrm>
-            <a:off x="3403397" y="4187952"/>
+          <p:cNvPr id="40" name="Text 38"/>
+          <p:cNvSpPr/>
+          <p:nvPr/>
+        </p:nvSpPr>
+        <p:spPr>
+          <a:xfrm>
+            <a:off x="4129430" y="4169664"/>
             <a:ext cx="676656" cy="475488"/>
           </a:xfrm>
           <a:prstGeom prst="rect">
@@ -16041,7 +16212,7 @@
                 <a:ea typeface="Trebuchet MS" pitchFamily="34" charset="-122"/>
                 <a:cs typeface="Trebuchet MS" pitchFamily="34" charset="-120"/>
               </a:rPr>
-              <a:t>n</a:t>
+              <a:t>s</a:t>
             </a:r>
             <a:endParaRPr lang="en-US" sz="900" dirty="0"/>
           </a:p>
@@ -16049,13 +16220,13 @@
       </p:sp>
       <p:sp>
         <p:nvSpPr>
-          <p:cNvPr id="39" name="Shape 37"/>
-          <p:cNvSpPr/>
-          <p:nvPr/>
-        </p:nvSpPr>
-        <p:spPr>
-          <a:xfrm>
-            <a:off x="4129430" y="4187952"/>
+          <p:cNvPr id="41" name="Shape 39"/>
+          <p:cNvSpPr/>
+          <p:nvPr/>
+        </p:nvSpPr>
+        <p:spPr>
+          <a:xfrm>
+            <a:off x="4855464" y="4169664"/>
             <a:ext cx="676656" cy="475488"/>
           </a:xfrm>
           <a:prstGeom prst="rect">
@@ -16076,13 +16247,13 @@
       </p:sp>
       <p:sp>
         <p:nvSpPr>
-          <p:cNvPr id="40" name="Text 38"/>
-          <p:cNvSpPr/>
-          <p:nvPr/>
-        </p:nvSpPr>
-        <p:spPr>
-          <a:xfrm>
-            <a:off x="4129430" y="4187952"/>
+          <p:cNvPr id="42" name="Text 40"/>
+          <p:cNvSpPr/>
+          <p:nvPr/>
+        </p:nvSpPr>
+        <p:spPr>
+          <a:xfrm>
+            <a:off x="4855464" y="4169664"/>
             <a:ext cx="676656" cy="475488"/>
           </a:xfrm>
           <a:prstGeom prst="rect">
@@ -16107,7 +16278,7 @@
                 <a:ea typeface="Trebuchet MS" pitchFamily="34" charset="-122"/>
                 <a:cs typeface="Trebuchet MS" pitchFamily="34" charset="-120"/>
               </a:rPr>
-              <a:t>s</a:t>
+              <a:t>t</a:t>
             </a:r>
             <a:endParaRPr lang="en-US" sz="900" dirty="0"/>
           </a:p>
@@ -16115,13 +16286,13 @@
       </p:sp>
       <p:sp>
         <p:nvSpPr>
-          <p:cNvPr id="41" name="Shape 39"/>
-          <p:cNvSpPr/>
-          <p:nvPr/>
-        </p:nvSpPr>
-        <p:spPr>
-          <a:xfrm>
-            <a:off x="4855464" y="4187952"/>
+          <p:cNvPr id="43" name="Shape 41"/>
+          <p:cNvSpPr/>
+          <p:nvPr/>
+        </p:nvSpPr>
+        <p:spPr>
+          <a:xfrm>
+            <a:off x="5581498" y="4169664"/>
             <a:ext cx="676656" cy="475488"/>
           </a:xfrm>
           <a:prstGeom prst="rect">
@@ -16142,13 +16313,13 @@
       </p:sp>
       <p:sp>
         <p:nvSpPr>
-          <p:cNvPr id="42" name="Text 40"/>
-          <p:cNvSpPr/>
-          <p:nvPr/>
-        </p:nvSpPr>
-        <p:spPr>
-          <a:xfrm>
-            <a:off x="4855464" y="4187952"/>
+          <p:cNvPr id="44" name="Text 42"/>
+          <p:cNvSpPr/>
+          <p:nvPr/>
+        </p:nvSpPr>
+        <p:spPr>
+          <a:xfrm>
+            <a:off x="5581498" y="4169664"/>
             <a:ext cx="676656" cy="475488"/>
           </a:xfrm>
           <a:prstGeom prst="rect">
@@ -16173,7 +16344,7 @@
                 <a:ea typeface="Trebuchet MS" pitchFamily="34" charset="-122"/>
                 <a:cs typeface="Trebuchet MS" pitchFamily="34" charset="-120"/>
               </a:rPr>
-              <a:t>t</a:t>
+              <a:t>r</a:t>
             </a:r>
             <a:endParaRPr lang="en-US" sz="900" dirty="0"/>
           </a:p>
@@ -16181,13 +16352,13 @@
       </p:sp>
       <p:sp>
         <p:nvSpPr>
-          <p:cNvPr id="43" name="Shape 41"/>
-          <p:cNvSpPr/>
-          <p:nvPr/>
-        </p:nvSpPr>
-        <p:spPr>
-          <a:xfrm>
-            <a:off x="5581498" y="4187952"/>
+          <p:cNvPr id="45" name="Shape 43"/>
+          <p:cNvSpPr/>
+          <p:nvPr/>
+        </p:nvSpPr>
+        <p:spPr>
+          <a:xfrm>
+            <a:off x="6307531" y="4169664"/>
             <a:ext cx="676656" cy="475488"/>
           </a:xfrm>
           <a:prstGeom prst="rect">
@@ -16208,13 +16379,13 @@
       </p:sp>
       <p:sp>
         <p:nvSpPr>
-          <p:cNvPr id="44" name="Text 42"/>
-          <p:cNvSpPr/>
-          <p:nvPr/>
-        </p:nvSpPr>
-        <p:spPr>
-          <a:xfrm>
-            <a:off x="5581498" y="4187952"/>
+          <p:cNvPr id="46" name="Text 44"/>
+          <p:cNvSpPr/>
+          <p:nvPr/>
+        </p:nvSpPr>
+        <p:spPr>
+          <a:xfrm>
+            <a:off x="6307531" y="4169664"/>
             <a:ext cx="676656" cy="475488"/>
           </a:xfrm>
           <a:prstGeom prst="rect">
@@ -16239,7 +16410,7 @@
                 <a:ea typeface="Trebuchet MS" pitchFamily="34" charset="-122"/>
                 <a:cs typeface="Trebuchet MS" pitchFamily="34" charset="-120"/>
               </a:rPr>
-              <a:t>r</a:t>
+              <a:t>u</a:t>
             </a:r>
             <a:endParaRPr lang="en-US" sz="900" dirty="0"/>
           </a:p>
@@ -16247,13 +16418,13 @@
       </p:sp>
       <p:sp>
         <p:nvSpPr>
-          <p:cNvPr id="45" name="Shape 43"/>
-          <p:cNvSpPr/>
-          <p:nvPr/>
-        </p:nvSpPr>
-        <p:spPr>
-          <a:xfrm>
-            <a:off x="6307531" y="4187952"/>
+          <p:cNvPr id="47" name="Shape 45"/>
+          <p:cNvSpPr/>
+          <p:nvPr/>
+        </p:nvSpPr>
+        <p:spPr>
+          <a:xfrm>
+            <a:off x="7033565" y="4169664"/>
             <a:ext cx="676656" cy="475488"/>
           </a:xfrm>
           <a:prstGeom prst="rect">
@@ -16274,13 +16445,13 @@
       </p:sp>
       <p:sp>
         <p:nvSpPr>
-          <p:cNvPr id="46" name="Text 44"/>
-          <p:cNvSpPr/>
-          <p:nvPr/>
-        </p:nvSpPr>
-        <p:spPr>
-          <a:xfrm>
-            <a:off x="6307531" y="4187952"/>
+          <p:cNvPr id="48" name="Text 46"/>
+          <p:cNvSpPr/>
+          <p:nvPr/>
+        </p:nvSpPr>
+        <p:spPr>
+          <a:xfrm>
+            <a:off x="7033565" y="4169664"/>
             <a:ext cx="676656" cy="475488"/>
           </a:xfrm>
           <a:prstGeom prst="rect">
@@ -16305,7 +16476,7 @@
                 <a:ea typeface="Trebuchet MS" pitchFamily="34" charset="-122"/>
                 <a:cs typeface="Trebuchet MS" pitchFamily="34" charset="-120"/>
               </a:rPr>
-              <a:t>u</a:t>
+              <a:t>c</a:t>
             </a:r>
             <a:endParaRPr lang="en-US" sz="900" dirty="0"/>
           </a:p>
@@ -16313,13 +16484,13 @@
       </p:sp>
       <p:sp>
         <p:nvSpPr>
-          <p:cNvPr id="47" name="Shape 45"/>
-          <p:cNvSpPr/>
-          <p:nvPr/>
-        </p:nvSpPr>
-        <p:spPr>
-          <a:xfrm>
-            <a:off x="7033565" y="4187952"/>
+          <p:cNvPr id="49" name="Shape 47"/>
+          <p:cNvSpPr/>
+          <p:nvPr/>
+        </p:nvSpPr>
+        <p:spPr>
+          <a:xfrm>
+            <a:off x="7759598" y="4169664"/>
             <a:ext cx="676656" cy="475488"/>
           </a:xfrm>
           <a:prstGeom prst="rect">
@@ -16340,79 +16511,13 @@
       </p:sp>
       <p:sp>
         <p:nvSpPr>
-          <p:cNvPr id="48" name="Text 46"/>
-          <p:cNvSpPr/>
-          <p:nvPr/>
-        </p:nvSpPr>
-        <p:spPr>
-          <a:xfrm>
-            <a:off x="7033565" y="4187952"/>
-            <a:ext cx="676656" cy="475488"/>
-          </a:xfrm>
-          <a:prstGeom prst="rect">
-            <a:avLst/>
-          </a:prstGeom>
-          <a:noFill/>
-          <a:ln/>
-        </p:spPr>
-        <p:txBody>
-          <a:bodyPr wrap="square" lIns="0" tIns="0" rIns="0" bIns="0" rtlCol="0" anchor="ctr"/>
-          <a:lstStyle/>
-          <a:p>
-            <a:pPr algn="ctr" indent="0" marL="0">
-              <a:buNone/>
-            </a:pPr>
-            <a:r>
-              <a:rPr lang="en-US" sz="900" b="1" dirty="0">
-                <a:solidFill>
-                  <a:srgbClr val="9D174D"/>
-                </a:solidFill>
-                <a:latin typeface="Trebuchet MS" pitchFamily="34" charset="0"/>
-                <a:ea typeface="Trebuchet MS" pitchFamily="34" charset="-122"/>
-                <a:cs typeface="Trebuchet MS" pitchFamily="34" charset="-120"/>
-              </a:rPr>
-              <a:t>c</a:t>
-            </a:r>
-            <a:endParaRPr lang="en-US" sz="900" dirty="0"/>
-          </a:p>
-        </p:txBody>
-      </p:sp>
-      <p:sp>
-        <p:nvSpPr>
-          <p:cNvPr id="49" name="Shape 47"/>
-          <p:cNvSpPr/>
-          <p:nvPr/>
-        </p:nvSpPr>
-        <p:spPr>
-          <a:xfrm>
-            <a:off x="7759598" y="4187952"/>
-            <a:ext cx="676656" cy="475488"/>
-          </a:xfrm>
-          <a:prstGeom prst="rect">
-            <a:avLst>
-              <a:gd name="adj" fmla="val 7692"/>
-            </a:avLst>
-          </a:prstGeom>
-          <a:solidFill>
-            <a:srgbClr val="FFFFFF"/>
-          </a:solidFill>
-          <a:ln w="12700">
-            <a:solidFill>
-              <a:srgbClr val="DB2777"/>
-            </a:solidFill>
-            <a:prstDash val="solid"/>
-          </a:ln>
-        </p:spPr>
-      </p:sp>
-      <p:sp>
-        <p:nvSpPr>
           <p:cNvPr id="50" name="Text 48"/>
           <p:cNvSpPr/>
           <p:nvPr/>
         </p:nvSpPr>
         <p:spPr>
           <a:xfrm>
-            <a:off x="7759598" y="4187952"/>
+            <a:off x="7759598" y="4169664"/>
             <a:ext cx="676656" cy="475488"/>
           </a:xfrm>
           <a:prstGeom prst="rect">
@@ -17345,7 +17450,7 @@
                 <a:ea typeface="Trebuchet MS" pitchFamily="34" charset="-122"/>
                 <a:cs typeface="Trebuchet MS" pitchFamily="34" charset="-120"/>
               </a:rPr>
-              <a:t>2</a:t>
+              <a:t>1</a:t>
             </a:r>
             <a:pPr algn="ctr" indent="0" marL="0">
               <a:buNone/>
@@ -17359,7 +17464,7 @@
                 <a:ea typeface="Trebuchet MS" pitchFamily="34" charset="-122"/>
                 <a:cs typeface="Trebuchet MS" pitchFamily="34" charset="-120"/>
               </a:rPr>
-              <a:t>  punctuation marks</a:t>
+              <a:t>  punctuation mark</a:t>
             </a:r>
             <a:endParaRPr lang="en-US" sz="2800" dirty="0"/>
           </a:p>
@@ -17780,7 +17885,7 @@
                 <a:ea typeface="Calibri" pitchFamily="34" charset="-122"/>
                 <a:cs typeface="Calibri" pitchFamily="34" charset="-120"/>
               </a:rPr>
-              <a:t>destructive</a:t>
+              <a:t>destruction</a:t>
             </a:r>
             <a:pPr algn="l" indent="0" marL="0">
               <a:buNone/>
@@ -17794,7 +17899,7 @@
                 <a:ea typeface="Calibri" pitchFamily="34" charset="-122"/>
                 <a:cs typeface="Calibri" pitchFamily="34" charset="-120"/>
               </a:rPr>
-              <a:t> flood, the town had to </a:t>
+              <a:t> of the old hall, they needed to </a:t>
             </a:r>
             <a:pPr algn="l" indent="0" marL="0">
               <a:buNone/>
@@ -17825,7 +17930,7 @@
                 <a:ea typeface="Calibri" pitchFamily="34" charset="-122"/>
                 <a:cs typeface="Calibri" pitchFamily="34" charset="-120"/>
               </a:rPr>
-              <a:t> the bridge, and the whole community helped with the </a:t>
+              <a:t> it using a solid </a:t>
             </a:r>
             <a:pPr algn="l" indent="0" marL="0">
               <a:buNone/>
@@ -17842,7 +17947,7 @@
                 <a:ea typeface="Calibri" pitchFamily="34" charset="-122"/>
                 <a:cs typeface="Calibri" pitchFamily="34" charset="-120"/>
               </a:rPr>
-              <a:t>construction</a:t>
+              <a:t>structure</a:t>
             </a:r>
             <a:pPr algn="l" indent="0" marL="0">
               <a:buNone/>
@@ -18011,7 +18116,7 @@
                 <a:ea typeface="Trebuchet MS" pitchFamily="34" charset="-122"/>
                 <a:cs typeface="Trebuchet MS" pitchFamily="34" charset="-120"/>
               </a:rPr>
-              <a:t>destructive</a:t>
+              <a:t>destruction</a:t>
             </a:r>
             <a:endParaRPr lang="en-US" sz="1400" dirty="0"/>
           </a:p>
@@ -18267,7 +18372,7 @@
                 <a:ea typeface="Trebuchet MS" pitchFamily="34" charset="-122"/>
                 <a:cs typeface="Trebuchet MS" pitchFamily="34" charset="-120"/>
               </a:rPr>
-              <a:t>construction</a:t>
+              <a:t>structure</a:t>
             </a:r>
             <a:endParaRPr lang="en-US" sz="1400" dirty="0"/>
           </a:p>
@@ -18737,7 +18842,7 @@
                 <a:ea typeface="Trebuchet MS" pitchFamily="34" charset="-122"/>
                 <a:cs typeface="Trebuchet MS" pitchFamily="34" charset="-120"/>
               </a:rPr>
-              <a:t>destructive</a:t>
+              <a:t>destruction</a:t>
             </a:r>
             <a:endParaRPr lang="en-US" sz="2800" dirty="0"/>
           </a:p>
@@ -19016,11 +19121,11 @@
         <p:spPr>
           <a:xfrm>
             <a:off x="365760" y="4096512"/>
-            <a:ext cx="1371600" cy="658368"/>
+            <a:ext cx="1371600" cy="804672"/>
           </a:xfrm>
           <a:prstGeom prst="rect">
             <a:avLst>
-              <a:gd name="adj" fmla="val 8333"/>
+              <a:gd name="adj" fmla="val 6818"/>
             </a:avLst>
           </a:prstGeom>
           <a:solidFill>
@@ -19043,7 +19148,7 @@
         <p:spPr>
           <a:xfrm>
             <a:off x="365760" y="4096512"/>
-            <a:ext cx="1371600" cy="658368"/>
+            <a:ext cx="1371600" cy="804672"/>
           </a:xfrm>
           <a:prstGeom prst="rect">
             <a:avLst/>
@@ -19082,11 +19187,11 @@
         <p:spPr>
           <a:xfrm>
             <a:off x="1874520" y="4096512"/>
-            <a:ext cx="6903720" cy="658368"/>
+            <a:ext cx="6903720" cy="804672"/>
           </a:xfrm>
           <a:prstGeom prst="rect">
             <a:avLst>
-              <a:gd name="adj" fmla="val 8333"/>
+              <a:gd name="adj" fmla="val 6818"/>
             </a:avLst>
           </a:prstGeom>
           <a:solidFill>
@@ -19109,7 +19214,7 @@
         <p:spPr>
           <a:xfrm>
             <a:off x="1874520" y="4096512"/>
-            <a:ext cx="6903720" cy="658368"/>
+            <a:ext cx="6903720" cy="804672"/>
           </a:xfrm>
           <a:prstGeom prst="rect">
             <a:avLst/>
@@ -19564,7 +19669,7 @@
                 <a:ea typeface="Trebuchet MS" pitchFamily="34" charset="-122"/>
                 <a:cs typeface="Trebuchet MS" pitchFamily="34" charset="-120"/>
               </a:rPr>
-              <a:t>destructive</a:t>
+              <a:t>destruction</a:t>
             </a:r>
             <a:endParaRPr lang="en-US" sz="2800" dirty="0"/>
           </a:p>
@@ -19742,7 +19847,7 @@
                 <a:ea typeface="Calibri" pitchFamily="34" charset="-122"/>
                 <a:cs typeface="Calibri" pitchFamily="34" charset="-120"/>
               </a:rPr>
-              <a:t>down, away, undo</a:t>
+              <a:t>down, away, apart</a:t>
             </a:r>
             <a:endParaRPr lang="en-US" sz="850" dirty="0"/>
           </a:p>
@@ -19854,7 +19959,7 @@
                 <a:ea typeface="Calibri" pitchFamily="34" charset="-122"/>
                 <a:cs typeface="Calibri" pitchFamily="34" charset="-120"/>
               </a:rPr>
-              <a:t>to build</a:t>
+              <a:t>to build or arrange</a:t>
             </a:r>
             <a:endParaRPr lang="en-US" sz="850" dirty="0"/>
           </a:p>
@@ -19927,7 +20032,7 @@
                 <a:ea typeface="Trebuchet MS" pitchFamily="34" charset="-122"/>
                 <a:cs typeface="Trebuchet MS" pitchFamily="34" charset="-120"/>
               </a:rPr>
-              <a:t>ive</a:t>
+              <a:t>ion</a:t>
             </a:r>
             <a:endParaRPr lang="en-US" sz="1300" dirty="0"/>
           </a:p>
@@ -19966,7 +20071,7 @@
                 <a:ea typeface="Calibri" pitchFamily="34" charset="-122"/>
                 <a:cs typeface="Calibri" pitchFamily="34" charset="-120"/>
               </a:rPr>
-              <a:t>having the quality of</a:t>
+              <a:t>act or result of</a:t>
             </a:r>
             <a:endParaRPr lang="en-US" sz="850" dirty="0"/>
           </a:p>
@@ -20113,11 +20218,11 @@
         <p:spPr>
           <a:xfrm>
             <a:off x="365760" y="4096512"/>
-            <a:ext cx="1371600" cy="658368"/>
+            <a:ext cx="1371600" cy="804672"/>
           </a:xfrm>
           <a:prstGeom prst="rect">
             <a:avLst>
-              <a:gd name="adj" fmla="val 8333"/>
+              <a:gd name="adj" fmla="val 6818"/>
             </a:avLst>
           </a:prstGeom>
           <a:solidFill>
@@ -20140,7 +20245,7 @@
         <p:spPr>
           <a:xfrm>
             <a:off x="365760" y="4096512"/>
-            <a:ext cx="1371600" cy="658368"/>
+            <a:ext cx="1371600" cy="804672"/>
           </a:xfrm>
           <a:prstGeom prst="rect">
             <a:avLst/>
@@ -20179,11 +20284,11 @@
         <p:spPr>
           <a:xfrm>
             <a:off x="1874520" y="4096512"/>
-            <a:ext cx="6903720" cy="658368"/>
+            <a:ext cx="6903720" cy="804672"/>
           </a:xfrm>
           <a:prstGeom prst="rect">
             <a:avLst>
-              <a:gd name="adj" fmla="val 8333"/>
+              <a:gd name="adj" fmla="val 6818"/>
             </a:avLst>
           </a:prstGeom>
           <a:solidFill>
@@ -20206,7 +20311,7 @@
         <p:spPr>
           <a:xfrm>
             <a:off x="1874520" y="4096512"/>
-            <a:ext cx="6903720" cy="658368"/>
+            <a:ext cx="6903720" cy="804672"/>
           </a:xfrm>
           <a:prstGeom prst="rect">
             <a:avLst/>
@@ -20661,7 +20766,7 @@
                 <a:ea typeface="Trebuchet MS" pitchFamily="34" charset="-122"/>
                 <a:cs typeface="Trebuchet MS" pitchFamily="34" charset="-120"/>
               </a:rPr>
-              <a:t>destructive</a:t>
+              <a:t>destruction</a:t>
             </a:r>
             <a:endParaRPr lang="en-US" sz="2800" dirty="0"/>
           </a:p>
@@ -20839,7 +20944,7 @@
                 <a:ea typeface="Calibri" pitchFamily="34" charset="-122"/>
                 <a:cs typeface="Calibri" pitchFamily="34" charset="-120"/>
               </a:rPr>
-              <a:t>down, away, undo</a:t>
+              <a:t>down, away, apart</a:t>
             </a:r>
             <a:endParaRPr lang="en-US" sz="850" dirty="0"/>
           </a:p>
@@ -20951,7 +21056,7 @@
                 <a:ea typeface="Calibri" pitchFamily="34" charset="-122"/>
                 <a:cs typeface="Calibri" pitchFamily="34" charset="-120"/>
               </a:rPr>
-              <a:t>to build</a:t>
+              <a:t>to build or arrange</a:t>
             </a:r>
             <a:endParaRPr lang="en-US" sz="850" dirty="0"/>
           </a:p>
@@ -21024,7 +21129,7 @@
                 <a:ea typeface="Trebuchet MS" pitchFamily="34" charset="-122"/>
                 <a:cs typeface="Trebuchet MS" pitchFamily="34" charset="-120"/>
               </a:rPr>
-              <a:t>ive</a:t>
+              <a:t>ion</a:t>
             </a:r>
             <a:endParaRPr lang="en-US" sz="1300" dirty="0"/>
           </a:p>
@@ -21063,7 +21168,7 @@
                 <a:ea typeface="Calibri" pitchFamily="34" charset="-122"/>
                 <a:cs typeface="Calibri" pitchFamily="34" charset="-120"/>
               </a:rPr>
-              <a:t>having the quality of</a:t>
+              <a:t>act or result of</a:t>
             </a:r>
             <a:endParaRPr lang="en-US" sz="850" dirty="0"/>
           </a:p>
@@ -21432,7 +21537,7 @@
                 <a:ea typeface="Trebuchet MS" pitchFamily="34" charset="-122"/>
                 <a:cs typeface="Trebuchet MS" pitchFamily="34" charset="-120"/>
               </a:rPr>
-              <a:t>tive</a:t>
+              <a:t>tion</a:t>
             </a:r>
             <a:endParaRPr lang="en-US" sz="1400" dirty="0"/>
           </a:p>
@@ -21447,11 +21552,11 @@
         <p:spPr>
           <a:xfrm>
             <a:off x="365760" y="4096512"/>
-            <a:ext cx="1371600" cy="658368"/>
+            <a:ext cx="1371600" cy="804672"/>
           </a:xfrm>
           <a:prstGeom prst="rect">
             <a:avLst>
-              <a:gd name="adj" fmla="val 8333"/>
+              <a:gd name="adj" fmla="val 6818"/>
             </a:avLst>
           </a:prstGeom>
           <a:solidFill>
@@ -21474,7 +21579,7 @@
         <p:spPr>
           <a:xfrm>
             <a:off x="365760" y="4096512"/>
-            <a:ext cx="1371600" cy="658368"/>
+            <a:ext cx="1371600" cy="804672"/>
           </a:xfrm>
           <a:prstGeom prst="rect">
             <a:avLst/>
@@ -21513,11 +21618,11 @@
         <p:spPr>
           <a:xfrm>
             <a:off x="1874520" y="4096512"/>
-            <a:ext cx="6903720" cy="658368"/>
+            <a:ext cx="6903720" cy="804672"/>
           </a:xfrm>
           <a:prstGeom prst="rect">
             <a:avLst>
-              <a:gd name="adj" fmla="val 8333"/>
+              <a:gd name="adj" fmla="val 6818"/>
             </a:avLst>
           </a:prstGeom>
           <a:solidFill>
@@ -21540,7 +21645,7 @@
         <p:spPr>
           <a:xfrm>
             <a:off x="1874520" y="4096512"/>
-            <a:ext cx="6903720" cy="658368"/>
+            <a:ext cx="6903720" cy="804672"/>
           </a:xfrm>
           <a:prstGeom prst="rect">
             <a:avLst/>
@@ -21995,7 +22100,7 @@
                 <a:ea typeface="Trebuchet MS" pitchFamily="34" charset="-122"/>
                 <a:cs typeface="Trebuchet MS" pitchFamily="34" charset="-120"/>
               </a:rPr>
-              <a:t>destructive</a:t>
+              <a:t>destruction</a:t>
             </a:r>
             <a:endParaRPr lang="en-US" sz="2800" dirty="0"/>
           </a:p>
@@ -22173,7 +22278,7 @@
                 <a:ea typeface="Calibri" pitchFamily="34" charset="-122"/>
                 <a:cs typeface="Calibri" pitchFamily="34" charset="-120"/>
               </a:rPr>
-              <a:t>down, away, undo</a:t>
+              <a:t>down, away, apart</a:t>
             </a:r>
             <a:endParaRPr lang="en-US" sz="850" dirty="0"/>
           </a:p>
@@ -22285,7 +22390,7 @@
                 <a:ea typeface="Calibri" pitchFamily="34" charset="-122"/>
                 <a:cs typeface="Calibri" pitchFamily="34" charset="-120"/>
               </a:rPr>
-              <a:t>to build</a:t>
+              <a:t>to build or arrange</a:t>
             </a:r>
             <a:endParaRPr lang="en-US" sz="850" dirty="0"/>
           </a:p>
@@ -22358,7 +22463,7 @@
                 <a:ea typeface="Trebuchet MS" pitchFamily="34" charset="-122"/>
                 <a:cs typeface="Trebuchet MS" pitchFamily="34" charset="-120"/>
               </a:rPr>
-              <a:t>ive</a:t>
+              <a:t>ion</a:t>
             </a:r>
             <a:endParaRPr lang="en-US" sz="1300" dirty="0"/>
           </a:p>
@@ -22397,7 +22502,7 @@
                 <a:ea typeface="Calibri" pitchFamily="34" charset="-122"/>
                 <a:cs typeface="Calibri" pitchFamily="34" charset="-120"/>
               </a:rPr>
-              <a:t>having the quality of</a:t>
+              <a:t>act or result of</a:t>
             </a:r>
             <a:endParaRPr lang="en-US" sz="850" dirty="0"/>
           </a:p>
@@ -22766,7 +22871,7 @@
                 <a:ea typeface="Trebuchet MS" pitchFamily="34" charset="-122"/>
                 <a:cs typeface="Trebuchet MS" pitchFamily="34" charset="-120"/>
               </a:rPr>
-              <a:t>tive</a:t>
+              <a:t>tion</a:t>
             </a:r>
             <a:endParaRPr lang="en-US" sz="1400" dirty="0"/>
           </a:p>
@@ -22781,11 +22886,11 @@
         <p:spPr>
           <a:xfrm>
             <a:off x="365760" y="4096512"/>
-            <a:ext cx="1371600" cy="658368"/>
+            <a:ext cx="1371600" cy="804672"/>
           </a:xfrm>
           <a:prstGeom prst="rect">
             <a:avLst>
-              <a:gd name="adj" fmla="val 8333"/>
+              <a:gd name="adj" fmla="val 6818"/>
             </a:avLst>
           </a:prstGeom>
           <a:solidFill>
@@ -22808,7 +22913,7 @@
         <p:spPr>
           <a:xfrm>
             <a:off x="365760" y="4096512"/>
-            <a:ext cx="1371600" cy="658368"/>
+            <a:ext cx="1371600" cy="804672"/>
           </a:xfrm>
           <a:prstGeom prst="rect">
             <a:avLst/>
@@ -22847,11 +22952,11 @@
         <p:spPr>
           <a:xfrm>
             <a:off x="1874520" y="4096512"/>
-            <a:ext cx="6903720" cy="658368"/>
+            <a:ext cx="6903720" cy="804672"/>
           </a:xfrm>
           <a:prstGeom prst="rect">
             <a:avLst>
-              <a:gd name="adj" fmla="val 8333"/>
+              <a:gd name="adj" fmla="val 6818"/>
             </a:avLst>
           </a:prstGeom>
           <a:solidFill>
@@ -22873,12 +22978,12 @@
         </p:nvSpPr>
         <p:spPr>
           <a:xfrm>
-            <a:off x="1951828" y="4187952"/>
-            <a:ext cx="603504" cy="475488"/>
+            <a:off x="1951828" y="4169664"/>
+            <a:ext cx="603504" cy="384048"/>
           </a:xfrm>
           <a:prstGeom prst="rect">
             <a:avLst>
-              <a:gd name="adj" fmla="val 7692"/>
+              <a:gd name="adj" fmla="val 9524"/>
             </a:avLst>
           </a:prstGeom>
           <a:solidFill>
@@ -22900,8 +23005,8 @@
         </p:nvSpPr>
         <p:spPr>
           <a:xfrm>
-            <a:off x="1951828" y="4187952"/>
-            <a:ext cx="603504" cy="475488"/>
+            <a:off x="1951828" y="4169664"/>
+            <a:ext cx="603504" cy="384048"/>
           </a:xfrm>
           <a:prstGeom prst="rect">
             <a:avLst/>
@@ -22939,12 +23044,12 @@
         </p:nvSpPr>
         <p:spPr>
           <a:xfrm>
-            <a:off x="2605209" y="4187952"/>
-            <a:ext cx="603504" cy="475488"/>
+            <a:off x="2605209" y="4169664"/>
+            <a:ext cx="603504" cy="384048"/>
           </a:xfrm>
           <a:prstGeom prst="rect">
             <a:avLst>
-              <a:gd name="adj" fmla="val 7692"/>
+              <a:gd name="adj" fmla="val 9524"/>
             </a:avLst>
           </a:prstGeom>
           <a:solidFill>
@@ -22966,8 +23071,8 @@
         </p:nvSpPr>
         <p:spPr>
           <a:xfrm>
-            <a:off x="2605209" y="4187952"/>
-            <a:ext cx="603504" cy="475488"/>
+            <a:off x="2605209" y="4169664"/>
+            <a:ext cx="603504" cy="384048"/>
           </a:xfrm>
           <a:prstGeom prst="rect">
             <a:avLst/>
@@ -23005,12 +23110,12 @@
         </p:nvSpPr>
         <p:spPr>
           <a:xfrm>
-            <a:off x="3258589" y="4187952"/>
-            <a:ext cx="603504" cy="475488"/>
+            <a:off x="3258589" y="4169664"/>
+            <a:ext cx="603504" cy="384048"/>
           </a:xfrm>
           <a:prstGeom prst="rect">
             <a:avLst>
-              <a:gd name="adj" fmla="val 7692"/>
+              <a:gd name="adj" fmla="val 9524"/>
             </a:avLst>
           </a:prstGeom>
           <a:solidFill>
@@ -23032,8 +23137,8 @@
         </p:nvSpPr>
         <p:spPr>
           <a:xfrm>
-            <a:off x="3258589" y="4187952"/>
-            <a:ext cx="603504" cy="475488"/>
+            <a:off x="3258589" y="4169664"/>
+            <a:ext cx="603504" cy="384048"/>
           </a:xfrm>
           <a:prstGeom prst="rect">
             <a:avLst/>
@@ -23071,12 +23176,12 @@
         </p:nvSpPr>
         <p:spPr>
           <a:xfrm>
-            <a:off x="3911969" y="4187952"/>
-            <a:ext cx="603504" cy="475488"/>
+            <a:off x="3911969" y="4169664"/>
+            <a:ext cx="603504" cy="384048"/>
           </a:xfrm>
           <a:prstGeom prst="rect">
             <a:avLst>
-              <a:gd name="adj" fmla="val 7692"/>
+              <a:gd name="adj" fmla="val 9524"/>
             </a:avLst>
           </a:prstGeom>
           <a:solidFill>
@@ -23098,8 +23203,8 @@
         </p:nvSpPr>
         <p:spPr>
           <a:xfrm>
-            <a:off x="3911969" y="4187952"/>
-            <a:ext cx="603504" cy="475488"/>
+            <a:off x="3911969" y="4169664"/>
+            <a:ext cx="603504" cy="384048"/>
           </a:xfrm>
           <a:prstGeom prst="rect">
             <a:avLst/>
@@ -23137,12 +23242,12 @@
         </p:nvSpPr>
         <p:spPr>
           <a:xfrm>
-            <a:off x="4565350" y="4187952"/>
-            <a:ext cx="603504" cy="475488"/>
+            <a:off x="4565350" y="4169664"/>
+            <a:ext cx="603504" cy="384048"/>
           </a:xfrm>
           <a:prstGeom prst="rect">
             <a:avLst>
-              <a:gd name="adj" fmla="val 7692"/>
+              <a:gd name="adj" fmla="val 9524"/>
             </a:avLst>
           </a:prstGeom>
           <a:solidFill>
@@ -23164,8 +23269,8 @@
         </p:nvSpPr>
         <p:spPr>
           <a:xfrm>
-            <a:off x="4565350" y="4187952"/>
-            <a:ext cx="603504" cy="475488"/>
+            <a:off x="4565350" y="4169664"/>
+            <a:ext cx="603504" cy="384048"/>
           </a:xfrm>
           <a:prstGeom prst="rect">
             <a:avLst/>
@@ -23203,12 +23308,12 @@
         </p:nvSpPr>
         <p:spPr>
           <a:xfrm>
-            <a:off x="5218730" y="4187952"/>
-            <a:ext cx="603504" cy="475488"/>
+            <a:off x="5218730" y="4169664"/>
+            <a:ext cx="603504" cy="384048"/>
           </a:xfrm>
           <a:prstGeom prst="rect">
             <a:avLst>
-              <a:gd name="adj" fmla="val 7692"/>
+              <a:gd name="adj" fmla="val 9524"/>
             </a:avLst>
           </a:prstGeom>
           <a:solidFill>
@@ -23230,8 +23335,8 @@
         </p:nvSpPr>
         <p:spPr>
           <a:xfrm>
-            <a:off x="5218730" y="4187952"/>
-            <a:ext cx="603504" cy="475488"/>
+            <a:off x="5218730" y="4169664"/>
+            <a:ext cx="603504" cy="384048"/>
           </a:xfrm>
           <a:prstGeom prst="rect">
             <a:avLst/>
@@ -23269,12 +23374,12 @@
         </p:nvSpPr>
         <p:spPr>
           <a:xfrm>
-            <a:off x="5872111" y="4187952"/>
-            <a:ext cx="603504" cy="475488"/>
+            <a:off x="5872111" y="4169664"/>
+            <a:ext cx="603504" cy="384048"/>
           </a:xfrm>
           <a:prstGeom prst="rect">
             <a:avLst>
-              <a:gd name="adj" fmla="val 7692"/>
+              <a:gd name="adj" fmla="val 9524"/>
             </a:avLst>
           </a:prstGeom>
           <a:solidFill>
@@ -23296,8 +23401,8 @@
         </p:nvSpPr>
         <p:spPr>
           <a:xfrm>
-            <a:off x="5872111" y="4187952"/>
-            <a:ext cx="603504" cy="475488"/>
+            <a:off x="5872111" y="4169664"/>
+            <a:ext cx="603504" cy="384048"/>
           </a:xfrm>
           <a:prstGeom prst="rect">
             <a:avLst/>
@@ -23335,12 +23440,12 @@
         </p:nvSpPr>
         <p:spPr>
           <a:xfrm>
-            <a:off x="6525491" y="4187952"/>
-            <a:ext cx="603504" cy="475488"/>
+            <a:off x="6525491" y="4169664"/>
+            <a:ext cx="603504" cy="384048"/>
           </a:xfrm>
           <a:prstGeom prst="rect">
             <a:avLst>
-              <a:gd name="adj" fmla="val 7692"/>
+              <a:gd name="adj" fmla="val 9524"/>
             </a:avLst>
           </a:prstGeom>
           <a:solidFill>
@@ -23362,8 +23467,8 @@
         </p:nvSpPr>
         <p:spPr>
           <a:xfrm>
-            <a:off x="6525491" y="4187952"/>
-            <a:ext cx="603504" cy="475488"/>
+            <a:off x="6525491" y="4169664"/>
+            <a:ext cx="603504" cy="384048"/>
           </a:xfrm>
           <a:prstGeom prst="rect">
             <a:avLst/>
@@ -23401,12 +23506,12 @@
         </p:nvSpPr>
         <p:spPr>
           <a:xfrm>
-            <a:off x="7178871" y="4187952"/>
-            <a:ext cx="603504" cy="475488"/>
+            <a:off x="7178871" y="4169664"/>
+            <a:ext cx="603504" cy="384048"/>
           </a:xfrm>
           <a:prstGeom prst="rect">
             <a:avLst>
-              <a:gd name="adj" fmla="val 7692"/>
+              <a:gd name="adj" fmla="val 9524"/>
             </a:avLst>
           </a:prstGeom>
           <a:solidFill>
@@ -23428,8 +23533,8 @@
         </p:nvSpPr>
         <p:spPr>
           <a:xfrm>
-            <a:off x="7178871" y="4187952"/>
-            <a:ext cx="603504" cy="475488"/>
+            <a:off x="7178871" y="4169664"/>
+            <a:ext cx="603504" cy="384048"/>
           </a:xfrm>
           <a:prstGeom prst="rect">
             <a:avLst/>
@@ -23453,7 +23558,7 @@
                 <a:ea typeface="Trebuchet MS" pitchFamily="34" charset="-122"/>
                 <a:cs typeface="Trebuchet MS" pitchFamily="34" charset="-120"/>
               </a:rPr>
-              <a:t>i</a:t>
+              <a:t>io</a:t>
             </a:r>
             <a:endParaRPr lang="en-US" sz="900" dirty="0"/>
           </a:p>
@@ -23461,18 +23566,57 @@
       </p:sp>
       <p:sp>
         <p:nvSpPr>
-          <p:cNvPr id="57" name="Shape 55"/>
-          <p:cNvSpPr/>
-          <p:nvPr/>
-        </p:nvSpPr>
-        <p:spPr>
-          <a:xfrm>
-            <a:off x="7832252" y="4187952"/>
-            <a:ext cx="603504" cy="475488"/>
+          <p:cNvPr id="57" name="Text 55"/>
+          <p:cNvSpPr/>
+          <p:nvPr/>
+        </p:nvSpPr>
+        <p:spPr>
+          <a:xfrm>
+            <a:off x="7178871" y="4572000"/>
+            <a:ext cx="603504" cy="219456"/>
+          </a:xfrm>
+          <a:prstGeom prst="rect">
+            <a:avLst/>
+          </a:prstGeom>
+          <a:noFill/>
+          <a:ln/>
+        </p:spPr>
+        <p:txBody>
+          <a:bodyPr wrap="square" lIns="0" tIns="0" rIns="0" bIns="0" rtlCol="0" anchor="t"/>
+          <a:lstStyle/>
+          <a:p>
+            <a:pPr algn="ctr" indent="0" marL="0">
+              <a:buNone/>
+            </a:pPr>
+            <a:r>
+              <a:rPr lang="en-US" sz="750" i="1" dirty="0">
+                <a:solidFill>
+                  <a:srgbClr val="94A3B8"/>
+                </a:solidFill>
+                <a:latin typeface="Calibri" pitchFamily="34" charset="0"/>
+                <a:ea typeface="Calibri" pitchFamily="34" charset="-122"/>
+                <a:cs typeface="Calibri" pitchFamily="34" charset="-120"/>
+              </a:rPr>
+              <a:t>/sh/</a:t>
+            </a:r>
+            <a:endParaRPr lang="en-US" sz="750" dirty="0"/>
+          </a:p>
+        </p:txBody>
+      </p:sp>
+      <p:sp>
+        <p:nvSpPr>
+          <p:cNvPr id="58" name="Shape 56"/>
+          <p:cNvSpPr/>
+          <p:nvPr/>
+        </p:nvSpPr>
+        <p:spPr>
+          <a:xfrm>
+            <a:off x="7832252" y="4169664"/>
+            <a:ext cx="603504" cy="384048"/>
           </a:xfrm>
           <a:prstGeom prst="rect">
             <a:avLst>
-              <a:gd name="adj" fmla="val 7692"/>
+              <a:gd name="adj" fmla="val 9524"/>
             </a:avLst>
           </a:prstGeom>
           <a:solidFill>
@@ -23488,14 +23632,14 @@
       </p:sp>
       <p:sp>
         <p:nvSpPr>
-          <p:cNvPr id="58" name="Text 56"/>
-          <p:cNvSpPr/>
-          <p:nvPr/>
-        </p:nvSpPr>
-        <p:spPr>
-          <a:xfrm>
-            <a:off x="7832252" y="4187952"/>
-            <a:ext cx="603504" cy="475488"/>
+          <p:cNvPr id="59" name="Text 57"/>
+          <p:cNvSpPr/>
+          <p:nvPr/>
+        </p:nvSpPr>
+        <p:spPr>
+          <a:xfrm>
+            <a:off x="7832252" y="4169664"/>
+            <a:ext cx="603504" cy="384048"/>
           </a:xfrm>
           <a:prstGeom prst="rect">
             <a:avLst/>
@@ -23519,7 +23663,7 @@
                 <a:ea typeface="Trebuchet MS" pitchFamily="34" charset="-122"/>
                 <a:cs typeface="Trebuchet MS" pitchFamily="34" charset="-120"/>
               </a:rPr>
-              <a:t>ve</a:t>
+              <a:t>n</a:t>
             </a:r>
             <a:endParaRPr lang="en-US" sz="900" dirty="0"/>
           </a:p>
@@ -24229,11 +24373,11 @@
         <p:spPr>
           <a:xfrm>
             <a:off x="365760" y="4096512"/>
-            <a:ext cx="1371600" cy="658368"/>
+            <a:ext cx="1371600" cy="804672"/>
           </a:xfrm>
           <a:prstGeom prst="rect">
             <a:avLst>
-              <a:gd name="adj" fmla="val 8333"/>
+              <a:gd name="adj" fmla="val 6818"/>
             </a:avLst>
           </a:prstGeom>
           <a:solidFill>
@@ -24256,7 +24400,7 @@
         <p:spPr>
           <a:xfrm>
             <a:off x="365760" y="4096512"/>
-            <a:ext cx="1371600" cy="658368"/>
+            <a:ext cx="1371600" cy="804672"/>
           </a:xfrm>
           <a:prstGeom prst="rect">
             <a:avLst/>
@@ -24295,11 +24439,11 @@
         <p:spPr>
           <a:xfrm>
             <a:off x="1874520" y="4096512"/>
-            <a:ext cx="6903720" cy="658368"/>
+            <a:ext cx="6903720" cy="804672"/>
           </a:xfrm>
           <a:prstGeom prst="rect">
             <a:avLst>
-              <a:gd name="adj" fmla="val 8333"/>
+              <a:gd name="adj" fmla="val 6818"/>
             </a:avLst>
           </a:prstGeom>
           <a:solidFill>
@@ -24322,7 +24466,7 @@
         <p:spPr>
           <a:xfrm>
             <a:off x="1874520" y="4096512"/>
-            <a:ext cx="6903720" cy="658368"/>
+            <a:ext cx="6903720" cy="804672"/>
           </a:xfrm>
           <a:prstGeom prst="rect">
             <a:avLst/>
@@ -25179,7 +25323,7 @@
                 <a:ea typeface="Calibri" pitchFamily="34" charset="-122"/>
                 <a:cs typeface="Calibri" pitchFamily="34" charset="-120"/>
               </a:rPr>
-              <a:t>to build</a:t>
+              <a:t>to build or arrange</a:t>
             </a:r>
             <a:endParaRPr lang="en-US" sz="850" dirty="0"/>
           </a:p>
@@ -25326,11 +25470,11 @@
         <p:spPr>
           <a:xfrm>
             <a:off x="365760" y="4096512"/>
-            <a:ext cx="1371600" cy="658368"/>
+            <a:ext cx="1371600" cy="804672"/>
           </a:xfrm>
           <a:prstGeom prst="rect">
             <a:avLst>
-              <a:gd name="adj" fmla="val 8333"/>
+              <a:gd name="adj" fmla="val 6818"/>
             </a:avLst>
           </a:prstGeom>
           <a:solidFill>
@@ -25353,7 +25497,7 @@
         <p:spPr>
           <a:xfrm>
             <a:off x="365760" y="4096512"/>
-            <a:ext cx="1371600" cy="658368"/>
+            <a:ext cx="1371600" cy="804672"/>
           </a:xfrm>
           <a:prstGeom prst="rect">
             <a:avLst/>
@@ -25392,11 +25536,11 @@
         <p:spPr>
           <a:xfrm>
             <a:off x="1874520" y="4096512"/>
-            <a:ext cx="6903720" cy="658368"/>
+            <a:ext cx="6903720" cy="804672"/>
           </a:xfrm>
           <a:prstGeom prst="rect">
             <a:avLst>
-              <a:gd name="adj" fmla="val 8333"/>
+              <a:gd name="adj" fmla="val 6818"/>
             </a:avLst>
           </a:prstGeom>
           <a:solidFill>
@@ -25419,7 +25563,7 @@
         <p:spPr>
           <a:xfrm>
             <a:off x="1874520" y="4096512"/>
-            <a:ext cx="6903720" cy="658368"/>
+            <a:ext cx="6903720" cy="804672"/>
           </a:xfrm>
           <a:prstGeom prst="rect">
             <a:avLst/>
@@ -26995,7 +27139,7 @@
                 <a:ea typeface="Calibri" pitchFamily="34" charset="-122"/>
                 <a:cs typeface="Calibri" pitchFamily="34" charset="-120"/>
               </a:rPr>
-              <a:t>to build</a:t>
+              <a:t>to build or arrange</a:t>
             </a:r>
             <a:endParaRPr lang="en-US" sz="850" dirty="0"/>
           </a:p>
@@ -27379,11 +27523,11 @@
         <p:spPr>
           <a:xfrm>
             <a:off x="365760" y="4096512"/>
-            <a:ext cx="1371600" cy="658368"/>
+            <a:ext cx="1371600" cy="804672"/>
           </a:xfrm>
           <a:prstGeom prst="rect">
             <a:avLst>
-              <a:gd name="adj" fmla="val 8333"/>
+              <a:gd name="adj" fmla="val 6818"/>
             </a:avLst>
           </a:prstGeom>
           <a:solidFill>
@@ -27406,7 +27550,7 @@
         <p:spPr>
           <a:xfrm>
             <a:off x="365760" y="4096512"/>
-            <a:ext cx="1371600" cy="658368"/>
+            <a:ext cx="1371600" cy="804672"/>
           </a:xfrm>
           <a:prstGeom prst="rect">
             <a:avLst/>
@@ -27445,11 +27589,11 @@
         <p:spPr>
           <a:xfrm>
             <a:off x="1874520" y="4096512"/>
-            <a:ext cx="6903720" cy="658368"/>
+            <a:ext cx="6903720" cy="804672"/>
           </a:xfrm>
           <a:prstGeom prst="rect">
             <a:avLst>
-              <a:gd name="adj" fmla="val 8333"/>
+              <a:gd name="adj" fmla="val 6818"/>
             </a:avLst>
           </a:prstGeom>
           <a:solidFill>
@@ -27472,7 +27616,7 @@
         <p:spPr>
           <a:xfrm>
             <a:off x="1874520" y="4096512"/>
-            <a:ext cx="6903720" cy="658368"/>
+            <a:ext cx="6903720" cy="804672"/>
           </a:xfrm>
           <a:prstGeom prst="rect">
             <a:avLst/>
@@ -28329,7 +28473,7 @@
                 <a:ea typeface="Calibri" pitchFamily="34" charset="-122"/>
                 <a:cs typeface="Calibri" pitchFamily="34" charset="-120"/>
               </a:rPr>
-              <a:t>to build</a:t>
+              <a:t>to build or arrange</a:t>
             </a:r>
             <a:endParaRPr lang="en-US" sz="850" dirty="0"/>
           </a:p>
@@ -28713,7 +28857,73 @@
         <p:spPr>
           <a:xfrm>
             <a:off x="365760" y="4096512"/>
-            <a:ext cx="1371600" cy="658368"/>
+            <a:ext cx="1371600" cy="804672"/>
+          </a:xfrm>
+          <a:prstGeom prst="rect">
+            <a:avLst>
+              <a:gd name="adj" fmla="val 6818"/>
+            </a:avLst>
+          </a:prstGeom>
+          <a:solidFill>
+            <a:srgbClr val="E2E8F0"/>
+          </a:solidFill>
+          <a:ln w="12700">
+            <a:solidFill>
+              <a:srgbClr val="E2E8F0"/>
+            </a:solidFill>
+            <a:prstDash val="solid"/>
+          </a:ln>
+        </p:spPr>
+      </p:sp>
+      <p:sp>
+        <p:nvSpPr>
+          <p:cNvPr id="37" name="Text 35"/>
+          <p:cNvSpPr/>
+          <p:nvPr/>
+        </p:nvSpPr>
+        <p:spPr>
+          <a:xfrm>
+            <a:off x="365760" y="4096512"/>
+            <a:ext cx="1371600" cy="804672"/>
+          </a:xfrm>
+          <a:prstGeom prst="rect">
+            <a:avLst/>
+          </a:prstGeom>
+          <a:noFill/>
+          <a:ln/>
+        </p:spPr>
+        <p:txBody>
+          <a:bodyPr wrap="square" lIns="0" tIns="0" rIns="0" bIns="0" rtlCol="0" anchor="ctr"/>
+          <a:lstStyle/>
+          <a:p>
+            <a:pPr algn="ctr" indent="0" marL="0">
+              <a:buNone/>
+            </a:pPr>
+            <a:r>
+              <a:rPr lang="en-US" sz="1100" b="1" dirty="0">
+                <a:solidFill>
+                  <a:srgbClr val="475569"/>
+                </a:solidFill>
+                <a:latin typeface="Trebuchet MS" pitchFamily="34" charset="0"/>
+                <a:ea typeface="Trebuchet MS" pitchFamily="34" charset="-122"/>
+                <a:cs typeface="Trebuchet MS" pitchFamily="34" charset="-120"/>
+              </a:rPr>
+              <a:t>Phonemes</a:t>
+            </a:r>
+            <a:endParaRPr lang="en-US" sz="1100" dirty="0"/>
+          </a:p>
+        </p:txBody>
+      </p:sp>
+      <p:sp>
+        <p:nvSpPr>
+          <p:cNvPr id="38" name="Shape 36"/>
+          <p:cNvSpPr/>
+          <p:nvPr/>
+        </p:nvSpPr>
+        <p:spPr>
+          <a:xfrm>
+            <a:off x="1874520" y="4096512"/>
+            <a:ext cx="6903720" cy="658368"/>
           </a:xfrm>
           <a:prstGeom prst="rect">
             <a:avLst>
@@ -28721,91 +28931,91 @@
             </a:avLst>
           </a:prstGeom>
           <a:solidFill>
-            <a:srgbClr val="E2E8F0"/>
-          </a:solidFill>
-          <a:ln w="12700">
-            <a:solidFill>
-              <a:srgbClr val="E2E8F0"/>
-            </a:solidFill>
-            <a:prstDash val="solid"/>
-          </a:ln>
-        </p:spPr>
-      </p:sp>
-      <p:sp>
-        <p:nvSpPr>
-          <p:cNvPr id="37" name="Text 35"/>
-          <p:cNvSpPr/>
-          <p:nvPr/>
-        </p:nvSpPr>
-        <p:spPr>
-          <a:xfrm>
-            <a:off x="365760" y="4096512"/>
-            <a:ext cx="1371600" cy="658368"/>
-          </a:xfrm>
-          <a:prstGeom prst="rect">
-            <a:avLst/>
-          </a:prstGeom>
-          <a:noFill/>
-          <a:ln/>
-        </p:spPr>
-        <p:txBody>
-          <a:bodyPr wrap="square" lIns="0" tIns="0" rIns="0" bIns="0" rtlCol="0" anchor="ctr"/>
-          <a:lstStyle/>
-          <a:p>
-            <a:pPr algn="ctr" indent="0" marL="0">
-              <a:buNone/>
-            </a:pPr>
-            <a:r>
-              <a:rPr lang="en-US" sz="1100" b="1" dirty="0">
-                <a:solidFill>
-                  <a:srgbClr val="475569"/>
+            <a:srgbClr val="FCE7F3"/>
+          </a:solidFill>
+          <a:ln w="12700">
+            <a:solidFill>
+              <a:srgbClr val="DB2777"/>
+            </a:solidFill>
+            <a:prstDash val="solid"/>
+          </a:ln>
+        </p:spPr>
+      </p:sp>
+      <p:sp>
+        <p:nvSpPr>
+          <p:cNvPr id="39" name="Shape 37"/>
+          <p:cNvSpPr/>
+          <p:nvPr/>
+        </p:nvSpPr>
+        <p:spPr>
+          <a:xfrm>
+            <a:off x="1952244" y="4169664"/>
+            <a:ext cx="543652" cy="475488"/>
+          </a:xfrm>
+          <a:prstGeom prst="rect">
+            <a:avLst>
+              <a:gd name="adj" fmla="val 7692"/>
+            </a:avLst>
+          </a:prstGeom>
+          <a:solidFill>
+            <a:srgbClr val="FFFFFF"/>
+          </a:solidFill>
+          <a:ln w="12700">
+            <a:solidFill>
+              <a:srgbClr val="DB2777"/>
+            </a:solidFill>
+            <a:prstDash val="solid"/>
+          </a:ln>
+        </p:spPr>
+      </p:sp>
+      <p:sp>
+        <p:nvSpPr>
+          <p:cNvPr id="40" name="Text 38"/>
+          <p:cNvSpPr/>
+          <p:nvPr/>
+        </p:nvSpPr>
+        <p:spPr>
+          <a:xfrm>
+            <a:off x="1952244" y="4169664"/>
+            <a:ext cx="543652" cy="475488"/>
+          </a:xfrm>
+          <a:prstGeom prst="rect">
+            <a:avLst/>
+          </a:prstGeom>
+          <a:noFill/>
+          <a:ln/>
+        </p:spPr>
+        <p:txBody>
+          <a:bodyPr wrap="square" lIns="0" tIns="0" rIns="0" bIns="0" rtlCol="0" anchor="ctr"/>
+          <a:lstStyle/>
+          <a:p>
+            <a:pPr algn="ctr" indent="0" marL="0">
+              <a:buNone/>
+            </a:pPr>
+            <a:r>
+              <a:rPr lang="en-US" sz="900" b="1" dirty="0">
+                <a:solidFill>
+                  <a:srgbClr val="9D174D"/>
                 </a:solidFill>
                 <a:latin typeface="Trebuchet MS" pitchFamily="34" charset="0"/>
                 <a:ea typeface="Trebuchet MS" pitchFamily="34" charset="-122"/>
                 <a:cs typeface="Trebuchet MS" pitchFamily="34" charset="-120"/>
               </a:rPr>
-              <a:t>Phonemes</a:t>
-            </a:r>
-            <a:endParaRPr lang="en-US" sz="1100" dirty="0"/>
-          </a:p>
-        </p:txBody>
-      </p:sp>
-      <p:sp>
-        <p:nvSpPr>
-          <p:cNvPr id="38" name="Shape 36"/>
-          <p:cNvSpPr/>
-          <p:nvPr/>
-        </p:nvSpPr>
-        <p:spPr>
-          <a:xfrm>
-            <a:off x="1874520" y="4096512"/>
-            <a:ext cx="6903720" cy="658368"/>
-          </a:xfrm>
-          <a:prstGeom prst="rect">
-            <a:avLst>
-              <a:gd name="adj" fmla="val 8333"/>
-            </a:avLst>
-          </a:prstGeom>
-          <a:solidFill>
-            <a:srgbClr val="FCE7F3"/>
-          </a:solidFill>
-          <a:ln w="12700">
-            <a:solidFill>
-              <a:srgbClr val="DB2777"/>
-            </a:solidFill>
-            <a:prstDash val="solid"/>
-          </a:ln>
-        </p:spPr>
-      </p:sp>
-      <p:sp>
-        <p:nvSpPr>
-          <p:cNvPr id="39" name="Shape 37"/>
-          <p:cNvSpPr/>
-          <p:nvPr/>
-        </p:nvSpPr>
-        <p:spPr>
-          <a:xfrm>
-            <a:off x="1952244" y="4187952"/>
+              <a:t>r</a:t>
+            </a:r>
+            <a:endParaRPr lang="en-US" sz="900" dirty="0"/>
+          </a:p>
+        </p:txBody>
+      </p:sp>
+      <p:sp>
+        <p:nvSpPr>
+          <p:cNvPr id="41" name="Shape 39"/>
+          <p:cNvSpPr/>
+          <p:nvPr/>
+        </p:nvSpPr>
+        <p:spPr>
+          <a:xfrm>
+            <a:off x="2546188" y="4169664"/>
             <a:ext cx="543652" cy="475488"/>
           </a:xfrm>
           <a:prstGeom prst="rect">
@@ -28826,13 +29036,13 @@
       </p:sp>
       <p:sp>
         <p:nvSpPr>
-          <p:cNvPr id="40" name="Text 38"/>
-          <p:cNvSpPr/>
-          <p:nvPr/>
-        </p:nvSpPr>
-        <p:spPr>
-          <a:xfrm>
-            <a:off x="1952244" y="4187952"/>
+          <p:cNvPr id="42" name="Text 40"/>
+          <p:cNvSpPr/>
+          <p:nvPr/>
+        </p:nvSpPr>
+        <p:spPr>
+          <a:xfrm>
+            <a:off x="2546188" y="4169664"/>
             <a:ext cx="543652" cy="475488"/>
           </a:xfrm>
           <a:prstGeom prst="rect">
@@ -28857,7 +29067,7 @@
                 <a:ea typeface="Trebuchet MS" pitchFamily="34" charset="-122"/>
                 <a:cs typeface="Trebuchet MS" pitchFamily="34" charset="-120"/>
               </a:rPr>
-              <a:t>r</a:t>
+              <a:t>e</a:t>
             </a:r>
             <a:endParaRPr lang="en-US" sz="900" dirty="0"/>
           </a:p>
@@ -28865,13 +29075,13 @@
       </p:sp>
       <p:sp>
         <p:nvSpPr>
-          <p:cNvPr id="41" name="Shape 39"/>
-          <p:cNvSpPr/>
-          <p:nvPr/>
-        </p:nvSpPr>
-        <p:spPr>
-          <a:xfrm>
-            <a:off x="2546188" y="4187952"/>
+          <p:cNvPr id="43" name="Shape 41"/>
+          <p:cNvSpPr/>
+          <p:nvPr/>
+        </p:nvSpPr>
+        <p:spPr>
+          <a:xfrm>
+            <a:off x="3140133" y="4169664"/>
             <a:ext cx="543652" cy="475488"/>
           </a:xfrm>
           <a:prstGeom prst="rect">
@@ -28892,13 +29102,13 @@
       </p:sp>
       <p:sp>
         <p:nvSpPr>
-          <p:cNvPr id="42" name="Text 40"/>
-          <p:cNvSpPr/>
-          <p:nvPr/>
-        </p:nvSpPr>
-        <p:spPr>
-          <a:xfrm>
-            <a:off x="2546188" y="4187952"/>
+          <p:cNvPr id="44" name="Text 42"/>
+          <p:cNvSpPr/>
+          <p:nvPr/>
+        </p:nvSpPr>
+        <p:spPr>
+          <a:xfrm>
+            <a:off x="3140133" y="4169664"/>
             <a:ext cx="543652" cy="475488"/>
           </a:xfrm>
           <a:prstGeom prst="rect">
@@ -28923,7 +29133,7 @@
                 <a:ea typeface="Trebuchet MS" pitchFamily="34" charset="-122"/>
                 <a:cs typeface="Trebuchet MS" pitchFamily="34" charset="-120"/>
               </a:rPr>
-              <a:t>e</a:t>
+              <a:t>c</a:t>
             </a:r>
             <a:endParaRPr lang="en-US" sz="900" dirty="0"/>
           </a:p>
@@ -28931,13 +29141,13 @@
       </p:sp>
       <p:sp>
         <p:nvSpPr>
-          <p:cNvPr id="43" name="Shape 41"/>
-          <p:cNvSpPr/>
-          <p:nvPr/>
-        </p:nvSpPr>
-        <p:spPr>
-          <a:xfrm>
-            <a:off x="3140133" y="4187952"/>
+          <p:cNvPr id="45" name="Shape 43"/>
+          <p:cNvSpPr/>
+          <p:nvPr/>
+        </p:nvSpPr>
+        <p:spPr>
+          <a:xfrm>
+            <a:off x="3734077" y="4169664"/>
             <a:ext cx="543652" cy="475488"/>
           </a:xfrm>
           <a:prstGeom prst="rect">
@@ -28958,13 +29168,13 @@
       </p:sp>
       <p:sp>
         <p:nvSpPr>
-          <p:cNvPr id="44" name="Text 42"/>
-          <p:cNvSpPr/>
-          <p:nvPr/>
-        </p:nvSpPr>
-        <p:spPr>
-          <a:xfrm>
-            <a:off x="3140133" y="4187952"/>
+          <p:cNvPr id="46" name="Text 44"/>
+          <p:cNvSpPr/>
+          <p:nvPr/>
+        </p:nvSpPr>
+        <p:spPr>
+          <a:xfrm>
+            <a:off x="3734077" y="4169664"/>
             <a:ext cx="543652" cy="475488"/>
           </a:xfrm>
           <a:prstGeom prst="rect">
@@ -28989,7 +29199,7 @@
                 <a:ea typeface="Trebuchet MS" pitchFamily="34" charset="-122"/>
                 <a:cs typeface="Trebuchet MS" pitchFamily="34" charset="-120"/>
               </a:rPr>
-              <a:t>c</a:t>
+              <a:t>o</a:t>
             </a:r>
             <a:endParaRPr lang="en-US" sz="900" dirty="0"/>
           </a:p>
@@ -28997,13 +29207,13 @@
       </p:sp>
       <p:sp>
         <p:nvSpPr>
-          <p:cNvPr id="45" name="Shape 43"/>
-          <p:cNvSpPr/>
-          <p:nvPr/>
-        </p:nvSpPr>
-        <p:spPr>
-          <a:xfrm>
-            <a:off x="3734077" y="4187952"/>
+          <p:cNvPr id="47" name="Shape 45"/>
+          <p:cNvSpPr/>
+          <p:nvPr/>
+        </p:nvSpPr>
+        <p:spPr>
+          <a:xfrm>
+            <a:off x="4328021" y="4169664"/>
             <a:ext cx="543652" cy="475488"/>
           </a:xfrm>
           <a:prstGeom prst="rect">
@@ -29024,13 +29234,13 @@
       </p:sp>
       <p:sp>
         <p:nvSpPr>
-          <p:cNvPr id="46" name="Text 44"/>
-          <p:cNvSpPr/>
-          <p:nvPr/>
-        </p:nvSpPr>
-        <p:spPr>
-          <a:xfrm>
-            <a:off x="3734077" y="4187952"/>
+          <p:cNvPr id="48" name="Text 46"/>
+          <p:cNvSpPr/>
+          <p:nvPr/>
+        </p:nvSpPr>
+        <p:spPr>
+          <a:xfrm>
+            <a:off x="4328021" y="4169664"/>
             <a:ext cx="543652" cy="475488"/>
           </a:xfrm>
           <a:prstGeom prst="rect">
@@ -29055,7 +29265,7 @@
                 <a:ea typeface="Trebuchet MS" pitchFamily="34" charset="-122"/>
                 <a:cs typeface="Trebuchet MS" pitchFamily="34" charset="-120"/>
               </a:rPr>
-              <a:t>o</a:t>
+              <a:t>n</a:t>
             </a:r>
             <a:endParaRPr lang="en-US" sz="900" dirty="0"/>
           </a:p>
@@ -29063,13 +29273,13 @@
       </p:sp>
       <p:sp>
         <p:nvSpPr>
-          <p:cNvPr id="47" name="Shape 45"/>
-          <p:cNvSpPr/>
-          <p:nvPr/>
-        </p:nvSpPr>
-        <p:spPr>
-          <a:xfrm>
-            <a:off x="4328021" y="4187952"/>
+          <p:cNvPr id="49" name="Shape 47"/>
+          <p:cNvSpPr/>
+          <p:nvPr/>
+        </p:nvSpPr>
+        <p:spPr>
+          <a:xfrm>
+            <a:off x="4921966" y="4169664"/>
             <a:ext cx="543652" cy="475488"/>
           </a:xfrm>
           <a:prstGeom prst="rect">
@@ -29090,13 +29300,13 @@
       </p:sp>
       <p:sp>
         <p:nvSpPr>
-          <p:cNvPr id="48" name="Text 46"/>
-          <p:cNvSpPr/>
-          <p:nvPr/>
-        </p:nvSpPr>
-        <p:spPr>
-          <a:xfrm>
-            <a:off x="4328021" y="4187952"/>
+          <p:cNvPr id="50" name="Text 48"/>
+          <p:cNvSpPr/>
+          <p:nvPr/>
+        </p:nvSpPr>
+        <p:spPr>
+          <a:xfrm>
+            <a:off x="4921966" y="4169664"/>
             <a:ext cx="543652" cy="475488"/>
           </a:xfrm>
           <a:prstGeom prst="rect">
@@ -29121,7 +29331,7 @@
                 <a:ea typeface="Trebuchet MS" pitchFamily="34" charset="-122"/>
                 <a:cs typeface="Trebuchet MS" pitchFamily="34" charset="-120"/>
               </a:rPr>
-              <a:t>n</a:t>
+              <a:t>s</a:t>
             </a:r>
             <a:endParaRPr lang="en-US" sz="900" dirty="0"/>
           </a:p>
@@ -29129,13 +29339,13 @@
       </p:sp>
       <p:sp>
         <p:nvSpPr>
-          <p:cNvPr id="49" name="Shape 47"/>
-          <p:cNvSpPr/>
-          <p:nvPr/>
-        </p:nvSpPr>
-        <p:spPr>
-          <a:xfrm>
-            <a:off x="4921966" y="4187952"/>
+          <p:cNvPr id="51" name="Shape 49"/>
+          <p:cNvSpPr/>
+          <p:nvPr/>
+        </p:nvSpPr>
+        <p:spPr>
+          <a:xfrm>
+            <a:off x="5515910" y="4169664"/>
             <a:ext cx="543652" cy="475488"/>
           </a:xfrm>
           <a:prstGeom prst="rect">
@@ -29156,13 +29366,13 @@
       </p:sp>
       <p:sp>
         <p:nvSpPr>
-          <p:cNvPr id="50" name="Text 48"/>
-          <p:cNvSpPr/>
-          <p:nvPr/>
-        </p:nvSpPr>
-        <p:spPr>
-          <a:xfrm>
-            <a:off x="4921966" y="4187952"/>
+          <p:cNvPr id="52" name="Text 50"/>
+          <p:cNvSpPr/>
+          <p:nvPr/>
+        </p:nvSpPr>
+        <p:spPr>
+          <a:xfrm>
+            <a:off x="5515910" y="4169664"/>
             <a:ext cx="543652" cy="475488"/>
           </a:xfrm>
           <a:prstGeom prst="rect">
@@ -29187,7 +29397,7 @@
                 <a:ea typeface="Trebuchet MS" pitchFamily="34" charset="-122"/>
                 <a:cs typeface="Trebuchet MS" pitchFamily="34" charset="-120"/>
               </a:rPr>
-              <a:t>s</a:t>
+              <a:t>t</a:t>
             </a:r>
             <a:endParaRPr lang="en-US" sz="900" dirty="0"/>
           </a:p>
@@ -29195,13 +29405,13 @@
       </p:sp>
       <p:sp>
         <p:nvSpPr>
-          <p:cNvPr id="51" name="Shape 49"/>
-          <p:cNvSpPr/>
-          <p:nvPr/>
-        </p:nvSpPr>
-        <p:spPr>
-          <a:xfrm>
-            <a:off x="5515910" y="4187952"/>
+          <p:cNvPr id="53" name="Shape 51"/>
+          <p:cNvSpPr/>
+          <p:nvPr/>
+        </p:nvSpPr>
+        <p:spPr>
+          <a:xfrm>
+            <a:off x="6109855" y="4169664"/>
             <a:ext cx="543652" cy="475488"/>
           </a:xfrm>
           <a:prstGeom prst="rect">
@@ -29222,13 +29432,13 @@
       </p:sp>
       <p:sp>
         <p:nvSpPr>
-          <p:cNvPr id="52" name="Text 50"/>
-          <p:cNvSpPr/>
-          <p:nvPr/>
-        </p:nvSpPr>
-        <p:spPr>
-          <a:xfrm>
-            <a:off x="5515910" y="4187952"/>
+          <p:cNvPr id="54" name="Text 52"/>
+          <p:cNvSpPr/>
+          <p:nvPr/>
+        </p:nvSpPr>
+        <p:spPr>
+          <a:xfrm>
+            <a:off x="6109855" y="4169664"/>
             <a:ext cx="543652" cy="475488"/>
           </a:xfrm>
           <a:prstGeom prst="rect">
@@ -29253,7 +29463,7 @@
                 <a:ea typeface="Trebuchet MS" pitchFamily="34" charset="-122"/>
                 <a:cs typeface="Trebuchet MS" pitchFamily="34" charset="-120"/>
               </a:rPr>
-              <a:t>t</a:t>
+              <a:t>r</a:t>
             </a:r>
             <a:endParaRPr lang="en-US" sz="900" dirty="0"/>
           </a:p>
@@ -29261,13 +29471,13 @@
       </p:sp>
       <p:sp>
         <p:nvSpPr>
-          <p:cNvPr id="53" name="Shape 51"/>
-          <p:cNvSpPr/>
-          <p:nvPr/>
-        </p:nvSpPr>
-        <p:spPr>
-          <a:xfrm>
-            <a:off x="6109855" y="4187952"/>
+          <p:cNvPr id="55" name="Shape 53"/>
+          <p:cNvSpPr/>
+          <p:nvPr/>
+        </p:nvSpPr>
+        <p:spPr>
+          <a:xfrm>
+            <a:off x="6703799" y="4169664"/>
             <a:ext cx="543652" cy="475488"/>
           </a:xfrm>
           <a:prstGeom prst="rect">
@@ -29288,13 +29498,13 @@
       </p:sp>
       <p:sp>
         <p:nvSpPr>
-          <p:cNvPr id="54" name="Text 52"/>
-          <p:cNvSpPr/>
-          <p:nvPr/>
-        </p:nvSpPr>
-        <p:spPr>
-          <a:xfrm>
-            <a:off x="6109855" y="4187952"/>
+          <p:cNvPr id="56" name="Text 54"/>
+          <p:cNvSpPr/>
+          <p:nvPr/>
+        </p:nvSpPr>
+        <p:spPr>
+          <a:xfrm>
+            <a:off x="6703799" y="4169664"/>
             <a:ext cx="543652" cy="475488"/>
           </a:xfrm>
           <a:prstGeom prst="rect">
@@ -29319,7 +29529,7 @@
                 <a:ea typeface="Trebuchet MS" pitchFamily="34" charset="-122"/>
                 <a:cs typeface="Trebuchet MS" pitchFamily="34" charset="-120"/>
               </a:rPr>
-              <a:t>r</a:t>
+              <a:t>u</a:t>
             </a:r>
             <a:endParaRPr lang="en-US" sz="900" dirty="0"/>
           </a:p>
@@ -29327,13 +29537,13 @@
       </p:sp>
       <p:sp>
         <p:nvSpPr>
-          <p:cNvPr id="55" name="Shape 53"/>
-          <p:cNvSpPr/>
-          <p:nvPr/>
-        </p:nvSpPr>
-        <p:spPr>
-          <a:xfrm>
-            <a:off x="6703799" y="4187952"/>
+          <p:cNvPr id="57" name="Shape 55"/>
+          <p:cNvSpPr/>
+          <p:nvPr/>
+        </p:nvSpPr>
+        <p:spPr>
+          <a:xfrm>
+            <a:off x="7297743" y="4169664"/>
             <a:ext cx="543652" cy="475488"/>
           </a:xfrm>
           <a:prstGeom prst="rect">
@@ -29354,13 +29564,13 @@
       </p:sp>
       <p:sp>
         <p:nvSpPr>
-          <p:cNvPr id="56" name="Text 54"/>
-          <p:cNvSpPr/>
-          <p:nvPr/>
-        </p:nvSpPr>
-        <p:spPr>
-          <a:xfrm>
-            <a:off x="6703799" y="4187952"/>
+          <p:cNvPr id="58" name="Text 56"/>
+          <p:cNvSpPr/>
+          <p:nvPr/>
+        </p:nvSpPr>
+        <p:spPr>
+          <a:xfrm>
+            <a:off x="7297743" y="4169664"/>
             <a:ext cx="543652" cy="475488"/>
           </a:xfrm>
           <a:prstGeom prst="rect">
@@ -29385,7 +29595,7 @@
                 <a:ea typeface="Trebuchet MS" pitchFamily="34" charset="-122"/>
                 <a:cs typeface="Trebuchet MS" pitchFamily="34" charset="-120"/>
               </a:rPr>
-              <a:t>u</a:t>
+              <a:t>c</a:t>
             </a:r>
             <a:endParaRPr lang="en-US" sz="900" dirty="0"/>
           </a:p>
@@ -29393,13 +29603,13 @@
       </p:sp>
       <p:sp>
         <p:nvSpPr>
-          <p:cNvPr id="57" name="Shape 55"/>
-          <p:cNvSpPr/>
-          <p:nvPr/>
-        </p:nvSpPr>
-        <p:spPr>
-          <a:xfrm>
-            <a:off x="7297743" y="4187952"/>
+          <p:cNvPr id="59" name="Shape 57"/>
+          <p:cNvSpPr/>
+          <p:nvPr/>
+        </p:nvSpPr>
+        <p:spPr>
+          <a:xfrm>
+            <a:off x="7891688" y="4169664"/>
             <a:ext cx="543652" cy="475488"/>
           </a:xfrm>
           <a:prstGeom prst="rect">
@@ -29420,79 +29630,13 @@
       </p:sp>
       <p:sp>
         <p:nvSpPr>
-          <p:cNvPr id="58" name="Text 56"/>
-          <p:cNvSpPr/>
-          <p:nvPr/>
-        </p:nvSpPr>
-        <p:spPr>
-          <a:xfrm>
-            <a:off x="7297743" y="4187952"/>
-            <a:ext cx="543652" cy="475488"/>
-          </a:xfrm>
-          <a:prstGeom prst="rect">
-            <a:avLst/>
-          </a:prstGeom>
-          <a:noFill/>
-          <a:ln/>
-        </p:spPr>
-        <p:txBody>
-          <a:bodyPr wrap="square" lIns="0" tIns="0" rIns="0" bIns="0" rtlCol="0" anchor="ctr"/>
-          <a:lstStyle/>
-          <a:p>
-            <a:pPr algn="ctr" indent="0" marL="0">
-              <a:buNone/>
-            </a:pPr>
-            <a:r>
-              <a:rPr lang="en-US" sz="900" b="1" dirty="0">
-                <a:solidFill>
-                  <a:srgbClr val="9D174D"/>
-                </a:solidFill>
-                <a:latin typeface="Trebuchet MS" pitchFamily="34" charset="0"/>
-                <a:ea typeface="Trebuchet MS" pitchFamily="34" charset="-122"/>
-                <a:cs typeface="Trebuchet MS" pitchFamily="34" charset="-120"/>
-              </a:rPr>
-              <a:t>c</a:t>
-            </a:r>
-            <a:endParaRPr lang="en-US" sz="900" dirty="0"/>
-          </a:p>
-        </p:txBody>
-      </p:sp>
-      <p:sp>
-        <p:nvSpPr>
-          <p:cNvPr id="59" name="Shape 57"/>
-          <p:cNvSpPr/>
-          <p:nvPr/>
-        </p:nvSpPr>
-        <p:spPr>
-          <a:xfrm>
-            <a:off x="7891688" y="4187952"/>
-            <a:ext cx="543652" cy="475488"/>
-          </a:xfrm>
-          <a:prstGeom prst="rect">
-            <a:avLst>
-              <a:gd name="adj" fmla="val 7692"/>
-            </a:avLst>
-          </a:prstGeom>
-          <a:solidFill>
-            <a:srgbClr val="FFFFFF"/>
-          </a:solidFill>
-          <a:ln w="12700">
-            <a:solidFill>
-              <a:srgbClr val="DB2777"/>
-            </a:solidFill>
-            <a:prstDash val="solid"/>
-          </a:ln>
-        </p:spPr>
-      </p:sp>
-      <p:sp>
-        <p:nvSpPr>
           <p:cNvPr id="60" name="Text 58"/>
           <p:cNvSpPr/>
           <p:nvPr/>
         </p:nvSpPr>
         <p:spPr>
           <a:xfrm>
-            <a:off x="7891688" y="4187952"/>
+            <a:off x="7891688" y="4169664"/>
             <a:ext cx="543652" cy="475488"/>
           </a:xfrm>
           <a:prstGeom prst="rect">
@@ -29948,7 +30092,7 @@
                 <a:ea typeface="Trebuchet MS" pitchFamily="34" charset="-122"/>
                 <a:cs typeface="Trebuchet MS" pitchFamily="34" charset="-120"/>
               </a:rPr>
-              <a:t>construction</a:t>
+              <a:t>structure</a:t>
             </a:r>
             <a:endParaRPr lang="en-US" sz="2800" dirty="0"/>
           </a:p>
@@ -30227,11 +30371,11 @@
         <p:spPr>
           <a:xfrm>
             <a:off x="365760" y="4096512"/>
-            <a:ext cx="1371600" cy="658368"/>
+            <a:ext cx="1371600" cy="804672"/>
           </a:xfrm>
           <a:prstGeom prst="rect">
             <a:avLst>
-              <a:gd name="adj" fmla="val 8333"/>
+              <a:gd name="adj" fmla="val 6818"/>
             </a:avLst>
           </a:prstGeom>
           <a:solidFill>
@@ -30254,7 +30398,7 @@
         <p:spPr>
           <a:xfrm>
             <a:off x="365760" y="4096512"/>
-            <a:ext cx="1371600" cy="658368"/>
+            <a:ext cx="1371600" cy="804672"/>
           </a:xfrm>
           <a:prstGeom prst="rect">
             <a:avLst/>
@@ -30293,11 +30437,11 @@
         <p:spPr>
           <a:xfrm>
             <a:off x="1874520" y="4096512"/>
-            <a:ext cx="6903720" cy="658368"/>
+            <a:ext cx="6903720" cy="804672"/>
           </a:xfrm>
           <a:prstGeom prst="rect">
             <a:avLst>
-              <a:gd name="adj" fmla="val 8333"/>
+              <a:gd name="adj" fmla="val 6818"/>
             </a:avLst>
           </a:prstGeom>
           <a:solidFill>
@@ -30320,7 +30464,7 @@
         <p:spPr>
           <a:xfrm>
             <a:off x="1874520" y="4096512"/>
-            <a:ext cx="6903720" cy="658368"/>
+            <a:ext cx="6903720" cy="804672"/>
           </a:xfrm>
           <a:prstGeom prst="rect">
             <a:avLst/>
@@ -30775,7 +30919,7 @@
                 <a:ea typeface="Trebuchet MS" pitchFamily="34" charset="-122"/>
                 <a:cs typeface="Trebuchet MS" pitchFamily="34" charset="-120"/>
               </a:rPr>
-              <a:t>construction</a:t>
+              <a:t>structure</a:t>
             </a:r>
             <a:endParaRPr lang="en-US" sz="2800" dirty="0"/>
           </a:p>
@@ -30855,7 +30999,7 @@
         </p:nvSpPr>
         <p:spPr>
           <a:xfrm>
-            <a:off x="2221992" y="2258568"/>
+            <a:off x="2938272" y="2258568"/>
             <a:ext cx="1828800" cy="292608"/>
           </a:xfrm>
           <a:prstGeom prst="rect">
@@ -30864,11 +31008,11 @@
             </a:avLst>
           </a:prstGeom>
           <a:solidFill>
-            <a:srgbClr val="DDD6FE"/>
+            <a:srgbClr val="CCFBF1"/>
           </a:solidFill>
           <a:ln w="19050">
             <a:solidFill>
-              <a:srgbClr val="7C3AED"/>
+              <a:srgbClr val="0D9488"/>
             </a:solidFill>
             <a:prstDash val="solid"/>
           </a:ln>
@@ -30889,7 +31033,7 @@
         </p:nvSpPr>
         <p:spPr>
           <a:xfrm>
-            <a:off x="2221992" y="2258568"/>
+            <a:off x="2938272" y="2258568"/>
             <a:ext cx="1828800" cy="292608"/>
           </a:xfrm>
           <a:prstGeom prst="rect">
@@ -30908,13 +31052,13 @@
             <a:r>
               <a:rPr lang="en-US" sz="1300" b="1" dirty="0">
                 <a:solidFill>
-                  <a:srgbClr val="4C1D95"/>
+                  <a:srgbClr val="0F766E"/>
                 </a:solidFill>
                 <a:latin typeface="Trebuchet MS" pitchFamily="34" charset="0"/>
                 <a:ea typeface="Trebuchet MS" pitchFamily="34" charset="-122"/>
                 <a:cs typeface="Trebuchet MS" pitchFamily="34" charset="-120"/>
               </a:rPr>
-              <a:t>con</a:t>
+              <a:t>struct</a:t>
             </a:r>
             <a:endParaRPr lang="en-US" sz="1300" dirty="0"/>
           </a:p>
@@ -30928,7 +31072,7 @@
         </p:nvSpPr>
         <p:spPr>
           <a:xfrm>
-            <a:off x="2221992" y="2569464"/>
+            <a:off x="2938272" y="2569464"/>
             <a:ext cx="1828800" cy="201168"/>
           </a:xfrm>
           <a:prstGeom prst="rect">
@@ -30953,7 +31097,7 @@
                 <a:ea typeface="Calibri" pitchFamily="34" charset="-122"/>
                 <a:cs typeface="Calibri" pitchFamily="34" charset="-120"/>
               </a:rPr>
-              <a:t>together, with</a:t>
+              <a:t>to build or arrange</a:t>
             </a:r>
             <a:endParaRPr lang="en-US" sz="850" dirty="0"/>
           </a:p>
@@ -30967,7 +31111,7 @@
         </p:nvSpPr>
         <p:spPr>
           <a:xfrm>
-            <a:off x="4370832" y="2258568"/>
+            <a:off x="5803392" y="2258568"/>
             <a:ext cx="1828800" cy="292608"/>
           </a:xfrm>
           <a:prstGeom prst="rect">
@@ -30976,11 +31120,11 @@
             </a:avLst>
           </a:prstGeom>
           <a:solidFill>
-            <a:srgbClr val="CCFBF1"/>
+            <a:srgbClr val="FCE7F3"/>
           </a:solidFill>
           <a:ln w="19050">
             <a:solidFill>
-              <a:srgbClr val="0D9488"/>
+              <a:srgbClr val="DB2777"/>
             </a:solidFill>
             <a:prstDash val="solid"/>
           </a:ln>
@@ -31001,7 +31145,7 @@
         </p:nvSpPr>
         <p:spPr>
           <a:xfrm>
-            <a:off x="4370832" y="2258568"/>
+            <a:off x="5803392" y="2258568"/>
             <a:ext cx="1828800" cy="292608"/>
           </a:xfrm>
           <a:prstGeom prst="rect">
@@ -31020,13 +31164,13 @@
             <a:r>
               <a:rPr lang="en-US" sz="1300" b="1" dirty="0">
                 <a:solidFill>
-                  <a:srgbClr val="0F766E"/>
+                  <a:srgbClr val="9D174D"/>
                 </a:solidFill>
                 <a:latin typeface="Trebuchet MS" pitchFamily="34" charset="0"/>
                 <a:ea typeface="Trebuchet MS" pitchFamily="34" charset="-122"/>
                 <a:cs typeface="Trebuchet MS" pitchFamily="34" charset="-120"/>
               </a:rPr>
-              <a:t>struct</a:t>
+              <a:t>ure</a:t>
             </a:r>
             <a:endParaRPr lang="en-US" sz="1300" dirty="0"/>
           </a:p>
@@ -31040,7 +31184,7 @@
         </p:nvSpPr>
         <p:spPr>
           <a:xfrm>
-            <a:off x="4370832" y="2569464"/>
+            <a:off x="5803392" y="2569464"/>
             <a:ext cx="1828800" cy="201168"/>
           </a:xfrm>
           <a:prstGeom prst="rect">
@@ -31065,7 +31209,7 @@
                 <a:ea typeface="Calibri" pitchFamily="34" charset="-122"/>
                 <a:cs typeface="Calibri" pitchFamily="34" charset="-120"/>
               </a:rPr>
-              <a:t>to build</a:t>
+              <a:t>result or process of</a:t>
             </a:r>
             <a:endParaRPr lang="en-US" sz="850" dirty="0"/>
           </a:p>
@@ -31079,30 +31223,23 @@
         </p:nvSpPr>
         <p:spPr>
           <a:xfrm>
-            <a:off x="6519672" y="2258568"/>
-            <a:ext cx="1828800" cy="292608"/>
+            <a:off x="365760" y="3273552"/>
+            <a:ext cx="1371600" cy="658368"/>
           </a:xfrm>
           <a:prstGeom prst="rect">
             <a:avLst>
-              <a:gd name="adj" fmla="val 25000"/>
+              <a:gd name="adj" fmla="val 8333"/>
             </a:avLst>
           </a:prstGeom>
           <a:solidFill>
-            <a:srgbClr val="FCE7F3"/>
-          </a:solidFill>
-          <a:ln w="19050">
-            <a:solidFill>
-              <a:srgbClr val="DB2777"/>
-            </a:solidFill>
-            <a:prstDash val="solid"/>
-          </a:ln>
-          <a:effectLst>
-            <a:outerShdw sx="100000" sy="100000" kx="0" ky="0" algn="bl" rotWithShape="0" blurRad="101600" dist="38100" dir="8100000">
-              <a:srgbClr val="000000">
-                <a:alpha val="12000"/>
-              </a:srgbClr>
-            </a:outerShdw>
-          </a:effectLst>
+            <a:srgbClr val="E2E8F0"/>
+          </a:solidFill>
+          <a:ln w="12700">
+            <a:solidFill>
+              <a:srgbClr val="E2E8F0"/>
+            </a:solidFill>
+            <a:prstDash val="solid"/>
+          </a:ln>
         </p:spPr>
       </p:sp>
       <p:sp>
@@ -31113,112 +31250,100 @@
         </p:nvSpPr>
         <p:spPr>
           <a:xfrm>
-            <a:off x="6519672" y="2258568"/>
-            <a:ext cx="1828800" cy="292608"/>
-          </a:xfrm>
-          <a:prstGeom prst="rect">
-            <a:avLst/>
-          </a:prstGeom>
-          <a:noFill/>
-          <a:ln/>
-        </p:spPr>
-        <p:txBody>
-          <a:bodyPr wrap="square" lIns="0" tIns="0" rIns="0" bIns="0" rtlCol="0" anchor="ctr"/>
-          <a:lstStyle/>
-          <a:p>
-            <a:pPr algn="ctr" indent="0" marL="0">
-              <a:buNone/>
-            </a:pPr>
-            <a:r>
-              <a:rPr lang="en-US" sz="1300" b="1" dirty="0">
-                <a:solidFill>
-                  <a:srgbClr val="9D174D"/>
+            <a:off x="365760" y="3273552"/>
+            <a:ext cx="1371600" cy="658368"/>
+          </a:xfrm>
+          <a:prstGeom prst="rect">
+            <a:avLst/>
+          </a:prstGeom>
+          <a:noFill/>
+          <a:ln/>
+        </p:spPr>
+        <p:txBody>
+          <a:bodyPr wrap="square" lIns="0" tIns="0" rIns="0" bIns="0" rtlCol="0" anchor="ctr"/>
+          <a:lstStyle/>
+          <a:p>
+            <a:pPr algn="ctr" indent="0" marL="0">
+              <a:buNone/>
+            </a:pPr>
+            <a:r>
+              <a:rPr lang="en-US" sz="1100" b="1" dirty="0">
+                <a:solidFill>
+                  <a:srgbClr val="475569"/>
                 </a:solidFill>
                 <a:latin typeface="Trebuchet MS" pitchFamily="34" charset="0"/>
                 <a:ea typeface="Trebuchet MS" pitchFamily="34" charset="-122"/>
                 <a:cs typeface="Trebuchet MS" pitchFamily="34" charset="-120"/>
               </a:rPr>
-              <a:t>ion</a:t>
-            </a:r>
-            <a:endParaRPr lang="en-US" sz="1300" dirty="0"/>
-          </a:p>
-        </p:txBody>
-      </p:sp>
-      <p:sp>
-        <p:nvSpPr>
-          <p:cNvPr id="24" name="Text 22"/>
-          <p:cNvSpPr/>
-          <p:nvPr/>
-        </p:nvSpPr>
-        <p:spPr>
-          <a:xfrm>
-            <a:off x="6519672" y="2569464"/>
-            <a:ext cx="1828800" cy="201168"/>
-          </a:xfrm>
-          <a:prstGeom prst="rect">
-            <a:avLst/>
-          </a:prstGeom>
-          <a:noFill/>
-          <a:ln/>
-        </p:spPr>
-        <p:txBody>
-          <a:bodyPr wrap="square" lIns="0" tIns="0" rIns="0" bIns="0" rtlCol="0" anchor="t"/>
-          <a:lstStyle/>
-          <a:p>
-            <a:pPr algn="ctr" indent="0" marL="0">
-              <a:buNone/>
-            </a:pPr>
-            <a:r>
-              <a:rPr lang="en-US" sz="850" dirty="0">
-                <a:solidFill>
-                  <a:srgbClr val="475569"/>
+              <a:t>Syllables</a:t>
+            </a:r>
+            <a:endParaRPr lang="en-US" sz="1100" dirty="0"/>
+          </a:p>
+        </p:txBody>
+      </p:sp>
+      <p:sp>
+        <p:nvSpPr>
+          <p:cNvPr id="24" name="Shape 22"/>
+          <p:cNvSpPr/>
+          <p:nvPr/>
+        </p:nvSpPr>
+        <p:spPr>
+          <a:xfrm>
+            <a:off x="1874520" y="3273552"/>
+            <a:ext cx="6903720" cy="658368"/>
+          </a:xfrm>
+          <a:prstGeom prst="rect">
+            <a:avLst>
+              <a:gd name="adj" fmla="val 8333"/>
+            </a:avLst>
+          </a:prstGeom>
+          <a:solidFill>
+            <a:srgbClr val="F8FAFC"/>
+          </a:solidFill>
+          <a:ln w="12700">
+            <a:solidFill>
+              <a:srgbClr val="E2E8F0"/>
+            </a:solidFill>
+            <a:prstDash val="dash"/>
+          </a:ln>
+        </p:spPr>
+      </p:sp>
+      <p:sp>
+        <p:nvSpPr>
+          <p:cNvPr id="25" name="Text 23"/>
+          <p:cNvSpPr/>
+          <p:nvPr/>
+        </p:nvSpPr>
+        <p:spPr>
+          <a:xfrm>
+            <a:off x="1874520" y="3273552"/>
+            <a:ext cx="6903720" cy="658368"/>
+          </a:xfrm>
+          <a:prstGeom prst="rect">
+            <a:avLst/>
+          </a:prstGeom>
+          <a:noFill/>
+          <a:ln/>
+        </p:spPr>
+        <p:txBody>
+          <a:bodyPr wrap="square" rtlCol="0" anchor="ctr"/>
+          <a:lstStyle/>
+          <a:p>
+            <a:pPr algn="ctr" indent="0" marL="0">
+              <a:buNone/>
+            </a:pPr>
+            <a:r>
+              <a:rPr lang="en-US" sz="1100" i="1" dirty="0">
+                <a:solidFill>
+                  <a:srgbClr val="CBD5E1"/>
                 </a:solidFill>
                 <a:latin typeface="Calibri" pitchFamily="34" charset="0"/>
                 <a:ea typeface="Calibri" pitchFamily="34" charset="-122"/>
                 <a:cs typeface="Calibri" pitchFamily="34" charset="-120"/>
               </a:rPr>
-              <a:t>act or result of</a:t>
-            </a:r>
-            <a:endParaRPr lang="en-US" sz="850" dirty="0"/>
-          </a:p>
-        </p:txBody>
-      </p:sp>
-      <p:sp>
-        <p:nvSpPr>
-          <p:cNvPr id="25" name="Text 23"/>
-          <p:cNvSpPr/>
-          <p:nvPr/>
-        </p:nvSpPr>
-        <p:spPr>
-          <a:xfrm>
-            <a:off x="6519672" y="2752344"/>
-            <a:ext cx="1828800" cy="182880"/>
-          </a:xfrm>
-          <a:prstGeom prst="rect">
-            <a:avLst/>
-          </a:prstGeom>
-          <a:noFill/>
-          <a:ln/>
-        </p:spPr>
-        <p:txBody>
-          <a:bodyPr wrap="square" lIns="0" tIns="0" rIns="0" bIns="0" rtlCol="0" anchor="t"/>
-          <a:lstStyle/>
-          <a:p>
-            <a:pPr algn="ctr" indent="0" marL="0">
-              <a:buNone/>
-            </a:pPr>
-            <a:r>
-              <a:rPr lang="en-US" sz="700" i="1" dirty="0">
-                <a:solidFill>
-                  <a:srgbClr val="94A3B8"/>
-                </a:solidFill>
-                <a:latin typeface="Calibri" pitchFamily="34" charset="0"/>
-                <a:ea typeface="Calibri" pitchFamily="34" charset="-122"/>
-                <a:cs typeface="Calibri" pitchFamily="34" charset="-120"/>
-              </a:rPr>
-              <a:t>'t' before 'ion' makes a 'sh' sound</a:t>
-            </a:r>
-            <a:endParaRPr lang="en-US" sz="700" dirty="0"/>
+              <a:t>Write here...</a:t>
+            </a:r>
+            <a:endParaRPr lang="en-US" sz="1100" dirty="0"/>
           </a:p>
         </p:txBody>
       </p:sp>
@@ -31230,12 +31355,12 @@
         </p:nvSpPr>
         <p:spPr>
           <a:xfrm>
-            <a:off x="365760" y="3273552"/>
-            <a:ext cx="1371600" cy="658368"/>
+            <a:off x="365760" y="4096512"/>
+            <a:ext cx="1371600" cy="804672"/>
           </a:xfrm>
           <a:prstGeom prst="rect">
             <a:avLst>
-              <a:gd name="adj" fmla="val 8333"/>
+              <a:gd name="adj" fmla="val 6818"/>
             </a:avLst>
           </a:prstGeom>
           <a:solidFill>
@@ -31257,8 +31382,8 @@
         </p:nvSpPr>
         <p:spPr>
           <a:xfrm>
-            <a:off x="365760" y="3273552"/>
-            <a:ext cx="1371600" cy="658368"/>
+            <a:off x="365760" y="4096512"/>
+            <a:ext cx="1371600" cy="804672"/>
           </a:xfrm>
           <a:prstGeom prst="rect">
             <a:avLst/>
@@ -31282,7 +31407,7 @@
                 <a:ea typeface="Trebuchet MS" pitchFamily="34" charset="-122"/>
                 <a:cs typeface="Trebuchet MS" pitchFamily="34" charset="-120"/>
               </a:rPr>
-              <a:t>Syllables</a:t>
+              <a:t>Phonemes</a:t>
             </a:r>
             <a:endParaRPr lang="en-US" sz="1100" dirty="0"/>
           </a:p>
@@ -31296,12 +31421,12 @@
         </p:nvSpPr>
         <p:spPr>
           <a:xfrm>
-            <a:off x="1874520" y="3273552"/>
-            <a:ext cx="6903720" cy="658368"/>
+            <a:off x="1874520" y="4096512"/>
+            <a:ext cx="6903720" cy="804672"/>
           </a:xfrm>
           <a:prstGeom prst="rect">
             <a:avLst>
-              <a:gd name="adj" fmla="val 8333"/>
+              <a:gd name="adj" fmla="val 6818"/>
             </a:avLst>
           </a:prstGeom>
           <a:solidFill>
@@ -31323,140 +31448,8 @@
         </p:nvSpPr>
         <p:spPr>
           <a:xfrm>
-            <a:off x="1874520" y="3273552"/>
-            <a:ext cx="6903720" cy="658368"/>
-          </a:xfrm>
-          <a:prstGeom prst="rect">
-            <a:avLst/>
-          </a:prstGeom>
-          <a:noFill/>
-          <a:ln/>
-        </p:spPr>
-        <p:txBody>
-          <a:bodyPr wrap="square" rtlCol="0" anchor="ctr"/>
-          <a:lstStyle/>
-          <a:p>
-            <a:pPr algn="ctr" indent="0" marL="0">
-              <a:buNone/>
-            </a:pPr>
-            <a:r>
-              <a:rPr lang="en-US" sz="1100" i="1" dirty="0">
-                <a:solidFill>
-                  <a:srgbClr val="CBD5E1"/>
-                </a:solidFill>
-                <a:latin typeface="Calibri" pitchFamily="34" charset="0"/>
-                <a:ea typeface="Calibri" pitchFamily="34" charset="-122"/>
-                <a:cs typeface="Calibri" pitchFamily="34" charset="-120"/>
-              </a:rPr>
-              <a:t>Write here...</a:t>
-            </a:r>
-            <a:endParaRPr lang="en-US" sz="1100" dirty="0"/>
-          </a:p>
-        </p:txBody>
-      </p:sp>
-      <p:sp>
-        <p:nvSpPr>
-          <p:cNvPr id="30" name="Shape 28"/>
-          <p:cNvSpPr/>
-          <p:nvPr/>
-        </p:nvSpPr>
-        <p:spPr>
-          <a:xfrm>
-            <a:off x="365760" y="4096512"/>
-            <a:ext cx="1371600" cy="658368"/>
-          </a:xfrm>
-          <a:prstGeom prst="rect">
-            <a:avLst>
-              <a:gd name="adj" fmla="val 8333"/>
-            </a:avLst>
-          </a:prstGeom>
-          <a:solidFill>
-            <a:srgbClr val="E2E8F0"/>
-          </a:solidFill>
-          <a:ln w="12700">
-            <a:solidFill>
-              <a:srgbClr val="E2E8F0"/>
-            </a:solidFill>
-            <a:prstDash val="solid"/>
-          </a:ln>
-        </p:spPr>
-      </p:sp>
-      <p:sp>
-        <p:nvSpPr>
-          <p:cNvPr id="31" name="Text 29"/>
-          <p:cNvSpPr/>
-          <p:nvPr/>
-        </p:nvSpPr>
-        <p:spPr>
-          <a:xfrm>
-            <a:off x="365760" y="4096512"/>
-            <a:ext cx="1371600" cy="658368"/>
-          </a:xfrm>
-          <a:prstGeom prst="rect">
-            <a:avLst/>
-          </a:prstGeom>
-          <a:noFill/>
-          <a:ln/>
-        </p:spPr>
-        <p:txBody>
-          <a:bodyPr wrap="square" lIns="0" tIns="0" rIns="0" bIns="0" rtlCol="0" anchor="ctr"/>
-          <a:lstStyle/>
-          <a:p>
-            <a:pPr algn="ctr" indent="0" marL="0">
-              <a:buNone/>
-            </a:pPr>
-            <a:r>
-              <a:rPr lang="en-US" sz="1100" b="1" dirty="0">
-                <a:solidFill>
-                  <a:srgbClr val="475569"/>
-                </a:solidFill>
-                <a:latin typeface="Trebuchet MS" pitchFamily="34" charset="0"/>
-                <a:ea typeface="Trebuchet MS" pitchFamily="34" charset="-122"/>
-                <a:cs typeface="Trebuchet MS" pitchFamily="34" charset="-120"/>
-              </a:rPr>
-              <a:t>Phonemes</a:t>
-            </a:r>
-            <a:endParaRPr lang="en-US" sz="1100" dirty="0"/>
-          </a:p>
-        </p:txBody>
-      </p:sp>
-      <p:sp>
-        <p:nvSpPr>
-          <p:cNvPr id="32" name="Shape 30"/>
-          <p:cNvSpPr/>
-          <p:nvPr/>
-        </p:nvSpPr>
-        <p:spPr>
-          <a:xfrm>
             <a:off x="1874520" y="4096512"/>
-            <a:ext cx="6903720" cy="658368"/>
-          </a:xfrm>
-          <a:prstGeom prst="rect">
-            <a:avLst>
-              <a:gd name="adj" fmla="val 8333"/>
-            </a:avLst>
-          </a:prstGeom>
-          <a:solidFill>
-            <a:srgbClr val="F8FAFC"/>
-          </a:solidFill>
-          <a:ln w="12700">
-            <a:solidFill>
-              <a:srgbClr val="E2E8F0"/>
-            </a:solidFill>
-            <a:prstDash val="dash"/>
-          </a:ln>
-        </p:spPr>
-      </p:sp>
-      <p:sp>
-        <p:nvSpPr>
-          <p:cNvPr id="33" name="Text 31"/>
-          <p:cNvSpPr/>
-          <p:nvPr/>
-        </p:nvSpPr>
-        <p:spPr>
-          <a:xfrm>
-            <a:off x="1874520" y="4096512"/>
-            <a:ext cx="6903720" cy="658368"/>
+            <a:ext cx="6903720" cy="804672"/>
           </a:xfrm>
           <a:prstGeom prst="rect">
             <a:avLst/>
@@ -31911,7 +31904,7 @@
                 <a:ea typeface="Trebuchet MS" pitchFamily="34" charset="-122"/>
                 <a:cs typeface="Trebuchet MS" pitchFamily="34" charset="-120"/>
               </a:rPr>
-              <a:t>construction</a:t>
+              <a:t>structure</a:t>
             </a:r>
             <a:endParaRPr lang="en-US" sz="2800" dirty="0"/>
           </a:p>
@@ -31991,7 +31984,7 @@
         </p:nvSpPr>
         <p:spPr>
           <a:xfrm>
-            <a:off x="2221992" y="2258568"/>
+            <a:off x="2938272" y="2258568"/>
             <a:ext cx="1828800" cy="292608"/>
           </a:xfrm>
           <a:prstGeom prst="rect">
@@ -32000,11 +31993,11 @@
             </a:avLst>
           </a:prstGeom>
           <a:solidFill>
-            <a:srgbClr val="DDD6FE"/>
+            <a:srgbClr val="CCFBF1"/>
           </a:solidFill>
           <a:ln w="19050">
             <a:solidFill>
-              <a:srgbClr val="7C3AED"/>
+              <a:srgbClr val="0D9488"/>
             </a:solidFill>
             <a:prstDash val="solid"/>
           </a:ln>
@@ -32025,7 +32018,7 @@
         </p:nvSpPr>
         <p:spPr>
           <a:xfrm>
-            <a:off x="2221992" y="2258568"/>
+            <a:off x="2938272" y="2258568"/>
             <a:ext cx="1828800" cy="292608"/>
           </a:xfrm>
           <a:prstGeom prst="rect">
@@ -32044,13 +32037,13 @@
             <a:r>
               <a:rPr lang="en-US" sz="1300" b="1" dirty="0">
                 <a:solidFill>
-                  <a:srgbClr val="4C1D95"/>
+                  <a:srgbClr val="0F766E"/>
                 </a:solidFill>
                 <a:latin typeface="Trebuchet MS" pitchFamily="34" charset="0"/>
                 <a:ea typeface="Trebuchet MS" pitchFamily="34" charset="-122"/>
                 <a:cs typeface="Trebuchet MS" pitchFamily="34" charset="-120"/>
               </a:rPr>
-              <a:t>con</a:t>
+              <a:t>struct</a:t>
             </a:r>
             <a:endParaRPr lang="en-US" sz="1300" dirty="0"/>
           </a:p>
@@ -32064,7 +32057,7 @@
         </p:nvSpPr>
         <p:spPr>
           <a:xfrm>
-            <a:off x="2221992" y="2569464"/>
+            <a:off x="2938272" y="2569464"/>
             <a:ext cx="1828800" cy="201168"/>
           </a:xfrm>
           <a:prstGeom prst="rect">
@@ -32089,7 +32082,7 @@
                 <a:ea typeface="Calibri" pitchFamily="34" charset="-122"/>
                 <a:cs typeface="Calibri" pitchFamily="34" charset="-120"/>
               </a:rPr>
-              <a:t>together, with</a:t>
+              <a:t>to build or arrange</a:t>
             </a:r>
             <a:endParaRPr lang="en-US" sz="850" dirty="0"/>
           </a:p>
@@ -32103,7 +32096,7 @@
         </p:nvSpPr>
         <p:spPr>
           <a:xfrm>
-            <a:off x="4370832" y="2258568"/>
+            <a:off x="5803392" y="2258568"/>
             <a:ext cx="1828800" cy="292608"/>
           </a:xfrm>
           <a:prstGeom prst="rect">
@@ -32112,11 +32105,11 @@
             </a:avLst>
           </a:prstGeom>
           <a:solidFill>
-            <a:srgbClr val="CCFBF1"/>
+            <a:srgbClr val="FCE7F3"/>
           </a:solidFill>
           <a:ln w="19050">
             <a:solidFill>
-              <a:srgbClr val="0D9488"/>
+              <a:srgbClr val="DB2777"/>
             </a:solidFill>
             <a:prstDash val="solid"/>
           </a:ln>
@@ -32137,7 +32130,7 @@
         </p:nvSpPr>
         <p:spPr>
           <a:xfrm>
-            <a:off x="4370832" y="2258568"/>
+            <a:off x="5803392" y="2258568"/>
             <a:ext cx="1828800" cy="292608"/>
           </a:xfrm>
           <a:prstGeom prst="rect">
@@ -32156,13 +32149,13 @@
             <a:r>
               <a:rPr lang="en-US" sz="1300" b="1" dirty="0">
                 <a:solidFill>
-                  <a:srgbClr val="0F766E"/>
+                  <a:srgbClr val="9D174D"/>
                 </a:solidFill>
                 <a:latin typeface="Trebuchet MS" pitchFamily="34" charset="0"/>
                 <a:ea typeface="Trebuchet MS" pitchFamily="34" charset="-122"/>
                 <a:cs typeface="Trebuchet MS" pitchFamily="34" charset="-120"/>
               </a:rPr>
-              <a:t>struct</a:t>
+              <a:t>ure</a:t>
             </a:r>
             <a:endParaRPr lang="en-US" sz="1300" dirty="0"/>
           </a:p>
@@ -32176,7 +32169,7 @@
         </p:nvSpPr>
         <p:spPr>
           <a:xfrm>
-            <a:off x="4370832" y="2569464"/>
+            <a:off x="5803392" y="2569464"/>
             <a:ext cx="1828800" cy="201168"/>
           </a:xfrm>
           <a:prstGeom prst="rect">
@@ -32201,7 +32194,7 @@
                 <a:ea typeface="Calibri" pitchFamily="34" charset="-122"/>
                 <a:cs typeface="Calibri" pitchFamily="34" charset="-120"/>
               </a:rPr>
-              <a:t>to build</a:t>
+              <a:t>result or process of</a:t>
             </a:r>
             <a:endParaRPr lang="en-US" sz="850" dirty="0"/>
           </a:p>
@@ -32215,30 +32208,23 @@
         </p:nvSpPr>
         <p:spPr>
           <a:xfrm>
-            <a:off x="6519672" y="2258568"/>
-            <a:ext cx="1828800" cy="292608"/>
+            <a:off x="365760" y="3273552"/>
+            <a:ext cx="1371600" cy="658368"/>
           </a:xfrm>
           <a:prstGeom prst="rect">
             <a:avLst>
-              <a:gd name="adj" fmla="val 25000"/>
+              <a:gd name="adj" fmla="val 8333"/>
             </a:avLst>
           </a:prstGeom>
           <a:solidFill>
-            <a:srgbClr val="FCE7F3"/>
-          </a:solidFill>
-          <a:ln w="19050">
-            <a:solidFill>
-              <a:srgbClr val="DB2777"/>
-            </a:solidFill>
-            <a:prstDash val="solid"/>
-          </a:ln>
-          <a:effectLst>
-            <a:outerShdw sx="100000" sy="100000" kx="0" ky="0" algn="bl" rotWithShape="0" blurRad="101600" dist="38100" dir="8100000">
-              <a:srgbClr val="000000">
-                <a:alpha val="12000"/>
-              </a:srgbClr>
-            </a:outerShdw>
-          </a:effectLst>
+            <a:srgbClr val="E2E8F0"/>
+          </a:solidFill>
+          <a:ln w="12700">
+            <a:solidFill>
+              <a:srgbClr val="E2E8F0"/>
+            </a:solidFill>
+            <a:prstDash val="solid"/>
+          </a:ln>
         </p:spPr>
       </p:sp>
       <p:sp>
@@ -32249,125 +32235,47 @@
         </p:nvSpPr>
         <p:spPr>
           <a:xfrm>
-            <a:off x="6519672" y="2258568"/>
-            <a:ext cx="1828800" cy="292608"/>
-          </a:xfrm>
-          <a:prstGeom prst="rect">
-            <a:avLst/>
-          </a:prstGeom>
-          <a:noFill/>
-          <a:ln/>
-        </p:spPr>
-        <p:txBody>
-          <a:bodyPr wrap="square" lIns="0" tIns="0" rIns="0" bIns="0" rtlCol="0" anchor="ctr"/>
-          <a:lstStyle/>
-          <a:p>
-            <a:pPr algn="ctr" indent="0" marL="0">
-              <a:buNone/>
-            </a:pPr>
-            <a:r>
-              <a:rPr lang="en-US" sz="1300" b="1" dirty="0">
-                <a:solidFill>
-                  <a:srgbClr val="9D174D"/>
+            <a:off x="365760" y="3273552"/>
+            <a:ext cx="1371600" cy="658368"/>
+          </a:xfrm>
+          <a:prstGeom prst="rect">
+            <a:avLst/>
+          </a:prstGeom>
+          <a:noFill/>
+          <a:ln/>
+        </p:spPr>
+        <p:txBody>
+          <a:bodyPr wrap="square" lIns="0" tIns="0" rIns="0" bIns="0" rtlCol="0" anchor="ctr"/>
+          <a:lstStyle/>
+          <a:p>
+            <a:pPr algn="ctr" indent="0" marL="0">
+              <a:buNone/>
+            </a:pPr>
+            <a:r>
+              <a:rPr lang="en-US" sz="1100" b="1" dirty="0">
+                <a:solidFill>
+                  <a:srgbClr val="475569"/>
                 </a:solidFill>
                 <a:latin typeface="Trebuchet MS" pitchFamily="34" charset="0"/>
                 <a:ea typeface="Trebuchet MS" pitchFamily="34" charset="-122"/>
                 <a:cs typeface="Trebuchet MS" pitchFamily="34" charset="-120"/>
               </a:rPr>
-              <a:t>ion</a:t>
-            </a:r>
-            <a:endParaRPr lang="en-US" sz="1300" dirty="0"/>
-          </a:p>
-        </p:txBody>
-      </p:sp>
-      <p:sp>
-        <p:nvSpPr>
-          <p:cNvPr id="24" name="Text 22"/>
-          <p:cNvSpPr/>
-          <p:nvPr/>
-        </p:nvSpPr>
-        <p:spPr>
-          <a:xfrm>
-            <a:off x="6519672" y="2569464"/>
-            <a:ext cx="1828800" cy="201168"/>
-          </a:xfrm>
-          <a:prstGeom prst="rect">
-            <a:avLst/>
-          </a:prstGeom>
-          <a:noFill/>
-          <a:ln/>
-        </p:spPr>
-        <p:txBody>
-          <a:bodyPr wrap="square" lIns="0" tIns="0" rIns="0" bIns="0" rtlCol="0" anchor="t"/>
-          <a:lstStyle/>
-          <a:p>
-            <a:pPr algn="ctr" indent="0" marL="0">
-              <a:buNone/>
-            </a:pPr>
-            <a:r>
-              <a:rPr lang="en-US" sz="850" dirty="0">
-                <a:solidFill>
-                  <a:srgbClr val="475569"/>
-                </a:solidFill>
-                <a:latin typeface="Calibri" pitchFamily="34" charset="0"/>
-                <a:ea typeface="Calibri" pitchFamily="34" charset="-122"/>
-                <a:cs typeface="Calibri" pitchFamily="34" charset="-120"/>
-              </a:rPr>
-              <a:t>act or result of</a:t>
-            </a:r>
-            <a:endParaRPr lang="en-US" sz="850" dirty="0"/>
-          </a:p>
-        </p:txBody>
-      </p:sp>
-      <p:sp>
-        <p:nvSpPr>
-          <p:cNvPr id="25" name="Text 23"/>
-          <p:cNvSpPr/>
-          <p:nvPr/>
-        </p:nvSpPr>
-        <p:spPr>
-          <a:xfrm>
-            <a:off x="6519672" y="2752344"/>
-            <a:ext cx="1828800" cy="182880"/>
-          </a:xfrm>
-          <a:prstGeom prst="rect">
-            <a:avLst/>
-          </a:prstGeom>
-          <a:noFill/>
-          <a:ln/>
-        </p:spPr>
-        <p:txBody>
-          <a:bodyPr wrap="square" lIns="0" tIns="0" rIns="0" bIns="0" rtlCol="0" anchor="t"/>
-          <a:lstStyle/>
-          <a:p>
-            <a:pPr algn="ctr" indent="0" marL="0">
-              <a:buNone/>
-            </a:pPr>
-            <a:r>
-              <a:rPr lang="en-US" sz="700" i="1" dirty="0">
-                <a:solidFill>
-                  <a:srgbClr val="94A3B8"/>
-                </a:solidFill>
-                <a:latin typeface="Calibri" pitchFamily="34" charset="0"/>
-                <a:ea typeface="Calibri" pitchFamily="34" charset="-122"/>
-                <a:cs typeface="Calibri" pitchFamily="34" charset="-120"/>
-              </a:rPr>
-              <a:t>'t' before 'ion' makes a 'sh' sound</a:t>
-            </a:r>
-            <a:endParaRPr lang="en-US" sz="700" dirty="0"/>
-          </a:p>
-        </p:txBody>
-      </p:sp>
-      <p:sp>
-        <p:nvSpPr>
-          <p:cNvPr id="26" name="Shape 24"/>
-          <p:cNvSpPr/>
-          <p:nvPr/>
-        </p:nvSpPr>
-        <p:spPr>
-          <a:xfrm>
-            <a:off x="365760" y="3273552"/>
-            <a:ext cx="1371600" cy="658368"/>
+              <a:t>Syllables</a:t>
+            </a:r>
+            <a:endParaRPr lang="en-US" sz="1100" dirty="0"/>
+          </a:p>
+        </p:txBody>
+      </p:sp>
+      <p:sp>
+        <p:nvSpPr>
+          <p:cNvPr id="24" name="Shape 22"/>
+          <p:cNvSpPr/>
+          <p:nvPr/>
+        </p:nvSpPr>
+        <p:spPr>
+          <a:xfrm>
+            <a:off x="1874520" y="3273552"/>
+            <a:ext cx="6903720" cy="658368"/>
           </a:xfrm>
           <a:prstGeom prst="rect">
             <a:avLst>
@@ -32375,52 +32283,118 @@
             </a:avLst>
           </a:prstGeom>
           <a:solidFill>
-            <a:srgbClr val="E2E8F0"/>
-          </a:solidFill>
-          <a:ln w="12700">
-            <a:solidFill>
-              <a:srgbClr val="E2E8F0"/>
-            </a:solidFill>
-            <a:prstDash val="solid"/>
-          </a:ln>
-        </p:spPr>
-      </p:sp>
-      <p:sp>
-        <p:nvSpPr>
-          <p:cNvPr id="27" name="Text 25"/>
-          <p:cNvSpPr/>
-          <p:nvPr/>
-        </p:nvSpPr>
-        <p:spPr>
-          <a:xfrm>
-            <a:off x="365760" y="3273552"/>
-            <a:ext cx="1371600" cy="658368"/>
-          </a:xfrm>
-          <a:prstGeom prst="rect">
-            <a:avLst/>
-          </a:prstGeom>
-          <a:noFill/>
-          <a:ln/>
-        </p:spPr>
-        <p:txBody>
-          <a:bodyPr wrap="square" lIns="0" tIns="0" rIns="0" bIns="0" rtlCol="0" anchor="ctr"/>
-          <a:lstStyle/>
-          <a:p>
-            <a:pPr algn="ctr" indent="0" marL="0">
-              <a:buNone/>
-            </a:pPr>
-            <a:r>
-              <a:rPr lang="en-US" sz="1100" b="1" dirty="0">
-                <a:solidFill>
-                  <a:srgbClr val="475569"/>
+            <a:srgbClr val="CCFBF1"/>
+          </a:solidFill>
+          <a:ln w="12700">
+            <a:solidFill>
+              <a:srgbClr val="0D9488"/>
+            </a:solidFill>
+            <a:prstDash val="solid"/>
+          </a:ln>
+        </p:spPr>
+      </p:sp>
+      <p:sp>
+        <p:nvSpPr>
+          <p:cNvPr id="25" name="Shape 23"/>
+          <p:cNvSpPr/>
+          <p:nvPr/>
+        </p:nvSpPr>
+        <p:spPr>
+          <a:xfrm>
+            <a:off x="2999232" y="3364992"/>
+            <a:ext cx="1645920" cy="475488"/>
+          </a:xfrm>
+          <a:prstGeom prst="rect">
+            <a:avLst>
+              <a:gd name="adj" fmla="val 9615"/>
+            </a:avLst>
+          </a:prstGeom>
+          <a:solidFill>
+            <a:srgbClr val="FFFFFF"/>
+          </a:solidFill>
+          <a:ln w="12700">
+            <a:solidFill>
+              <a:srgbClr val="0D9488"/>
+            </a:solidFill>
+            <a:prstDash val="solid"/>
+          </a:ln>
+        </p:spPr>
+      </p:sp>
+      <p:sp>
+        <p:nvSpPr>
+          <p:cNvPr id="26" name="Text 24"/>
+          <p:cNvSpPr/>
+          <p:nvPr/>
+        </p:nvSpPr>
+        <p:spPr>
+          <a:xfrm>
+            <a:off x="2999232" y="3364992"/>
+            <a:ext cx="1645920" cy="475488"/>
+          </a:xfrm>
+          <a:prstGeom prst="rect">
+            <a:avLst/>
+          </a:prstGeom>
+          <a:noFill/>
+          <a:ln/>
+        </p:spPr>
+        <p:txBody>
+          <a:bodyPr wrap="square" lIns="0" tIns="0" rIns="0" bIns="0" rtlCol="0" anchor="ctr"/>
+          <a:lstStyle/>
+          <a:p>
+            <a:pPr algn="ctr" indent="0" marL="0">
+              <a:buNone/>
+            </a:pPr>
+            <a:r>
+              <a:rPr lang="en-US" sz="1400" b="1" dirty="0">
+                <a:solidFill>
+                  <a:srgbClr val="0D9488"/>
                 </a:solidFill>
                 <a:latin typeface="Trebuchet MS" pitchFamily="34" charset="0"/>
                 <a:ea typeface="Trebuchet MS" pitchFamily="34" charset="-122"/>
                 <a:cs typeface="Trebuchet MS" pitchFamily="34" charset="-120"/>
               </a:rPr>
-              <a:t>Syllables</a:t>
-            </a:r>
-            <a:endParaRPr lang="en-US" sz="1100" dirty="0"/>
+              <a:t>struc</a:t>
+            </a:r>
+            <a:endParaRPr lang="en-US" sz="1400" dirty="0"/>
+          </a:p>
+        </p:txBody>
+      </p:sp>
+      <p:sp>
+        <p:nvSpPr>
+          <p:cNvPr id="27" name="Text 25"/>
+          <p:cNvSpPr/>
+          <p:nvPr/>
+        </p:nvSpPr>
+        <p:spPr>
+          <a:xfrm>
+            <a:off x="4645152" y="3364992"/>
+            <a:ext cx="1097280" cy="475488"/>
+          </a:xfrm>
+          <a:prstGeom prst="rect">
+            <a:avLst/>
+          </a:prstGeom>
+          <a:noFill/>
+          <a:ln/>
+        </p:spPr>
+        <p:txBody>
+          <a:bodyPr wrap="square" lIns="0" tIns="0" rIns="0" bIns="0" rtlCol="0" anchor="ctr"/>
+          <a:lstStyle/>
+          <a:p>
+            <a:pPr algn="ctr" indent="0" marL="0">
+              <a:buNone/>
+            </a:pPr>
+            <a:r>
+              <a:rPr lang="en-US" sz="1600" b="1" dirty="0">
+                <a:solidFill>
+                  <a:srgbClr val="0D9488"/>
+                </a:solidFill>
+                <a:latin typeface="Trebuchet MS" pitchFamily="34" charset="0"/>
+                <a:ea typeface="Trebuchet MS" pitchFamily="34" charset="-122"/>
+                <a:cs typeface="Trebuchet MS" pitchFamily="34" charset="-120"/>
+              </a:rPr>
+              <a:t>·</a:t>
+            </a:r>
+            <a:endParaRPr lang="en-US" sz="1600" dirty="0"/>
           </a:p>
         </p:txBody>
       </p:sp>
@@ -32432,34 +32406,7 @@
         </p:nvSpPr>
         <p:spPr>
           <a:xfrm>
-            <a:off x="1874520" y="3273552"/>
-            <a:ext cx="6903720" cy="658368"/>
-          </a:xfrm>
-          <a:prstGeom prst="rect">
-            <a:avLst>
-              <a:gd name="adj" fmla="val 8333"/>
-            </a:avLst>
-          </a:prstGeom>
-          <a:solidFill>
-            <a:srgbClr val="CCFBF1"/>
-          </a:solidFill>
-          <a:ln w="12700">
-            <a:solidFill>
-              <a:srgbClr val="0D9488"/>
-            </a:solidFill>
-            <a:prstDash val="solid"/>
-          </a:ln>
-        </p:spPr>
-      </p:sp>
-      <p:sp>
-        <p:nvSpPr>
-          <p:cNvPr id="29" name="Shape 27"/>
-          <p:cNvSpPr/>
-          <p:nvPr/>
-        </p:nvSpPr>
-        <p:spPr>
-          <a:xfrm>
-            <a:off x="2313432" y="3364992"/>
+            <a:off x="5742432" y="3364992"/>
             <a:ext cx="1645920" cy="475488"/>
           </a:xfrm>
           <a:prstGeom prst="rect">
@@ -32480,13 +32427,13 @@
       </p:sp>
       <p:sp>
         <p:nvSpPr>
-          <p:cNvPr id="30" name="Text 28"/>
-          <p:cNvSpPr/>
-          <p:nvPr/>
-        </p:nvSpPr>
-        <p:spPr>
-          <a:xfrm>
-            <a:off x="2313432" y="3364992"/>
+          <p:cNvPr id="29" name="Text 27"/>
+          <p:cNvSpPr/>
+          <p:nvPr/>
+        </p:nvSpPr>
+        <p:spPr>
+          <a:xfrm>
+            <a:off x="5742432" y="3364992"/>
             <a:ext cx="1645920" cy="475488"/>
           </a:xfrm>
           <a:prstGeom prst="rect">
@@ -32511,7 +32458,7 @@
                 <a:ea typeface="Trebuchet MS" pitchFamily="34" charset="-122"/>
                 <a:cs typeface="Trebuchet MS" pitchFamily="34" charset="-120"/>
               </a:rPr>
-              <a:t>con</a:t>
+              <a:t>ture</a:t>
             </a:r>
             <a:endParaRPr lang="en-US" sz="1400" dirty="0"/>
           </a:p>
@@ -32519,40 +32466,67 @@
       </p:sp>
       <p:sp>
         <p:nvSpPr>
+          <p:cNvPr id="30" name="Shape 28"/>
+          <p:cNvSpPr/>
+          <p:nvPr/>
+        </p:nvSpPr>
+        <p:spPr>
+          <a:xfrm>
+            <a:off x="365760" y="4096512"/>
+            <a:ext cx="1371600" cy="804672"/>
+          </a:xfrm>
+          <a:prstGeom prst="rect">
+            <a:avLst>
+              <a:gd name="adj" fmla="val 6818"/>
+            </a:avLst>
+          </a:prstGeom>
+          <a:solidFill>
+            <a:srgbClr val="E2E8F0"/>
+          </a:solidFill>
+          <a:ln w="12700">
+            <a:solidFill>
+              <a:srgbClr val="E2E8F0"/>
+            </a:solidFill>
+            <a:prstDash val="solid"/>
+          </a:ln>
+        </p:spPr>
+      </p:sp>
+      <p:sp>
+        <p:nvSpPr>
           <p:cNvPr id="31" name="Text 29"/>
           <p:cNvSpPr/>
           <p:nvPr/>
         </p:nvSpPr>
         <p:spPr>
           <a:xfrm>
-            <a:off x="3959352" y="3364992"/>
-            <a:ext cx="411480" cy="475488"/>
-          </a:xfrm>
-          <a:prstGeom prst="rect">
-            <a:avLst/>
-          </a:prstGeom>
-          <a:noFill/>
-          <a:ln/>
-        </p:spPr>
-        <p:txBody>
-          <a:bodyPr wrap="square" lIns="0" tIns="0" rIns="0" bIns="0" rtlCol="0" anchor="ctr"/>
-          <a:lstStyle/>
-          <a:p>
-            <a:pPr algn="ctr" indent="0" marL="0">
-              <a:buNone/>
-            </a:pPr>
-            <a:r>
-              <a:rPr lang="en-US" sz="1600" b="1" dirty="0">
-                <a:solidFill>
-                  <a:srgbClr val="0D9488"/>
+            <a:off x="365760" y="4096512"/>
+            <a:ext cx="1371600" cy="804672"/>
+          </a:xfrm>
+          <a:prstGeom prst="rect">
+            <a:avLst/>
+          </a:prstGeom>
+          <a:noFill/>
+          <a:ln/>
+        </p:spPr>
+        <p:txBody>
+          <a:bodyPr wrap="square" lIns="0" tIns="0" rIns="0" bIns="0" rtlCol="0" anchor="ctr"/>
+          <a:lstStyle/>
+          <a:p>
+            <a:pPr algn="ctr" indent="0" marL="0">
+              <a:buNone/>
+            </a:pPr>
+            <a:r>
+              <a:rPr lang="en-US" sz="1100" b="1" dirty="0">
+                <a:solidFill>
+                  <a:srgbClr val="475569"/>
                 </a:solidFill>
                 <a:latin typeface="Trebuchet MS" pitchFamily="34" charset="0"/>
                 <a:ea typeface="Trebuchet MS" pitchFamily="34" charset="-122"/>
                 <a:cs typeface="Trebuchet MS" pitchFamily="34" charset="-120"/>
               </a:rPr>
-              <a:t>·</a:t>
-            </a:r>
-            <a:endParaRPr lang="en-US" sz="1600" dirty="0"/>
+              <a:t>Phonemes</a:t>
+            </a:r>
+            <a:endParaRPr lang="en-US" sz="1100" dirty="0"/>
           </a:p>
         </p:txBody>
       </p:sp>
@@ -32564,22 +32538,22 @@
         </p:nvSpPr>
         <p:spPr>
           <a:xfrm>
-            <a:off x="4370832" y="3364992"/>
-            <a:ext cx="1645920" cy="475488"/>
+            <a:off x="1874520" y="4096512"/>
+            <a:ext cx="6903720" cy="804672"/>
           </a:xfrm>
           <a:prstGeom prst="rect">
             <a:avLst>
-              <a:gd name="adj" fmla="val 9615"/>
+              <a:gd name="adj" fmla="val 6818"/>
             </a:avLst>
           </a:prstGeom>
           <a:solidFill>
-            <a:srgbClr val="FFFFFF"/>
-          </a:solidFill>
-          <a:ln w="12700">
-            <a:solidFill>
-              <a:srgbClr val="0D9488"/>
-            </a:solidFill>
-            <a:prstDash val="solid"/>
+            <a:srgbClr val="F8FAFC"/>
+          </a:solidFill>
+          <a:ln w="12700">
+            <a:solidFill>
+              <a:srgbClr val="E2E8F0"/>
+            </a:solidFill>
+            <a:prstDash val="dash"/>
           </a:ln>
         </p:spPr>
       </p:sp>
@@ -32591,245 +32565,8 @@
         </p:nvSpPr>
         <p:spPr>
           <a:xfrm>
-            <a:off x="4370832" y="3364992"/>
-            <a:ext cx="1645920" cy="475488"/>
-          </a:xfrm>
-          <a:prstGeom prst="rect">
-            <a:avLst/>
-          </a:prstGeom>
-          <a:noFill/>
-          <a:ln/>
-        </p:spPr>
-        <p:txBody>
-          <a:bodyPr wrap="square" lIns="0" tIns="0" rIns="0" bIns="0" rtlCol="0" anchor="ctr"/>
-          <a:lstStyle/>
-          <a:p>
-            <a:pPr algn="ctr" indent="0" marL="0">
-              <a:buNone/>
-            </a:pPr>
-            <a:r>
-              <a:rPr lang="en-US" sz="1400" b="1" dirty="0">
-                <a:solidFill>
-                  <a:srgbClr val="0D9488"/>
-                </a:solidFill>
-                <a:latin typeface="Trebuchet MS" pitchFamily="34" charset="0"/>
-                <a:ea typeface="Trebuchet MS" pitchFamily="34" charset="-122"/>
-                <a:cs typeface="Trebuchet MS" pitchFamily="34" charset="-120"/>
-              </a:rPr>
-              <a:t>struc</a:t>
-            </a:r>
-            <a:endParaRPr lang="en-US" sz="1400" dirty="0"/>
-          </a:p>
-        </p:txBody>
-      </p:sp>
-      <p:sp>
-        <p:nvSpPr>
-          <p:cNvPr id="34" name="Text 32"/>
-          <p:cNvSpPr/>
-          <p:nvPr/>
-        </p:nvSpPr>
-        <p:spPr>
-          <a:xfrm>
-            <a:off x="6016752" y="3364992"/>
-            <a:ext cx="411480" cy="475488"/>
-          </a:xfrm>
-          <a:prstGeom prst="rect">
-            <a:avLst/>
-          </a:prstGeom>
-          <a:noFill/>
-          <a:ln/>
-        </p:spPr>
-        <p:txBody>
-          <a:bodyPr wrap="square" lIns="0" tIns="0" rIns="0" bIns="0" rtlCol="0" anchor="ctr"/>
-          <a:lstStyle/>
-          <a:p>
-            <a:pPr algn="ctr" indent="0" marL="0">
-              <a:buNone/>
-            </a:pPr>
-            <a:r>
-              <a:rPr lang="en-US" sz="1600" b="1" dirty="0">
-                <a:solidFill>
-                  <a:srgbClr val="0D9488"/>
-                </a:solidFill>
-                <a:latin typeface="Trebuchet MS" pitchFamily="34" charset="0"/>
-                <a:ea typeface="Trebuchet MS" pitchFamily="34" charset="-122"/>
-                <a:cs typeface="Trebuchet MS" pitchFamily="34" charset="-120"/>
-              </a:rPr>
-              <a:t>·</a:t>
-            </a:r>
-            <a:endParaRPr lang="en-US" sz="1600" dirty="0"/>
-          </a:p>
-        </p:txBody>
-      </p:sp>
-      <p:sp>
-        <p:nvSpPr>
-          <p:cNvPr id="35" name="Shape 33"/>
-          <p:cNvSpPr/>
-          <p:nvPr/>
-        </p:nvSpPr>
-        <p:spPr>
-          <a:xfrm>
-            <a:off x="6428232" y="3364992"/>
-            <a:ext cx="1645920" cy="475488"/>
-          </a:xfrm>
-          <a:prstGeom prst="rect">
-            <a:avLst>
-              <a:gd name="adj" fmla="val 9615"/>
-            </a:avLst>
-          </a:prstGeom>
-          <a:solidFill>
-            <a:srgbClr val="FFFFFF"/>
-          </a:solidFill>
-          <a:ln w="12700">
-            <a:solidFill>
-              <a:srgbClr val="0D9488"/>
-            </a:solidFill>
-            <a:prstDash val="solid"/>
-          </a:ln>
-        </p:spPr>
-      </p:sp>
-      <p:sp>
-        <p:nvSpPr>
-          <p:cNvPr id="36" name="Text 34"/>
-          <p:cNvSpPr/>
-          <p:nvPr/>
-        </p:nvSpPr>
-        <p:spPr>
-          <a:xfrm>
-            <a:off x="6428232" y="3364992"/>
-            <a:ext cx="1645920" cy="475488"/>
-          </a:xfrm>
-          <a:prstGeom prst="rect">
-            <a:avLst/>
-          </a:prstGeom>
-          <a:noFill/>
-          <a:ln/>
-        </p:spPr>
-        <p:txBody>
-          <a:bodyPr wrap="square" lIns="0" tIns="0" rIns="0" bIns="0" rtlCol="0" anchor="ctr"/>
-          <a:lstStyle/>
-          <a:p>
-            <a:pPr algn="ctr" indent="0" marL="0">
-              <a:buNone/>
-            </a:pPr>
-            <a:r>
-              <a:rPr lang="en-US" sz="1400" b="1" dirty="0">
-                <a:solidFill>
-                  <a:srgbClr val="0D9488"/>
-                </a:solidFill>
-                <a:latin typeface="Trebuchet MS" pitchFamily="34" charset="0"/>
-                <a:ea typeface="Trebuchet MS" pitchFamily="34" charset="-122"/>
-                <a:cs typeface="Trebuchet MS" pitchFamily="34" charset="-120"/>
-              </a:rPr>
-              <a:t>tion</a:t>
-            </a:r>
-            <a:endParaRPr lang="en-US" sz="1400" dirty="0"/>
-          </a:p>
-        </p:txBody>
-      </p:sp>
-      <p:sp>
-        <p:nvSpPr>
-          <p:cNvPr id="37" name="Shape 35"/>
-          <p:cNvSpPr/>
-          <p:nvPr/>
-        </p:nvSpPr>
-        <p:spPr>
-          <a:xfrm>
-            <a:off x="365760" y="4096512"/>
-            <a:ext cx="1371600" cy="658368"/>
-          </a:xfrm>
-          <a:prstGeom prst="rect">
-            <a:avLst>
-              <a:gd name="adj" fmla="val 8333"/>
-            </a:avLst>
-          </a:prstGeom>
-          <a:solidFill>
-            <a:srgbClr val="E2E8F0"/>
-          </a:solidFill>
-          <a:ln w="12700">
-            <a:solidFill>
-              <a:srgbClr val="E2E8F0"/>
-            </a:solidFill>
-            <a:prstDash val="solid"/>
-          </a:ln>
-        </p:spPr>
-      </p:sp>
-      <p:sp>
-        <p:nvSpPr>
-          <p:cNvPr id="38" name="Text 36"/>
-          <p:cNvSpPr/>
-          <p:nvPr/>
-        </p:nvSpPr>
-        <p:spPr>
-          <a:xfrm>
-            <a:off x="365760" y="4096512"/>
-            <a:ext cx="1371600" cy="658368"/>
-          </a:xfrm>
-          <a:prstGeom prst="rect">
-            <a:avLst/>
-          </a:prstGeom>
-          <a:noFill/>
-          <a:ln/>
-        </p:spPr>
-        <p:txBody>
-          <a:bodyPr wrap="square" lIns="0" tIns="0" rIns="0" bIns="0" rtlCol="0" anchor="ctr"/>
-          <a:lstStyle/>
-          <a:p>
-            <a:pPr algn="ctr" indent="0" marL="0">
-              <a:buNone/>
-            </a:pPr>
-            <a:r>
-              <a:rPr lang="en-US" sz="1100" b="1" dirty="0">
-                <a:solidFill>
-                  <a:srgbClr val="475569"/>
-                </a:solidFill>
-                <a:latin typeface="Trebuchet MS" pitchFamily="34" charset="0"/>
-                <a:ea typeface="Trebuchet MS" pitchFamily="34" charset="-122"/>
-                <a:cs typeface="Trebuchet MS" pitchFamily="34" charset="-120"/>
-              </a:rPr>
-              <a:t>Phonemes</a:t>
-            </a:r>
-            <a:endParaRPr lang="en-US" sz="1100" dirty="0"/>
-          </a:p>
-        </p:txBody>
-      </p:sp>
-      <p:sp>
-        <p:nvSpPr>
-          <p:cNvPr id="39" name="Shape 37"/>
-          <p:cNvSpPr/>
-          <p:nvPr/>
-        </p:nvSpPr>
-        <p:spPr>
-          <a:xfrm>
             <a:off x="1874520" y="4096512"/>
-            <a:ext cx="6903720" cy="658368"/>
-          </a:xfrm>
-          <a:prstGeom prst="rect">
-            <a:avLst>
-              <a:gd name="adj" fmla="val 8333"/>
-            </a:avLst>
-          </a:prstGeom>
-          <a:solidFill>
-            <a:srgbClr val="F8FAFC"/>
-          </a:solidFill>
-          <a:ln w="12700">
-            <a:solidFill>
-              <a:srgbClr val="E2E8F0"/>
-            </a:solidFill>
-            <a:prstDash val="dash"/>
-          </a:ln>
-        </p:spPr>
-      </p:sp>
-      <p:sp>
-        <p:nvSpPr>
-          <p:cNvPr id="40" name="Text 38"/>
-          <p:cNvSpPr/>
-          <p:nvPr/>
-        </p:nvSpPr>
-        <p:spPr>
-          <a:xfrm>
-            <a:off x="1874520" y="4096512"/>
-            <a:ext cx="6903720" cy="658368"/>
+            <a:ext cx="6903720" cy="804672"/>
           </a:xfrm>
           <a:prstGeom prst="rect">
             <a:avLst/>
@@ -33284,7 +33021,7 @@
                 <a:ea typeface="Trebuchet MS" pitchFamily="34" charset="-122"/>
                 <a:cs typeface="Trebuchet MS" pitchFamily="34" charset="-120"/>
               </a:rPr>
-              <a:t>construction</a:t>
+              <a:t>structure</a:t>
             </a:r>
             <a:endParaRPr lang="en-US" sz="2800" dirty="0"/>
           </a:p>
@@ -33364,7 +33101,7 @@
         </p:nvSpPr>
         <p:spPr>
           <a:xfrm>
-            <a:off x="2221992" y="2258568"/>
+            <a:off x="2938272" y="2258568"/>
             <a:ext cx="1828800" cy="292608"/>
           </a:xfrm>
           <a:prstGeom prst="rect">
@@ -33373,11 +33110,11 @@
             </a:avLst>
           </a:prstGeom>
           <a:solidFill>
-            <a:srgbClr val="DDD6FE"/>
+            <a:srgbClr val="CCFBF1"/>
           </a:solidFill>
           <a:ln w="19050">
             <a:solidFill>
-              <a:srgbClr val="7C3AED"/>
+              <a:srgbClr val="0D9488"/>
             </a:solidFill>
             <a:prstDash val="solid"/>
           </a:ln>
@@ -33398,7 +33135,7 @@
         </p:nvSpPr>
         <p:spPr>
           <a:xfrm>
-            <a:off x="2221992" y="2258568"/>
+            <a:off x="2938272" y="2258568"/>
             <a:ext cx="1828800" cy="292608"/>
           </a:xfrm>
           <a:prstGeom prst="rect">
@@ -33417,13 +33154,13 @@
             <a:r>
               <a:rPr lang="en-US" sz="1300" b="1" dirty="0">
                 <a:solidFill>
-                  <a:srgbClr val="4C1D95"/>
+                  <a:srgbClr val="0F766E"/>
                 </a:solidFill>
                 <a:latin typeface="Trebuchet MS" pitchFamily="34" charset="0"/>
                 <a:ea typeface="Trebuchet MS" pitchFamily="34" charset="-122"/>
                 <a:cs typeface="Trebuchet MS" pitchFamily="34" charset="-120"/>
               </a:rPr>
-              <a:t>con</a:t>
+              <a:t>struct</a:t>
             </a:r>
             <a:endParaRPr lang="en-US" sz="1300" dirty="0"/>
           </a:p>
@@ -33437,7 +33174,7 @@
         </p:nvSpPr>
         <p:spPr>
           <a:xfrm>
-            <a:off x="2221992" y="2569464"/>
+            <a:off x="2938272" y="2569464"/>
             <a:ext cx="1828800" cy="201168"/>
           </a:xfrm>
           <a:prstGeom prst="rect">
@@ -33462,7 +33199,7 @@
                 <a:ea typeface="Calibri" pitchFamily="34" charset="-122"/>
                 <a:cs typeface="Calibri" pitchFamily="34" charset="-120"/>
               </a:rPr>
-              <a:t>together, with</a:t>
+              <a:t>to build or arrange</a:t>
             </a:r>
             <a:endParaRPr lang="en-US" sz="850" dirty="0"/>
           </a:p>
@@ -33476,7 +33213,7 @@
         </p:nvSpPr>
         <p:spPr>
           <a:xfrm>
-            <a:off x="4370832" y="2258568"/>
+            <a:off x="5803392" y="2258568"/>
             <a:ext cx="1828800" cy="292608"/>
           </a:xfrm>
           <a:prstGeom prst="rect">
@@ -33485,11 +33222,11 @@
             </a:avLst>
           </a:prstGeom>
           <a:solidFill>
-            <a:srgbClr val="CCFBF1"/>
+            <a:srgbClr val="FCE7F3"/>
           </a:solidFill>
           <a:ln w="19050">
             <a:solidFill>
-              <a:srgbClr val="0D9488"/>
+              <a:srgbClr val="DB2777"/>
             </a:solidFill>
             <a:prstDash val="solid"/>
           </a:ln>
@@ -33510,7 +33247,7 @@
         </p:nvSpPr>
         <p:spPr>
           <a:xfrm>
-            <a:off x="4370832" y="2258568"/>
+            <a:off x="5803392" y="2258568"/>
             <a:ext cx="1828800" cy="292608"/>
           </a:xfrm>
           <a:prstGeom prst="rect">
@@ -33529,13 +33266,13 @@
             <a:r>
               <a:rPr lang="en-US" sz="1300" b="1" dirty="0">
                 <a:solidFill>
-                  <a:srgbClr val="0F766E"/>
+                  <a:srgbClr val="9D174D"/>
                 </a:solidFill>
                 <a:latin typeface="Trebuchet MS" pitchFamily="34" charset="0"/>
                 <a:ea typeface="Trebuchet MS" pitchFamily="34" charset="-122"/>
                 <a:cs typeface="Trebuchet MS" pitchFamily="34" charset="-120"/>
               </a:rPr>
-              <a:t>struct</a:t>
+              <a:t>ure</a:t>
             </a:r>
             <a:endParaRPr lang="en-US" sz="1300" dirty="0"/>
           </a:p>
@@ -33549,7 +33286,7 @@
         </p:nvSpPr>
         <p:spPr>
           <a:xfrm>
-            <a:off x="4370832" y="2569464"/>
+            <a:off x="5803392" y="2569464"/>
             <a:ext cx="1828800" cy="201168"/>
           </a:xfrm>
           <a:prstGeom prst="rect">
@@ -33574,7 +33311,7 @@
                 <a:ea typeface="Calibri" pitchFamily="34" charset="-122"/>
                 <a:cs typeface="Calibri" pitchFamily="34" charset="-120"/>
               </a:rPr>
-              <a:t>to build</a:t>
+              <a:t>result or process of</a:t>
             </a:r>
             <a:endParaRPr lang="en-US" sz="850" dirty="0"/>
           </a:p>
@@ -33588,30 +33325,23 @@
         </p:nvSpPr>
         <p:spPr>
           <a:xfrm>
-            <a:off x="6519672" y="2258568"/>
-            <a:ext cx="1828800" cy="292608"/>
+            <a:off x="365760" y="3273552"/>
+            <a:ext cx="1371600" cy="658368"/>
           </a:xfrm>
           <a:prstGeom prst="rect">
             <a:avLst>
-              <a:gd name="adj" fmla="val 25000"/>
+              <a:gd name="adj" fmla="val 8333"/>
             </a:avLst>
           </a:prstGeom>
           <a:solidFill>
-            <a:srgbClr val="FCE7F3"/>
-          </a:solidFill>
-          <a:ln w="19050">
-            <a:solidFill>
-              <a:srgbClr val="DB2777"/>
-            </a:solidFill>
-            <a:prstDash val="solid"/>
-          </a:ln>
-          <a:effectLst>
-            <a:outerShdw sx="100000" sy="100000" kx="0" ky="0" algn="bl" rotWithShape="0" blurRad="101600" dist="38100" dir="8100000">
-              <a:srgbClr val="000000">
-                <a:alpha val="12000"/>
-              </a:srgbClr>
-            </a:outerShdw>
-          </a:effectLst>
+            <a:srgbClr val="E2E8F0"/>
+          </a:solidFill>
+          <a:ln w="12700">
+            <a:solidFill>
+              <a:srgbClr val="E2E8F0"/>
+            </a:solidFill>
+            <a:prstDash val="solid"/>
+          </a:ln>
         </p:spPr>
       </p:sp>
       <p:sp>
@@ -33622,125 +33352,47 @@
         </p:nvSpPr>
         <p:spPr>
           <a:xfrm>
-            <a:off x="6519672" y="2258568"/>
-            <a:ext cx="1828800" cy="292608"/>
-          </a:xfrm>
-          <a:prstGeom prst="rect">
-            <a:avLst/>
-          </a:prstGeom>
-          <a:noFill/>
-          <a:ln/>
-        </p:spPr>
-        <p:txBody>
-          <a:bodyPr wrap="square" lIns="0" tIns="0" rIns="0" bIns="0" rtlCol="0" anchor="ctr"/>
-          <a:lstStyle/>
-          <a:p>
-            <a:pPr algn="ctr" indent="0" marL="0">
-              <a:buNone/>
-            </a:pPr>
-            <a:r>
-              <a:rPr lang="en-US" sz="1300" b="1" dirty="0">
-                <a:solidFill>
-                  <a:srgbClr val="9D174D"/>
+            <a:off x="365760" y="3273552"/>
+            <a:ext cx="1371600" cy="658368"/>
+          </a:xfrm>
+          <a:prstGeom prst="rect">
+            <a:avLst/>
+          </a:prstGeom>
+          <a:noFill/>
+          <a:ln/>
+        </p:spPr>
+        <p:txBody>
+          <a:bodyPr wrap="square" lIns="0" tIns="0" rIns="0" bIns="0" rtlCol="0" anchor="ctr"/>
+          <a:lstStyle/>
+          <a:p>
+            <a:pPr algn="ctr" indent="0" marL="0">
+              <a:buNone/>
+            </a:pPr>
+            <a:r>
+              <a:rPr lang="en-US" sz="1100" b="1" dirty="0">
+                <a:solidFill>
+                  <a:srgbClr val="475569"/>
                 </a:solidFill>
                 <a:latin typeface="Trebuchet MS" pitchFamily="34" charset="0"/>
                 <a:ea typeface="Trebuchet MS" pitchFamily="34" charset="-122"/>
                 <a:cs typeface="Trebuchet MS" pitchFamily="34" charset="-120"/>
               </a:rPr>
-              <a:t>ion</a:t>
-            </a:r>
-            <a:endParaRPr lang="en-US" sz="1300" dirty="0"/>
-          </a:p>
-        </p:txBody>
-      </p:sp>
-      <p:sp>
-        <p:nvSpPr>
-          <p:cNvPr id="24" name="Text 22"/>
-          <p:cNvSpPr/>
-          <p:nvPr/>
-        </p:nvSpPr>
-        <p:spPr>
-          <a:xfrm>
-            <a:off x="6519672" y="2569464"/>
-            <a:ext cx="1828800" cy="201168"/>
-          </a:xfrm>
-          <a:prstGeom prst="rect">
-            <a:avLst/>
-          </a:prstGeom>
-          <a:noFill/>
-          <a:ln/>
-        </p:spPr>
-        <p:txBody>
-          <a:bodyPr wrap="square" lIns="0" tIns="0" rIns="0" bIns="0" rtlCol="0" anchor="t"/>
-          <a:lstStyle/>
-          <a:p>
-            <a:pPr algn="ctr" indent="0" marL="0">
-              <a:buNone/>
-            </a:pPr>
-            <a:r>
-              <a:rPr lang="en-US" sz="850" dirty="0">
-                <a:solidFill>
-                  <a:srgbClr val="475569"/>
-                </a:solidFill>
-                <a:latin typeface="Calibri" pitchFamily="34" charset="0"/>
-                <a:ea typeface="Calibri" pitchFamily="34" charset="-122"/>
-                <a:cs typeface="Calibri" pitchFamily="34" charset="-120"/>
-              </a:rPr>
-              <a:t>act or result of</a:t>
-            </a:r>
-            <a:endParaRPr lang="en-US" sz="850" dirty="0"/>
-          </a:p>
-        </p:txBody>
-      </p:sp>
-      <p:sp>
-        <p:nvSpPr>
-          <p:cNvPr id="25" name="Text 23"/>
-          <p:cNvSpPr/>
-          <p:nvPr/>
-        </p:nvSpPr>
-        <p:spPr>
-          <a:xfrm>
-            <a:off x="6519672" y="2752344"/>
-            <a:ext cx="1828800" cy="182880"/>
-          </a:xfrm>
-          <a:prstGeom prst="rect">
-            <a:avLst/>
-          </a:prstGeom>
-          <a:noFill/>
-          <a:ln/>
-        </p:spPr>
-        <p:txBody>
-          <a:bodyPr wrap="square" lIns="0" tIns="0" rIns="0" bIns="0" rtlCol="0" anchor="t"/>
-          <a:lstStyle/>
-          <a:p>
-            <a:pPr algn="ctr" indent="0" marL="0">
-              <a:buNone/>
-            </a:pPr>
-            <a:r>
-              <a:rPr lang="en-US" sz="700" i="1" dirty="0">
-                <a:solidFill>
-                  <a:srgbClr val="94A3B8"/>
-                </a:solidFill>
-                <a:latin typeface="Calibri" pitchFamily="34" charset="0"/>
-                <a:ea typeface="Calibri" pitchFamily="34" charset="-122"/>
-                <a:cs typeface="Calibri" pitchFamily="34" charset="-120"/>
-              </a:rPr>
-              <a:t>'t' before 'ion' makes a 'sh' sound</a:t>
-            </a:r>
-            <a:endParaRPr lang="en-US" sz="700" dirty="0"/>
-          </a:p>
-        </p:txBody>
-      </p:sp>
-      <p:sp>
-        <p:nvSpPr>
-          <p:cNvPr id="26" name="Shape 24"/>
-          <p:cNvSpPr/>
-          <p:nvPr/>
-        </p:nvSpPr>
-        <p:spPr>
-          <a:xfrm>
-            <a:off x="365760" y="3273552"/>
-            <a:ext cx="1371600" cy="658368"/>
+              <a:t>Syllables</a:t>
+            </a:r>
+            <a:endParaRPr lang="en-US" sz="1100" dirty="0"/>
+          </a:p>
+        </p:txBody>
+      </p:sp>
+      <p:sp>
+        <p:nvSpPr>
+          <p:cNvPr id="24" name="Shape 22"/>
+          <p:cNvSpPr/>
+          <p:nvPr/>
+        </p:nvSpPr>
+        <p:spPr>
+          <a:xfrm>
+            <a:off x="1874520" y="3273552"/>
+            <a:ext cx="6903720" cy="658368"/>
           </a:xfrm>
           <a:prstGeom prst="rect">
             <a:avLst>
@@ -33748,50 +33400,248 @@
             </a:avLst>
           </a:prstGeom>
           <a:solidFill>
-            <a:srgbClr val="E2E8F0"/>
-          </a:solidFill>
-          <a:ln w="12700">
-            <a:solidFill>
-              <a:srgbClr val="E2E8F0"/>
-            </a:solidFill>
-            <a:prstDash val="solid"/>
-          </a:ln>
-        </p:spPr>
-      </p:sp>
-      <p:sp>
-        <p:nvSpPr>
-          <p:cNvPr id="27" name="Text 25"/>
-          <p:cNvSpPr/>
-          <p:nvPr/>
-        </p:nvSpPr>
-        <p:spPr>
-          <a:xfrm>
-            <a:off x="365760" y="3273552"/>
-            <a:ext cx="1371600" cy="658368"/>
-          </a:xfrm>
-          <a:prstGeom prst="rect">
-            <a:avLst/>
-          </a:prstGeom>
-          <a:noFill/>
-          <a:ln/>
-        </p:spPr>
-        <p:txBody>
-          <a:bodyPr wrap="square" lIns="0" tIns="0" rIns="0" bIns="0" rtlCol="0" anchor="ctr"/>
-          <a:lstStyle/>
-          <a:p>
-            <a:pPr algn="ctr" indent="0" marL="0">
-              <a:buNone/>
-            </a:pPr>
-            <a:r>
-              <a:rPr lang="en-US" sz="1100" b="1" dirty="0">
-                <a:solidFill>
-                  <a:srgbClr val="475569"/>
+            <a:srgbClr val="CCFBF1"/>
+          </a:solidFill>
+          <a:ln w="12700">
+            <a:solidFill>
+              <a:srgbClr val="0D9488"/>
+            </a:solidFill>
+            <a:prstDash val="solid"/>
+          </a:ln>
+        </p:spPr>
+      </p:sp>
+      <p:sp>
+        <p:nvSpPr>
+          <p:cNvPr id="25" name="Shape 23"/>
+          <p:cNvSpPr/>
+          <p:nvPr/>
+        </p:nvSpPr>
+        <p:spPr>
+          <a:xfrm>
+            <a:off x="2999232" y="3364992"/>
+            <a:ext cx="1645920" cy="475488"/>
+          </a:xfrm>
+          <a:prstGeom prst="rect">
+            <a:avLst>
+              <a:gd name="adj" fmla="val 9615"/>
+            </a:avLst>
+          </a:prstGeom>
+          <a:solidFill>
+            <a:srgbClr val="FFFFFF"/>
+          </a:solidFill>
+          <a:ln w="12700">
+            <a:solidFill>
+              <a:srgbClr val="0D9488"/>
+            </a:solidFill>
+            <a:prstDash val="solid"/>
+          </a:ln>
+        </p:spPr>
+      </p:sp>
+      <p:sp>
+        <p:nvSpPr>
+          <p:cNvPr id="26" name="Text 24"/>
+          <p:cNvSpPr/>
+          <p:nvPr/>
+        </p:nvSpPr>
+        <p:spPr>
+          <a:xfrm>
+            <a:off x="2999232" y="3364992"/>
+            <a:ext cx="1645920" cy="475488"/>
+          </a:xfrm>
+          <a:prstGeom prst="rect">
+            <a:avLst/>
+          </a:prstGeom>
+          <a:noFill/>
+          <a:ln/>
+        </p:spPr>
+        <p:txBody>
+          <a:bodyPr wrap="square" lIns="0" tIns="0" rIns="0" bIns="0" rtlCol="0" anchor="ctr"/>
+          <a:lstStyle/>
+          <a:p>
+            <a:pPr algn="ctr" indent="0" marL="0">
+              <a:buNone/>
+            </a:pPr>
+            <a:r>
+              <a:rPr lang="en-US" sz="1400" b="1" dirty="0">
+                <a:solidFill>
+                  <a:srgbClr val="0D9488"/>
                 </a:solidFill>
                 <a:latin typeface="Trebuchet MS" pitchFamily="34" charset="0"/>
                 <a:ea typeface="Trebuchet MS" pitchFamily="34" charset="-122"/>
                 <a:cs typeface="Trebuchet MS" pitchFamily="34" charset="-120"/>
               </a:rPr>
-              <a:t>Syllables</a:t>
+              <a:t>struc</a:t>
+            </a:r>
+            <a:endParaRPr lang="en-US" sz="1400" dirty="0"/>
+          </a:p>
+        </p:txBody>
+      </p:sp>
+      <p:sp>
+        <p:nvSpPr>
+          <p:cNvPr id="27" name="Text 25"/>
+          <p:cNvSpPr/>
+          <p:nvPr/>
+        </p:nvSpPr>
+        <p:spPr>
+          <a:xfrm>
+            <a:off x="4645152" y="3364992"/>
+            <a:ext cx="1097280" cy="475488"/>
+          </a:xfrm>
+          <a:prstGeom prst="rect">
+            <a:avLst/>
+          </a:prstGeom>
+          <a:noFill/>
+          <a:ln/>
+        </p:spPr>
+        <p:txBody>
+          <a:bodyPr wrap="square" lIns="0" tIns="0" rIns="0" bIns="0" rtlCol="0" anchor="ctr"/>
+          <a:lstStyle/>
+          <a:p>
+            <a:pPr algn="ctr" indent="0" marL="0">
+              <a:buNone/>
+            </a:pPr>
+            <a:r>
+              <a:rPr lang="en-US" sz="1600" b="1" dirty="0">
+                <a:solidFill>
+                  <a:srgbClr val="0D9488"/>
+                </a:solidFill>
+                <a:latin typeface="Trebuchet MS" pitchFamily="34" charset="0"/>
+                <a:ea typeface="Trebuchet MS" pitchFamily="34" charset="-122"/>
+                <a:cs typeface="Trebuchet MS" pitchFamily="34" charset="-120"/>
+              </a:rPr>
+              <a:t>·</a:t>
+            </a:r>
+            <a:endParaRPr lang="en-US" sz="1600" dirty="0"/>
+          </a:p>
+        </p:txBody>
+      </p:sp>
+      <p:sp>
+        <p:nvSpPr>
+          <p:cNvPr id="28" name="Shape 26"/>
+          <p:cNvSpPr/>
+          <p:nvPr/>
+        </p:nvSpPr>
+        <p:spPr>
+          <a:xfrm>
+            <a:off x="5742432" y="3364992"/>
+            <a:ext cx="1645920" cy="475488"/>
+          </a:xfrm>
+          <a:prstGeom prst="rect">
+            <a:avLst>
+              <a:gd name="adj" fmla="val 9615"/>
+            </a:avLst>
+          </a:prstGeom>
+          <a:solidFill>
+            <a:srgbClr val="FFFFFF"/>
+          </a:solidFill>
+          <a:ln w="12700">
+            <a:solidFill>
+              <a:srgbClr val="0D9488"/>
+            </a:solidFill>
+            <a:prstDash val="solid"/>
+          </a:ln>
+        </p:spPr>
+      </p:sp>
+      <p:sp>
+        <p:nvSpPr>
+          <p:cNvPr id="29" name="Text 27"/>
+          <p:cNvSpPr/>
+          <p:nvPr/>
+        </p:nvSpPr>
+        <p:spPr>
+          <a:xfrm>
+            <a:off x="5742432" y="3364992"/>
+            <a:ext cx="1645920" cy="475488"/>
+          </a:xfrm>
+          <a:prstGeom prst="rect">
+            <a:avLst/>
+          </a:prstGeom>
+          <a:noFill/>
+          <a:ln/>
+        </p:spPr>
+        <p:txBody>
+          <a:bodyPr wrap="square" lIns="0" tIns="0" rIns="0" bIns="0" rtlCol="0" anchor="ctr"/>
+          <a:lstStyle/>
+          <a:p>
+            <a:pPr algn="ctr" indent="0" marL="0">
+              <a:buNone/>
+            </a:pPr>
+            <a:r>
+              <a:rPr lang="en-US" sz="1400" b="1" dirty="0">
+                <a:solidFill>
+                  <a:srgbClr val="0D9488"/>
+                </a:solidFill>
+                <a:latin typeface="Trebuchet MS" pitchFamily="34" charset="0"/>
+                <a:ea typeface="Trebuchet MS" pitchFamily="34" charset="-122"/>
+                <a:cs typeface="Trebuchet MS" pitchFamily="34" charset="-120"/>
+              </a:rPr>
+              <a:t>ture</a:t>
+            </a:r>
+            <a:endParaRPr lang="en-US" sz="1400" dirty="0"/>
+          </a:p>
+        </p:txBody>
+      </p:sp>
+      <p:sp>
+        <p:nvSpPr>
+          <p:cNvPr id="30" name="Shape 28"/>
+          <p:cNvSpPr/>
+          <p:nvPr/>
+        </p:nvSpPr>
+        <p:spPr>
+          <a:xfrm>
+            <a:off x="365760" y="4096512"/>
+            <a:ext cx="1371600" cy="804672"/>
+          </a:xfrm>
+          <a:prstGeom prst="rect">
+            <a:avLst>
+              <a:gd name="adj" fmla="val 6818"/>
+            </a:avLst>
+          </a:prstGeom>
+          <a:solidFill>
+            <a:srgbClr val="E2E8F0"/>
+          </a:solidFill>
+          <a:ln w="12700">
+            <a:solidFill>
+              <a:srgbClr val="E2E8F0"/>
+            </a:solidFill>
+            <a:prstDash val="solid"/>
+          </a:ln>
+        </p:spPr>
+      </p:sp>
+      <p:sp>
+        <p:nvSpPr>
+          <p:cNvPr id="31" name="Text 29"/>
+          <p:cNvSpPr/>
+          <p:nvPr/>
+        </p:nvSpPr>
+        <p:spPr>
+          <a:xfrm>
+            <a:off x="365760" y="4096512"/>
+            <a:ext cx="1371600" cy="804672"/>
+          </a:xfrm>
+          <a:prstGeom prst="rect">
+            <a:avLst/>
+          </a:prstGeom>
+          <a:noFill/>
+          <a:ln/>
+        </p:spPr>
+        <p:txBody>
+          <a:bodyPr wrap="square" lIns="0" tIns="0" rIns="0" bIns="0" rtlCol="0" anchor="ctr"/>
+          <a:lstStyle/>
+          <a:p>
+            <a:pPr algn="ctr" indent="0" marL="0">
+              <a:buNone/>
+            </a:pPr>
+            <a:r>
+              <a:rPr lang="en-US" sz="1100" b="1" dirty="0">
+                <a:solidFill>
+                  <a:srgbClr val="475569"/>
+                </a:solidFill>
+                <a:latin typeface="Trebuchet MS" pitchFamily="34" charset="0"/>
+                <a:ea typeface="Trebuchet MS" pitchFamily="34" charset="-122"/>
+                <a:cs typeface="Trebuchet MS" pitchFamily="34" charset="-120"/>
+              </a:rPr>
+              <a:t>Phonemes</a:t>
             </a:r>
             <a:endParaRPr lang="en-US" sz="1100" dirty="0"/>
           </a:p>
@@ -33799,13 +33649,13 @@
       </p:sp>
       <p:sp>
         <p:nvSpPr>
-          <p:cNvPr id="28" name="Shape 26"/>
-          <p:cNvSpPr/>
-          <p:nvPr/>
-        </p:nvSpPr>
-        <p:spPr>
-          <a:xfrm>
-            <a:off x="1874520" y="3273552"/>
+          <p:cNvPr id="32" name="Shape 30"/>
+          <p:cNvSpPr/>
+          <p:nvPr/>
+        </p:nvSpPr>
+        <p:spPr>
+          <a:xfrm>
+            <a:off x="1874520" y="4096512"/>
             <a:ext cx="6903720" cy="658368"/>
           </a:xfrm>
           <a:prstGeom prst="rect">
@@ -33814,30 +33664,30 @@
             </a:avLst>
           </a:prstGeom>
           <a:solidFill>
-            <a:srgbClr val="CCFBF1"/>
-          </a:solidFill>
-          <a:ln w="12700">
-            <a:solidFill>
-              <a:srgbClr val="0D9488"/>
-            </a:solidFill>
-            <a:prstDash val="solid"/>
-          </a:ln>
-        </p:spPr>
-      </p:sp>
-      <p:sp>
-        <p:nvSpPr>
-          <p:cNvPr id="29" name="Shape 27"/>
-          <p:cNvSpPr/>
-          <p:nvPr/>
-        </p:nvSpPr>
-        <p:spPr>
-          <a:xfrm>
-            <a:off x="2313432" y="3364992"/>
-            <a:ext cx="1645920" cy="475488"/>
+            <a:srgbClr val="FCE7F3"/>
+          </a:solidFill>
+          <a:ln w="12700">
+            <a:solidFill>
+              <a:srgbClr val="DB2777"/>
+            </a:solidFill>
+            <a:prstDash val="solid"/>
+          </a:ln>
+        </p:spPr>
+      </p:sp>
+      <p:sp>
+        <p:nvSpPr>
+          <p:cNvPr id="33" name="Shape 31"/>
+          <p:cNvSpPr/>
+          <p:nvPr/>
+        </p:nvSpPr>
+        <p:spPr>
+          <a:xfrm>
+            <a:off x="2023872" y="4169664"/>
+            <a:ext cx="685800" cy="475488"/>
           </a:xfrm>
           <a:prstGeom prst="rect">
             <a:avLst>
-              <a:gd name="adj" fmla="val 9615"/>
+              <a:gd name="adj" fmla="val 7692"/>
             </a:avLst>
           </a:prstGeom>
           <a:solidFill>
@@ -33845,104 +33695,131 @@
           </a:solidFill>
           <a:ln w="12700">
             <a:solidFill>
-              <a:srgbClr val="0D9488"/>
-            </a:solidFill>
-            <a:prstDash val="solid"/>
-          </a:ln>
-        </p:spPr>
-      </p:sp>
-      <p:sp>
-        <p:nvSpPr>
-          <p:cNvPr id="30" name="Text 28"/>
-          <p:cNvSpPr/>
-          <p:nvPr/>
-        </p:nvSpPr>
-        <p:spPr>
-          <a:xfrm>
-            <a:off x="2313432" y="3364992"/>
-            <a:ext cx="1645920" cy="475488"/>
-          </a:xfrm>
-          <a:prstGeom prst="rect">
-            <a:avLst/>
-          </a:prstGeom>
-          <a:noFill/>
-          <a:ln/>
-        </p:spPr>
-        <p:txBody>
-          <a:bodyPr wrap="square" lIns="0" tIns="0" rIns="0" bIns="0" rtlCol="0" anchor="ctr"/>
-          <a:lstStyle/>
-          <a:p>
-            <a:pPr algn="ctr" indent="0" marL="0">
-              <a:buNone/>
-            </a:pPr>
-            <a:r>
-              <a:rPr lang="en-US" sz="1400" b="1" dirty="0">
-                <a:solidFill>
-                  <a:srgbClr val="0D9488"/>
+              <a:srgbClr val="DB2777"/>
+            </a:solidFill>
+            <a:prstDash val="solid"/>
+          </a:ln>
+        </p:spPr>
+      </p:sp>
+      <p:sp>
+        <p:nvSpPr>
+          <p:cNvPr id="34" name="Text 32"/>
+          <p:cNvSpPr/>
+          <p:nvPr/>
+        </p:nvSpPr>
+        <p:spPr>
+          <a:xfrm>
+            <a:off x="2023872" y="4169664"/>
+            <a:ext cx="685800" cy="475488"/>
+          </a:xfrm>
+          <a:prstGeom prst="rect">
+            <a:avLst/>
+          </a:prstGeom>
+          <a:noFill/>
+          <a:ln/>
+        </p:spPr>
+        <p:txBody>
+          <a:bodyPr wrap="square" lIns="0" tIns="0" rIns="0" bIns="0" rtlCol="0" anchor="ctr"/>
+          <a:lstStyle/>
+          <a:p>
+            <a:pPr algn="ctr" indent="0" marL="0">
+              <a:buNone/>
+            </a:pPr>
+            <a:r>
+              <a:rPr lang="en-US" sz="900" b="1" dirty="0">
+                <a:solidFill>
+                  <a:srgbClr val="9D174D"/>
                 </a:solidFill>
                 <a:latin typeface="Trebuchet MS" pitchFamily="34" charset="0"/>
                 <a:ea typeface="Trebuchet MS" pitchFamily="34" charset="-122"/>
                 <a:cs typeface="Trebuchet MS" pitchFamily="34" charset="-120"/>
               </a:rPr>
-              <a:t>con</a:t>
-            </a:r>
-            <a:endParaRPr lang="en-US" sz="1400" dirty="0"/>
-          </a:p>
-        </p:txBody>
-      </p:sp>
-      <p:sp>
-        <p:nvSpPr>
-          <p:cNvPr id="31" name="Text 29"/>
-          <p:cNvSpPr/>
-          <p:nvPr/>
-        </p:nvSpPr>
-        <p:spPr>
-          <a:xfrm>
-            <a:off x="3959352" y="3364992"/>
-            <a:ext cx="411480" cy="475488"/>
-          </a:xfrm>
-          <a:prstGeom prst="rect">
-            <a:avLst/>
-          </a:prstGeom>
-          <a:noFill/>
-          <a:ln/>
-        </p:spPr>
-        <p:txBody>
-          <a:bodyPr wrap="square" lIns="0" tIns="0" rIns="0" bIns="0" rtlCol="0" anchor="ctr"/>
-          <a:lstStyle/>
-          <a:p>
-            <a:pPr algn="ctr" indent="0" marL="0">
-              <a:buNone/>
-            </a:pPr>
-            <a:r>
-              <a:rPr lang="en-US" sz="1600" b="1" dirty="0">
-                <a:solidFill>
-                  <a:srgbClr val="0D9488"/>
+              <a:t>s</a:t>
+            </a:r>
+            <a:endParaRPr lang="en-US" sz="900" dirty="0"/>
+          </a:p>
+        </p:txBody>
+      </p:sp>
+      <p:sp>
+        <p:nvSpPr>
+          <p:cNvPr id="35" name="Shape 33"/>
+          <p:cNvSpPr/>
+          <p:nvPr/>
+        </p:nvSpPr>
+        <p:spPr>
+          <a:xfrm>
+            <a:off x="2831592" y="4169664"/>
+            <a:ext cx="685800" cy="475488"/>
+          </a:xfrm>
+          <a:prstGeom prst="rect">
+            <a:avLst>
+              <a:gd name="adj" fmla="val 7692"/>
+            </a:avLst>
+          </a:prstGeom>
+          <a:solidFill>
+            <a:srgbClr val="FFFFFF"/>
+          </a:solidFill>
+          <a:ln w="12700">
+            <a:solidFill>
+              <a:srgbClr val="DB2777"/>
+            </a:solidFill>
+            <a:prstDash val="solid"/>
+          </a:ln>
+        </p:spPr>
+      </p:sp>
+      <p:sp>
+        <p:nvSpPr>
+          <p:cNvPr id="36" name="Text 34"/>
+          <p:cNvSpPr/>
+          <p:nvPr/>
+        </p:nvSpPr>
+        <p:spPr>
+          <a:xfrm>
+            <a:off x="2831592" y="4169664"/>
+            <a:ext cx="685800" cy="475488"/>
+          </a:xfrm>
+          <a:prstGeom prst="rect">
+            <a:avLst/>
+          </a:prstGeom>
+          <a:noFill/>
+          <a:ln/>
+        </p:spPr>
+        <p:txBody>
+          <a:bodyPr wrap="square" lIns="0" tIns="0" rIns="0" bIns="0" rtlCol="0" anchor="ctr"/>
+          <a:lstStyle/>
+          <a:p>
+            <a:pPr algn="ctr" indent="0" marL="0">
+              <a:buNone/>
+            </a:pPr>
+            <a:r>
+              <a:rPr lang="en-US" sz="900" b="1" dirty="0">
+                <a:solidFill>
+                  <a:srgbClr val="9D174D"/>
                 </a:solidFill>
                 <a:latin typeface="Trebuchet MS" pitchFamily="34" charset="0"/>
                 <a:ea typeface="Trebuchet MS" pitchFamily="34" charset="-122"/>
                 <a:cs typeface="Trebuchet MS" pitchFamily="34" charset="-120"/>
               </a:rPr>
-              <a:t>·</a:t>
-            </a:r>
-            <a:endParaRPr lang="en-US" sz="1600" dirty="0"/>
-          </a:p>
-        </p:txBody>
-      </p:sp>
-      <p:sp>
-        <p:nvSpPr>
-          <p:cNvPr id="32" name="Shape 30"/>
-          <p:cNvSpPr/>
-          <p:nvPr/>
-        </p:nvSpPr>
-        <p:spPr>
-          <a:xfrm>
-            <a:off x="4370832" y="3364992"/>
-            <a:ext cx="1645920" cy="475488"/>
+              <a:t>t</a:t>
+            </a:r>
+            <a:endParaRPr lang="en-US" sz="900" dirty="0"/>
+          </a:p>
+        </p:txBody>
+      </p:sp>
+      <p:sp>
+        <p:nvSpPr>
+          <p:cNvPr id="37" name="Shape 35"/>
+          <p:cNvSpPr/>
+          <p:nvPr/>
+        </p:nvSpPr>
+        <p:spPr>
+          <a:xfrm>
+            <a:off x="3639312" y="4169664"/>
+            <a:ext cx="685800" cy="475488"/>
           </a:xfrm>
           <a:prstGeom prst="rect">
             <a:avLst>
-              <a:gd name="adj" fmla="val 9615"/>
+              <a:gd name="adj" fmla="val 7692"/>
             </a:avLst>
           </a:prstGeom>
           <a:solidFill>
@@ -33950,104 +33827,131 @@
           </a:solidFill>
           <a:ln w="12700">
             <a:solidFill>
-              <a:srgbClr val="0D9488"/>
-            </a:solidFill>
-            <a:prstDash val="solid"/>
-          </a:ln>
-        </p:spPr>
-      </p:sp>
-      <p:sp>
-        <p:nvSpPr>
-          <p:cNvPr id="33" name="Text 31"/>
-          <p:cNvSpPr/>
-          <p:nvPr/>
-        </p:nvSpPr>
-        <p:spPr>
-          <a:xfrm>
-            <a:off x="4370832" y="3364992"/>
-            <a:ext cx="1645920" cy="475488"/>
-          </a:xfrm>
-          <a:prstGeom prst="rect">
-            <a:avLst/>
-          </a:prstGeom>
-          <a:noFill/>
-          <a:ln/>
-        </p:spPr>
-        <p:txBody>
-          <a:bodyPr wrap="square" lIns="0" tIns="0" rIns="0" bIns="0" rtlCol="0" anchor="ctr"/>
-          <a:lstStyle/>
-          <a:p>
-            <a:pPr algn="ctr" indent="0" marL="0">
-              <a:buNone/>
-            </a:pPr>
-            <a:r>
-              <a:rPr lang="en-US" sz="1400" b="1" dirty="0">
-                <a:solidFill>
-                  <a:srgbClr val="0D9488"/>
+              <a:srgbClr val="DB2777"/>
+            </a:solidFill>
+            <a:prstDash val="solid"/>
+          </a:ln>
+        </p:spPr>
+      </p:sp>
+      <p:sp>
+        <p:nvSpPr>
+          <p:cNvPr id="38" name="Text 36"/>
+          <p:cNvSpPr/>
+          <p:nvPr/>
+        </p:nvSpPr>
+        <p:spPr>
+          <a:xfrm>
+            <a:off x="3639312" y="4169664"/>
+            <a:ext cx="685800" cy="475488"/>
+          </a:xfrm>
+          <a:prstGeom prst="rect">
+            <a:avLst/>
+          </a:prstGeom>
+          <a:noFill/>
+          <a:ln/>
+        </p:spPr>
+        <p:txBody>
+          <a:bodyPr wrap="square" lIns="0" tIns="0" rIns="0" bIns="0" rtlCol="0" anchor="ctr"/>
+          <a:lstStyle/>
+          <a:p>
+            <a:pPr algn="ctr" indent="0" marL="0">
+              <a:buNone/>
+            </a:pPr>
+            <a:r>
+              <a:rPr lang="en-US" sz="900" b="1" dirty="0">
+                <a:solidFill>
+                  <a:srgbClr val="9D174D"/>
                 </a:solidFill>
                 <a:latin typeface="Trebuchet MS" pitchFamily="34" charset="0"/>
                 <a:ea typeface="Trebuchet MS" pitchFamily="34" charset="-122"/>
                 <a:cs typeface="Trebuchet MS" pitchFamily="34" charset="-120"/>
               </a:rPr>
-              <a:t>struc</a:t>
-            </a:r>
-            <a:endParaRPr lang="en-US" sz="1400" dirty="0"/>
-          </a:p>
-        </p:txBody>
-      </p:sp>
-      <p:sp>
-        <p:nvSpPr>
-          <p:cNvPr id="34" name="Text 32"/>
-          <p:cNvSpPr/>
-          <p:nvPr/>
-        </p:nvSpPr>
-        <p:spPr>
-          <a:xfrm>
-            <a:off x="6016752" y="3364992"/>
-            <a:ext cx="411480" cy="475488"/>
-          </a:xfrm>
-          <a:prstGeom prst="rect">
-            <a:avLst/>
-          </a:prstGeom>
-          <a:noFill/>
-          <a:ln/>
-        </p:spPr>
-        <p:txBody>
-          <a:bodyPr wrap="square" lIns="0" tIns="0" rIns="0" bIns="0" rtlCol="0" anchor="ctr"/>
-          <a:lstStyle/>
-          <a:p>
-            <a:pPr algn="ctr" indent="0" marL="0">
-              <a:buNone/>
-            </a:pPr>
-            <a:r>
-              <a:rPr lang="en-US" sz="1600" b="1" dirty="0">
-                <a:solidFill>
-                  <a:srgbClr val="0D9488"/>
+              <a:t>r</a:t>
+            </a:r>
+            <a:endParaRPr lang="en-US" sz="900" dirty="0"/>
+          </a:p>
+        </p:txBody>
+      </p:sp>
+      <p:sp>
+        <p:nvSpPr>
+          <p:cNvPr id="39" name="Shape 37"/>
+          <p:cNvSpPr/>
+          <p:nvPr/>
+        </p:nvSpPr>
+        <p:spPr>
+          <a:xfrm>
+            <a:off x="4447032" y="4169664"/>
+            <a:ext cx="685800" cy="475488"/>
+          </a:xfrm>
+          <a:prstGeom prst="rect">
+            <a:avLst>
+              <a:gd name="adj" fmla="val 7692"/>
+            </a:avLst>
+          </a:prstGeom>
+          <a:solidFill>
+            <a:srgbClr val="FFFFFF"/>
+          </a:solidFill>
+          <a:ln w="12700">
+            <a:solidFill>
+              <a:srgbClr val="DB2777"/>
+            </a:solidFill>
+            <a:prstDash val="solid"/>
+          </a:ln>
+        </p:spPr>
+      </p:sp>
+      <p:sp>
+        <p:nvSpPr>
+          <p:cNvPr id="40" name="Text 38"/>
+          <p:cNvSpPr/>
+          <p:nvPr/>
+        </p:nvSpPr>
+        <p:spPr>
+          <a:xfrm>
+            <a:off x="4447032" y="4169664"/>
+            <a:ext cx="685800" cy="475488"/>
+          </a:xfrm>
+          <a:prstGeom prst="rect">
+            <a:avLst/>
+          </a:prstGeom>
+          <a:noFill/>
+          <a:ln/>
+        </p:spPr>
+        <p:txBody>
+          <a:bodyPr wrap="square" lIns="0" tIns="0" rIns="0" bIns="0" rtlCol="0" anchor="ctr"/>
+          <a:lstStyle/>
+          <a:p>
+            <a:pPr algn="ctr" indent="0" marL="0">
+              <a:buNone/>
+            </a:pPr>
+            <a:r>
+              <a:rPr lang="en-US" sz="900" b="1" dirty="0">
+                <a:solidFill>
+                  <a:srgbClr val="9D174D"/>
                 </a:solidFill>
                 <a:latin typeface="Trebuchet MS" pitchFamily="34" charset="0"/>
                 <a:ea typeface="Trebuchet MS" pitchFamily="34" charset="-122"/>
                 <a:cs typeface="Trebuchet MS" pitchFamily="34" charset="-120"/>
               </a:rPr>
-              <a:t>·</a:t>
-            </a:r>
-            <a:endParaRPr lang="en-US" sz="1600" dirty="0"/>
-          </a:p>
-        </p:txBody>
-      </p:sp>
-      <p:sp>
-        <p:nvSpPr>
-          <p:cNvPr id="35" name="Shape 33"/>
-          <p:cNvSpPr/>
-          <p:nvPr/>
-        </p:nvSpPr>
-        <p:spPr>
-          <a:xfrm>
-            <a:off x="6428232" y="3364992"/>
-            <a:ext cx="1645920" cy="475488"/>
+              <a:t>u</a:t>
+            </a:r>
+            <a:endParaRPr lang="en-US" sz="900" dirty="0"/>
+          </a:p>
+        </p:txBody>
+      </p:sp>
+      <p:sp>
+        <p:nvSpPr>
+          <p:cNvPr id="41" name="Shape 39"/>
+          <p:cNvSpPr/>
+          <p:nvPr/>
+        </p:nvSpPr>
+        <p:spPr>
+          <a:xfrm>
+            <a:off x="5254752" y="4169664"/>
+            <a:ext cx="685800" cy="475488"/>
           </a:xfrm>
           <a:prstGeom prst="rect">
             <a:avLst>
-              <a:gd name="adj" fmla="val 9615"/>
+              <a:gd name="adj" fmla="val 7692"/>
             </a:avLst>
           </a:prstGeom>
           <a:solidFill>
@@ -34055,154 +33959,127 @@
           </a:solidFill>
           <a:ln w="12700">
             <a:solidFill>
-              <a:srgbClr val="0D9488"/>
-            </a:solidFill>
-            <a:prstDash val="solid"/>
-          </a:ln>
-        </p:spPr>
-      </p:sp>
-      <p:sp>
-        <p:nvSpPr>
-          <p:cNvPr id="36" name="Text 34"/>
-          <p:cNvSpPr/>
-          <p:nvPr/>
-        </p:nvSpPr>
-        <p:spPr>
-          <a:xfrm>
-            <a:off x="6428232" y="3364992"/>
-            <a:ext cx="1645920" cy="475488"/>
-          </a:xfrm>
-          <a:prstGeom prst="rect">
-            <a:avLst/>
-          </a:prstGeom>
-          <a:noFill/>
-          <a:ln/>
-        </p:spPr>
-        <p:txBody>
-          <a:bodyPr wrap="square" lIns="0" tIns="0" rIns="0" bIns="0" rtlCol="0" anchor="ctr"/>
-          <a:lstStyle/>
-          <a:p>
-            <a:pPr algn="ctr" indent="0" marL="0">
-              <a:buNone/>
-            </a:pPr>
-            <a:r>
-              <a:rPr lang="en-US" sz="1400" b="1" dirty="0">
-                <a:solidFill>
-                  <a:srgbClr val="0D9488"/>
+              <a:srgbClr val="DB2777"/>
+            </a:solidFill>
+            <a:prstDash val="solid"/>
+          </a:ln>
+        </p:spPr>
+      </p:sp>
+      <p:sp>
+        <p:nvSpPr>
+          <p:cNvPr id="42" name="Text 40"/>
+          <p:cNvSpPr/>
+          <p:nvPr/>
+        </p:nvSpPr>
+        <p:spPr>
+          <a:xfrm>
+            <a:off x="5254752" y="4169664"/>
+            <a:ext cx="685800" cy="475488"/>
+          </a:xfrm>
+          <a:prstGeom prst="rect">
+            <a:avLst/>
+          </a:prstGeom>
+          <a:noFill/>
+          <a:ln/>
+        </p:spPr>
+        <p:txBody>
+          <a:bodyPr wrap="square" lIns="0" tIns="0" rIns="0" bIns="0" rtlCol="0" anchor="ctr"/>
+          <a:lstStyle/>
+          <a:p>
+            <a:pPr algn="ctr" indent="0" marL="0">
+              <a:buNone/>
+            </a:pPr>
+            <a:r>
+              <a:rPr lang="en-US" sz="900" b="1" dirty="0">
+                <a:solidFill>
+                  <a:srgbClr val="9D174D"/>
                 </a:solidFill>
                 <a:latin typeface="Trebuchet MS" pitchFamily="34" charset="0"/>
                 <a:ea typeface="Trebuchet MS" pitchFamily="34" charset="-122"/>
                 <a:cs typeface="Trebuchet MS" pitchFamily="34" charset="-120"/>
               </a:rPr>
-              <a:t>tion</a:t>
-            </a:r>
-            <a:endParaRPr lang="en-US" sz="1400" dirty="0"/>
-          </a:p>
-        </p:txBody>
-      </p:sp>
-      <p:sp>
-        <p:nvSpPr>
-          <p:cNvPr id="37" name="Shape 35"/>
-          <p:cNvSpPr/>
-          <p:nvPr/>
-        </p:nvSpPr>
-        <p:spPr>
-          <a:xfrm>
-            <a:off x="365760" y="4096512"/>
-            <a:ext cx="1371600" cy="658368"/>
+              <a:t>c</a:t>
+            </a:r>
+            <a:endParaRPr lang="en-US" sz="900" dirty="0"/>
+          </a:p>
+        </p:txBody>
+      </p:sp>
+      <p:sp>
+        <p:nvSpPr>
+          <p:cNvPr id="43" name="Shape 41"/>
+          <p:cNvSpPr/>
+          <p:nvPr/>
+        </p:nvSpPr>
+        <p:spPr>
+          <a:xfrm>
+            <a:off x="6062472" y="4169664"/>
+            <a:ext cx="685800" cy="475488"/>
           </a:xfrm>
           <a:prstGeom prst="rect">
             <a:avLst>
-              <a:gd name="adj" fmla="val 8333"/>
+              <a:gd name="adj" fmla="val 7692"/>
             </a:avLst>
           </a:prstGeom>
           <a:solidFill>
-            <a:srgbClr val="E2E8F0"/>
-          </a:solidFill>
-          <a:ln w="12700">
-            <a:solidFill>
-              <a:srgbClr val="E2E8F0"/>
-            </a:solidFill>
-            <a:prstDash val="solid"/>
-          </a:ln>
-        </p:spPr>
-      </p:sp>
-      <p:sp>
-        <p:nvSpPr>
-          <p:cNvPr id="38" name="Text 36"/>
-          <p:cNvSpPr/>
-          <p:nvPr/>
-        </p:nvSpPr>
-        <p:spPr>
-          <a:xfrm>
-            <a:off x="365760" y="4096512"/>
-            <a:ext cx="1371600" cy="658368"/>
-          </a:xfrm>
-          <a:prstGeom prst="rect">
-            <a:avLst/>
-          </a:prstGeom>
-          <a:noFill/>
-          <a:ln/>
-        </p:spPr>
-        <p:txBody>
-          <a:bodyPr wrap="square" lIns="0" tIns="0" rIns="0" bIns="0" rtlCol="0" anchor="ctr"/>
-          <a:lstStyle/>
-          <a:p>
-            <a:pPr algn="ctr" indent="0" marL="0">
-              <a:buNone/>
-            </a:pPr>
-            <a:r>
-              <a:rPr lang="en-US" sz="1100" b="1" dirty="0">
-                <a:solidFill>
-                  <a:srgbClr val="475569"/>
+            <a:srgbClr val="FFFFFF"/>
+          </a:solidFill>
+          <a:ln w="12700">
+            <a:solidFill>
+              <a:srgbClr val="DB2777"/>
+            </a:solidFill>
+            <a:prstDash val="solid"/>
+          </a:ln>
+        </p:spPr>
+      </p:sp>
+      <p:sp>
+        <p:nvSpPr>
+          <p:cNvPr id="44" name="Text 42"/>
+          <p:cNvSpPr/>
+          <p:nvPr/>
+        </p:nvSpPr>
+        <p:spPr>
+          <a:xfrm>
+            <a:off x="6062472" y="4169664"/>
+            <a:ext cx="685800" cy="475488"/>
+          </a:xfrm>
+          <a:prstGeom prst="rect">
+            <a:avLst/>
+          </a:prstGeom>
+          <a:noFill/>
+          <a:ln/>
+        </p:spPr>
+        <p:txBody>
+          <a:bodyPr wrap="square" lIns="0" tIns="0" rIns="0" bIns="0" rtlCol="0" anchor="ctr"/>
+          <a:lstStyle/>
+          <a:p>
+            <a:pPr algn="ctr" indent="0" marL="0">
+              <a:buNone/>
+            </a:pPr>
+            <a:r>
+              <a:rPr lang="en-US" sz="900" b="1" dirty="0">
+                <a:solidFill>
+                  <a:srgbClr val="9D174D"/>
                 </a:solidFill>
                 <a:latin typeface="Trebuchet MS" pitchFamily="34" charset="0"/>
                 <a:ea typeface="Trebuchet MS" pitchFamily="34" charset="-122"/>
                 <a:cs typeface="Trebuchet MS" pitchFamily="34" charset="-120"/>
               </a:rPr>
-              <a:t>Phonemes</a:t>
-            </a:r>
-            <a:endParaRPr lang="en-US" sz="1100" dirty="0"/>
-          </a:p>
-        </p:txBody>
-      </p:sp>
-      <p:sp>
-        <p:nvSpPr>
-          <p:cNvPr id="39" name="Shape 37"/>
-          <p:cNvSpPr/>
-          <p:nvPr/>
-        </p:nvSpPr>
-        <p:spPr>
-          <a:xfrm>
-            <a:off x="1874520" y="4096512"/>
-            <a:ext cx="6903720" cy="658368"/>
-          </a:xfrm>
-          <a:prstGeom prst="rect">
-            <a:avLst>
-              <a:gd name="adj" fmla="val 8333"/>
-            </a:avLst>
-          </a:prstGeom>
-          <a:solidFill>
-            <a:srgbClr val="FCE7F3"/>
-          </a:solidFill>
-          <a:ln w="12700">
-            <a:solidFill>
-              <a:srgbClr val="DB2777"/>
-            </a:solidFill>
-            <a:prstDash val="solid"/>
-          </a:ln>
-        </p:spPr>
-      </p:sp>
-      <p:sp>
-        <p:nvSpPr>
-          <p:cNvPr id="40" name="Shape 38"/>
-          <p:cNvSpPr/>
-          <p:nvPr/>
-        </p:nvSpPr>
-        <p:spPr>
-          <a:xfrm>
-            <a:off x="1952244" y="4187952"/>
-            <a:ext cx="543652" cy="475488"/>
+              <a:t>t</a:t>
+            </a:r>
+            <a:endParaRPr lang="en-US" sz="900" dirty="0"/>
+          </a:p>
+        </p:txBody>
+      </p:sp>
+      <p:sp>
+        <p:nvSpPr>
+          <p:cNvPr id="45" name="Shape 43"/>
+          <p:cNvSpPr/>
+          <p:nvPr/>
+        </p:nvSpPr>
+        <p:spPr>
+          <a:xfrm>
+            <a:off x="6870192" y="4169664"/>
+            <a:ext cx="685800" cy="475488"/>
           </a:xfrm>
           <a:prstGeom prst="rect">
             <a:avLst>
@@ -34222,14 +34099,14 @@
       </p:sp>
       <p:sp>
         <p:nvSpPr>
-          <p:cNvPr id="41" name="Text 39"/>
-          <p:cNvSpPr/>
-          <p:nvPr/>
-        </p:nvSpPr>
-        <p:spPr>
-          <a:xfrm>
-            <a:off x="1952244" y="4187952"/>
-            <a:ext cx="543652" cy="475488"/>
+          <p:cNvPr id="46" name="Text 44"/>
+          <p:cNvSpPr/>
+          <p:nvPr/>
+        </p:nvSpPr>
+        <p:spPr>
+          <a:xfrm>
+            <a:off x="6870192" y="4169664"/>
+            <a:ext cx="685800" cy="475488"/>
           </a:xfrm>
           <a:prstGeom prst="rect">
             <a:avLst/>
@@ -34253,7 +34130,7 @@
                 <a:ea typeface="Trebuchet MS" pitchFamily="34" charset="-122"/>
                 <a:cs typeface="Trebuchet MS" pitchFamily="34" charset="-120"/>
               </a:rPr>
-              <a:t>c</a:t>
+              <a:t>u</a:t>
             </a:r>
             <a:endParaRPr lang="en-US" sz="900" dirty="0"/>
           </a:p>
@@ -34261,14 +34138,14 @@
       </p:sp>
       <p:sp>
         <p:nvSpPr>
-          <p:cNvPr id="42" name="Shape 40"/>
-          <p:cNvSpPr/>
-          <p:nvPr/>
-        </p:nvSpPr>
-        <p:spPr>
-          <a:xfrm>
-            <a:off x="2546188" y="4187952"/>
-            <a:ext cx="543652" cy="475488"/>
+          <p:cNvPr id="47" name="Shape 45"/>
+          <p:cNvSpPr/>
+          <p:nvPr/>
+        </p:nvSpPr>
+        <p:spPr>
+          <a:xfrm>
+            <a:off x="7677912" y="4169664"/>
+            <a:ext cx="685800" cy="475488"/>
           </a:xfrm>
           <a:prstGeom prst="rect">
             <a:avLst>
@@ -34288,14 +34165,14 @@
       </p:sp>
       <p:sp>
         <p:nvSpPr>
-          <p:cNvPr id="43" name="Text 41"/>
-          <p:cNvSpPr/>
-          <p:nvPr/>
-        </p:nvSpPr>
-        <p:spPr>
-          <a:xfrm>
-            <a:off x="2546188" y="4187952"/>
-            <a:ext cx="543652" cy="475488"/>
+          <p:cNvPr id="48" name="Text 46"/>
+          <p:cNvSpPr/>
+          <p:nvPr/>
+        </p:nvSpPr>
+        <p:spPr>
+          <a:xfrm>
+            <a:off x="7677912" y="4169664"/>
+            <a:ext cx="685800" cy="475488"/>
           </a:xfrm>
           <a:prstGeom prst="rect">
             <a:avLst/>
@@ -34319,601 +34196,7 @@
                 <a:ea typeface="Trebuchet MS" pitchFamily="34" charset="-122"/>
                 <a:cs typeface="Trebuchet MS" pitchFamily="34" charset="-120"/>
               </a:rPr>
-              <a:t>o</a:t>
-            </a:r>
-            <a:endParaRPr lang="en-US" sz="900" dirty="0"/>
-          </a:p>
-        </p:txBody>
-      </p:sp>
-      <p:sp>
-        <p:nvSpPr>
-          <p:cNvPr id="44" name="Shape 42"/>
-          <p:cNvSpPr/>
-          <p:nvPr/>
-        </p:nvSpPr>
-        <p:spPr>
-          <a:xfrm>
-            <a:off x="3140133" y="4187952"/>
-            <a:ext cx="543652" cy="475488"/>
-          </a:xfrm>
-          <a:prstGeom prst="rect">
-            <a:avLst>
-              <a:gd name="adj" fmla="val 7692"/>
-            </a:avLst>
-          </a:prstGeom>
-          <a:solidFill>
-            <a:srgbClr val="FFFFFF"/>
-          </a:solidFill>
-          <a:ln w="12700">
-            <a:solidFill>
-              <a:srgbClr val="DB2777"/>
-            </a:solidFill>
-            <a:prstDash val="solid"/>
-          </a:ln>
-        </p:spPr>
-      </p:sp>
-      <p:sp>
-        <p:nvSpPr>
-          <p:cNvPr id="45" name="Text 43"/>
-          <p:cNvSpPr/>
-          <p:nvPr/>
-        </p:nvSpPr>
-        <p:spPr>
-          <a:xfrm>
-            <a:off x="3140133" y="4187952"/>
-            <a:ext cx="543652" cy="475488"/>
-          </a:xfrm>
-          <a:prstGeom prst="rect">
-            <a:avLst/>
-          </a:prstGeom>
-          <a:noFill/>
-          <a:ln/>
-        </p:spPr>
-        <p:txBody>
-          <a:bodyPr wrap="square" lIns="0" tIns="0" rIns="0" bIns="0" rtlCol="0" anchor="ctr"/>
-          <a:lstStyle/>
-          <a:p>
-            <a:pPr algn="ctr" indent="0" marL="0">
-              <a:buNone/>
-            </a:pPr>
-            <a:r>
-              <a:rPr lang="en-US" sz="900" b="1" dirty="0">
-                <a:solidFill>
-                  <a:srgbClr val="9D174D"/>
-                </a:solidFill>
-                <a:latin typeface="Trebuchet MS" pitchFamily="34" charset="0"/>
-                <a:ea typeface="Trebuchet MS" pitchFamily="34" charset="-122"/>
-                <a:cs typeface="Trebuchet MS" pitchFamily="34" charset="-120"/>
-              </a:rPr>
-              <a:t>n</a:t>
-            </a:r>
-            <a:endParaRPr lang="en-US" sz="900" dirty="0"/>
-          </a:p>
-        </p:txBody>
-      </p:sp>
-      <p:sp>
-        <p:nvSpPr>
-          <p:cNvPr id="46" name="Shape 44"/>
-          <p:cNvSpPr/>
-          <p:nvPr/>
-        </p:nvSpPr>
-        <p:spPr>
-          <a:xfrm>
-            <a:off x="3734077" y="4187952"/>
-            <a:ext cx="543652" cy="475488"/>
-          </a:xfrm>
-          <a:prstGeom prst="rect">
-            <a:avLst>
-              <a:gd name="adj" fmla="val 7692"/>
-            </a:avLst>
-          </a:prstGeom>
-          <a:solidFill>
-            <a:srgbClr val="FFFFFF"/>
-          </a:solidFill>
-          <a:ln w="12700">
-            <a:solidFill>
-              <a:srgbClr val="DB2777"/>
-            </a:solidFill>
-            <a:prstDash val="solid"/>
-          </a:ln>
-        </p:spPr>
-      </p:sp>
-      <p:sp>
-        <p:nvSpPr>
-          <p:cNvPr id="47" name="Text 45"/>
-          <p:cNvSpPr/>
-          <p:nvPr/>
-        </p:nvSpPr>
-        <p:spPr>
-          <a:xfrm>
-            <a:off x="3734077" y="4187952"/>
-            <a:ext cx="543652" cy="475488"/>
-          </a:xfrm>
-          <a:prstGeom prst="rect">
-            <a:avLst/>
-          </a:prstGeom>
-          <a:noFill/>
-          <a:ln/>
-        </p:spPr>
-        <p:txBody>
-          <a:bodyPr wrap="square" lIns="0" tIns="0" rIns="0" bIns="0" rtlCol="0" anchor="ctr"/>
-          <a:lstStyle/>
-          <a:p>
-            <a:pPr algn="ctr" indent="0" marL="0">
-              <a:buNone/>
-            </a:pPr>
-            <a:r>
-              <a:rPr lang="en-US" sz="900" b="1" dirty="0">
-                <a:solidFill>
-                  <a:srgbClr val="9D174D"/>
-                </a:solidFill>
-                <a:latin typeface="Trebuchet MS" pitchFamily="34" charset="0"/>
-                <a:ea typeface="Trebuchet MS" pitchFamily="34" charset="-122"/>
-                <a:cs typeface="Trebuchet MS" pitchFamily="34" charset="-120"/>
-              </a:rPr>
-              <a:t>s</a:t>
-            </a:r>
-            <a:endParaRPr lang="en-US" sz="900" dirty="0"/>
-          </a:p>
-        </p:txBody>
-      </p:sp>
-      <p:sp>
-        <p:nvSpPr>
-          <p:cNvPr id="48" name="Shape 46"/>
-          <p:cNvSpPr/>
-          <p:nvPr/>
-        </p:nvSpPr>
-        <p:spPr>
-          <a:xfrm>
-            <a:off x="4328021" y="4187952"/>
-            <a:ext cx="543652" cy="475488"/>
-          </a:xfrm>
-          <a:prstGeom prst="rect">
-            <a:avLst>
-              <a:gd name="adj" fmla="val 7692"/>
-            </a:avLst>
-          </a:prstGeom>
-          <a:solidFill>
-            <a:srgbClr val="FFFFFF"/>
-          </a:solidFill>
-          <a:ln w="12700">
-            <a:solidFill>
-              <a:srgbClr val="DB2777"/>
-            </a:solidFill>
-            <a:prstDash val="solid"/>
-          </a:ln>
-        </p:spPr>
-      </p:sp>
-      <p:sp>
-        <p:nvSpPr>
-          <p:cNvPr id="49" name="Text 47"/>
-          <p:cNvSpPr/>
-          <p:nvPr/>
-        </p:nvSpPr>
-        <p:spPr>
-          <a:xfrm>
-            <a:off x="4328021" y="4187952"/>
-            <a:ext cx="543652" cy="475488"/>
-          </a:xfrm>
-          <a:prstGeom prst="rect">
-            <a:avLst/>
-          </a:prstGeom>
-          <a:noFill/>
-          <a:ln/>
-        </p:spPr>
-        <p:txBody>
-          <a:bodyPr wrap="square" lIns="0" tIns="0" rIns="0" bIns="0" rtlCol="0" anchor="ctr"/>
-          <a:lstStyle/>
-          <a:p>
-            <a:pPr algn="ctr" indent="0" marL="0">
-              <a:buNone/>
-            </a:pPr>
-            <a:r>
-              <a:rPr lang="en-US" sz="900" b="1" dirty="0">
-                <a:solidFill>
-                  <a:srgbClr val="9D174D"/>
-                </a:solidFill>
-                <a:latin typeface="Trebuchet MS" pitchFamily="34" charset="0"/>
-                <a:ea typeface="Trebuchet MS" pitchFamily="34" charset="-122"/>
-                <a:cs typeface="Trebuchet MS" pitchFamily="34" charset="-120"/>
-              </a:rPr>
-              <a:t>t</a:t>
-            </a:r>
-            <a:endParaRPr lang="en-US" sz="900" dirty="0"/>
-          </a:p>
-        </p:txBody>
-      </p:sp>
-      <p:sp>
-        <p:nvSpPr>
-          <p:cNvPr id="50" name="Shape 48"/>
-          <p:cNvSpPr/>
-          <p:nvPr/>
-        </p:nvSpPr>
-        <p:spPr>
-          <a:xfrm>
-            <a:off x="4921966" y="4187952"/>
-            <a:ext cx="543652" cy="475488"/>
-          </a:xfrm>
-          <a:prstGeom prst="rect">
-            <a:avLst>
-              <a:gd name="adj" fmla="val 7692"/>
-            </a:avLst>
-          </a:prstGeom>
-          <a:solidFill>
-            <a:srgbClr val="FFFFFF"/>
-          </a:solidFill>
-          <a:ln w="12700">
-            <a:solidFill>
-              <a:srgbClr val="DB2777"/>
-            </a:solidFill>
-            <a:prstDash val="solid"/>
-          </a:ln>
-        </p:spPr>
-      </p:sp>
-      <p:sp>
-        <p:nvSpPr>
-          <p:cNvPr id="51" name="Text 49"/>
-          <p:cNvSpPr/>
-          <p:nvPr/>
-        </p:nvSpPr>
-        <p:spPr>
-          <a:xfrm>
-            <a:off x="4921966" y="4187952"/>
-            <a:ext cx="543652" cy="475488"/>
-          </a:xfrm>
-          <a:prstGeom prst="rect">
-            <a:avLst/>
-          </a:prstGeom>
-          <a:noFill/>
-          <a:ln/>
-        </p:spPr>
-        <p:txBody>
-          <a:bodyPr wrap="square" lIns="0" tIns="0" rIns="0" bIns="0" rtlCol="0" anchor="ctr"/>
-          <a:lstStyle/>
-          <a:p>
-            <a:pPr algn="ctr" indent="0" marL="0">
-              <a:buNone/>
-            </a:pPr>
-            <a:r>
-              <a:rPr lang="en-US" sz="900" b="1" dirty="0">
-                <a:solidFill>
-                  <a:srgbClr val="9D174D"/>
-                </a:solidFill>
-                <a:latin typeface="Trebuchet MS" pitchFamily="34" charset="0"/>
-                <a:ea typeface="Trebuchet MS" pitchFamily="34" charset="-122"/>
-                <a:cs typeface="Trebuchet MS" pitchFamily="34" charset="-120"/>
-              </a:rPr>
-              <a:t>r</a:t>
-            </a:r>
-            <a:endParaRPr lang="en-US" sz="900" dirty="0"/>
-          </a:p>
-        </p:txBody>
-      </p:sp>
-      <p:sp>
-        <p:nvSpPr>
-          <p:cNvPr id="52" name="Shape 50"/>
-          <p:cNvSpPr/>
-          <p:nvPr/>
-        </p:nvSpPr>
-        <p:spPr>
-          <a:xfrm>
-            <a:off x="5515910" y="4187952"/>
-            <a:ext cx="543652" cy="475488"/>
-          </a:xfrm>
-          <a:prstGeom prst="rect">
-            <a:avLst>
-              <a:gd name="adj" fmla="val 7692"/>
-            </a:avLst>
-          </a:prstGeom>
-          <a:solidFill>
-            <a:srgbClr val="FFFFFF"/>
-          </a:solidFill>
-          <a:ln w="12700">
-            <a:solidFill>
-              <a:srgbClr val="DB2777"/>
-            </a:solidFill>
-            <a:prstDash val="solid"/>
-          </a:ln>
-        </p:spPr>
-      </p:sp>
-      <p:sp>
-        <p:nvSpPr>
-          <p:cNvPr id="53" name="Text 51"/>
-          <p:cNvSpPr/>
-          <p:nvPr/>
-        </p:nvSpPr>
-        <p:spPr>
-          <a:xfrm>
-            <a:off x="5515910" y="4187952"/>
-            <a:ext cx="543652" cy="475488"/>
-          </a:xfrm>
-          <a:prstGeom prst="rect">
-            <a:avLst/>
-          </a:prstGeom>
-          <a:noFill/>
-          <a:ln/>
-        </p:spPr>
-        <p:txBody>
-          <a:bodyPr wrap="square" lIns="0" tIns="0" rIns="0" bIns="0" rtlCol="0" anchor="ctr"/>
-          <a:lstStyle/>
-          <a:p>
-            <a:pPr algn="ctr" indent="0" marL="0">
-              <a:buNone/>
-            </a:pPr>
-            <a:r>
-              <a:rPr lang="en-US" sz="900" b="1" dirty="0">
-                <a:solidFill>
-                  <a:srgbClr val="9D174D"/>
-                </a:solidFill>
-                <a:latin typeface="Trebuchet MS" pitchFamily="34" charset="0"/>
-                <a:ea typeface="Trebuchet MS" pitchFamily="34" charset="-122"/>
-                <a:cs typeface="Trebuchet MS" pitchFamily="34" charset="-120"/>
-              </a:rPr>
-              <a:t>u</a:t>
-            </a:r>
-            <a:endParaRPr lang="en-US" sz="900" dirty="0"/>
-          </a:p>
-        </p:txBody>
-      </p:sp>
-      <p:sp>
-        <p:nvSpPr>
-          <p:cNvPr id="54" name="Shape 52"/>
-          <p:cNvSpPr/>
-          <p:nvPr/>
-        </p:nvSpPr>
-        <p:spPr>
-          <a:xfrm>
-            <a:off x="6109855" y="4187952"/>
-            <a:ext cx="543652" cy="475488"/>
-          </a:xfrm>
-          <a:prstGeom prst="rect">
-            <a:avLst>
-              <a:gd name="adj" fmla="val 7692"/>
-            </a:avLst>
-          </a:prstGeom>
-          <a:solidFill>
-            <a:srgbClr val="FFFFFF"/>
-          </a:solidFill>
-          <a:ln w="12700">
-            <a:solidFill>
-              <a:srgbClr val="DB2777"/>
-            </a:solidFill>
-            <a:prstDash val="solid"/>
-          </a:ln>
-        </p:spPr>
-      </p:sp>
-      <p:sp>
-        <p:nvSpPr>
-          <p:cNvPr id="55" name="Text 53"/>
-          <p:cNvSpPr/>
-          <p:nvPr/>
-        </p:nvSpPr>
-        <p:spPr>
-          <a:xfrm>
-            <a:off x="6109855" y="4187952"/>
-            <a:ext cx="543652" cy="475488"/>
-          </a:xfrm>
-          <a:prstGeom prst="rect">
-            <a:avLst/>
-          </a:prstGeom>
-          <a:noFill/>
-          <a:ln/>
-        </p:spPr>
-        <p:txBody>
-          <a:bodyPr wrap="square" lIns="0" tIns="0" rIns="0" bIns="0" rtlCol="0" anchor="ctr"/>
-          <a:lstStyle/>
-          <a:p>
-            <a:pPr algn="ctr" indent="0" marL="0">
-              <a:buNone/>
-            </a:pPr>
-            <a:r>
-              <a:rPr lang="en-US" sz="900" b="1" dirty="0">
-                <a:solidFill>
-                  <a:srgbClr val="9D174D"/>
-                </a:solidFill>
-                <a:latin typeface="Trebuchet MS" pitchFamily="34" charset="0"/>
-                <a:ea typeface="Trebuchet MS" pitchFamily="34" charset="-122"/>
-                <a:cs typeface="Trebuchet MS" pitchFamily="34" charset="-120"/>
-              </a:rPr>
-              <a:t>c</a:t>
-            </a:r>
-            <a:endParaRPr lang="en-US" sz="900" dirty="0"/>
-          </a:p>
-        </p:txBody>
-      </p:sp>
-      <p:sp>
-        <p:nvSpPr>
-          <p:cNvPr id="56" name="Shape 54"/>
-          <p:cNvSpPr/>
-          <p:nvPr/>
-        </p:nvSpPr>
-        <p:spPr>
-          <a:xfrm>
-            <a:off x="6703799" y="4187952"/>
-            <a:ext cx="543652" cy="475488"/>
-          </a:xfrm>
-          <a:prstGeom prst="rect">
-            <a:avLst>
-              <a:gd name="adj" fmla="val 7692"/>
-            </a:avLst>
-          </a:prstGeom>
-          <a:solidFill>
-            <a:srgbClr val="FFFFFF"/>
-          </a:solidFill>
-          <a:ln w="12700">
-            <a:solidFill>
-              <a:srgbClr val="DB2777"/>
-            </a:solidFill>
-            <a:prstDash val="solid"/>
-          </a:ln>
-        </p:spPr>
-      </p:sp>
-      <p:sp>
-        <p:nvSpPr>
-          <p:cNvPr id="57" name="Text 55"/>
-          <p:cNvSpPr/>
-          <p:nvPr/>
-        </p:nvSpPr>
-        <p:spPr>
-          <a:xfrm>
-            <a:off x="6703799" y="4187952"/>
-            <a:ext cx="543652" cy="475488"/>
-          </a:xfrm>
-          <a:prstGeom prst="rect">
-            <a:avLst/>
-          </a:prstGeom>
-          <a:noFill/>
-          <a:ln/>
-        </p:spPr>
-        <p:txBody>
-          <a:bodyPr wrap="square" lIns="0" tIns="0" rIns="0" bIns="0" rtlCol="0" anchor="ctr"/>
-          <a:lstStyle/>
-          <a:p>
-            <a:pPr algn="ctr" indent="0" marL="0">
-              <a:buNone/>
-            </a:pPr>
-            <a:r>
-              <a:rPr lang="en-US" sz="900" b="1" dirty="0">
-                <a:solidFill>
-                  <a:srgbClr val="9D174D"/>
-                </a:solidFill>
-                <a:latin typeface="Trebuchet MS" pitchFamily="34" charset="0"/>
-                <a:ea typeface="Trebuchet MS" pitchFamily="34" charset="-122"/>
-                <a:cs typeface="Trebuchet MS" pitchFamily="34" charset="-120"/>
-              </a:rPr>
-              <a:t>t</a:t>
-            </a:r>
-            <a:endParaRPr lang="en-US" sz="900" dirty="0"/>
-          </a:p>
-        </p:txBody>
-      </p:sp>
-      <p:sp>
-        <p:nvSpPr>
-          <p:cNvPr id="58" name="Shape 56"/>
-          <p:cNvSpPr/>
-          <p:nvPr/>
-        </p:nvSpPr>
-        <p:spPr>
-          <a:xfrm>
-            <a:off x="7297743" y="4187952"/>
-            <a:ext cx="543652" cy="475488"/>
-          </a:xfrm>
-          <a:prstGeom prst="rect">
-            <a:avLst>
-              <a:gd name="adj" fmla="val 7692"/>
-            </a:avLst>
-          </a:prstGeom>
-          <a:solidFill>
-            <a:srgbClr val="FFFFFF"/>
-          </a:solidFill>
-          <a:ln w="12700">
-            <a:solidFill>
-              <a:srgbClr val="DB2777"/>
-            </a:solidFill>
-            <a:prstDash val="solid"/>
-          </a:ln>
-        </p:spPr>
-      </p:sp>
-      <p:sp>
-        <p:nvSpPr>
-          <p:cNvPr id="59" name="Text 57"/>
-          <p:cNvSpPr/>
-          <p:nvPr/>
-        </p:nvSpPr>
-        <p:spPr>
-          <a:xfrm>
-            <a:off x="7297743" y="4187952"/>
-            <a:ext cx="543652" cy="475488"/>
-          </a:xfrm>
-          <a:prstGeom prst="rect">
-            <a:avLst/>
-          </a:prstGeom>
-          <a:noFill/>
-          <a:ln/>
-        </p:spPr>
-        <p:txBody>
-          <a:bodyPr wrap="square" lIns="0" tIns="0" rIns="0" bIns="0" rtlCol="0" anchor="ctr"/>
-          <a:lstStyle/>
-          <a:p>
-            <a:pPr algn="ctr" indent="0" marL="0">
-              <a:buNone/>
-            </a:pPr>
-            <a:r>
-              <a:rPr lang="en-US" sz="900" b="1" dirty="0">
-                <a:solidFill>
-                  <a:srgbClr val="9D174D"/>
-                </a:solidFill>
-                <a:latin typeface="Trebuchet MS" pitchFamily="34" charset="0"/>
-                <a:ea typeface="Trebuchet MS" pitchFamily="34" charset="-122"/>
-                <a:cs typeface="Trebuchet MS" pitchFamily="34" charset="-120"/>
-              </a:rPr>
-              <a:t>io</a:t>
-            </a:r>
-            <a:endParaRPr lang="en-US" sz="900" dirty="0"/>
-          </a:p>
-        </p:txBody>
-      </p:sp>
-      <p:sp>
-        <p:nvSpPr>
-          <p:cNvPr id="60" name="Shape 58"/>
-          <p:cNvSpPr/>
-          <p:nvPr/>
-        </p:nvSpPr>
-        <p:spPr>
-          <a:xfrm>
-            <a:off x="7891688" y="4187952"/>
-            <a:ext cx="543652" cy="475488"/>
-          </a:xfrm>
-          <a:prstGeom prst="rect">
-            <a:avLst>
-              <a:gd name="adj" fmla="val 7692"/>
-            </a:avLst>
-          </a:prstGeom>
-          <a:solidFill>
-            <a:srgbClr val="FFFFFF"/>
-          </a:solidFill>
-          <a:ln w="12700">
-            <a:solidFill>
-              <a:srgbClr val="DB2777"/>
-            </a:solidFill>
-            <a:prstDash val="solid"/>
-          </a:ln>
-        </p:spPr>
-      </p:sp>
-      <p:sp>
-        <p:nvSpPr>
-          <p:cNvPr id="61" name="Text 59"/>
-          <p:cNvSpPr/>
-          <p:nvPr/>
-        </p:nvSpPr>
-        <p:spPr>
-          <a:xfrm>
-            <a:off x="7891688" y="4187952"/>
-            <a:ext cx="543652" cy="475488"/>
-          </a:xfrm>
-          <a:prstGeom prst="rect">
-            <a:avLst/>
-          </a:prstGeom>
-          <a:noFill/>
-          <a:ln/>
-        </p:spPr>
-        <p:txBody>
-          <a:bodyPr wrap="square" lIns="0" tIns="0" rIns="0" bIns="0" rtlCol="0" anchor="ctr"/>
-          <a:lstStyle/>
-          <a:p>
-            <a:pPr algn="ctr" indent="0" marL="0">
-              <a:buNone/>
-            </a:pPr>
-            <a:r>
-              <a:rPr lang="en-US" sz="900" b="1" dirty="0">
-                <a:solidFill>
-                  <a:srgbClr val="9D174D"/>
-                </a:solidFill>
-                <a:latin typeface="Trebuchet MS" pitchFamily="34" charset="0"/>
-                <a:ea typeface="Trebuchet MS" pitchFamily="34" charset="-122"/>
-                <a:cs typeface="Trebuchet MS" pitchFamily="34" charset="-120"/>
-              </a:rPr>
-              <a:t>n</a:t>
+              <a:t>re</a:t>
             </a:r>
             <a:endParaRPr lang="en-US" sz="900" dirty="0"/>
           </a:p>
@@ -36803,7 +36086,7 @@
                 <a:ea typeface="Trebuchet MS" pitchFamily="34" charset="-122"/>
                 <a:cs typeface="Trebuchet MS" pitchFamily="34" charset="-120"/>
               </a:rPr>
-              <a:t>-ure</a:t>
+              <a:t>-ion</a:t>
             </a:r>
             <a:endParaRPr lang="en-US" sz="1300" dirty="0"/>
           </a:p>
@@ -36956,7 +36239,7 @@
                 <a:ea typeface="Trebuchet MS" pitchFamily="34" charset="-122"/>
                 <a:cs typeface="Trebuchet MS" pitchFamily="34" charset="-120"/>
               </a:rPr>
-              <a:t>-ion</a:t>
+              <a:t>-ure</a:t>
             </a:r>
             <a:endParaRPr lang="en-US" sz="1300" dirty="0"/>
           </a:p>
@@ -37173,7 +36456,7 @@
                 <a:ea typeface="Trebuchet MS" pitchFamily="34" charset="-122"/>
                 <a:cs typeface="Trebuchet MS" pitchFamily="34" charset="-120"/>
               </a:rPr>
-              <a:t>re-</a:t>
+              <a:t>ob-</a:t>
             </a:r>
             <a:endParaRPr lang="en-US" sz="1300" dirty="0"/>
           </a:p>
@@ -37326,7 +36609,7 @@
                 <a:ea typeface="Trebuchet MS" pitchFamily="34" charset="-122"/>
                 <a:cs typeface="Trebuchet MS" pitchFamily="34" charset="-120"/>
               </a:rPr>
-              <a:t>ob-</a:t>
+              <a:t>re-</a:t>
             </a:r>
             <a:endParaRPr lang="en-US" sz="1300" dirty="0"/>
           </a:p>
@@ -37652,7 +36935,7 @@
                 <a:ea typeface="Trebuchet MS" pitchFamily="34" charset="-122"/>
                 <a:cs typeface="Trebuchet MS" pitchFamily="34" charset="-120"/>
               </a:rPr>
-              <a:t>destruct</a:t>
+              <a:t>instruct</a:t>
             </a:r>
             <a:endParaRPr lang="en-US" sz="1200" dirty="0"/>
           </a:p>
@@ -37718,7 +37001,7 @@
                 <a:ea typeface="Trebuchet MS" pitchFamily="34" charset="-122"/>
                 <a:cs typeface="Trebuchet MS" pitchFamily="34" charset="-120"/>
               </a:rPr>
-              <a:t>instruct</a:t>
+              <a:t>destruction</a:t>
             </a:r>
             <a:endParaRPr lang="en-US" sz="1200" dirty="0"/>
           </a:p>
@@ -37784,7 +37067,7 @@
                 <a:ea typeface="Trebuchet MS" pitchFamily="34" charset="-122"/>
                 <a:cs typeface="Trebuchet MS" pitchFamily="34" charset="-120"/>
               </a:rPr>
-              <a:t>instructor</a:t>
+              <a:t>instruction</a:t>
             </a:r>
             <a:endParaRPr lang="en-US" sz="1200" dirty="0"/>
           </a:p>
@@ -37982,7 +37265,7 @@
                 <a:ea typeface="Trebuchet MS" pitchFamily="34" charset="-122"/>
                 <a:cs typeface="Trebuchet MS" pitchFamily="34" charset="-120"/>
               </a:rPr>
-              <a:t>destructive</a:t>
+              <a:t>constructor</a:t>
             </a:r>
             <a:endParaRPr lang="en-US" sz="1200" dirty="0"/>
           </a:p>
@@ -39309,7 +38592,7 @@
                 <a:ea typeface="Calibri" pitchFamily="34" charset="-122"/>
                 <a:cs typeface="Calibri" pitchFamily="34" charset="-120"/>
               </a:rPr>
-              <a:t>2.  The word 'instruct' means to tear something down.</a:t>
+              <a:t>2.  The word 'instruct' means to knock something down.</a:t>
             </a:r>
             <a:endParaRPr lang="en-US" sz="1300" dirty="0"/>
           </a:p>
@@ -39448,7 +38731,7 @@
                 <a:ea typeface="Calibri" pitchFamily="34" charset="-122"/>
                 <a:cs typeface="Calibri" pitchFamily="34" charset="-120"/>
               </a:rPr>
-              <a:t>3.  A structure is something that has been built or arranged in a particular way.</a:t>
+              <a:t>3.  The word 'obstruct' contains the root 'struct'.</a:t>
             </a:r>
             <a:endParaRPr lang="en-US" sz="1300" dirty="0"/>
           </a:p>
@@ -39587,7 +38870,7 @@
                 <a:ea typeface="Calibri" pitchFamily="34" charset="-122"/>
                 <a:cs typeface="Calibri" pitchFamily="34" charset="-120"/>
               </a:rPr>
-              <a:t>4.  The word 'reconstruct' contains the prefix 're-', meaning again.</a:t>
+              <a:t>4.  A structure is something that has been built or arranged in a particular way.</a:t>
             </a:r>
             <a:endParaRPr lang="en-US" sz="1300" dirty="0"/>
           </a:p>
@@ -39726,7 +39009,7 @@
                 <a:ea typeface="Calibri" pitchFamily="34" charset="-122"/>
                 <a:cs typeface="Calibri" pitchFamily="34" charset="-120"/>
               </a:rPr>
-              <a:t>5.  The root 'struct' is found in the word 'street' because streets are long.</a:t>
+              <a:t>5.  The root 'struct' originally came from Greek.</a:t>
             </a:r>
             <a:endParaRPr lang="en-US" sz="1300" dirty="0"/>
           </a:p>
@@ -40497,7 +39780,7 @@
                 <a:ea typeface="Trebuchet MS" pitchFamily="34" charset="-122"/>
                 <a:cs typeface="Trebuchet MS" pitchFamily="34" charset="-120"/>
               </a:rPr>
-              <a:t>destruct</a:t>
+              <a:t>instruct</a:t>
             </a:r>
             <a:endParaRPr lang="en-US" sz="1300" dirty="0"/>
           </a:p>
@@ -40563,7 +39846,7 @@
                 <a:ea typeface="Trebuchet MS" pitchFamily="34" charset="-122"/>
                 <a:cs typeface="Trebuchet MS" pitchFamily="34" charset="-120"/>
               </a:rPr>
-              <a:t>instruct</a:t>
+              <a:t>destruction</a:t>
             </a:r>
             <a:endParaRPr lang="en-US" sz="1300" dirty="0"/>
           </a:p>
@@ -40629,7 +39912,7 @@
                 <a:ea typeface="Trebuchet MS" pitchFamily="34" charset="-122"/>
                 <a:cs typeface="Trebuchet MS" pitchFamily="34" charset="-120"/>
               </a:rPr>
-              <a:t>instructor</a:t>
+              <a:t>instruction</a:t>
             </a:r>
             <a:endParaRPr lang="en-US" sz="1300" dirty="0"/>
           </a:p>
@@ -41482,7 +40765,7 @@
                 <a:ea typeface="Trebuchet MS" pitchFamily="34" charset="-122"/>
                 <a:cs typeface="Trebuchet MS" pitchFamily="34" charset="-120"/>
               </a:rPr>
-              <a:t>-ure</a:t>
+              <a:t>-ion</a:t>
             </a:r>
             <a:endParaRPr lang="en-US" sz="1300" dirty="0"/>
           </a:p>
@@ -41635,7 +40918,7 @@
                 <a:ea typeface="Trebuchet MS" pitchFamily="34" charset="-122"/>
                 <a:cs typeface="Trebuchet MS" pitchFamily="34" charset="-120"/>
               </a:rPr>
-              <a:t>-ion</a:t>
+              <a:t>-ure</a:t>
             </a:r>
             <a:endParaRPr lang="en-US" sz="1300" dirty="0"/>
           </a:p>
@@ -41852,7 +41135,7 @@
                 <a:ea typeface="Trebuchet MS" pitchFamily="34" charset="-122"/>
                 <a:cs typeface="Trebuchet MS" pitchFamily="34" charset="-120"/>
               </a:rPr>
-              <a:t>re-</a:t>
+              <a:t>ob-</a:t>
             </a:r>
             <a:endParaRPr lang="en-US" sz="1300" dirty="0"/>
           </a:p>
@@ -42005,7 +41288,7 @@
                 <a:ea typeface="Trebuchet MS" pitchFamily="34" charset="-122"/>
                 <a:cs typeface="Trebuchet MS" pitchFamily="34" charset="-120"/>
               </a:rPr>
-              <a:t>ob-</a:t>
+              <a:t>re-</a:t>
             </a:r>
             <a:endParaRPr lang="en-US" sz="1300" dirty="0"/>
           </a:p>
@@ -42430,7 +41713,7 @@
                 <a:ea typeface="Trebuchet MS" pitchFamily="34" charset="-122"/>
                 <a:cs typeface="Trebuchet MS" pitchFamily="34" charset="-120"/>
               </a:rPr>
-              <a:t>-ure</a:t>
+              <a:t>-ion</a:t>
             </a:r>
             <a:endParaRPr lang="en-US" sz="1300" dirty="0"/>
           </a:p>
@@ -43005,7 +42288,7 @@
                 <a:ea typeface="Calibri" pitchFamily="34" charset="-122"/>
                 <a:cs typeface="Calibri" pitchFamily="34" charset="-120"/>
               </a:rPr>
-              <a:t>To build something again after it has been damaged or destroyed.</a:t>
+              <a:t>To build something again after it has been damaged or taken apart.</a:t>
             </a:r>
             <a:endParaRPr lang="en-US" sz="1200" dirty="0"/>
           </a:p>
@@ -43144,7 +42427,7 @@
                 <a:ea typeface="Calibri" pitchFamily="34" charset="-122"/>
                 <a:cs typeface="Calibri" pitchFamily="34" charset="-120"/>
               </a:rPr>
-              <a:t>A person who teaches or shows others how to do something.</a:t>
+              <a:t>A set of steps or directions that tell you how to do something.</a:t>
             </a:r>
             <a:endParaRPr lang="en-US" sz="1200" dirty="0"/>
           </a:p>
@@ -43217,7 +42500,7 @@
                 <a:ea typeface="Trebuchet MS" pitchFamily="34" charset="-122"/>
                 <a:cs typeface="Trebuchet MS" pitchFamily="34" charset="-120"/>
               </a:rPr>
-              <a:t>destruct</a:t>
+              <a:t>instruct</a:t>
             </a:r>
             <a:endParaRPr lang="en-US" sz="1200" dirty="0"/>
           </a:p>
@@ -43283,7 +42566,7 @@
                 <a:ea typeface="Calibri" pitchFamily="34" charset="-122"/>
                 <a:cs typeface="Calibri" pitchFamily="34" charset="-120"/>
               </a:rPr>
-              <a:t>To teach or give directions to someone about how to do something.</a:t>
+              <a:t>The act of breaking something down or ruining it completely.</a:t>
             </a:r>
             <a:endParaRPr lang="en-US" sz="1200" dirty="0"/>
           </a:p>
@@ -43356,7 +42639,7 @@
                 <a:ea typeface="Trebuchet MS" pitchFamily="34" charset="-122"/>
                 <a:cs typeface="Trebuchet MS" pitchFamily="34" charset="-120"/>
               </a:rPr>
-              <a:t>instruct</a:t>
+              <a:t>destruction</a:t>
             </a:r>
             <a:endParaRPr lang="en-US" sz="1200" dirty="0"/>
           </a:p>
@@ -43495,7 +42778,7 @@
                 <a:ea typeface="Trebuchet MS" pitchFamily="34" charset="-122"/>
                 <a:cs typeface="Trebuchet MS" pitchFamily="34" charset="-120"/>
               </a:rPr>
-              <a:t>instructor</a:t>
+              <a:t>instruction</a:t>
             </a:r>
             <a:endParaRPr lang="en-US" sz="1200" dirty="0"/>
           </a:p>
@@ -43561,7 +42844,7 @@
                 <a:ea typeface="Calibri" pitchFamily="34" charset="-122"/>
                 <a:cs typeface="Calibri" pitchFamily="34" charset="-120"/>
               </a:rPr>
-              <a:t>To break apart or destroy something that has been built.</a:t>
+              <a:t>To teach or give someone directions on how to do something.</a:t>
             </a:r>
             <a:endParaRPr lang="en-US" sz="1200" dirty="0"/>
           </a:p>
@@ -43839,7 +43122,7 @@
                 <a:ea typeface="Calibri" pitchFamily="34" charset="-122"/>
                 <a:cs typeface="Calibri" pitchFamily="34" charset="-120"/>
               </a:rPr>
-              <a:t>The way something is built or organised, like the framework of a building.</a:t>
+              <a:t>The way something is built or organised, like the frame of a house.</a:t>
             </a:r>
             <a:endParaRPr lang="en-US" sz="1200" dirty="0"/>
           </a:p>
@@ -44334,7 +43617,7 @@
                 <a:ea typeface="Calibri" pitchFamily="34" charset="-122"/>
                 <a:cs typeface="Calibri" pitchFamily="34" charset="-120"/>
               </a:rPr>
-              <a:t>The engineers worked hard to construct a new bridge over the river.</a:t>
+              <a:t>The engineer had to construct a new bridge across the river after the old one was damaged.</a:t>
             </a:r>
             <a:endParaRPr lang="en-US" sz="1500" dirty="0"/>
           </a:p>

--- a/output/wordlabs-struct-3day.pptx
+++ b/output/wordlabs-struct-3day.pptx
@@ -6040,7 +6040,7 @@
                 <a:ea typeface="Calibri" pitchFamily="34" charset="-122"/>
                 <a:cs typeface="Calibri" pitchFamily="34" charset="-120"/>
               </a:rPr>
-              <a:t>The builder used careful </a:t>
+              <a:t>The swimming </a:t>
             </a:r>
             <a:pPr algn="l" indent="0" marL="0">
               <a:buNone/>
@@ -6057,7 +6057,7 @@
                 <a:ea typeface="Calibri" pitchFamily="34" charset="-122"/>
                 <a:cs typeface="Calibri" pitchFamily="34" charset="-120"/>
               </a:rPr>
-              <a:t>instruction</a:t>
+              <a:t>instructor</a:t>
             </a:r>
             <a:pPr algn="l" indent="0" marL="0">
               <a:buNone/>
@@ -6071,7 +6071,7 @@
                 <a:ea typeface="Calibri" pitchFamily="34" charset="-122"/>
                 <a:cs typeface="Calibri" pitchFamily="34" charset="-120"/>
               </a:rPr>
-              <a:t> to </a:t>
+              <a:t> gave </a:t>
             </a:r>
             <a:pPr algn="l" indent="0" marL="0">
               <a:buNone/>
@@ -6088,7 +6088,7 @@
                 <a:ea typeface="Calibri" pitchFamily="34" charset="-122"/>
                 <a:cs typeface="Calibri" pitchFamily="34" charset="-120"/>
               </a:rPr>
-              <a:t>construct</a:t>
+              <a:t>constructive</a:t>
             </a:r>
             <a:pPr algn="l" indent="0" marL="0">
               <a:buNone/>
@@ -6102,7 +6102,7 @@
                 <a:ea typeface="Calibri" pitchFamily="34" charset="-122"/>
                 <a:cs typeface="Calibri" pitchFamily="34" charset="-120"/>
               </a:rPr>
-              <a:t> the new school hall.</a:t>
+              <a:t> feedback to help the young athletes improve their technique.</a:t>
             </a:r>
             <a:endParaRPr lang="en-US" sz="1800" dirty="0"/>
           </a:p>
@@ -6257,7 +6257,7 @@
                 <a:ea typeface="Trebuchet MS" pitchFamily="34" charset="-122"/>
                 <a:cs typeface="Trebuchet MS" pitchFamily="34" charset="-120"/>
               </a:rPr>
-              <a:t>instruction</a:t>
+              <a:t>instructor</a:t>
             </a:r>
             <a:endParaRPr lang="en-US" sz="1400" dirty="0"/>
           </a:p>
@@ -6385,7 +6385,7 @@
                 <a:ea typeface="Trebuchet MS" pitchFamily="34" charset="-122"/>
                 <a:cs typeface="Trebuchet MS" pitchFamily="34" charset="-120"/>
               </a:rPr>
-              <a:t>construct</a:t>
+              <a:t>constructive</a:t>
             </a:r>
             <a:endParaRPr lang="en-US" sz="1400" dirty="0"/>
           </a:p>
@@ -6855,7 +6855,7 @@
                 <a:ea typeface="Trebuchet MS" pitchFamily="34" charset="-122"/>
                 <a:cs typeface="Trebuchet MS" pitchFamily="34" charset="-120"/>
               </a:rPr>
-              <a:t>instruction</a:t>
+              <a:t>instructor</a:t>
             </a:r>
             <a:endParaRPr lang="en-US" sz="2800" dirty="0"/>
           </a:p>
@@ -7682,7 +7682,7 @@
                 <a:ea typeface="Trebuchet MS" pitchFamily="34" charset="-122"/>
                 <a:cs typeface="Trebuchet MS" pitchFamily="34" charset="-120"/>
               </a:rPr>
-              <a:t>instruction</a:t>
+              <a:t>instructor</a:t>
             </a:r>
             <a:endParaRPr lang="en-US" sz="2800" dirty="0"/>
           </a:p>
@@ -7860,7 +7860,7 @@
                 <a:ea typeface="Calibri" pitchFamily="34" charset="-122"/>
                 <a:cs typeface="Calibri" pitchFamily="34" charset="-120"/>
               </a:rPr>
-              <a:t>into, upon</a:t>
+              <a:t>in or into</a:t>
             </a:r>
             <a:endParaRPr lang="en-US" sz="850" dirty="0"/>
           </a:p>
@@ -7972,7 +7972,7 @@
                 <a:ea typeface="Calibri" pitchFamily="34" charset="-122"/>
                 <a:cs typeface="Calibri" pitchFamily="34" charset="-120"/>
               </a:rPr>
-              <a:t>to build or arrange</a:t>
+              <a:t>to build</a:t>
             </a:r>
             <a:endParaRPr lang="en-US" sz="850" dirty="0"/>
           </a:p>
@@ -8045,7 +8045,7 @@
                 <a:ea typeface="Trebuchet MS" pitchFamily="34" charset="-122"/>
                 <a:cs typeface="Trebuchet MS" pitchFamily="34" charset="-120"/>
               </a:rPr>
-              <a:t>ion</a:t>
+              <a:t>or</a:t>
             </a:r>
             <a:endParaRPr lang="en-US" sz="1300" dirty="0"/>
           </a:p>
@@ -8084,7 +8084,7 @@
                 <a:ea typeface="Calibri" pitchFamily="34" charset="-122"/>
                 <a:cs typeface="Calibri" pitchFamily="34" charset="-120"/>
               </a:rPr>
-              <a:t>act or result of</a:t>
+              <a:t>a person who does something</a:t>
             </a:r>
             <a:endParaRPr lang="en-US" sz="850" dirty="0"/>
           </a:p>
@@ -8779,7 +8779,7 @@
                 <a:ea typeface="Trebuchet MS" pitchFamily="34" charset="-122"/>
                 <a:cs typeface="Trebuchet MS" pitchFamily="34" charset="-120"/>
               </a:rPr>
-              <a:t>instruction</a:t>
+              <a:t>instructor</a:t>
             </a:r>
             <a:endParaRPr lang="en-US" sz="2800" dirty="0"/>
           </a:p>
@@ -8957,7 +8957,7 @@
                 <a:ea typeface="Calibri" pitchFamily="34" charset="-122"/>
                 <a:cs typeface="Calibri" pitchFamily="34" charset="-120"/>
               </a:rPr>
-              <a:t>into, upon</a:t>
+              <a:t>in or into</a:t>
             </a:r>
             <a:endParaRPr lang="en-US" sz="850" dirty="0"/>
           </a:p>
@@ -9069,7 +9069,7 @@
                 <a:ea typeface="Calibri" pitchFamily="34" charset="-122"/>
                 <a:cs typeface="Calibri" pitchFamily="34" charset="-120"/>
               </a:rPr>
-              <a:t>to build or arrange</a:t>
+              <a:t>to build</a:t>
             </a:r>
             <a:endParaRPr lang="en-US" sz="850" dirty="0"/>
           </a:p>
@@ -9142,7 +9142,7 @@
                 <a:ea typeface="Trebuchet MS" pitchFamily="34" charset="-122"/>
                 <a:cs typeface="Trebuchet MS" pitchFamily="34" charset="-120"/>
               </a:rPr>
-              <a:t>ion</a:t>
+              <a:t>or</a:t>
             </a:r>
             <a:endParaRPr lang="en-US" sz="1300" dirty="0"/>
           </a:p>
@@ -9181,7 +9181,7 @@
                 <a:ea typeface="Calibri" pitchFamily="34" charset="-122"/>
                 <a:cs typeface="Calibri" pitchFamily="34" charset="-120"/>
               </a:rPr>
-              <a:t>act or result of</a:t>
+              <a:t>a person who does something</a:t>
             </a:r>
             <a:endParaRPr lang="en-US" sz="850" dirty="0"/>
           </a:p>
@@ -9550,7 +9550,7 @@
                 <a:ea typeface="Trebuchet MS" pitchFamily="34" charset="-122"/>
                 <a:cs typeface="Trebuchet MS" pitchFamily="34" charset="-120"/>
               </a:rPr>
-              <a:t>tion</a:t>
+              <a:t>tor</a:t>
             </a:r>
             <a:endParaRPr lang="en-US" sz="1400" dirty="0"/>
           </a:p>
@@ -10113,7 +10113,7 @@
                 <a:ea typeface="Trebuchet MS" pitchFamily="34" charset="-122"/>
                 <a:cs typeface="Trebuchet MS" pitchFamily="34" charset="-120"/>
               </a:rPr>
-              <a:t>instruction</a:t>
+              <a:t>instructor</a:t>
             </a:r>
             <a:endParaRPr lang="en-US" sz="2800" dirty="0"/>
           </a:p>
@@ -10291,7 +10291,7 @@
                 <a:ea typeface="Calibri" pitchFamily="34" charset="-122"/>
                 <a:cs typeface="Calibri" pitchFamily="34" charset="-120"/>
               </a:rPr>
-              <a:t>into, upon</a:t>
+              <a:t>in or into</a:t>
             </a:r>
             <a:endParaRPr lang="en-US" sz="850" dirty="0"/>
           </a:p>
@@ -10403,7 +10403,7 @@
                 <a:ea typeface="Calibri" pitchFamily="34" charset="-122"/>
                 <a:cs typeface="Calibri" pitchFamily="34" charset="-120"/>
               </a:rPr>
-              <a:t>to build or arrange</a:t>
+              <a:t>to build</a:t>
             </a:r>
             <a:endParaRPr lang="en-US" sz="850" dirty="0"/>
           </a:p>
@@ -10476,7 +10476,7 @@
                 <a:ea typeface="Trebuchet MS" pitchFamily="34" charset="-122"/>
                 <a:cs typeface="Trebuchet MS" pitchFamily="34" charset="-120"/>
               </a:rPr>
-              <a:t>ion</a:t>
+              <a:t>or</a:t>
             </a:r>
             <a:endParaRPr lang="en-US" sz="1300" dirty="0"/>
           </a:p>
@@ -10515,7 +10515,7 @@
                 <a:ea typeface="Calibri" pitchFamily="34" charset="-122"/>
                 <a:cs typeface="Calibri" pitchFamily="34" charset="-120"/>
               </a:rPr>
-              <a:t>act or result of</a:t>
+              <a:t>a person who does something</a:t>
             </a:r>
             <a:endParaRPr lang="en-US" sz="850" dirty="0"/>
           </a:p>
@@ -10884,7 +10884,7 @@
                 <a:ea typeface="Trebuchet MS" pitchFamily="34" charset="-122"/>
                 <a:cs typeface="Trebuchet MS" pitchFamily="34" charset="-120"/>
               </a:rPr>
-              <a:t>tion</a:t>
+              <a:t>tor</a:t>
             </a:r>
             <a:endParaRPr lang="en-US" sz="1400" dirty="0"/>
           </a:p>
@@ -10965,11 +10965,11 @@
         <p:spPr>
           <a:xfrm>
             <a:off x="1874520" y="4096512"/>
-            <a:ext cx="6903720" cy="804672"/>
+            <a:ext cx="6903720" cy="658368"/>
           </a:xfrm>
           <a:prstGeom prst="rect">
             <a:avLst>
-              <a:gd name="adj" fmla="val 6818"/>
+              <a:gd name="adj" fmla="val 8333"/>
             </a:avLst>
           </a:prstGeom>
           <a:solidFill>
@@ -10991,12 +10991,12 @@
         </p:nvSpPr>
         <p:spPr>
           <a:xfrm>
-            <a:off x="1951828" y="4169664"/>
-            <a:ext cx="603504" cy="384048"/>
+            <a:off x="1951330" y="4169664"/>
+            <a:ext cx="676656" cy="475488"/>
           </a:xfrm>
           <a:prstGeom prst="rect">
             <a:avLst>
-              <a:gd name="adj" fmla="val 9524"/>
+              <a:gd name="adj" fmla="val 7692"/>
             </a:avLst>
           </a:prstGeom>
           <a:solidFill>
@@ -11018,8 +11018,8 @@
         </p:nvSpPr>
         <p:spPr>
           <a:xfrm>
-            <a:off x="1951828" y="4169664"/>
-            <a:ext cx="603504" cy="384048"/>
+            <a:off x="1951330" y="4169664"/>
+            <a:ext cx="676656" cy="475488"/>
           </a:xfrm>
           <a:prstGeom prst="rect">
             <a:avLst/>
@@ -11057,12 +11057,12 @@
         </p:nvSpPr>
         <p:spPr>
           <a:xfrm>
-            <a:off x="2605209" y="4169664"/>
-            <a:ext cx="603504" cy="384048"/>
+            <a:off x="2677363" y="4169664"/>
+            <a:ext cx="676656" cy="475488"/>
           </a:xfrm>
           <a:prstGeom prst="rect">
             <a:avLst>
-              <a:gd name="adj" fmla="val 9524"/>
+              <a:gd name="adj" fmla="val 7692"/>
             </a:avLst>
           </a:prstGeom>
           <a:solidFill>
@@ -11084,8 +11084,8 @@
         </p:nvSpPr>
         <p:spPr>
           <a:xfrm>
-            <a:off x="2605209" y="4169664"/>
-            <a:ext cx="603504" cy="384048"/>
+            <a:off x="2677363" y="4169664"/>
+            <a:ext cx="676656" cy="475488"/>
           </a:xfrm>
           <a:prstGeom prst="rect">
             <a:avLst/>
@@ -11123,12 +11123,12 @@
         </p:nvSpPr>
         <p:spPr>
           <a:xfrm>
-            <a:off x="3258589" y="4169664"/>
-            <a:ext cx="603504" cy="384048"/>
+            <a:off x="3403397" y="4169664"/>
+            <a:ext cx="676656" cy="475488"/>
           </a:xfrm>
           <a:prstGeom prst="rect">
             <a:avLst>
-              <a:gd name="adj" fmla="val 9524"/>
+              <a:gd name="adj" fmla="val 7692"/>
             </a:avLst>
           </a:prstGeom>
           <a:solidFill>
@@ -11150,8 +11150,8 @@
         </p:nvSpPr>
         <p:spPr>
           <a:xfrm>
-            <a:off x="3258589" y="4169664"/>
-            <a:ext cx="603504" cy="384048"/>
+            <a:off x="3403397" y="4169664"/>
+            <a:ext cx="676656" cy="475488"/>
           </a:xfrm>
           <a:prstGeom prst="rect">
             <a:avLst/>
@@ -11189,12 +11189,12 @@
         </p:nvSpPr>
         <p:spPr>
           <a:xfrm>
-            <a:off x="3911969" y="4169664"/>
-            <a:ext cx="603504" cy="384048"/>
+            <a:off x="4129430" y="4169664"/>
+            <a:ext cx="676656" cy="475488"/>
           </a:xfrm>
           <a:prstGeom prst="rect">
             <a:avLst>
-              <a:gd name="adj" fmla="val 9524"/>
+              <a:gd name="adj" fmla="val 7692"/>
             </a:avLst>
           </a:prstGeom>
           <a:solidFill>
@@ -11216,8 +11216,8 @@
         </p:nvSpPr>
         <p:spPr>
           <a:xfrm>
-            <a:off x="3911969" y="4169664"/>
-            <a:ext cx="603504" cy="384048"/>
+            <a:off x="4129430" y="4169664"/>
+            <a:ext cx="676656" cy="475488"/>
           </a:xfrm>
           <a:prstGeom prst="rect">
             <a:avLst/>
@@ -11255,12 +11255,12 @@
         </p:nvSpPr>
         <p:spPr>
           <a:xfrm>
-            <a:off x="4565350" y="4169664"/>
-            <a:ext cx="603504" cy="384048"/>
+            <a:off x="4855464" y="4169664"/>
+            <a:ext cx="676656" cy="475488"/>
           </a:xfrm>
           <a:prstGeom prst="rect">
             <a:avLst>
-              <a:gd name="adj" fmla="val 9524"/>
+              <a:gd name="adj" fmla="val 7692"/>
             </a:avLst>
           </a:prstGeom>
           <a:solidFill>
@@ -11282,8 +11282,8 @@
         </p:nvSpPr>
         <p:spPr>
           <a:xfrm>
-            <a:off x="4565350" y="4169664"/>
-            <a:ext cx="603504" cy="384048"/>
+            <a:off x="4855464" y="4169664"/>
+            <a:ext cx="676656" cy="475488"/>
           </a:xfrm>
           <a:prstGeom prst="rect">
             <a:avLst/>
@@ -11321,12 +11321,12 @@
         </p:nvSpPr>
         <p:spPr>
           <a:xfrm>
-            <a:off x="5218730" y="4169664"/>
-            <a:ext cx="603504" cy="384048"/>
+            <a:off x="5581498" y="4169664"/>
+            <a:ext cx="676656" cy="475488"/>
           </a:xfrm>
           <a:prstGeom prst="rect">
             <a:avLst>
-              <a:gd name="adj" fmla="val 9524"/>
+              <a:gd name="adj" fmla="val 7692"/>
             </a:avLst>
           </a:prstGeom>
           <a:solidFill>
@@ -11348,8 +11348,8 @@
         </p:nvSpPr>
         <p:spPr>
           <a:xfrm>
-            <a:off x="5218730" y="4169664"/>
-            <a:ext cx="603504" cy="384048"/>
+            <a:off x="5581498" y="4169664"/>
+            <a:ext cx="676656" cy="475488"/>
           </a:xfrm>
           <a:prstGeom prst="rect">
             <a:avLst/>
@@ -11387,12 +11387,12 @@
         </p:nvSpPr>
         <p:spPr>
           <a:xfrm>
-            <a:off x="5872111" y="4169664"/>
-            <a:ext cx="603504" cy="384048"/>
+            <a:off x="6307531" y="4169664"/>
+            <a:ext cx="676656" cy="475488"/>
           </a:xfrm>
           <a:prstGeom prst="rect">
             <a:avLst>
-              <a:gd name="adj" fmla="val 9524"/>
+              <a:gd name="adj" fmla="val 7692"/>
             </a:avLst>
           </a:prstGeom>
           <a:solidFill>
@@ -11414,8 +11414,8 @@
         </p:nvSpPr>
         <p:spPr>
           <a:xfrm>
-            <a:off x="5872111" y="4169664"/>
-            <a:ext cx="603504" cy="384048"/>
+            <a:off x="6307531" y="4169664"/>
+            <a:ext cx="676656" cy="475488"/>
           </a:xfrm>
           <a:prstGeom prst="rect">
             <a:avLst/>
@@ -11453,12 +11453,12 @@
         </p:nvSpPr>
         <p:spPr>
           <a:xfrm>
-            <a:off x="6525491" y="4169664"/>
-            <a:ext cx="603504" cy="384048"/>
+            <a:off x="7033565" y="4169664"/>
+            <a:ext cx="676656" cy="475488"/>
           </a:xfrm>
           <a:prstGeom prst="rect">
             <a:avLst>
-              <a:gd name="adj" fmla="val 9524"/>
+              <a:gd name="adj" fmla="val 7692"/>
             </a:avLst>
           </a:prstGeom>
           <a:solidFill>
@@ -11480,8 +11480,8 @@
         </p:nvSpPr>
         <p:spPr>
           <a:xfrm>
-            <a:off x="6525491" y="4169664"/>
-            <a:ext cx="603504" cy="384048"/>
+            <a:off x="7033565" y="4169664"/>
+            <a:ext cx="676656" cy="475488"/>
           </a:xfrm>
           <a:prstGeom prst="rect">
             <a:avLst/>
@@ -11519,12 +11519,12 @@
         </p:nvSpPr>
         <p:spPr>
           <a:xfrm>
-            <a:off x="7178871" y="4169664"/>
-            <a:ext cx="603504" cy="384048"/>
+            <a:off x="7759598" y="4169664"/>
+            <a:ext cx="676656" cy="475488"/>
           </a:xfrm>
           <a:prstGeom prst="rect">
             <a:avLst>
-              <a:gd name="adj" fmla="val 9524"/>
+              <a:gd name="adj" fmla="val 7692"/>
             </a:avLst>
           </a:prstGeom>
           <a:solidFill>
@@ -11546,8 +11546,8 @@
         </p:nvSpPr>
         <p:spPr>
           <a:xfrm>
-            <a:off x="7178871" y="4169664"/>
-            <a:ext cx="603504" cy="384048"/>
+            <a:off x="7759598" y="4169664"/>
+            <a:ext cx="676656" cy="475488"/>
           </a:xfrm>
           <a:prstGeom prst="rect">
             <a:avLst/>
@@ -11571,112 +11571,7 @@
                 <a:ea typeface="Trebuchet MS" pitchFamily="34" charset="-122"/>
                 <a:cs typeface="Trebuchet MS" pitchFamily="34" charset="-120"/>
               </a:rPr>
-              <a:t>io</a:t>
-            </a:r>
-            <a:endParaRPr lang="en-US" sz="900" dirty="0"/>
-          </a:p>
-        </p:txBody>
-      </p:sp>
-      <p:sp>
-        <p:nvSpPr>
-          <p:cNvPr id="57" name="Text 55"/>
-          <p:cNvSpPr/>
-          <p:nvPr/>
-        </p:nvSpPr>
-        <p:spPr>
-          <a:xfrm>
-            <a:off x="7178871" y="4572000"/>
-            <a:ext cx="603504" cy="219456"/>
-          </a:xfrm>
-          <a:prstGeom prst="rect">
-            <a:avLst/>
-          </a:prstGeom>
-          <a:noFill/>
-          <a:ln/>
-        </p:spPr>
-        <p:txBody>
-          <a:bodyPr wrap="square" lIns="0" tIns="0" rIns="0" bIns="0" rtlCol="0" anchor="t"/>
-          <a:lstStyle/>
-          <a:p>
-            <a:pPr algn="ctr" indent="0" marL="0">
-              <a:buNone/>
-            </a:pPr>
-            <a:r>
-              <a:rPr lang="en-US" sz="750" i="1" dirty="0">
-                <a:solidFill>
-                  <a:srgbClr val="94A3B8"/>
-                </a:solidFill>
-                <a:latin typeface="Calibri" pitchFamily="34" charset="0"/>
-                <a:ea typeface="Calibri" pitchFamily="34" charset="-122"/>
-                <a:cs typeface="Calibri" pitchFamily="34" charset="-120"/>
-              </a:rPr>
-              <a:t>/sh/</a:t>
-            </a:r>
-            <a:endParaRPr lang="en-US" sz="750" dirty="0"/>
-          </a:p>
-        </p:txBody>
-      </p:sp>
-      <p:sp>
-        <p:nvSpPr>
-          <p:cNvPr id="58" name="Shape 56"/>
-          <p:cNvSpPr/>
-          <p:nvPr/>
-        </p:nvSpPr>
-        <p:spPr>
-          <a:xfrm>
-            <a:off x="7832252" y="4169664"/>
-            <a:ext cx="603504" cy="384048"/>
-          </a:xfrm>
-          <a:prstGeom prst="rect">
-            <a:avLst>
-              <a:gd name="adj" fmla="val 9524"/>
-            </a:avLst>
-          </a:prstGeom>
-          <a:solidFill>
-            <a:srgbClr val="FFFFFF"/>
-          </a:solidFill>
-          <a:ln w="12700">
-            <a:solidFill>
-              <a:srgbClr val="DB2777"/>
-            </a:solidFill>
-            <a:prstDash val="solid"/>
-          </a:ln>
-        </p:spPr>
-      </p:sp>
-      <p:sp>
-        <p:nvSpPr>
-          <p:cNvPr id="59" name="Text 57"/>
-          <p:cNvSpPr/>
-          <p:nvPr/>
-        </p:nvSpPr>
-        <p:spPr>
-          <a:xfrm>
-            <a:off x="7832252" y="4169664"/>
-            <a:ext cx="603504" cy="384048"/>
-          </a:xfrm>
-          <a:prstGeom prst="rect">
-            <a:avLst/>
-          </a:prstGeom>
-          <a:noFill/>
-          <a:ln/>
-        </p:spPr>
-        <p:txBody>
-          <a:bodyPr wrap="square" lIns="0" tIns="0" rIns="0" bIns="0" rtlCol="0" anchor="ctr"/>
-          <a:lstStyle/>
-          <a:p>
-            <a:pPr algn="ctr" indent="0" marL="0">
-              <a:buNone/>
-            </a:pPr>
-            <a:r>
-              <a:rPr lang="en-US" sz="900" b="1" dirty="0">
-                <a:solidFill>
-                  <a:srgbClr val="9D174D"/>
-                </a:solidFill>
-                <a:latin typeface="Trebuchet MS" pitchFamily="34" charset="0"/>
-                <a:ea typeface="Trebuchet MS" pitchFamily="34" charset="-122"/>
-                <a:cs typeface="Trebuchet MS" pitchFamily="34" charset="-120"/>
-              </a:rPr>
-              <a:t>n</a:t>
+              <a:t>or</a:t>
             </a:r>
             <a:endParaRPr lang="en-US" sz="900" dirty="0"/>
           </a:p>
@@ -12107,7 +12002,7 @@
                 <a:ea typeface="Trebuchet MS" pitchFamily="34" charset="-122"/>
                 <a:cs typeface="Trebuchet MS" pitchFamily="34" charset="-120"/>
               </a:rPr>
-              <a:t>construct</a:t>
+              <a:t>constructive</a:t>
             </a:r>
             <a:endParaRPr lang="en-US" sz="2800" dirty="0"/>
           </a:p>
@@ -12934,7 +12829,7 @@
                 <a:ea typeface="Trebuchet MS" pitchFamily="34" charset="-122"/>
                 <a:cs typeface="Trebuchet MS" pitchFamily="34" charset="-120"/>
               </a:rPr>
-              <a:t>construct</a:t>
+              <a:t>constructive</a:t>
             </a:r>
             <a:endParaRPr lang="en-US" sz="2800" dirty="0"/>
           </a:p>
@@ -13014,7 +12909,7 @@
         </p:nvSpPr>
         <p:spPr>
           <a:xfrm>
-            <a:off x="2938272" y="2258568"/>
+            <a:off x="2221992" y="2258568"/>
             <a:ext cx="1828800" cy="292608"/>
           </a:xfrm>
           <a:prstGeom prst="rect">
@@ -13048,7 +12943,7 @@
         </p:nvSpPr>
         <p:spPr>
           <a:xfrm>
-            <a:off x="2938272" y="2258568"/>
+            <a:off x="2221992" y="2258568"/>
             <a:ext cx="1828800" cy="292608"/>
           </a:xfrm>
           <a:prstGeom prst="rect">
@@ -13087,7 +12982,7 @@
         </p:nvSpPr>
         <p:spPr>
           <a:xfrm>
-            <a:off x="2938272" y="2569464"/>
+            <a:off x="2221992" y="2569464"/>
             <a:ext cx="1828800" cy="201168"/>
           </a:xfrm>
           <a:prstGeom prst="rect">
@@ -13112,7 +13007,7 @@
                 <a:ea typeface="Calibri" pitchFamily="34" charset="-122"/>
                 <a:cs typeface="Calibri" pitchFamily="34" charset="-120"/>
               </a:rPr>
-              <a:t>together, with</a:t>
+              <a:t>together or with</a:t>
             </a:r>
             <a:endParaRPr lang="en-US" sz="850" dirty="0"/>
           </a:p>
@@ -13126,7 +13021,7 @@
         </p:nvSpPr>
         <p:spPr>
           <a:xfrm>
-            <a:off x="5803392" y="2258568"/>
+            <a:off x="4370832" y="2258568"/>
             <a:ext cx="1828800" cy="292608"/>
           </a:xfrm>
           <a:prstGeom prst="rect">
@@ -13160,7 +13055,7 @@
         </p:nvSpPr>
         <p:spPr>
           <a:xfrm>
-            <a:off x="5803392" y="2258568"/>
+            <a:off x="4370832" y="2258568"/>
             <a:ext cx="1828800" cy="292608"/>
           </a:xfrm>
           <a:prstGeom prst="rect">
@@ -13199,7 +13094,7 @@
         </p:nvSpPr>
         <p:spPr>
           <a:xfrm>
-            <a:off x="5803392" y="2569464"/>
+            <a:off x="4370832" y="2569464"/>
             <a:ext cx="1828800" cy="201168"/>
           </a:xfrm>
           <a:prstGeom prst="rect">
@@ -13224,7 +13119,7 @@
                 <a:ea typeface="Calibri" pitchFamily="34" charset="-122"/>
                 <a:cs typeface="Calibri" pitchFamily="34" charset="-120"/>
               </a:rPr>
-              <a:t>to build or arrange</a:t>
+              <a:t>to build</a:t>
             </a:r>
             <a:endParaRPr lang="en-US" sz="850" dirty="0"/>
           </a:p>
@@ -13233,6 +13128,118 @@
       <p:sp>
         <p:nvSpPr>
           <p:cNvPr id="22" name="Shape 20"/>
+          <p:cNvSpPr/>
+          <p:nvPr/>
+        </p:nvSpPr>
+        <p:spPr>
+          <a:xfrm>
+            <a:off x="6519672" y="2258568"/>
+            <a:ext cx="1828800" cy="292608"/>
+          </a:xfrm>
+          <a:prstGeom prst="rect">
+            <a:avLst>
+              <a:gd name="adj" fmla="val 25000"/>
+            </a:avLst>
+          </a:prstGeom>
+          <a:solidFill>
+            <a:srgbClr val="FCE7F3"/>
+          </a:solidFill>
+          <a:ln w="19050">
+            <a:solidFill>
+              <a:srgbClr val="DB2777"/>
+            </a:solidFill>
+            <a:prstDash val="solid"/>
+          </a:ln>
+          <a:effectLst>
+            <a:outerShdw sx="100000" sy="100000" kx="0" ky="0" algn="bl" rotWithShape="0" blurRad="101600" dist="38100" dir="8100000">
+              <a:srgbClr val="000000">
+                <a:alpha val="12000"/>
+              </a:srgbClr>
+            </a:outerShdw>
+          </a:effectLst>
+        </p:spPr>
+      </p:sp>
+      <p:sp>
+        <p:nvSpPr>
+          <p:cNvPr id="23" name="Text 21"/>
+          <p:cNvSpPr/>
+          <p:nvPr/>
+        </p:nvSpPr>
+        <p:spPr>
+          <a:xfrm>
+            <a:off x="6519672" y="2258568"/>
+            <a:ext cx="1828800" cy="292608"/>
+          </a:xfrm>
+          <a:prstGeom prst="rect">
+            <a:avLst/>
+          </a:prstGeom>
+          <a:noFill/>
+          <a:ln/>
+        </p:spPr>
+        <p:txBody>
+          <a:bodyPr wrap="square" lIns="0" tIns="0" rIns="0" bIns="0" rtlCol="0" anchor="ctr"/>
+          <a:lstStyle/>
+          <a:p>
+            <a:pPr algn="ctr" indent="0" marL="0">
+              <a:buNone/>
+            </a:pPr>
+            <a:r>
+              <a:rPr lang="en-US" sz="1300" b="1" dirty="0">
+                <a:solidFill>
+                  <a:srgbClr val="9D174D"/>
+                </a:solidFill>
+                <a:latin typeface="Trebuchet MS" pitchFamily="34" charset="0"/>
+                <a:ea typeface="Trebuchet MS" pitchFamily="34" charset="-122"/>
+                <a:cs typeface="Trebuchet MS" pitchFamily="34" charset="-120"/>
+              </a:rPr>
+              <a:t>ive</a:t>
+            </a:r>
+            <a:endParaRPr lang="en-US" sz="1300" dirty="0"/>
+          </a:p>
+        </p:txBody>
+      </p:sp>
+      <p:sp>
+        <p:nvSpPr>
+          <p:cNvPr id="24" name="Text 22"/>
+          <p:cNvSpPr/>
+          <p:nvPr/>
+        </p:nvSpPr>
+        <p:spPr>
+          <a:xfrm>
+            <a:off x="6519672" y="2569464"/>
+            <a:ext cx="1828800" cy="201168"/>
+          </a:xfrm>
+          <a:prstGeom prst="rect">
+            <a:avLst/>
+          </a:prstGeom>
+          <a:noFill/>
+          <a:ln/>
+        </p:spPr>
+        <p:txBody>
+          <a:bodyPr wrap="square" lIns="0" tIns="0" rIns="0" bIns="0" rtlCol="0" anchor="t"/>
+          <a:lstStyle/>
+          <a:p>
+            <a:pPr algn="ctr" indent="0" marL="0">
+              <a:buNone/>
+            </a:pPr>
+            <a:r>
+              <a:rPr lang="en-US" sz="850" dirty="0">
+                <a:solidFill>
+                  <a:srgbClr val="475569"/>
+                </a:solidFill>
+                <a:latin typeface="Calibri" pitchFamily="34" charset="0"/>
+                <a:ea typeface="Calibri" pitchFamily="34" charset="-122"/>
+                <a:cs typeface="Calibri" pitchFamily="34" charset="-120"/>
+              </a:rPr>
+              <a:t>having the quality of</a:t>
+            </a:r>
+            <a:endParaRPr lang="en-US" sz="850" dirty="0"/>
+          </a:p>
+        </p:txBody>
+      </p:sp>
+      <p:sp>
+        <p:nvSpPr>
+          <p:cNvPr id="25" name="Shape 23"/>
           <p:cNvSpPr/>
           <p:nvPr/>
         </p:nvSpPr>
@@ -13259,7 +13266,7 @@
       </p:sp>
       <p:sp>
         <p:nvSpPr>
-          <p:cNvPr id="23" name="Text 21"/>
+          <p:cNvPr id="26" name="Text 24"/>
           <p:cNvSpPr/>
           <p:nvPr/>
         </p:nvSpPr>
@@ -13298,7 +13305,7 @@
       </p:sp>
       <p:sp>
         <p:nvSpPr>
-          <p:cNvPr id="24" name="Shape 22"/>
+          <p:cNvPr id="27" name="Shape 25"/>
           <p:cNvSpPr/>
           <p:nvPr/>
         </p:nvSpPr>
@@ -13325,7 +13332,7 @@
       </p:sp>
       <p:sp>
         <p:nvSpPr>
-          <p:cNvPr id="25" name="Text 23"/>
+          <p:cNvPr id="28" name="Text 26"/>
           <p:cNvSpPr/>
           <p:nvPr/>
         </p:nvSpPr>
@@ -13364,7 +13371,7 @@
       </p:sp>
       <p:sp>
         <p:nvSpPr>
-          <p:cNvPr id="26" name="Shape 24"/>
+          <p:cNvPr id="29" name="Shape 27"/>
           <p:cNvSpPr/>
           <p:nvPr/>
         </p:nvSpPr>
@@ -13391,7 +13398,7 @@
       </p:sp>
       <p:sp>
         <p:nvSpPr>
-          <p:cNvPr id="27" name="Text 25"/>
+          <p:cNvPr id="30" name="Text 28"/>
           <p:cNvSpPr/>
           <p:nvPr/>
         </p:nvSpPr>
@@ -13430,7 +13437,7 @@
       </p:sp>
       <p:sp>
         <p:nvSpPr>
-          <p:cNvPr id="28" name="Shape 26"/>
+          <p:cNvPr id="31" name="Shape 29"/>
           <p:cNvSpPr/>
           <p:nvPr/>
         </p:nvSpPr>
@@ -13457,7 +13464,7 @@
       </p:sp>
       <p:sp>
         <p:nvSpPr>
-          <p:cNvPr id="29" name="Text 27"/>
+          <p:cNvPr id="32" name="Text 30"/>
           <p:cNvSpPr/>
           <p:nvPr/>
         </p:nvSpPr>
@@ -13919,7 +13926,7 @@
                 <a:ea typeface="Trebuchet MS" pitchFamily="34" charset="-122"/>
                 <a:cs typeface="Trebuchet MS" pitchFamily="34" charset="-120"/>
               </a:rPr>
-              <a:t>construct</a:t>
+              <a:t>constructive</a:t>
             </a:r>
             <a:endParaRPr lang="en-US" sz="2800" dirty="0"/>
           </a:p>
@@ -13999,7 +14006,7 @@
         </p:nvSpPr>
         <p:spPr>
           <a:xfrm>
-            <a:off x="2938272" y="2258568"/>
+            <a:off x="2221992" y="2258568"/>
             <a:ext cx="1828800" cy="292608"/>
           </a:xfrm>
           <a:prstGeom prst="rect">
@@ -14033,7 +14040,7 @@
         </p:nvSpPr>
         <p:spPr>
           <a:xfrm>
-            <a:off x="2938272" y="2258568"/>
+            <a:off x="2221992" y="2258568"/>
             <a:ext cx="1828800" cy="292608"/>
           </a:xfrm>
           <a:prstGeom prst="rect">
@@ -14072,7 +14079,7 @@
         </p:nvSpPr>
         <p:spPr>
           <a:xfrm>
-            <a:off x="2938272" y="2569464"/>
+            <a:off x="2221992" y="2569464"/>
             <a:ext cx="1828800" cy="201168"/>
           </a:xfrm>
           <a:prstGeom prst="rect">
@@ -14097,7 +14104,7 @@
                 <a:ea typeface="Calibri" pitchFamily="34" charset="-122"/>
                 <a:cs typeface="Calibri" pitchFamily="34" charset="-120"/>
               </a:rPr>
-              <a:t>together, with</a:t>
+              <a:t>together or with</a:t>
             </a:r>
             <a:endParaRPr lang="en-US" sz="850" dirty="0"/>
           </a:p>
@@ -14111,7 +14118,7 @@
         </p:nvSpPr>
         <p:spPr>
           <a:xfrm>
-            <a:off x="5803392" y="2258568"/>
+            <a:off x="4370832" y="2258568"/>
             <a:ext cx="1828800" cy="292608"/>
           </a:xfrm>
           <a:prstGeom prst="rect">
@@ -14145,7 +14152,7 @@
         </p:nvSpPr>
         <p:spPr>
           <a:xfrm>
-            <a:off x="5803392" y="2258568"/>
+            <a:off x="4370832" y="2258568"/>
             <a:ext cx="1828800" cy="292608"/>
           </a:xfrm>
           <a:prstGeom prst="rect">
@@ -14184,7 +14191,7 @@
         </p:nvSpPr>
         <p:spPr>
           <a:xfrm>
-            <a:off x="5803392" y="2569464"/>
+            <a:off x="4370832" y="2569464"/>
             <a:ext cx="1828800" cy="201168"/>
           </a:xfrm>
           <a:prstGeom prst="rect">
@@ -14209,7 +14216,7 @@
                 <a:ea typeface="Calibri" pitchFamily="34" charset="-122"/>
                 <a:cs typeface="Calibri" pitchFamily="34" charset="-120"/>
               </a:rPr>
-              <a:t>to build or arrange</a:t>
+              <a:t>to build</a:t>
             </a:r>
             <a:endParaRPr lang="en-US" sz="850" dirty="0"/>
           </a:p>
@@ -14218,6 +14225,118 @@
       <p:sp>
         <p:nvSpPr>
           <p:cNvPr id="22" name="Shape 20"/>
+          <p:cNvSpPr/>
+          <p:nvPr/>
+        </p:nvSpPr>
+        <p:spPr>
+          <a:xfrm>
+            <a:off x="6519672" y="2258568"/>
+            <a:ext cx="1828800" cy="292608"/>
+          </a:xfrm>
+          <a:prstGeom prst="rect">
+            <a:avLst>
+              <a:gd name="adj" fmla="val 25000"/>
+            </a:avLst>
+          </a:prstGeom>
+          <a:solidFill>
+            <a:srgbClr val="FCE7F3"/>
+          </a:solidFill>
+          <a:ln w="19050">
+            <a:solidFill>
+              <a:srgbClr val="DB2777"/>
+            </a:solidFill>
+            <a:prstDash val="solid"/>
+          </a:ln>
+          <a:effectLst>
+            <a:outerShdw sx="100000" sy="100000" kx="0" ky="0" algn="bl" rotWithShape="0" blurRad="101600" dist="38100" dir="8100000">
+              <a:srgbClr val="000000">
+                <a:alpha val="12000"/>
+              </a:srgbClr>
+            </a:outerShdw>
+          </a:effectLst>
+        </p:spPr>
+      </p:sp>
+      <p:sp>
+        <p:nvSpPr>
+          <p:cNvPr id="23" name="Text 21"/>
+          <p:cNvSpPr/>
+          <p:nvPr/>
+        </p:nvSpPr>
+        <p:spPr>
+          <a:xfrm>
+            <a:off x="6519672" y="2258568"/>
+            <a:ext cx="1828800" cy="292608"/>
+          </a:xfrm>
+          <a:prstGeom prst="rect">
+            <a:avLst/>
+          </a:prstGeom>
+          <a:noFill/>
+          <a:ln/>
+        </p:spPr>
+        <p:txBody>
+          <a:bodyPr wrap="square" lIns="0" tIns="0" rIns="0" bIns="0" rtlCol="0" anchor="ctr"/>
+          <a:lstStyle/>
+          <a:p>
+            <a:pPr algn="ctr" indent="0" marL="0">
+              <a:buNone/>
+            </a:pPr>
+            <a:r>
+              <a:rPr lang="en-US" sz="1300" b="1" dirty="0">
+                <a:solidFill>
+                  <a:srgbClr val="9D174D"/>
+                </a:solidFill>
+                <a:latin typeface="Trebuchet MS" pitchFamily="34" charset="0"/>
+                <a:ea typeface="Trebuchet MS" pitchFamily="34" charset="-122"/>
+                <a:cs typeface="Trebuchet MS" pitchFamily="34" charset="-120"/>
+              </a:rPr>
+              <a:t>ive</a:t>
+            </a:r>
+            <a:endParaRPr lang="en-US" sz="1300" dirty="0"/>
+          </a:p>
+        </p:txBody>
+      </p:sp>
+      <p:sp>
+        <p:nvSpPr>
+          <p:cNvPr id="24" name="Text 22"/>
+          <p:cNvSpPr/>
+          <p:nvPr/>
+        </p:nvSpPr>
+        <p:spPr>
+          <a:xfrm>
+            <a:off x="6519672" y="2569464"/>
+            <a:ext cx="1828800" cy="201168"/>
+          </a:xfrm>
+          <a:prstGeom prst="rect">
+            <a:avLst/>
+          </a:prstGeom>
+          <a:noFill/>
+          <a:ln/>
+        </p:spPr>
+        <p:txBody>
+          <a:bodyPr wrap="square" lIns="0" tIns="0" rIns="0" bIns="0" rtlCol="0" anchor="t"/>
+          <a:lstStyle/>
+          <a:p>
+            <a:pPr algn="ctr" indent="0" marL="0">
+              <a:buNone/>
+            </a:pPr>
+            <a:r>
+              <a:rPr lang="en-US" sz="850" dirty="0">
+                <a:solidFill>
+                  <a:srgbClr val="475569"/>
+                </a:solidFill>
+                <a:latin typeface="Calibri" pitchFamily="34" charset="0"/>
+                <a:ea typeface="Calibri" pitchFamily="34" charset="-122"/>
+                <a:cs typeface="Calibri" pitchFamily="34" charset="-120"/>
+              </a:rPr>
+              <a:t>having the quality of</a:t>
+            </a:r>
+            <a:endParaRPr lang="en-US" sz="850" dirty="0"/>
+          </a:p>
+        </p:txBody>
+      </p:sp>
+      <p:sp>
+        <p:nvSpPr>
+          <p:cNvPr id="25" name="Shape 23"/>
           <p:cNvSpPr/>
           <p:nvPr/>
         </p:nvSpPr>
@@ -14244,7 +14363,7 @@
       </p:sp>
       <p:sp>
         <p:nvSpPr>
-          <p:cNvPr id="23" name="Text 21"/>
+          <p:cNvPr id="26" name="Text 24"/>
           <p:cNvSpPr/>
           <p:nvPr/>
         </p:nvSpPr>
@@ -14283,7 +14402,7 @@
       </p:sp>
       <p:sp>
         <p:nvSpPr>
-          <p:cNvPr id="24" name="Shape 22"/>
+          <p:cNvPr id="27" name="Shape 25"/>
           <p:cNvSpPr/>
           <p:nvPr/>
         </p:nvSpPr>
@@ -14310,13 +14429,13 @@
       </p:sp>
       <p:sp>
         <p:nvSpPr>
-          <p:cNvPr id="25" name="Shape 23"/>
-          <p:cNvSpPr/>
-          <p:nvPr/>
-        </p:nvSpPr>
-        <p:spPr>
-          <a:xfrm>
-            <a:off x="2999232" y="3364992"/>
+          <p:cNvPr id="28" name="Shape 26"/>
+          <p:cNvSpPr/>
+          <p:nvPr/>
+        </p:nvSpPr>
+        <p:spPr>
+          <a:xfrm>
+            <a:off x="2313432" y="3364992"/>
             <a:ext cx="1645920" cy="475488"/>
           </a:xfrm>
           <a:prstGeom prst="rect">
@@ -14337,13 +14456,13 @@
       </p:sp>
       <p:sp>
         <p:nvSpPr>
-          <p:cNvPr id="26" name="Text 24"/>
-          <p:cNvSpPr/>
-          <p:nvPr/>
-        </p:nvSpPr>
-        <p:spPr>
-          <a:xfrm>
-            <a:off x="2999232" y="3364992"/>
+          <p:cNvPr id="29" name="Text 27"/>
+          <p:cNvSpPr/>
+          <p:nvPr/>
+        </p:nvSpPr>
+        <p:spPr>
+          <a:xfrm>
+            <a:off x="2313432" y="3364992"/>
             <a:ext cx="1645920" cy="475488"/>
           </a:xfrm>
           <a:prstGeom prst="rect">
@@ -14376,14 +14495,14 @@
       </p:sp>
       <p:sp>
         <p:nvSpPr>
-          <p:cNvPr id="27" name="Text 25"/>
-          <p:cNvSpPr/>
-          <p:nvPr/>
-        </p:nvSpPr>
-        <p:spPr>
-          <a:xfrm>
-            <a:off x="4645152" y="3364992"/>
-            <a:ext cx="1097280" cy="475488"/>
+          <p:cNvPr id="30" name="Text 28"/>
+          <p:cNvSpPr/>
+          <p:nvPr/>
+        </p:nvSpPr>
+        <p:spPr>
+          <a:xfrm>
+            <a:off x="3959352" y="3364992"/>
+            <a:ext cx="411480" cy="475488"/>
           </a:xfrm>
           <a:prstGeom prst="rect">
             <a:avLst/>
@@ -14415,13 +14534,13 @@
       </p:sp>
       <p:sp>
         <p:nvSpPr>
-          <p:cNvPr id="28" name="Shape 26"/>
-          <p:cNvSpPr/>
-          <p:nvPr/>
-        </p:nvSpPr>
-        <p:spPr>
-          <a:xfrm>
-            <a:off x="5742432" y="3364992"/>
+          <p:cNvPr id="31" name="Shape 29"/>
+          <p:cNvSpPr/>
+          <p:nvPr/>
+        </p:nvSpPr>
+        <p:spPr>
+          <a:xfrm>
+            <a:off x="4370832" y="3364992"/>
             <a:ext cx="1645920" cy="475488"/>
           </a:xfrm>
           <a:prstGeom prst="rect">
@@ -14442,13 +14561,13 @@
       </p:sp>
       <p:sp>
         <p:nvSpPr>
-          <p:cNvPr id="29" name="Text 27"/>
-          <p:cNvSpPr/>
-          <p:nvPr/>
-        </p:nvSpPr>
-        <p:spPr>
-          <a:xfrm>
-            <a:off x="5742432" y="3364992"/>
+          <p:cNvPr id="32" name="Text 30"/>
+          <p:cNvSpPr/>
+          <p:nvPr/>
+        </p:nvSpPr>
+        <p:spPr>
+          <a:xfrm>
+            <a:off x="4370832" y="3364992"/>
             <a:ext cx="1645920" cy="475488"/>
           </a:xfrm>
           <a:prstGeom prst="rect">
@@ -14473,7 +14592,7 @@
                 <a:ea typeface="Trebuchet MS" pitchFamily="34" charset="-122"/>
                 <a:cs typeface="Trebuchet MS" pitchFamily="34" charset="-120"/>
               </a:rPr>
-              <a:t>struct</a:t>
+              <a:t>struc</a:t>
             </a:r>
             <a:endParaRPr lang="en-US" sz="1400" dirty="0"/>
           </a:p>
@@ -14481,7 +14600,112 @@
       </p:sp>
       <p:sp>
         <p:nvSpPr>
-          <p:cNvPr id="30" name="Shape 28"/>
+          <p:cNvPr id="33" name="Text 31"/>
+          <p:cNvSpPr/>
+          <p:nvPr/>
+        </p:nvSpPr>
+        <p:spPr>
+          <a:xfrm>
+            <a:off x="6016752" y="3364992"/>
+            <a:ext cx="411480" cy="475488"/>
+          </a:xfrm>
+          <a:prstGeom prst="rect">
+            <a:avLst/>
+          </a:prstGeom>
+          <a:noFill/>
+          <a:ln/>
+        </p:spPr>
+        <p:txBody>
+          <a:bodyPr wrap="square" lIns="0" tIns="0" rIns="0" bIns="0" rtlCol="0" anchor="ctr"/>
+          <a:lstStyle/>
+          <a:p>
+            <a:pPr algn="ctr" indent="0" marL="0">
+              <a:buNone/>
+            </a:pPr>
+            <a:r>
+              <a:rPr lang="en-US" sz="1600" b="1" dirty="0">
+                <a:solidFill>
+                  <a:srgbClr val="0D9488"/>
+                </a:solidFill>
+                <a:latin typeface="Trebuchet MS" pitchFamily="34" charset="0"/>
+                <a:ea typeface="Trebuchet MS" pitchFamily="34" charset="-122"/>
+                <a:cs typeface="Trebuchet MS" pitchFamily="34" charset="-120"/>
+              </a:rPr>
+              <a:t>·</a:t>
+            </a:r>
+            <a:endParaRPr lang="en-US" sz="1600" dirty="0"/>
+          </a:p>
+        </p:txBody>
+      </p:sp>
+      <p:sp>
+        <p:nvSpPr>
+          <p:cNvPr id="34" name="Shape 32"/>
+          <p:cNvSpPr/>
+          <p:nvPr/>
+        </p:nvSpPr>
+        <p:spPr>
+          <a:xfrm>
+            <a:off x="6428232" y="3364992"/>
+            <a:ext cx="1645920" cy="475488"/>
+          </a:xfrm>
+          <a:prstGeom prst="rect">
+            <a:avLst>
+              <a:gd name="adj" fmla="val 9615"/>
+            </a:avLst>
+          </a:prstGeom>
+          <a:solidFill>
+            <a:srgbClr val="FFFFFF"/>
+          </a:solidFill>
+          <a:ln w="12700">
+            <a:solidFill>
+              <a:srgbClr val="0D9488"/>
+            </a:solidFill>
+            <a:prstDash val="solid"/>
+          </a:ln>
+        </p:spPr>
+      </p:sp>
+      <p:sp>
+        <p:nvSpPr>
+          <p:cNvPr id="35" name="Text 33"/>
+          <p:cNvSpPr/>
+          <p:nvPr/>
+        </p:nvSpPr>
+        <p:spPr>
+          <a:xfrm>
+            <a:off x="6428232" y="3364992"/>
+            <a:ext cx="1645920" cy="475488"/>
+          </a:xfrm>
+          <a:prstGeom prst="rect">
+            <a:avLst/>
+          </a:prstGeom>
+          <a:noFill/>
+          <a:ln/>
+        </p:spPr>
+        <p:txBody>
+          <a:bodyPr wrap="square" lIns="0" tIns="0" rIns="0" bIns="0" rtlCol="0" anchor="ctr"/>
+          <a:lstStyle/>
+          <a:p>
+            <a:pPr algn="ctr" indent="0" marL="0">
+              <a:buNone/>
+            </a:pPr>
+            <a:r>
+              <a:rPr lang="en-US" sz="1400" b="1" dirty="0">
+                <a:solidFill>
+                  <a:srgbClr val="0D9488"/>
+                </a:solidFill>
+                <a:latin typeface="Trebuchet MS" pitchFamily="34" charset="0"/>
+                <a:ea typeface="Trebuchet MS" pitchFamily="34" charset="-122"/>
+                <a:cs typeface="Trebuchet MS" pitchFamily="34" charset="-120"/>
+              </a:rPr>
+              <a:t>tive</a:t>
+            </a:r>
+            <a:endParaRPr lang="en-US" sz="1400" dirty="0"/>
+          </a:p>
+        </p:txBody>
+      </p:sp>
+      <p:sp>
+        <p:nvSpPr>
+          <p:cNvPr id="36" name="Shape 34"/>
           <p:cNvSpPr/>
           <p:nvPr/>
         </p:nvSpPr>
@@ -14508,7 +14732,7 @@
       </p:sp>
       <p:sp>
         <p:nvSpPr>
-          <p:cNvPr id="31" name="Text 29"/>
+          <p:cNvPr id="37" name="Text 35"/>
           <p:cNvSpPr/>
           <p:nvPr/>
         </p:nvSpPr>
@@ -14547,7 +14771,7 @@
       </p:sp>
       <p:sp>
         <p:nvSpPr>
-          <p:cNvPr id="32" name="Shape 30"/>
+          <p:cNvPr id="38" name="Shape 36"/>
           <p:cNvSpPr/>
           <p:nvPr/>
         </p:nvSpPr>
@@ -14574,7 +14798,7 @@
       </p:sp>
       <p:sp>
         <p:nvSpPr>
-          <p:cNvPr id="33" name="Text 31"/>
+          <p:cNvPr id="39" name="Text 37"/>
           <p:cNvSpPr/>
           <p:nvPr/>
         </p:nvSpPr>
@@ -15301,7 +15525,7 @@
                 <a:ea typeface="Trebuchet MS" pitchFamily="34" charset="-122"/>
                 <a:cs typeface="Trebuchet MS" pitchFamily="34" charset="-120"/>
               </a:rPr>
-              <a:t>construct</a:t>
+              <a:t>constructive</a:t>
             </a:r>
             <a:endParaRPr lang="en-US" sz="2800" dirty="0"/>
           </a:p>
@@ -15381,7 +15605,7 @@
         </p:nvSpPr>
         <p:spPr>
           <a:xfrm>
-            <a:off x="2938272" y="2258568"/>
+            <a:off x="2221992" y="2258568"/>
             <a:ext cx="1828800" cy="292608"/>
           </a:xfrm>
           <a:prstGeom prst="rect">
@@ -15415,7 +15639,7 @@
         </p:nvSpPr>
         <p:spPr>
           <a:xfrm>
-            <a:off x="2938272" y="2258568"/>
+            <a:off x="2221992" y="2258568"/>
             <a:ext cx="1828800" cy="292608"/>
           </a:xfrm>
           <a:prstGeom prst="rect">
@@ -15454,7 +15678,7 @@
         </p:nvSpPr>
         <p:spPr>
           <a:xfrm>
-            <a:off x="2938272" y="2569464"/>
+            <a:off x="2221992" y="2569464"/>
             <a:ext cx="1828800" cy="201168"/>
           </a:xfrm>
           <a:prstGeom prst="rect">
@@ -15479,7 +15703,7 @@
                 <a:ea typeface="Calibri" pitchFamily="34" charset="-122"/>
                 <a:cs typeface="Calibri" pitchFamily="34" charset="-120"/>
               </a:rPr>
-              <a:t>together, with</a:t>
+              <a:t>together or with</a:t>
             </a:r>
             <a:endParaRPr lang="en-US" sz="850" dirty="0"/>
           </a:p>
@@ -15493,7 +15717,7 @@
         </p:nvSpPr>
         <p:spPr>
           <a:xfrm>
-            <a:off x="5803392" y="2258568"/>
+            <a:off x="4370832" y="2258568"/>
             <a:ext cx="1828800" cy="292608"/>
           </a:xfrm>
           <a:prstGeom prst="rect">
@@ -15527,7 +15751,7 @@
         </p:nvSpPr>
         <p:spPr>
           <a:xfrm>
-            <a:off x="5803392" y="2258568"/>
+            <a:off x="4370832" y="2258568"/>
             <a:ext cx="1828800" cy="292608"/>
           </a:xfrm>
           <a:prstGeom prst="rect">
@@ -15566,7 +15790,7 @@
         </p:nvSpPr>
         <p:spPr>
           <a:xfrm>
-            <a:off x="5803392" y="2569464"/>
+            <a:off x="4370832" y="2569464"/>
             <a:ext cx="1828800" cy="201168"/>
           </a:xfrm>
           <a:prstGeom prst="rect">
@@ -15591,7 +15815,7 @@
                 <a:ea typeface="Calibri" pitchFamily="34" charset="-122"/>
                 <a:cs typeface="Calibri" pitchFamily="34" charset="-120"/>
               </a:rPr>
-              <a:t>to build or arrange</a:t>
+              <a:t>to build</a:t>
             </a:r>
             <a:endParaRPr lang="en-US" sz="850" dirty="0"/>
           </a:p>
@@ -15600,6 +15824,118 @@
       <p:sp>
         <p:nvSpPr>
           <p:cNvPr id="22" name="Shape 20"/>
+          <p:cNvSpPr/>
+          <p:nvPr/>
+        </p:nvSpPr>
+        <p:spPr>
+          <a:xfrm>
+            <a:off x="6519672" y="2258568"/>
+            <a:ext cx="1828800" cy="292608"/>
+          </a:xfrm>
+          <a:prstGeom prst="rect">
+            <a:avLst>
+              <a:gd name="adj" fmla="val 25000"/>
+            </a:avLst>
+          </a:prstGeom>
+          <a:solidFill>
+            <a:srgbClr val="FCE7F3"/>
+          </a:solidFill>
+          <a:ln w="19050">
+            <a:solidFill>
+              <a:srgbClr val="DB2777"/>
+            </a:solidFill>
+            <a:prstDash val="solid"/>
+          </a:ln>
+          <a:effectLst>
+            <a:outerShdw sx="100000" sy="100000" kx="0" ky="0" algn="bl" rotWithShape="0" blurRad="101600" dist="38100" dir="8100000">
+              <a:srgbClr val="000000">
+                <a:alpha val="12000"/>
+              </a:srgbClr>
+            </a:outerShdw>
+          </a:effectLst>
+        </p:spPr>
+      </p:sp>
+      <p:sp>
+        <p:nvSpPr>
+          <p:cNvPr id="23" name="Text 21"/>
+          <p:cNvSpPr/>
+          <p:nvPr/>
+        </p:nvSpPr>
+        <p:spPr>
+          <a:xfrm>
+            <a:off x="6519672" y="2258568"/>
+            <a:ext cx="1828800" cy="292608"/>
+          </a:xfrm>
+          <a:prstGeom prst="rect">
+            <a:avLst/>
+          </a:prstGeom>
+          <a:noFill/>
+          <a:ln/>
+        </p:spPr>
+        <p:txBody>
+          <a:bodyPr wrap="square" lIns="0" tIns="0" rIns="0" bIns="0" rtlCol="0" anchor="ctr"/>
+          <a:lstStyle/>
+          <a:p>
+            <a:pPr algn="ctr" indent="0" marL="0">
+              <a:buNone/>
+            </a:pPr>
+            <a:r>
+              <a:rPr lang="en-US" sz="1300" b="1" dirty="0">
+                <a:solidFill>
+                  <a:srgbClr val="9D174D"/>
+                </a:solidFill>
+                <a:latin typeface="Trebuchet MS" pitchFamily="34" charset="0"/>
+                <a:ea typeface="Trebuchet MS" pitchFamily="34" charset="-122"/>
+                <a:cs typeface="Trebuchet MS" pitchFamily="34" charset="-120"/>
+              </a:rPr>
+              <a:t>ive</a:t>
+            </a:r>
+            <a:endParaRPr lang="en-US" sz="1300" dirty="0"/>
+          </a:p>
+        </p:txBody>
+      </p:sp>
+      <p:sp>
+        <p:nvSpPr>
+          <p:cNvPr id="24" name="Text 22"/>
+          <p:cNvSpPr/>
+          <p:nvPr/>
+        </p:nvSpPr>
+        <p:spPr>
+          <a:xfrm>
+            <a:off x="6519672" y="2569464"/>
+            <a:ext cx="1828800" cy="201168"/>
+          </a:xfrm>
+          <a:prstGeom prst="rect">
+            <a:avLst/>
+          </a:prstGeom>
+          <a:noFill/>
+          <a:ln/>
+        </p:spPr>
+        <p:txBody>
+          <a:bodyPr wrap="square" lIns="0" tIns="0" rIns="0" bIns="0" rtlCol="0" anchor="t"/>
+          <a:lstStyle/>
+          <a:p>
+            <a:pPr algn="ctr" indent="0" marL="0">
+              <a:buNone/>
+            </a:pPr>
+            <a:r>
+              <a:rPr lang="en-US" sz="850" dirty="0">
+                <a:solidFill>
+                  <a:srgbClr val="475569"/>
+                </a:solidFill>
+                <a:latin typeface="Calibri" pitchFamily="34" charset="0"/>
+                <a:ea typeface="Calibri" pitchFamily="34" charset="-122"/>
+                <a:cs typeface="Calibri" pitchFamily="34" charset="-120"/>
+              </a:rPr>
+              <a:t>having the quality of</a:t>
+            </a:r>
+            <a:endParaRPr lang="en-US" sz="850" dirty="0"/>
+          </a:p>
+        </p:txBody>
+      </p:sp>
+      <p:sp>
+        <p:nvSpPr>
+          <p:cNvPr id="25" name="Shape 23"/>
           <p:cNvSpPr/>
           <p:nvPr/>
         </p:nvSpPr>
@@ -15626,7 +15962,7 @@
       </p:sp>
       <p:sp>
         <p:nvSpPr>
-          <p:cNvPr id="23" name="Text 21"/>
+          <p:cNvPr id="26" name="Text 24"/>
           <p:cNvSpPr/>
           <p:nvPr/>
         </p:nvSpPr>
@@ -15665,7 +16001,7 @@
       </p:sp>
       <p:sp>
         <p:nvSpPr>
-          <p:cNvPr id="24" name="Shape 22"/>
+          <p:cNvPr id="27" name="Shape 25"/>
           <p:cNvSpPr/>
           <p:nvPr/>
         </p:nvSpPr>
@@ -15692,13 +16028,13 @@
       </p:sp>
       <p:sp>
         <p:nvSpPr>
-          <p:cNvPr id="25" name="Shape 23"/>
-          <p:cNvSpPr/>
-          <p:nvPr/>
-        </p:nvSpPr>
-        <p:spPr>
-          <a:xfrm>
-            <a:off x="2999232" y="3364992"/>
+          <p:cNvPr id="28" name="Shape 26"/>
+          <p:cNvSpPr/>
+          <p:nvPr/>
+        </p:nvSpPr>
+        <p:spPr>
+          <a:xfrm>
+            <a:off x="2313432" y="3364992"/>
             <a:ext cx="1645920" cy="475488"/>
           </a:xfrm>
           <a:prstGeom prst="rect">
@@ -15719,13 +16055,13 @@
       </p:sp>
       <p:sp>
         <p:nvSpPr>
-          <p:cNvPr id="26" name="Text 24"/>
-          <p:cNvSpPr/>
-          <p:nvPr/>
-        </p:nvSpPr>
-        <p:spPr>
-          <a:xfrm>
-            <a:off x="2999232" y="3364992"/>
+          <p:cNvPr id="29" name="Text 27"/>
+          <p:cNvSpPr/>
+          <p:nvPr/>
+        </p:nvSpPr>
+        <p:spPr>
+          <a:xfrm>
+            <a:off x="2313432" y="3364992"/>
             <a:ext cx="1645920" cy="475488"/>
           </a:xfrm>
           <a:prstGeom prst="rect">
@@ -15758,14 +16094,14 @@
       </p:sp>
       <p:sp>
         <p:nvSpPr>
-          <p:cNvPr id="27" name="Text 25"/>
-          <p:cNvSpPr/>
-          <p:nvPr/>
-        </p:nvSpPr>
-        <p:spPr>
-          <a:xfrm>
-            <a:off x="4645152" y="3364992"/>
-            <a:ext cx="1097280" cy="475488"/>
+          <p:cNvPr id="30" name="Text 28"/>
+          <p:cNvSpPr/>
+          <p:nvPr/>
+        </p:nvSpPr>
+        <p:spPr>
+          <a:xfrm>
+            <a:off x="3959352" y="3364992"/>
+            <a:ext cx="411480" cy="475488"/>
           </a:xfrm>
           <a:prstGeom prst="rect">
             <a:avLst/>
@@ -15797,13 +16133,13 @@
       </p:sp>
       <p:sp>
         <p:nvSpPr>
-          <p:cNvPr id="28" name="Shape 26"/>
-          <p:cNvSpPr/>
-          <p:nvPr/>
-        </p:nvSpPr>
-        <p:spPr>
-          <a:xfrm>
-            <a:off x="5742432" y="3364992"/>
+          <p:cNvPr id="31" name="Shape 29"/>
+          <p:cNvSpPr/>
+          <p:nvPr/>
+        </p:nvSpPr>
+        <p:spPr>
+          <a:xfrm>
+            <a:off x="4370832" y="3364992"/>
             <a:ext cx="1645920" cy="475488"/>
           </a:xfrm>
           <a:prstGeom prst="rect">
@@ -15824,13 +16160,13 @@
       </p:sp>
       <p:sp>
         <p:nvSpPr>
-          <p:cNvPr id="29" name="Text 27"/>
-          <p:cNvSpPr/>
-          <p:nvPr/>
-        </p:nvSpPr>
-        <p:spPr>
-          <a:xfrm>
-            <a:off x="5742432" y="3364992"/>
+          <p:cNvPr id="32" name="Text 30"/>
+          <p:cNvSpPr/>
+          <p:nvPr/>
+        </p:nvSpPr>
+        <p:spPr>
+          <a:xfrm>
+            <a:off x="4370832" y="3364992"/>
             <a:ext cx="1645920" cy="475488"/>
           </a:xfrm>
           <a:prstGeom prst="rect">
@@ -15855,7 +16191,7 @@
                 <a:ea typeface="Trebuchet MS" pitchFamily="34" charset="-122"/>
                 <a:cs typeface="Trebuchet MS" pitchFamily="34" charset="-120"/>
               </a:rPr>
-              <a:t>struct</a:t>
+              <a:t>struc</a:t>
             </a:r>
             <a:endParaRPr lang="en-US" sz="1400" dirty="0"/>
           </a:p>
@@ -15863,7 +16199,112 @@
       </p:sp>
       <p:sp>
         <p:nvSpPr>
-          <p:cNvPr id="30" name="Shape 28"/>
+          <p:cNvPr id="33" name="Text 31"/>
+          <p:cNvSpPr/>
+          <p:nvPr/>
+        </p:nvSpPr>
+        <p:spPr>
+          <a:xfrm>
+            <a:off x="6016752" y="3364992"/>
+            <a:ext cx="411480" cy="475488"/>
+          </a:xfrm>
+          <a:prstGeom prst="rect">
+            <a:avLst/>
+          </a:prstGeom>
+          <a:noFill/>
+          <a:ln/>
+        </p:spPr>
+        <p:txBody>
+          <a:bodyPr wrap="square" lIns="0" tIns="0" rIns="0" bIns="0" rtlCol="0" anchor="ctr"/>
+          <a:lstStyle/>
+          <a:p>
+            <a:pPr algn="ctr" indent="0" marL="0">
+              <a:buNone/>
+            </a:pPr>
+            <a:r>
+              <a:rPr lang="en-US" sz="1600" b="1" dirty="0">
+                <a:solidFill>
+                  <a:srgbClr val="0D9488"/>
+                </a:solidFill>
+                <a:latin typeface="Trebuchet MS" pitchFamily="34" charset="0"/>
+                <a:ea typeface="Trebuchet MS" pitchFamily="34" charset="-122"/>
+                <a:cs typeface="Trebuchet MS" pitchFamily="34" charset="-120"/>
+              </a:rPr>
+              <a:t>·</a:t>
+            </a:r>
+            <a:endParaRPr lang="en-US" sz="1600" dirty="0"/>
+          </a:p>
+        </p:txBody>
+      </p:sp>
+      <p:sp>
+        <p:nvSpPr>
+          <p:cNvPr id="34" name="Shape 32"/>
+          <p:cNvSpPr/>
+          <p:nvPr/>
+        </p:nvSpPr>
+        <p:spPr>
+          <a:xfrm>
+            <a:off x="6428232" y="3364992"/>
+            <a:ext cx="1645920" cy="475488"/>
+          </a:xfrm>
+          <a:prstGeom prst="rect">
+            <a:avLst>
+              <a:gd name="adj" fmla="val 9615"/>
+            </a:avLst>
+          </a:prstGeom>
+          <a:solidFill>
+            <a:srgbClr val="FFFFFF"/>
+          </a:solidFill>
+          <a:ln w="12700">
+            <a:solidFill>
+              <a:srgbClr val="0D9488"/>
+            </a:solidFill>
+            <a:prstDash val="solid"/>
+          </a:ln>
+        </p:spPr>
+      </p:sp>
+      <p:sp>
+        <p:nvSpPr>
+          <p:cNvPr id="35" name="Text 33"/>
+          <p:cNvSpPr/>
+          <p:nvPr/>
+        </p:nvSpPr>
+        <p:spPr>
+          <a:xfrm>
+            <a:off x="6428232" y="3364992"/>
+            <a:ext cx="1645920" cy="475488"/>
+          </a:xfrm>
+          <a:prstGeom prst="rect">
+            <a:avLst/>
+          </a:prstGeom>
+          <a:noFill/>
+          <a:ln/>
+        </p:spPr>
+        <p:txBody>
+          <a:bodyPr wrap="square" lIns="0" tIns="0" rIns="0" bIns="0" rtlCol="0" anchor="ctr"/>
+          <a:lstStyle/>
+          <a:p>
+            <a:pPr algn="ctr" indent="0" marL="0">
+              <a:buNone/>
+            </a:pPr>
+            <a:r>
+              <a:rPr lang="en-US" sz="1400" b="1" dirty="0">
+                <a:solidFill>
+                  <a:srgbClr val="0D9488"/>
+                </a:solidFill>
+                <a:latin typeface="Trebuchet MS" pitchFamily="34" charset="0"/>
+                <a:ea typeface="Trebuchet MS" pitchFamily="34" charset="-122"/>
+                <a:cs typeface="Trebuchet MS" pitchFamily="34" charset="-120"/>
+              </a:rPr>
+              <a:t>tive</a:t>
+            </a:r>
+            <a:endParaRPr lang="en-US" sz="1400" dirty="0"/>
+          </a:p>
+        </p:txBody>
+      </p:sp>
+      <p:sp>
+        <p:nvSpPr>
+          <p:cNvPr id="36" name="Shape 34"/>
           <p:cNvSpPr/>
           <p:nvPr/>
         </p:nvSpPr>
@@ -15890,7 +16331,7 @@
       </p:sp>
       <p:sp>
         <p:nvSpPr>
-          <p:cNvPr id="31" name="Text 29"/>
+          <p:cNvPr id="37" name="Text 35"/>
           <p:cNvSpPr/>
           <p:nvPr/>
         </p:nvSpPr>
@@ -15929,18 +16370,18 @@
       </p:sp>
       <p:sp>
         <p:nvSpPr>
-          <p:cNvPr id="32" name="Shape 30"/>
+          <p:cNvPr id="38" name="Shape 36"/>
           <p:cNvSpPr/>
           <p:nvPr/>
         </p:nvSpPr>
         <p:spPr>
           <a:xfrm>
             <a:off x="1874520" y="4096512"/>
-            <a:ext cx="6903720" cy="658368"/>
+            <a:ext cx="6903720" cy="804672"/>
           </a:xfrm>
           <a:prstGeom prst="rect">
             <a:avLst>
-              <a:gd name="adj" fmla="val 8333"/>
+              <a:gd name="adj" fmla="val 6818"/>
             </a:avLst>
           </a:prstGeom>
           <a:solidFill>
@@ -15956,18 +16397,18 @@
       </p:sp>
       <p:sp>
         <p:nvSpPr>
-          <p:cNvPr id="33" name="Shape 31"/>
-          <p:cNvSpPr/>
-          <p:nvPr/>
-        </p:nvSpPr>
-        <p:spPr>
-          <a:xfrm>
-            <a:off x="1951330" y="4169664"/>
-            <a:ext cx="676656" cy="475488"/>
+          <p:cNvPr id="39" name="Shape 37"/>
+          <p:cNvSpPr/>
+          <p:nvPr/>
+        </p:nvSpPr>
+        <p:spPr>
+          <a:xfrm>
+            <a:off x="1952244" y="4169664"/>
+            <a:ext cx="543652" cy="384048"/>
           </a:xfrm>
           <a:prstGeom prst="rect">
             <a:avLst>
-              <a:gd name="adj" fmla="val 7692"/>
+              <a:gd name="adj" fmla="val 9524"/>
             </a:avLst>
           </a:prstGeom>
           <a:solidFill>
@@ -15983,14 +16424,14 @@
       </p:sp>
       <p:sp>
         <p:nvSpPr>
-          <p:cNvPr id="34" name="Text 32"/>
-          <p:cNvSpPr/>
-          <p:nvPr/>
-        </p:nvSpPr>
-        <p:spPr>
-          <a:xfrm>
-            <a:off x="1951330" y="4169664"/>
-            <a:ext cx="676656" cy="475488"/>
+          <p:cNvPr id="40" name="Text 38"/>
+          <p:cNvSpPr/>
+          <p:nvPr/>
+        </p:nvSpPr>
+        <p:spPr>
+          <a:xfrm>
+            <a:off x="1952244" y="4169664"/>
+            <a:ext cx="543652" cy="384048"/>
           </a:xfrm>
           <a:prstGeom prst="rect">
             <a:avLst/>
@@ -16022,18 +16463,18 @@
       </p:sp>
       <p:sp>
         <p:nvSpPr>
-          <p:cNvPr id="35" name="Shape 33"/>
-          <p:cNvSpPr/>
-          <p:nvPr/>
-        </p:nvSpPr>
-        <p:spPr>
-          <a:xfrm>
-            <a:off x="2677363" y="4169664"/>
-            <a:ext cx="676656" cy="475488"/>
+          <p:cNvPr id="41" name="Shape 39"/>
+          <p:cNvSpPr/>
+          <p:nvPr/>
+        </p:nvSpPr>
+        <p:spPr>
+          <a:xfrm>
+            <a:off x="2546188" y="4169664"/>
+            <a:ext cx="543652" cy="384048"/>
           </a:xfrm>
           <a:prstGeom prst="rect">
             <a:avLst>
-              <a:gd name="adj" fmla="val 7692"/>
+              <a:gd name="adj" fmla="val 9524"/>
             </a:avLst>
           </a:prstGeom>
           <a:solidFill>
@@ -16049,14 +16490,14 @@
       </p:sp>
       <p:sp>
         <p:nvSpPr>
-          <p:cNvPr id="36" name="Text 34"/>
-          <p:cNvSpPr/>
-          <p:nvPr/>
-        </p:nvSpPr>
-        <p:spPr>
-          <a:xfrm>
-            <a:off x="2677363" y="4169664"/>
-            <a:ext cx="676656" cy="475488"/>
+          <p:cNvPr id="42" name="Text 40"/>
+          <p:cNvSpPr/>
+          <p:nvPr/>
+        </p:nvSpPr>
+        <p:spPr>
+          <a:xfrm>
+            <a:off x="2546188" y="4169664"/>
+            <a:ext cx="543652" cy="384048"/>
           </a:xfrm>
           <a:prstGeom prst="rect">
             <a:avLst/>
@@ -16088,18 +16529,18 @@
       </p:sp>
       <p:sp>
         <p:nvSpPr>
-          <p:cNvPr id="37" name="Shape 35"/>
-          <p:cNvSpPr/>
-          <p:nvPr/>
-        </p:nvSpPr>
-        <p:spPr>
-          <a:xfrm>
-            <a:off x="3403397" y="4169664"/>
-            <a:ext cx="676656" cy="475488"/>
+          <p:cNvPr id="43" name="Shape 41"/>
+          <p:cNvSpPr/>
+          <p:nvPr/>
+        </p:nvSpPr>
+        <p:spPr>
+          <a:xfrm>
+            <a:off x="3140133" y="4169664"/>
+            <a:ext cx="543652" cy="384048"/>
           </a:xfrm>
           <a:prstGeom prst="rect">
             <a:avLst>
-              <a:gd name="adj" fmla="val 7692"/>
+              <a:gd name="adj" fmla="val 9524"/>
             </a:avLst>
           </a:prstGeom>
           <a:solidFill>
@@ -16115,14 +16556,14 @@
       </p:sp>
       <p:sp>
         <p:nvSpPr>
-          <p:cNvPr id="38" name="Text 36"/>
-          <p:cNvSpPr/>
-          <p:nvPr/>
-        </p:nvSpPr>
-        <p:spPr>
-          <a:xfrm>
-            <a:off x="3403397" y="4169664"/>
-            <a:ext cx="676656" cy="475488"/>
+          <p:cNvPr id="44" name="Text 42"/>
+          <p:cNvSpPr/>
+          <p:nvPr/>
+        </p:nvSpPr>
+        <p:spPr>
+          <a:xfrm>
+            <a:off x="3140133" y="4169664"/>
+            <a:ext cx="543652" cy="384048"/>
           </a:xfrm>
           <a:prstGeom prst="rect">
             <a:avLst/>
@@ -16154,18 +16595,18 @@
       </p:sp>
       <p:sp>
         <p:nvSpPr>
-          <p:cNvPr id="39" name="Shape 37"/>
-          <p:cNvSpPr/>
-          <p:nvPr/>
-        </p:nvSpPr>
-        <p:spPr>
-          <a:xfrm>
-            <a:off x="4129430" y="4169664"/>
-            <a:ext cx="676656" cy="475488"/>
+          <p:cNvPr id="45" name="Shape 43"/>
+          <p:cNvSpPr/>
+          <p:nvPr/>
+        </p:nvSpPr>
+        <p:spPr>
+          <a:xfrm>
+            <a:off x="3734077" y="4169664"/>
+            <a:ext cx="543652" cy="384048"/>
           </a:xfrm>
           <a:prstGeom prst="rect">
             <a:avLst>
-              <a:gd name="adj" fmla="val 7692"/>
+              <a:gd name="adj" fmla="val 9524"/>
             </a:avLst>
           </a:prstGeom>
           <a:solidFill>
@@ -16181,14 +16622,14 @@
       </p:sp>
       <p:sp>
         <p:nvSpPr>
-          <p:cNvPr id="40" name="Text 38"/>
-          <p:cNvSpPr/>
-          <p:nvPr/>
-        </p:nvSpPr>
-        <p:spPr>
-          <a:xfrm>
-            <a:off x="4129430" y="4169664"/>
-            <a:ext cx="676656" cy="475488"/>
+          <p:cNvPr id="46" name="Text 44"/>
+          <p:cNvSpPr/>
+          <p:nvPr/>
+        </p:nvSpPr>
+        <p:spPr>
+          <a:xfrm>
+            <a:off x="3734077" y="4169664"/>
+            <a:ext cx="543652" cy="384048"/>
           </a:xfrm>
           <a:prstGeom prst="rect">
             <a:avLst/>
@@ -16220,18 +16661,18 @@
       </p:sp>
       <p:sp>
         <p:nvSpPr>
-          <p:cNvPr id="41" name="Shape 39"/>
-          <p:cNvSpPr/>
-          <p:nvPr/>
-        </p:nvSpPr>
-        <p:spPr>
-          <a:xfrm>
-            <a:off x="4855464" y="4169664"/>
-            <a:ext cx="676656" cy="475488"/>
+          <p:cNvPr id="47" name="Shape 45"/>
+          <p:cNvSpPr/>
+          <p:nvPr/>
+        </p:nvSpPr>
+        <p:spPr>
+          <a:xfrm>
+            <a:off x="4328021" y="4169664"/>
+            <a:ext cx="543652" cy="384048"/>
           </a:xfrm>
           <a:prstGeom prst="rect">
             <a:avLst>
-              <a:gd name="adj" fmla="val 7692"/>
+              <a:gd name="adj" fmla="val 9524"/>
             </a:avLst>
           </a:prstGeom>
           <a:solidFill>
@@ -16247,14 +16688,14 @@
       </p:sp>
       <p:sp>
         <p:nvSpPr>
-          <p:cNvPr id="42" name="Text 40"/>
-          <p:cNvSpPr/>
-          <p:nvPr/>
-        </p:nvSpPr>
-        <p:spPr>
-          <a:xfrm>
-            <a:off x="4855464" y="4169664"/>
-            <a:ext cx="676656" cy="475488"/>
+          <p:cNvPr id="48" name="Text 46"/>
+          <p:cNvSpPr/>
+          <p:nvPr/>
+        </p:nvSpPr>
+        <p:spPr>
+          <a:xfrm>
+            <a:off x="4328021" y="4169664"/>
+            <a:ext cx="543652" cy="384048"/>
           </a:xfrm>
           <a:prstGeom prst="rect">
             <a:avLst/>
@@ -16286,18 +16727,18 @@
       </p:sp>
       <p:sp>
         <p:nvSpPr>
-          <p:cNvPr id="43" name="Shape 41"/>
-          <p:cNvSpPr/>
-          <p:nvPr/>
-        </p:nvSpPr>
-        <p:spPr>
-          <a:xfrm>
-            <a:off x="5581498" y="4169664"/>
-            <a:ext cx="676656" cy="475488"/>
+          <p:cNvPr id="49" name="Shape 47"/>
+          <p:cNvSpPr/>
+          <p:nvPr/>
+        </p:nvSpPr>
+        <p:spPr>
+          <a:xfrm>
+            <a:off x="4921966" y="4169664"/>
+            <a:ext cx="543652" cy="384048"/>
           </a:xfrm>
           <a:prstGeom prst="rect">
             <a:avLst>
-              <a:gd name="adj" fmla="val 7692"/>
+              <a:gd name="adj" fmla="val 9524"/>
             </a:avLst>
           </a:prstGeom>
           <a:solidFill>
@@ -16313,14 +16754,14 @@
       </p:sp>
       <p:sp>
         <p:nvSpPr>
-          <p:cNvPr id="44" name="Text 42"/>
-          <p:cNvSpPr/>
-          <p:nvPr/>
-        </p:nvSpPr>
-        <p:spPr>
-          <a:xfrm>
-            <a:off x="5581498" y="4169664"/>
-            <a:ext cx="676656" cy="475488"/>
+          <p:cNvPr id="50" name="Text 48"/>
+          <p:cNvSpPr/>
+          <p:nvPr/>
+        </p:nvSpPr>
+        <p:spPr>
+          <a:xfrm>
+            <a:off x="4921966" y="4169664"/>
+            <a:ext cx="543652" cy="384048"/>
           </a:xfrm>
           <a:prstGeom prst="rect">
             <a:avLst/>
@@ -16352,18 +16793,18 @@
       </p:sp>
       <p:sp>
         <p:nvSpPr>
-          <p:cNvPr id="45" name="Shape 43"/>
-          <p:cNvSpPr/>
-          <p:nvPr/>
-        </p:nvSpPr>
-        <p:spPr>
-          <a:xfrm>
-            <a:off x="6307531" y="4169664"/>
-            <a:ext cx="676656" cy="475488"/>
+          <p:cNvPr id="51" name="Shape 49"/>
+          <p:cNvSpPr/>
+          <p:nvPr/>
+        </p:nvSpPr>
+        <p:spPr>
+          <a:xfrm>
+            <a:off x="5515910" y="4169664"/>
+            <a:ext cx="543652" cy="384048"/>
           </a:xfrm>
           <a:prstGeom prst="rect">
             <a:avLst>
-              <a:gd name="adj" fmla="val 7692"/>
+              <a:gd name="adj" fmla="val 9524"/>
             </a:avLst>
           </a:prstGeom>
           <a:solidFill>
@@ -16379,14 +16820,14 @@
       </p:sp>
       <p:sp>
         <p:nvSpPr>
-          <p:cNvPr id="46" name="Text 44"/>
-          <p:cNvSpPr/>
-          <p:nvPr/>
-        </p:nvSpPr>
-        <p:spPr>
-          <a:xfrm>
-            <a:off x="6307531" y="4169664"/>
-            <a:ext cx="676656" cy="475488"/>
+          <p:cNvPr id="52" name="Text 50"/>
+          <p:cNvSpPr/>
+          <p:nvPr/>
+        </p:nvSpPr>
+        <p:spPr>
+          <a:xfrm>
+            <a:off x="5515910" y="4169664"/>
+            <a:ext cx="543652" cy="384048"/>
           </a:xfrm>
           <a:prstGeom prst="rect">
             <a:avLst/>
@@ -16418,18 +16859,18 @@
       </p:sp>
       <p:sp>
         <p:nvSpPr>
-          <p:cNvPr id="47" name="Shape 45"/>
-          <p:cNvSpPr/>
-          <p:nvPr/>
-        </p:nvSpPr>
-        <p:spPr>
-          <a:xfrm>
-            <a:off x="7033565" y="4169664"/>
-            <a:ext cx="676656" cy="475488"/>
+          <p:cNvPr id="53" name="Shape 51"/>
+          <p:cNvSpPr/>
+          <p:nvPr/>
+        </p:nvSpPr>
+        <p:spPr>
+          <a:xfrm>
+            <a:off x="6109855" y="4169664"/>
+            <a:ext cx="543652" cy="384048"/>
           </a:xfrm>
           <a:prstGeom prst="rect">
             <a:avLst>
-              <a:gd name="adj" fmla="val 7692"/>
+              <a:gd name="adj" fmla="val 9524"/>
             </a:avLst>
           </a:prstGeom>
           <a:solidFill>
@@ -16445,14 +16886,14 @@
       </p:sp>
       <p:sp>
         <p:nvSpPr>
-          <p:cNvPr id="48" name="Text 46"/>
-          <p:cNvSpPr/>
-          <p:nvPr/>
-        </p:nvSpPr>
-        <p:spPr>
-          <a:xfrm>
-            <a:off x="7033565" y="4169664"/>
-            <a:ext cx="676656" cy="475488"/>
+          <p:cNvPr id="54" name="Text 52"/>
+          <p:cNvSpPr/>
+          <p:nvPr/>
+        </p:nvSpPr>
+        <p:spPr>
+          <a:xfrm>
+            <a:off x="6109855" y="4169664"/>
+            <a:ext cx="543652" cy="384048"/>
           </a:xfrm>
           <a:prstGeom prst="rect">
             <a:avLst/>
@@ -16484,18 +16925,18 @@
       </p:sp>
       <p:sp>
         <p:nvSpPr>
-          <p:cNvPr id="49" name="Shape 47"/>
-          <p:cNvSpPr/>
-          <p:nvPr/>
-        </p:nvSpPr>
-        <p:spPr>
-          <a:xfrm>
-            <a:off x="7759598" y="4169664"/>
-            <a:ext cx="676656" cy="475488"/>
+          <p:cNvPr id="55" name="Shape 53"/>
+          <p:cNvSpPr/>
+          <p:nvPr/>
+        </p:nvSpPr>
+        <p:spPr>
+          <a:xfrm>
+            <a:off x="6703799" y="4169664"/>
+            <a:ext cx="543652" cy="384048"/>
           </a:xfrm>
           <a:prstGeom prst="rect">
             <a:avLst>
-              <a:gd name="adj" fmla="val 7692"/>
+              <a:gd name="adj" fmla="val 9524"/>
             </a:avLst>
           </a:prstGeom>
           <a:solidFill>
@@ -16511,14 +16952,14 @@
       </p:sp>
       <p:sp>
         <p:nvSpPr>
-          <p:cNvPr id="50" name="Text 48"/>
-          <p:cNvSpPr/>
-          <p:nvPr/>
-        </p:nvSpPr>
-        <p:spPr>
-          <a:xfrm>
-            <a:off x="7759598" y="4169664"/>
-            <a:ext cx="676656" cy="475488"/>
+          <p:cNvPr id="56" name="Text 54"/>
+          <p:cNvSpPr/>
+          <p:nvPr/>
+        </p:nvSpPr>
+        <p:spPr>
+          <a:xfrm>
+            <a:off x="6703799" y="4169664"/>
+            <a:ext cx="543652" cy="384048"/>
           </a:xfrm>
           <a:prstGeom prst="rect">
             <a:avLst/>
@@ -16545,6 +16986,177 @@
               <a:t>t</a:t>
             </a:r>
             <a:endParaRPr lang="en-US" sz="900" dirty="0"/>
+          </a:p>
+        </p:txBody>
+      </p:sp>
+      <p:sp>
+        <p:nvSpPr>
+          <p:cNvPr id="57" name="Shape 55"/>
+          <p:cNvSpPr/>
+          <p:nvPr/>
+        </p:nvSpPr>
+        <p:spPr>
+          <a:xfrm>
+            <a:off x="7297743" y="4169664"/>
+            <a:ext cx="543652" cy="384048"/>
+          </a:xfrm>
+          <a:prstGeom prst="rect">
+            <a:avLst>
+              <a:gd name="adj" fmla="val 9524"/>
+            </a:avLst>
+          </a:prstGeom>
+          <a:solidFill>
+            <a:srgbClr val="FFFFFF"/>
+          </a:solidFill>
+          <a:ln w="12700">
+            <a:solidFill>
+              <a:srgbClr val="DB2777"/>
+            </a:solidFill>
+            <a:prstDash val="solid"/>
+          </a:ln>
+        </p:spPr>
+      </p:sp>
+      <p:sp>
+        <p:nvSpPr>
+          <p:cNvPr id="58" name="Text 56"/>
+          <p:cNvSpPr/>
+          <p:nvPr/>
+        </p:nvSpPr>
+        <p:spPr>
+          <a:xfrm>
+            <a:off x="7297743" y="4169664"/>
+            <a:ext cx="543652" cy="384048"/>
+          </a:xfrm>
+          <a:prstGeom prst="rect">
+            <a:avLst/>
+          </a:prstGeom>
+          <a:noFill/>
+          <a:ln/>
+        </p:spPr>
+        <p:txBody>
+          <a:bodyPr wrap="square" lIns="0" tIns="0" rIns="0" bIns="0" rtlCol="0" anchor="ctr"/>
+          <a:lstStyle/>
+          <a:p>
+            <a:pPr algn="ctr" indent="0" marL="0">
+              <a:buNone/>
+            </a:pPr>
+            <a:r>
+              <a:rPr lang="en-US" sz="900" b="1" dirty="0">
+                <a:solidFill>
+                  <a:srgbClr val="9D174D"/>
+                </a:solidFill>
+                <a:latin typeface="Trebuchet MS" pitchFamily="34" charset="0"/>
+                <a:ea typeface="Trebuchet MS" pitchFamily="34" charset="-122"/>
+                <a:cs typeface="Trebuchet MS" pitchFamily="34" charset="-120"/>
+              </a:rPr>
+              <a:t>i</a:t>
+            </a:r>
+            <a:endParaRPr lang="en-US" sz="900" dirty="0"/>
+          </a:p>
+        </p:txBody>
+      </p:sp>
+      <p:sp>
+        <p:nvSpPr>
+          <p:cNvPr id="59" name="Shape 57"/>
+          <p:cNvSpPr/>
+          <p:nvPr/>
+        </p:nvSpPr>
+        <p:spPr>
+          <a:xfrm>
+            <a:off x="7891688" y="4169664"/>
+            <a:ext cx="543652" cy="384048"/>
+          </a:xfrm>
+          <a:prstGeom prst="rect">
+            <a:avLst>
+              <a:gd name="adj" fmla="val 9524"/>
+            </a:avLst>
+          </a:prstGeom>
+          <a:solidFill>
+            <a:srgbClr val="FFFFFF"/>
+          </a:solidFill>
+          <a:ln w="12700">
+            <a:solidFill>
+              <a:srgbClr val="DB2777"/>
+            </a:solidFill>
+            <a:prstDash val="solid"/>
+          </a:ln>
+        </p:spPr>
+      </p:sp>
+      <p:sp>
+        <p:nvSpPr>
+          <p:cNvPr id="60" name="Text 58"/>
+          <p:cNvSpPr/>
+          <p:nvPr/>
+        </p:nvSpPr>
+        <p:spPr>
+          <a:xfrm>
+            <a:off x="7891688" y="4169664"/>
+            <a:ext cx="543652" cy="384048"/>
+          </a:xfrm>
+          <a:prstGeom prst="rect">
+            <a:avLst/>
+          </a:prstGeom>
+          <a:noFill/>
+          <a:ln/>
+        </p:spPr>
+        <p:txBody>
+          <a:bodyPr wrap="square" lIns="0" tIns="0" rIns="0" bIns="0" rtlCol="0" anchor="ctr"/>
+          <a:lstStyle/>
+          <a:p>
+            <a:pPr algn="ctr" indent="0" marL="0">
+              <a:buNone/>
+            </a:pPr>
+            <a:r>
+              <a:rPr lang="en-US" sz="900" b="1" dirty="0">
+                <a:solidFill>
+                  <a:srgbClr val="9D174D"/>
+                </a:solidFill>
+                <a:latin typeface="Trebuchet MS" pitchFamily="34" charset="0"/>
+                <a:ea typeface="Trebuchet MS" pitchFamily="34" charset="-122"/>
+                <a:cs typeface="Trebuchet MS" pitchFamily="34" charset="-120"/>
+              </a:rPr>
+              <a:t>ve</a:t>
+            </a:r>
+            <a:endParaRPr lang="en-US" sz="900" dirty="0"/>
+          </a:p>
+        </p:txBody>
+      </p:sp>
+      <p:sp>
+        <p:nvSpPr>
+          <p:cNvPr id="61" name="Text 59"/>
+          <p:cNvSpPr/>
+          <p:nvPr/>
+        </p:nvSpPr>
+        <p:spPr>
+          <a:xfrm>
+            <a:off x="7891688" y="4572000"/>
+            <a:ext cx="543652" cy="219456"/>
+          </a:xfrm>
+          <a:prstGeom prst="rect">
+            <a:avLst/>
+          </a:prstGeom>
+          <a:noFill/>
+          <a:ln/>
+        </p:spPr>
+        <p:txBody>
+          <a:bodyPr wrap="square" lIns="0" tIns="0" rIns="0" bIns="0" rtlCol="0" anchor="t"/>
+          <a:lstStyle/>
+          <a:p>
+            <a:pPr algn="ctr" indent="0" marL="0">
+              <a:buNone/>
+            </a:pPr>
+            <a:r>
+              <a:rPr lang="en-US" sz="750" i="1" dirty="0">
+                <a:solidFill>
+                  <a:srgbClr val="94A3B8"/>
+                </a:solidFill>
+                <a:latin typeface="Calibri" pitchFamily="34" charset="0"/>
+                <a:ea typeface="Calibri" pitchFamily="34" charset="-122"/>
+                <a:cs typeface="Calibri" pitchFamily="34" charset="-120"/>
+              </a:rPr>
+              <a:t>/v/</a:t>
+            </a:r>
+            <a:endParaRPr lang="en-US" sz="750" dirty="0"/>
           </a:p>
         </p:txBody>
       </p:sp>
@@ -17899,7 +18511,7 @@
                 <a:ea typeface="Calibri" pitchFamily="34" charset="-122"/>
                 <a:cs typeface="Calibri" pitchFamily="34" charset="-120"/>
               </a:rPr>
-              <a:t> of the old hall, they needed to </a:t>
+              <a:t> of the old bridge, workers began the </a:t>
             </a:r>
             <a:pPr algn="l" indent="0" marL="0">
               <a:buNone/>
@@ -17916,7 +18528,7 @@
                 <a:ea typeface="Calibri" pitchFamily="34" charset="-122"/>
                 <a:cs typeface="Calibri" pitchFamily="34" charset="-120"/>
               </a:rPr>
-              <a:t>reconstruct</a:t>
+              <a:t>reconstruction</a:t>
             </a:r>
             <a:pPr algn="l" indent="0" marL="0">
               <a:buNone/>
@@ -17930,7 +18542,7 @@
                 <a:ea typeface="Calibri" pitchFamily="34" charset="-122"/>
                 <a:cs typeface="Calibri" pitchFamily="34" charset="-120"/>
               </a:rPr>
-              <a:t> it using a solid </a:t>
+              <a:t> of a stronger </a:t>
             </a:r>
             <a:pPr algn="l" indent="0" marL="0">
               <a:buNone/>
@@ -18244,7 +18856,7 @@
                 <a:ea typeface="Trebuchet MS" pitchFamily="34" charset="-122"/>
                 <a:cs typeface="Trebuchet MS" pitchFamily="34" charset="-120"/>
               </a:rPr>
-              <a:t>reconstruct</a:t>
+              <a:t>reconstruction</a:t>
             </a:r>
             <a:endParaRPr lang="en-US" sz="1400" dirty="0"/>
           </a:p>
@@ -19847,7 +20459,7 @@
                 <a:ea typeface="Calibri" pitchFamily="34" charset="-122"/>
                 <a:cs typeface="Calibri" pitchFamily="34" charset="-120"/>
               </a:rPr>
-              <a:t>down, away, apart</a:t>
+              <a:t>undo or remove</a:t>
             </a:r>
             <a:endParaRPr lang="en-US" sz="850" dirty="0"/>
           </a:p>
@@ -19959,7 +20571,7 @@
                 <a:ea typeface="Calibri" pitchFamily="34" charset="-122"/>
                 <a:cs typeface="Calibri" pitchFamily="34" charset="-120"/>
               </a:rPr>
-              <a:t>to build or arrange</a:t>
+              <a:t>to build</a:t>
             </a:r>
             <a:endParaRPr lang="en-US" sz="850" dirty="0"/>
           </a:p>
@@ -20071,7 +20683,7 @@
                 <a:ea typeface="Calibri" pitchFamily="34" charset="-122"/>
                 <a:cs typeface="Calibri" pitchFamily="34" charset="-120"/>
               </a:rPr>
-              <a:t>act or result of</a:t>
+              <a:t>the act or result of</a:t>
             </a:r>
             <a:endParaRPr lang="en-US" sz="850" dirty="0"/>
           </a:p>
@@ -20944,7 +21556,7 @@
                 <a:ea typeface="Calibri" pitchFamily="34" charset="-122"/>
                 <a:cs typeface="Calibri" pitchFamily="34" charset="-120"/>
               </a:rPr>
-              <a:t>down, away, apart</a:t>
+              <a:t>undo or remove</a:t>
             </a:r>
             <a:endParaRPr lang="en-US" sz="850" dirty="0"/>
           </a:p>
@@ -21056,7 +21668,7 @@
                 <a:ea typeface="Calibri" pitchFamily="34" charset="-122"/>
                 <a:cs typeface="Calibri" pitchFamily="34" charset="-120"/>
               </a:rPr>
-              <a:t>to build or arrange</a:t>
+              <a:t>to build</a:t>
             </a:r>
             <a:endParaRPr lang="en-US" sz="850" dirty="0"/>
           </a:p>
@@ -21168,7 +21780,7 @@
                 <a:ea typeface="Calibri" pitchFamily="34" charset="-122"/>
                 <a:cs typeface="Calibri" pitchFamily="34" charset="-120"/>
               </a:rPr>
-              <a:t>act or result of</a:t>
+              <a:t>the act or result of</a:t>
             </a:r>
             <a:endParaRPr lang="en-US" sz="850" dirty="0"/>
           </a:p>
@@ -22278,7 +22890,7 @@
                 <a:ea typeface="Calibri" pitchFamily="34" charset="-122"/>
                 <a:cs typeface="Calibri" pitchFamily="34" charset="-120"/>
               </a:rPr>
-              <a:t>down, away, apart</a:t>
+              <a:t>undo or remove</a:t>
             </a:r>
             <a:endParaRPr lang="en-US" sz="850" dirty="0"/>
           </a:p>
@@ -22390,7 +23002,7 @@
                 <a:ea typeface="Calibri" pitchFamily="34" charset="-122"/>
                 <a:cs typeface="Calibri" pitchFamily="34" charset="-120"/>
               </a:rPr>
-              <a:t>to build or arrange</a:t>
+              <a:t>to build</a:t>
             </a:r>
             <a:endParaRPr lang="en-US" sz="850" dirty="0"/>
           </a:p>
@@ -22502,7 +23114,7 @@
                 <a:ea typeface="Calibri" pitchFamily="34" charset="-122"/>
                 <a:cs typeface="Calibri" pitchFamily="34" charset="-120"/>
               </a:rPr>
-              <a:t>act or result of</a:t>
+              <a:t>the act or result of</a:t>
             </a:r>
             <a:endParaRPr lang="en-US" sz="850" dirty="0"/>
           </a:p>
@@ -22952,11 +23564,11 @@
         <p:spPr>
           <a:xfrm>
             <a:off x="1874520" y="4096512"/>
-            <a:ext cx="6903720" cy="804672"/>
+            <a:ext cx="6903720" cy="658368"/>
           </a:xfrm>
           <a:prstGeom prst="rect">
             <a:avLst>
-              <a:gd name="adj" fmla="val 6818"/>
+              <a:gd name="adj" fmla="val 8333"/>
             </a:avLst>
           </a:prstGeom>
           <a:solidFill>
@@ -22978,12 +23590,12 @@
         </p:nvSpPr>
         <p:spPr>
           <a:xfrm>
-            <a:off x="1951828" y="4169664"/>
-            <a:ext cx="603504" cy="384048"/>
+            <a:off x="1952244" y="4169664"/>
+            <a:ext cx="543652" cy="475488"/>
           </a:xfrm>
           <a:prstGeom prst="rect">
             <a:avLst>
-              <a:gd name="adj" fmla="val 9524"/>
+              <a:gd name="adj" fmla="val 7692"/>
             </a:avLst>
           </a:prstGeom>
           <a:solidFill>
@@ -23005,8 +23617,8 @@
         </p:nvSpPr>
         <p:spPr>
           <a:xfrm>
-            <a:off x="1951828" y="4169664"/>
-            <a:ext cx="603504" cy="384048"/>
+            <a:off x="1952244" y="4169664"/>
+            <a:ext cx="543652" cy="475488"/>
           </a:xfrm>
           <a:prstGeom prst="rect">
             <a:avLst/>
@@ -23044,12 +23656,12 @@
         </p:nvSpPr>
         <p:spPr>
           <a:xfrm>
-            <a:off x="2605209" y="4169664"/>
-            <a:ext cx="603504" cy="384048"/>
+            <a:off x="2546188" y="4169664"/>
+            <a:ext cx="543652" cy="475488"/>
           </a:xfrm>
           <a:prstGeom prst="rect">
             <a:avLst>
-              <a:gd name="adj" fmla="val 9524"/>
+              <a:gd name="adj" fmla="val 7692"/>
             </a:avLst>
           </a:prstGeom>
           <a:solidFill>
@@ -23071,8 +23683,8 @@
         </p:nvSpPr>
         <p:spPr>
           <a:xfrm>
-            <a:off x="2605209" y="4169664"/>
-            <a:ext cx="603504" cy="384048"/>
+            <a:off x="2546188" y="4169664"/>
+            <a:ext cx="543652" cy="475488"/>
           </a:xfrm>
           <a:prstGeom prst="rect">
             <a:avLst/>
@@ -23110,12 +23722,12 @@
         </p:nvSpPr>
         <p:spPr>
           <a:xfrm>
-            <a:off x="3258589" y="4169664"/>
-            <a:ext cx="603504" cy="384048"/>
+            <a:off x="3140133" y="4169664"/>
+            <a:ext cx="543652" cy="475488"/>
           </a:xfrm>
           <a:prstGeom prst="rect">
             <a:avLst>
-              <a:gd name="adj" fmla="val 9524"/>
+              <a:gd name="adj" fmla="val 7692"/>
             </a:avLst>
           </a:prstGeom>
           <a:solidFill>
@@ -23137,8 +23749,8 @@
         </p:nvSpPr>
         <p:spPr>
           <a:xfrm>
-            <a:off x="3258589" y="4169664"/>
-            <a:ext cx="603504" cy="384048"/>
+            <a:off x="3140133" y="4169664"/>
+            <a:ext cx="543652" cy="475488"/>
           </a:xfrm>
           <a:prstGeom prst="rect">
             <a:avLst/>
@@ -23176,12 +23788,12 @@
         </p:nvSpPr>
         <p:spPr>
           <a:xfrm>
-            <a:off x="3911969" y="4169664"/>
-            <a:ext cx="603504" cy="384048"/>
+            <a:off x="3734077" y="4169664"/>
+            <a:ext cx="543652" cy="475488"/>
           </a:xfrm>
           <a:prstGeom prst="rect">
             <a:avLst>
-              <a:gd name="adj" fmla="val 9524"/>
+              <a:gd name="adj" fmla="val 7692"/>
             </a:avLst>
           </a:prstGeom>
           <a:solidFill>
@@ -23203,8 +23815,8 @@
         </p:nvSpPr>
         <p:spPr>
           <a:xfrm>
-            <a:off x="3911969" y="4169664"/>
-            <a:ext cx="603504" cy="384048"/>
+            <a:off x="3734077" y="4169664"/>
+            <a:ext cx="543652" cy="475488"/>
           </a:xfrm>
           <a:prstGeom prst="rect">
             <a:avLst/>
@@ -23242,12 +23854,12 @@
         </p:nvSpPr>
         <p:spPr>
           <a:xfrm>
-            <a:off x="4565350" y="4169664"/>
-            <a:ext cx="603504" cy="384048"/>
+            <a:off x="4328021" y="4169664"/>
+            <a:ext cx="543652" cy="475488"/>
           </a:xfrm>
           <a:prstGeom prst="rect">
             <a:avLst>
-              <a:gd name="adj" fmla="val 9524"/>
+              <a:gd name="adj" fmla="val 7692"/>
             </a:avLst>
           </a:prstGeom>
           <a:solidFill>
@@ -23269,8 +23881,8 @@
         </p:nvSpPr>
         <p:spPr>
           <a:xfrm>
-            <a:off x="4565350" y="4169664"/>
-            <a:ext cx="603504" cy="384048"/>
+            <a:off x="4328021" y="4169664"/>
+            <a:ext cx="543652" cy="475488"/>
           </a:xfrm>
           <a:prstGeom prst="rect">
             <a:avLst/>
@@ -23308,12 +23920,12 @@
         </p:nvSpPr>
         <p:spPr>
           <a:xfrm>
-            <a:off x="5218730" y="4169664"/>
-            <a:ext cx="603504" cy="384048"/>
+            <a:off x="4921966" y="4169664"/>
+            <a:ext cx="543652" cy="475488"/>
           </a:xfrm>
           <a:prstGeom prst="rect">
             <a:avLst>
-              <a:gd name="adj" fmla="val 9524"/>
+              <a:gd name="adj" fmla="val 7692"/>
             </a:avLst>
           </a:prstGeom>
           <a:solidFill>
@@ -23335,8 +23947,8 @@
         </p:nvSpPr>
         <p:spPr>
           <a:xfrm>
-            <a:off x="5218730" y="4169664"/>
-            <a:ext cx="603504" cy="384048"/>
+            <a:off x="4921966" y="4169664"/>
+            <a:ext cx="543652" cy="475488"/>
           </a:xfrm>
           <a:prstGeom prst="rect">
             <a:avLst/>
@@ -23374,12 +23986,12 @@
         </p:nvSpPr>
         <p:spPr>
           <a:xfrm>
-            <a:off x="5872111" y="4169664"/>
-            <a:ext cx="603504" cy="384048"/>
+            <a:off x="5515910" y="4169664"/>
+            <a:ext cx="543652" cy="475488"/>
           </a:xfrm>
           <a:prstGeom prst="rect">
             <a:avLst>
-              <a:gd name="adj" fmla="val 9524"/>
+              <a:gd name="adj" fmla="val 7692"/>
             </a:avLst>
           </a:prstGeom>
           <a:solidFill>
@@ -23401,8 +24013,8 @@
         </p:nvSpPr>
         <p:spPr>
           <a:xfrm>
-            <a:off x="5872111" y="4169664"/>
-            <a:ext cx="603504" cy="384048"/>
+            <a:off x="5515910" y="4169664"/>
+            <a:ext cx="543652" cy="475488"/>
           </a:xfrm>
           <a:prstGeom prst="rect">
             <a:avLst/>
@@ -23440,12 +24052,12 @@
         </p:nvSpPr>
         <p:spPr>
           <a:xfrm>
-            <a:off x="6525491" y="4169664"/>
-            <a:ext cx="603504" cy="384048"/>
+            <a:off x="6109855" y="4169664"/>
+            <a:ext cx="543652" cy="475488"/>
           </a:xfrm>
           <a:prstGeom prst="rect">
             <a:avLst>
-              <a:gd name="adj" fmla="val 9524"/>
+              <a:gd name="adj" fmla="val 7692"/>
             </a:avLst>
           </a:prstGeom>
           <a:solidFill>
@@ -23467,8 +24079,8 @@
         </p:nvSpPr>
         <p:spPr>
           <a:xfrm>
-            <a:off x="6525491" y="4169664"/>
-            <a:ext cx="603504" cy="384048"/>
+            <a:off x="6109855" y="4169664"/>
+            <a:ext cx="543652" cy="475488"/>
           </a:xfrm>
           <a:prstGeom prst="rect">
             <a:avLst/>
@@ -23506,12 +24118,12 @@
         </p:nvSpPr>
         <p:spPr>
           <a:xfrm>
-            <a:off x="7178871" y="4169664"/>
-            <a:ext cx="603504" cy="384048"/>
+            <a:off x="6703799" y="4169664"/>
+            <a:ext cx="543652" cy="475488"/>
           </a:xfrm>
           <a:prstGeom prst="rect">
             <a:avLst>
-              <a:gd name="adj" fmla="val 9524"/>
+              <a:gd name="adj" fmla="val 7692"/>
             </a:avLst>
           </a:prstGeom>
           <a:solidFill>
@@ -23533,8 +24145,8 @@
         </p:nvSpPr>
         <p:spPr>
           <a:xfrm>
-            <a:off x="7178871" y="4169664"/>
-            <a:ext cx="603504" cy="384048"/>
+            <a:off x="6703799" y="4169664"/>
+            <a:ext cx="543652" cy="475488"/>
           </a:xfrm>
           <a:prstGeom prst="rect">
             <a:avLst/>
@@ -23558,7 +24170,7 @@
                 <a:ea typeface="Trebuchet MS" pitchFamily="34" charset="-122"/>
                 <a:cs typeface="Trebuchet MS" pitchFamily="34" charset="-120"/>
               </a:rPr>
-              <a:t>io</a:t>
+              <a:t>i</a:t>
             </a:r>
             <a:endParaRPr lang="en-US" sz="900" dirty="0"/>
           </a:p>
@@ -23566,57 +24178,18 @@
       </p:sp>
       <p:sp>
         <p:nvSpPr>
-          <p:cNvPr id="57" name="Text 55"/>
-          <p:cNvSpPr/>
-          <p:nvPr/>
-        </p:nvSpPr>
-        <p:spPr>
-          <a:xfrm>
-            <a:off x="7178871" y="4572000"/>
-            <a:ext cx="603504" cy="219456"/>
-          </a:xfrm>
-          <a:prstGeom prst="rect">
-            <a:avLst/>
-          </a:prstGeom>
-          <a:noFill/>
-          <a:ln/>
-        </p:spPr>
-        <p:txBody>
-          <a:bodyPr wrap="square" lIns="0" tIns="0" rIns="0" bIns="0" rtlCol="0" anchor="t"/>
-          <a:lstStyle/>
-          <a:p>
-            <a:pPr algn="ctr" indent="0" marL="0">
-              <a:buNone/>
-            </a:pPr>
-            <a:r>
-              <a:rPr lang="en-US" sz="750" i="1" dirty="0">
-                <a:solidFill>
-                  <a:srgbClr val="94A3B8"/>
-                </a:solidFill>
-                <a:latin typeface="Calibri" pitchFamily="34" charset="0"/>
-                <a:ea typeface="Calibri" pitchFamily="34" charset="-122"/>
-                <a:cs typeface="Calibri" pitchFamily="34" charset="-120"/>
-              </a:rPr>
-              <a:t>/sh/</a:t>
-            </a:r>
-            <a:endParaRPr lang="en-US" sz="750" dirty="0"/>
-          </a:p>
-        </p:txBody>
-      </p:sp>
-      <p:sp>
-        <p:nvSpPr>
-          <p:cNvPr id="58" name="Shape 56"/>
-          <p:cNvSpPr/>
-          <p:nvPr/>
-        </p:nvSpPr>
-        <p:spPr>
-          <a:xfrm>
-            <a:off x="7832252" y="4169664"/>
-            <a:ext cx="603504" cy="384048"/>
+          <p:cNvPr id="57" name="Shape 55"/>
+          <p:cNvSpPr/>
+          <p:nvPr/>
+        </p:nvSpPr>
+        <p:spPr>
+          <a:xfrm>
+            <a:off x="7297743" y="4169664"/>
+            <a:ext cx="543652" cy="475488"/>
           </a:xfrm>
           <a:prstGeom prst="rect">
             <a:avLst>
-              <a:gd name="adj" fmla="val 9524"/>
+              <a:gd name="adj" fmla="val 7692"/>
             </a:avLst>
           </a:prstGeom>
           <a:solidFill>
@@ -23632,14 +24205,80 @@
       </p:sp>
       <p:sp>
         <p:nvSpPr>
-          <p:cNvPr id="59" name="Text 57"/>
-          <p:cNvSpPr/>
-          <p:nvPr/>
-        </p:nvSpPr>
-        <p:spPr>
-          <a:xfrm>
-            <a:off x="7832252" y="4169664"/>
-            <a:ext cx="603504" cy="384048"/>
+          <p:cNvPr id="58" name="Text 56"/>
+          <p:cNvSpPr/>
+          <p:nvPr/>
+        </p:nvSpPr>
+        <p:spPr>
+          <a:xfrm>
+            <a:off x="7297743" y="4169664"/>
+            <a:ext cx="543652" cy="475488"/>
+          </a:xfrm>
+          <a:prstGeom prst="rect">
+            <a:avLst/>
+          </a:prstGeom>
+          <a:noFill/>
+          <a:ln/>
+        </p:spPr>
+        <p:txBody>
+          <a:bodyPr wrap="square" lIns="0" tIns="0" rIns="0" bIns="0" rtlCol="0" anchor="ctr"/>
+          <a:lstStyle/>
+          <a:p>
+            <a:pPr algn="ctr" indent="0" marL="0">
+              <a:buNone/>
+            </a:pPr>
+            <a:r>
+              <a:rPr lang="en-US" sz="900" b="1" dirty="0">
+                <a:solidFill>
+                  <a:srgbClr val="9D174D"/>
+                </a:solidFill>
+                <a:latin typeface="Trebuchet MS" pitchFamily="34" charset="0"/>
+                <a:ea typeface="Trebuchet MS" pitchFamily="34" charset="-122"/>
+                <a:cs typeface="Trebuchet MS" pitchFamily="34" charset="-120"/>
+              </a:rPr>
+              <a:t>o</a:t>
+            </a:r>
+            <a:endParaRPr lang="en-US" sz="900" dirty="0"/>
+          </a:p>
+        </p:txBody>
+      </p:sp>
+      <p:sp>
+        <p:nvSpPr>
+          <p:cNvPr id="59" name="Shape 57"/>
+          <p:cNvSpPr/>
+          <p:nvPr/>
+        </p:nvSpPr>
+        <p:spPr>
+          <a:xfrm>
+            <a:off x="7891688" y="4169664"/>
+            <a:ext cx="543652" cy="475488"/>
+          </a:xfrm>
+          <a:prstGeom prst="rect">
+            <a:avLst>
+              <a:gd name="adj" fmla="val 7692"/>
+            </a:avLst>
+          </a:prstGeom>
+          <a:solidFill>
+            <a:srgbClr val="FFFFFF"/>
+          </a:solidFill>
+          <a:ln w="12700">
+            <a:solidFill>
+              <a:srgbClr val="DB2777"/>
+            </a:solidFill>
+            <a:prstDash val="solid"/>
+          </a:ln>
+        </p:spPr>
+      </p:sp>
+      <p:sp>
+        <p:nvSpPr>
+          <p:cNvPr id="60" name="Text 58"/>
+          <p:cNvSpPr/>
+          <p:nvPr/>
+        </p:nvSpPr>
+        <p:spPr>
+          <a:xfrm>
+            <a:off x="7891688" y="4169664"/>
+            <a:ext cx="543652" cy="475488"/>
           </a:xfrm>
           <a:prstGeom prst="rect">
             <a:avLst/>
@@ -24094,7 +24733,7 @@
                 <a:ea typeface="Trebuchet MS" pitchFamily="34" charset="-122"/>
                 <a:cs typeface="Trebuchet MS" pitchFamily="34" charset="-120"/>
               </a:rPr>
-              <a:t>reconstruct</a:t>
+              <a:t>reconstruction</a:t>
             </a:r>
             <a:endParaRPr lang="en-US" sz="2800" dirty="0"/>
           </a:p>
@@ -24921,7 +25560,7 @@
                 <a:ea typeface="Trebuchet MS" pitchFamily="34" charset="-122"/>
                 <a:cs typeface="Trebuchet MS" pitchFamily="34" charset="-120"/>
               </a:rPr>
-              <a:t>reconstruct</a:t>
+              <a:t>reconstruction</a:t>
             </a:r>
             <a:endParaRPr lang="en-US" sz="2800" dirty="0"/>
           </a:p>
@@ -25001,8 +25640,8 @@
         </p:nvSpPr>
         <p:spPr>
           <a:xfrm>
-            <a:off x="2221992" y="2258568"/>
-            <a:ext cx="1828800" cy="292608"/>
+            <a:off x="1989734" y="2258568"/>
+            <a:ext cx="1581912" cy="292608"/>
           </a:xfrm>
           <a:prstGeom prst="rect">
             <a:avLst>
@@ -25035,8 +25674,8 @@
         </p:nvSpPr>
         <p:spPr>
           <a:xfrm>
-            <a:off x="2221992" y="2258568"/>
-            <a:ext cx="1828800" cy="292608"/>
+            <a:off x="1989734" y="2258568"/>
+            <a:ext cx="1581912" cy="292608"/>
           </a:xfrm>
           <a:prstGeom prst="rect">
             <a:avLst/>
@@ -25074,8 +25713,8 @@
         </p:nvSpPr>
         <p:spPr>
           <a:xfrm>
-            <a:off x="2221992" y="2569464"/>
-            <a:ext cx="1828800" cy="201168"/>
+            <a:off x="1989734" y="2569464"/>
+            <a:ext cx="1581912" cy="201168"/>
           </a:xfrm>
           <a:prstGeom prst="rect">
             <a:avLst/>
@@ -25113,8 +25752,8 @@
         </p:nvSpPr>
         <p:spPr>
           <a:xfrm>
-            <a:off x="4370832" y="2258568"/>
-            <a:ext cx="1828800" cy="292608"/>
+            <a:off x="3659429" y="2258568"/>
+            <a:ext cx="1581912" cy="292608"/>
           </a:xfrm>
           <a:prstGeom prst="rect">
             <a:avLst>
@@ -25147,8 +25786,8 @@
         </p:nvSpPr>
         <p:spPr>
           <a:xfrm>
-            <a:off x="4370832" y="2258568"/>
-            <a:ext cx="1828800" cy="292608"/>
+            <a:off x="3659429" y="2258568"/>
+            <a:ext cx="1581912" cy="292608"/>
           </a:xfrm>
           <a:prstGeom prst="rect">
             <a:avLst/>
@@ -25186,8 +25825,8 @@
         </p:nvSpPr>
         <p:spPr>
           <a:xfrm>
-            <a:off x="4370832" y="2569464"/>
-            <a:ext cx="1828800" cy="201168"/>
+            <a:off x="3659429" y="2569464"/>
+            <a:ext cx="1581912" cy="201168"/>
           </a:xfrm>
           <a:prstGeom prst="rect">
             <a:avLst/>
@@ -25211,7 +25850,7 @@
                 <a:ea typeface="Calibri" pitchFamily="34" charset="-122"/>
                 <a:cs typeface="Calibri" pitchFamily="34" charset="-120"/>
               </a:rPr>
-              <a:t>together, with</a:t>
+              <a:t>together or with</a:t>
             </a:r>
             <a:endParaRPr lang="en-US" sz="850" dirty="0"/>
           </a:p>
@@ -25225,8 +25864,8 @@
         </p:nvSpPr>
         <p:spPr>
           <a:xfrm>
-            <a:off x="6519672" y="2258568"/>
-            <a:ext cx="1828800" cy="292608"/>
+            <a:off x="5329123" y="2258568"/>
+            <a:ext cx="1581912" cy="292608"/>
           </a:xfrm>
           <a:prstGeom prst="rect">
             <a:avLst>
@@ -25259,8 +25898,8 @@
         </p:nvSpPr>
         <p:spPr>
           <a:xfrm>
-            <a:off x="6519672" y="2258568"/>
-            <a:ext cx="1828800" cy="292608"/>
+            <a:off x="5329123" y="2258568"/>
+            <a:ext cx="1581912" cy="292608"/>
           </a:xfrm>
           <a:prstGeom prst="rect">
             <a:avLst/>
@@ -25298,8 +25937,8 @@
         </p:nvSpPr>
         <p:spPr>
           <a:xfrm>
-            <a:off x="6519672" y="2569464"/>
-            <a:ext cx="1828800" cy="201168"/>
+            <a:off x="5329123" y="2569464"/>
+            <a:ext cx="1581912" cy="201168"/>
           </a:xfrm>
           <a:prstGeom prst="rect">
             <a:avLst/>
@@ -25323,7 +25962,7 @@
                 <a:ea typeface="Calibri" pitchFamily="34" charset="-122"/>
                 <a:cs typeface="Calibri" pitchFamily="34" charset="-120"/>
               </a:rPr>
-              <a:t>to build or arrange</a:t>
+              <a:t>to build</a:t>
             </a:r>
             <a:endParaRPr lang="en-US" sz="850" dirty="0"/>
           </a:p>
@@ -25332,6 +25971,118 @@
       <p:sp>
         <p:nvSpPr>
           <p:cNvPr id="25" name="Shape 23"/>
+          <p:cNvSpPr/>
+          <p:nvPr/>
+        </p:nvSpPr>
+        <p:spPr>
+          <a:xfrm>
+            <a:off x="6998818" y="2258568"/>
+            <a:ext cx="1581912" cy="292608"/>
+          </a:xfrm>
+          <a:prstGeom prst="rect">
+            <a:avLst>
+              <a:gd name="adj" fmla="val 25000"/>
+            </a:avLst>
+          </a:prstGeom>
+          <a:solidFill>
+            <a:srgbClr val="FCE7F3"/>
+          </a:solidFill>
+          <a:ln w="19050">
+            <a:solidFill>
+              <a:srgbClr val="DB2777"/>
+            </a:solidFill>
+            <a:prstDash val="solid"/>
+          </a:ln>
+          <a:effectLst>
+            <a:outerShdw sx="100000" sy="100000" kx="0" ky="0" algn="bl" rotWithShape="0" blurRad="101600" dist="38100" dir="8100000">
+              <a:srgbClr val="000000">
+                <a:alpha val="12000"/>
+              </a:srgbClr>
+            </a:outerShdw>
+          </a:effectLst>
+        </p:spPr>
+      </p:sp>
+      <p:sp>
+        <p:nvSpPr>
+          <p:cNvPr id="26" name="Text 24"/>
+          <p:cNvSpPr/>
+          <p:nvPr/>
+        </p:nvSpPr>
+        <p:spPr>
+          <a:xfrm>
+            <a:off x="6998818" y="2258568"/>
+            <a:ext cx="1581912" cy="292608"/>
+          </a:xfrm>
+          <a:prstGeom prst="rect">
+            <a:avLst/>
+          </a:prstGeom>
+          <a:noFill/>
+          <a:ln/>
+        </p:spPr>
+        <p:txBody>
+          <a:bodyPr wrap="square" lIns="0" tIns="0" rIns="0" bIns="0" rtlCol="0" anchor="ctr"/>
+          <a:lstStyle/>
+          <a:p>
+            <a:pPr algn="ctr" indent="0" marL="0">
+              <a:buNone/>
+            </a:pPr>
+            <a:r>
+              <a:rPr lang="en-US" sz="1300" b="1" dirty="0">
+                <a:solidFill>
+                  <a:srgbClr val="9D174D"/>
+                </a:solidFill>
+                <a:latin typeface="Trebuchet MS" pitchFamily="34" charset="0"/>
+                <a:ea typeface="Trebuchet MS" pitchFamily="34" charset="-122"/>
+                <a:cs typeface="Trebuchet MS" pitchFamily="34" charset="-120"/>
+              </a:rPr>
+              <a:t>ion</a:t>
+            </a:r>
+            <a:endParaRPr lang="en-US" sz="1300" dirty="0"/>
+          </a:p>
+        </p:txBody>
+      </p:sp>
+      <p:sp>
+        <p:nvSpPr>
+          <p:cNvPr id="27" name="Text 25"/>
+          <p:cNvSpPr/>
+          <p:nvPr/>
+        </p:nvSpPr>
+        <p:spPr>
+          <a:xfrm>
+            <a:off x="6998818" y="2569464"/>
+            <a:ext cx="1581912" cy="201168"/>
+          </a:xfrm>
+          <a:prstGeom prst="rect">
+            <a:avLst/>
+          </a:prstGeom>
+          <a:noFill/>
+          <a:ln/>
+        </p:spPr>
+        <p:txBody>
+          <a:bodyPr wrap="square" lIns="0" tIns="0" rIns="0" bIns="0" rtlCol="0" anchor="t"/>
+          <a:lstStyle/>
+          <a:p>
+            <a:pPr algn="ctr" indent="0" marL="0">
+              <a:buNone/>
+            </a:pPr>
+            <a:r>
+              <a:rPr lang="en-US" sz="850" dirty="0">
+                <a:solidFill>
+                  <a:srgbClr val="475569"/>
+                </a:solidFill>
+                <a:latin typeface="Calibri" pitchFamily="34" charset="0"/>
+                <a:ea typeface="Calibri" pitchFamily="34" charset="-122"/>
+                <a:cs typeface="Calibri" pitchFamily="34" charset="-120"/>
+              </a:rPr>
+              <a:t>the act or result of</a:t>
+            </a:r>
+            <a:endParaRPr lang="en-US" sz="850" dirty="0"/>
+          </a:p>
+        </p:txBody>
+      </p:sp>
+      <p:sp>
+        <p:nvSpPr>
+          <p:cNvPr id="28" name="Shape 26"/>
           <p:cNvSpPr/>
           <p:nvPr/>
         </p:nvSpPr>
@@ -25358,7 +26109,7 @@
       </p:sp>
       <p:sp>
         <p:nvSpPr>
-          <p:cNvPr id="26" name="Text 24"/>
+          <p:cNvPr id="29" name="Text 27"/>
           <p:cNvSpPr/>
           <p:nvPr/>
         </p:nvSpPr>
@@ -25397,7 +26148,7 @@
       </p:sp>
       <p:sp>
         <p:nvSpPr>
-          <p:cNvPr id="27" name="Shape 25"/>
+          <p:cNvPr id="30" name="Shape 28"/>
           <p:cNvSpPr/>
           <p:nvPr/>
         </p:nvSpPr>
@@ -25424,7 +26175,7 @@
       </p:sp>
       <p:sp>
         <p:nvSpPr>
-          <p:cNvPr id="28" name="Text 26"/>
+          <p:cNvPr id="31" name="Text 29"/>
           <p:cNvSpPr/>
           <p:nvPr/>
         </p:nvSpPr>
@@ -25463,7 +26214,7 @@
       </p:sp>
       <p:sp>
         <p:nvSpPr>
-          <p:cNvPr id="29" name="Shape 27"/>
+          <p:cNvPr id="32" name="Shape 30"/>
           <p:cNvSpPr/>
           <p:nvPr/>
         </p:nvSpPr>
@@ -25490,7 +26241,7 @@
       </p:sp>
       <p:sp>
         <p:nvSpPr>
-          <p:cNvPr id="30" name="Text 28"/>
+          <p:cNvPr id="33" name="Text 31"/>
           <p:cNvSpPr/>
           <p:nvPr/>
         </p:nvSpPr>
@@ -25529,7 +26280,7 @@
       </p:sp>
       <p:sp>
         <p:nvSpPr>
-          <p:cNvPr id="31" name="Shape 29"/>
+          <p:cNvPr id="34" name="Shape 32"/>
           <p:cNvSpPr/>
           <p:nvPr/>
         </p:nvSpPr>
@@ -25556,7 +26307,7 @@
       </p:sp>
       <p:sp>
         <p:nvSpPr>
-          <p:cNvPr id="32" name="Text 30"/>
+          <p:cNvPr id="35" name="Text 33"/>
           <p:cNvSpPr/>
           <p:nvPr/>
         </p:nvSpPr>
@@ -26737,7 +27488,7 @@
                 <a:ea typeface="Trebuchet MS" pitchFamily="34" charset="-122"/>
                 <a:cs typeface="Trebuchet MS" pitchFamily="34" charset="-120"/>
               </a:rPr>
-              <a:t>reconstruct</a:t>
+              <a:t>reconstruction</a:t>
             </a:r>
             <a:endParaRPr lang="en-US" sz="2800" dirty="0"/>
           </a:p>
@@ -26817,8 +27568,8 @@
         </p:nvSpPr>
         <p:spPr>
           <a:xfrm>
-            <a:off x="2221992" y="2258568"/>
-            <a:ext cx="1828800" cy="292608"/>
+            <a:off x="1989734" y="2258568"/>
+            <a:ext cx="1581912" cy="292608"/>
           </a:xfrm>
           <a:prstGeom prst="rect">
             <a:avLst>
@@ -26851,8 +27602,8 @@
         </p:nvSpPr>
         <p:spPr>
           <a:xfrm>
-            <a:off x="2221992" y="2258568"/>
-            <a:ext cx="1828800" cy="292608"/>
+            <a:off x="1989734" y="2258568"/>
+            <a:ext cx="1581912" cy="292608"/>
           </a:xfrm>
           <a:prstGeom prst="rect">
             <a:avLst/>
@@ -26890,8 +27641,8 @@
         </p:nvSpPr>
         <p:spPr>
           <a:xfrm>
-            <a:off x="2221992" y="2569464"/>
-            <a:ext cx="1828800" cy="201168"/>
+            <a:off x="1989734" y="2569464"/>
+            <a:ext cx="1581912" cy="201168"/>
           </a:xfrm>
           <a:prstGeom prst="rect">
             <a:avLst/>
@@ -26929,8 +27680,8 @@
         </p:nvSpPr>
         <p:spPr>
           <a:xfrm>
-            <a:off x="4370832" y="2258568"/>
-            <a:ext cx="1828800" cy="292608"/>
+            <a:off x="3659429" y="2258568"/>
+            <a:ext cx="1581912" cy="292608"/>
           </a:xfrm>
           <a:prstGeom prst="rect">
             <a:avLst>
@@ -26963,8 +27714,8 @@
         </p:nvSpPr>
         <p:spPr>
           <a:xfrm>
-            <a:off x="4370832" y="2258568"/>
-            <a:ext cx="1828800" cy="292608"/>
+            <a:off x="3659429" y="2258568"/>
+            <a:ext cx="1581912" cy="292608"/>
           </a:xfrm>
           <a:prstGeom prst="rect">
             <a:avLst/>
@@ -27002,8 +27753,8 @@
         </p:nvSpPr>
         <p:spPr>
           <a:xfrm>
-            <a:off x="4370832" y="2569464"/>
-            <a:ext cx="1828800" cy="201168"/>
+            <a:off x="3659429" y="2569464"/>
+            <a:ext cx="1581912" cy="201168"/>
           </a:xfrm>
           <a:prstGeom prst="rect">
             <a:avLst/>
@@ -27027,7 +27778,7 @@
                 <a:ea typeface="Calibri" pitchFamily="34" charset="-122"/>
                 <a:cs typeface="Calibri" pitchFamily="34" charset="-120"/>
               </a:rPr>
-              <a:t>together, with</a:t>
+              <a:t>together or with</a:t>
             </a:r>
             <a:endParaRPr lang="en-US" sz="850" dirty="0"/>
           </a:p>
@@ -27041,8 +27792,8 @@
         </p:nvSpPr>
         <p:spPr>
           <a:xfrm>
-            <a:off x="6519672" y="2258568"/>
-            <a:ext cx="1828800" cy="292608"/>
+            <a:off x="5329123" y="2258568"/>
+            <a:ext cx="1581912" cy="292608"/>
           </a:xfrm>
           <a:prstGeom prst="rect">
             <a:avLst>
@@ -27075,8 +27826,8 @@
         </p:nvSpPr>
         <p:spPr>
           <a:xfrm>
-            <a:off x="6519672" y="2258568"/>
-            <a:ext cx="1828800" cy="292608"/>
+            <a:off x="5329123" y="2258568"/>
+            <a:ext cx="1581912" cy="292608"/>
           </a:xfrm>
           <a:prstGeom prst="rect">
             <a:avLst/>
@@ -27114,8 +27865,8 @@
         </p:nvSpPr>
         <p:spPr>
           <a:xfrm>
-            <a:off x="6519672" y="2569464"/>
-            <a:ext cx="1828800" cy="201168"/>
+            <a:off x="5329123" y="2569464"/>
+            <a:ext cx="1581912" cy="201168"/>
           </a:xfrm>
           <a:prstGeom prst="rect">
             <a:avLst/>
@@ -27139,7 +27890,7 @@
                 <a:ea typeface="Calibri" pitchFamily="34" charset="-122"/>
                 <a:cs typeface="Calibri" pitchFamily="34" charset="-120"/>
               </a:rPr>
-              <a:t>to build or arrange</a:t>
+              <a:t>to build</a:t>
             </a:r>
             <a:endParaRPr lang="en-US" sz="850" dirty="0"/>
           </a:p>
@@ -27148,6 +27899,118 @@
       <p:sp>
         <p:nvSpPr>
           <p:cNvPr id="25" name="Shape 23"/>
+          <p:cNvSpPr/>
+          <p:nvPr/>
+        </p:nvSpPr>
+        <p:spPr>
+          <a:xfrm>
+            <a:off x="6998818" y="2258568"/>
+            <a:ext cx="1581912" cy="292608"/>
+          </a:xfrm>
+          <a:prstGeom prst="rect">
+            <a:avLst>
+              <a:gd name="adj" fmla="val 25000"/>
+            </a:avLst>
+          </a:prstGeom>
+          <a:solidFill>
+            <a:srgbClr val="FCE7F3"/>
+          </a:solidFill>
+          <a:ln w="19050">
+            <a:solidFill>
+              <a:srgbClr val="DB2777"/>
+            </a:solidFill>
+            <a:prstDash val="solid"/>
+          </a:ln>
+          <a:effectLst>
+            <a:outerShdw sx="100000" sy="100000" kx="0" ky="0" algn="bl" rotWithShape="0" blurRad="101600" dist="38100" dir="8100000">
+              <a:srgbClr val="000000">
+                <a:alpha val="12000"/>
+              </a:srgbClr>
+            </a:outerShdw>
+          </a:effectLst>
+        </p:spPr>
+      </p:sp>
+      <p:sp>
+        <p:nvSpPr>
+          <p:cNvPr id="26" name="Text 24"/>
+          <p:cNvSpPr/>
+          <p:nvPr/>
+        </p:nvSpPr>
+        <p:spPr>
+          <a:xfrm>
+            <a:off x="6998818" y="2258568"/>
+            <a:ext cx="1581912" cy="292608"/>
+          </a:xfrm>
+          <a:prstGeom prst="rect">
+            <a:avLst/>
+          </a:prstGeom>
+          <a:noFill/>
+          <a:ln/>
+        </p:spPr>
+        <p:txBody>
+          <a:bodyPr wrap="square" lIns="0" tIns="0" rIns="0" bIns="0" rtlCol="0" anchor="ctr"/>
+          <a:lstStyle/>
+          <a:p>
+            <a:pPr algn="ctr" indent="0" marL="0">
+              <a:buNone/>
+            </a:pPr>
+            <a:r>
+              <a:rPr lang="en-US" sz="1300" b="1" dirty="0">
+                <a:solidFill>
+                  <a:srgbClr val="9D174D"/>
+                </a:solidFill>
+                <a:latin typeface="Trebuchet MS" pitchFamily="34" charset="0"/>
+                <a:ea typeface="Trebuchet MS" pitchFamily="34" charset="-122"/>
+                <a:cs typeface="Trebuchet MS" pitchFamily="34" charset="-120"/>
+              </a:rPr>
+              <a:t>ion</a:t>
+            </a:r>
+            <a:endParaRPr lang="en-US" sz="1300" dirty="0"/>
+          </a:p>
+        </p:txBody>
+      </p:sp>
+      <p:sp>
+        <p:nvSpPr>
+          <p:cNvPr id="27" name="Text 25"/>
+          <p:cNvSpPr/>
+          <p:nvPr/>
+        </p:nvSpPr>
+        <p:spPr>
+          <a:xfrm>
+            <a:off x="6998818" y="2569464"/>
+            <a:ext cx="1581912" cy="201168"/>
+          </a:xfrm>
+          <a:prstGeom prst="rect">
+            <a:avLst/>
+          </a:prstGeom>
+          <a:noFill/>
+          <a:ln/>
+        </p:spPr>
+        <p:txBody>
+          <a:bodyPr wrap="square" lIns="0" tIns="0" rIns="0" bIns="0" rtlCol="0" anchor="t"/>
+          <a:lstStyle/>
+          <a:p>
+            <a:pPr algn="ctr" indent="0" marL="0">
+              <a:buNone/>
+            </a:pPr>
+            <a:r>
+              <a:rPr lang="en-US" sz="850" dirty="0">
+                <a:solidFill>
+                  <a:srgbClr val="475569"/>
+                </a:solidFill>
+                <a:latin typeface="Calibri" pitchFamily="34" charset="0"/>
+                <a:ea typeface="Calibri" pitchFamily="34" charset="-122"/>
+                <a:cs typeface="Calibri" pitchFamily="34" charset="-120"/>
+              </a:rPr>
+              <a:t>the act or result of</a:t>
+            </a:r>
+            <a:endParaRPr lang="en-US" sz="850" dirty="0"/>
+          </a:p>
+        </p:txBody>
+      </p:sp>
+      <p:sp>
+        <p:nvSpPr>
+          <p:cNvPr id="28" name="Shape 26"/>
           <p:cNvSpPr/>
           <p:nvPr/>
         </p:nvSpPr>
@@ -27174,7 +28037,7 @@
       </p:sp>
       <p:sp>
         <p:nvSpPr>
-          <p:cNvPr id="26" name="Text 24"/>
+          <p:cNvPr id="29" name="Text 27"/>
           <p:cNvSpPr/>
           <p:nvPr/>
         </p:nvSpPr>
@@ -27213,7 +28076,7 @@
       </p:sp>
       <p:sp>
         <p:nvSpPr>
-          <p:cNvPr id="27" name="Shape 25"/>
+          <p:cNvPr id="30" name="Shape 28"/>
           <p:cNvSpPr/>
           <p:nvPr/>
         </p:nvSpPr>
@@ -27240,14 +28103,14 @@
       </p:sp>
       <p:sp>
         <p:nvSpPr>
-          <p:cNvPr id="28" name="Shape 26"/>
-          <p:cNvSpPr/>
-          <p:nvPr/>
-        </p:nvSpPr>
-        <p:spPr>
-          <a:xfrm>
-            <a:off x="2313432" y="3364992"/>
-            <a:ext cx="1645920" cy="475488"/>
+          <p:cNvPr id="31" name="Shape 29"/>
+          <p:cNvSpPr/>
+          <p:nvPr/>
+        </p:nvSpPr>
+        <p:spPr>
+          <a:xfrm>
+            <a:off x="1975104" y="3364992"/>
+            <a:ext cx="1554480" cy="475488"/>
           </a:xfrm>
           <a:prstGeom prst="rect">
             <a:avLst>
@@ -27267,14 +28130,14 @@
       </p:sp>
       <p:sp>
         <p:nvSpPr>
-          <p:cNvPr id="29" name="Text 27"/>
-          <p:cNvSpPr/>
-          <p:nvPr/>
-        </p:nvSpPr>
-        <p:spPr>
-          <a:xfrm>
-            <a:off x="2313432" y="3364992"/>
-            <a:ext cx="1645920" cy="475488"/>
+          <p:cNvPr id="32" name="Text 30"/>
+          <p:cNvSpPr/>
+          <p:nvPr/>
+        </p:nvSpPr>
+        <p:spPr>
+          <a:xfrm>
+            <a:off x="1975104" y="3364992"/>
+            <a:ext cx="1554480" cy="475488"/>
           </a:xfrm>
           <a:prstGeom prst="rect">
             <a:avLst/>
@@ -27306,14 +28169,14 @@
       </p:sp>
       <p:sp>
         <p:nvSpPr>
-          <p:cNvPr id="30" name="Text 28"/>
-          <p:cNvSpPr/>
-          <p:nvPr/>
-        </p:nvSpPr>
-        <p:spPr>
-          <a:xfrm>
-            <a:off x="3959352" y="3364992"/>
-            <a:ext cx="411480" cy="475488"/>
+          <p:cNvPr id="33" name="Text 31"/>
+          <p:cNvSpPr/>
+          <p:nvPr/>
+        </p:nvSpPr>
+        <p:spPr>
+          <a:xfrm>
+            <a:off x="3529584" y="3364992"/>
+            <a:ext cx="73152" cy="475488"/>
           </a:xfrm>
           <a:prstGeom prst="rect">
             <a:avLst/>
@@ -27345,14 +28208,14 @@
       </p:sp>
       <p:sp>
         <p:nvSpPr>
-          <p:cNvPr id="31" name="Shape 29"/>
-          <p:cNvSpPr/>
-          <p:nvPr/>
-        </p:nvSpPr>
-        <p:spPr>
-          <a:xfrm>
-            <a:off x="4370832" y="3364992"/>
-            <a:ext cx="1645920" cy="475488"/>
+          <p:cNvPr id="34" name="Shape 32"/>
+          <p:cNvSpPr/>
+          <p:nvPr/>
+        </p:nvSpPr>
+        <p:spPr>
+          <a:xfrm>
+            <a:off x="3602736" y="3364992"/>
+            <a:ext cx="1554480" cy="475488"/>
           </a:xfrm>
           <a:prstGeom prst="rect">
             <a:avLst>
@@ -27372,14 +28235,14 @@
       </p:sp>
       <p:sp>
         <p:nvSpPr>
-          <p:cNvPr id="32" name="Text 30"/>
-          <p:cNvSpPr/>
-          <p:nvPr/>
-        </p:nvSpPr>
-        <p:spPr>
-          <a:xfrm>
-            <a:off x="4370832" y="3364992"/>
-            <a:ext cx="1645920" cy="475488"/>
+          <p:cNvPr id="35" name="Text 33"/>
+          <p:cNvSpPr/>
+          <p:nvPr/>
+        </p:nvSpPr>
+        <p:spPr>
+          <a:xfrm>
+            <a:off x="3602736" y="3364992"/>
+            <a:ext cx="1554480" cy="475488"/>
           </a:xfrm>
           <a:prstGeom prst="rect">
             <a:avLst/>
@@ -27411,14 +28274,14 @@
       </p:sp>
       <p:sp>
         <p:nvSpPr>
-          <p:cNvPr id="33" name="Text 31"/>
-          <p:cNvSpPr/>
-          <p:nvPr/>
-        </p:nvSpPr>
-        <p:spPr>
-          <a:xfrm>
-            <a:off x="6016752" y="3364992"/>
-            <a:ext cx="411480" cy="475488"/>
+          <p:cNvPr id="36" name="Text 34"/>
+          <p:cNvSpPr/>
+          <p:nvPr/>
+        </p:nvSpPr>
+        <p:spPr>
+          <a:xfrm>
+            <a:off x="5157216" y="3364992"/>
+            <a:ext cx="73152" cy="475488"/>
           </a:xfrm>
           <a:prstGeom prst="rect">
             <a:avLst/>
@@ -27450,14 +28313,14 @@
       </p:sp>
       <p:sp>
         <p:nvSpPr>
-          <p:cNvPr id="34" name="Shape 32"/>
-          <p:cNvSpPr/>
-          <p:nvPr/>
-        </p:nvSpPr>
-        <p:spPr>
-          <a:xfrm>
-            <a:off x="6428232" y="3364992"/>
-            <a:ext cx="1645920" cy="475488"/>
+          <p:cNvPr id="37" name="Shape 35"/>
+          <p:cNvSpPr/>
+          <p:nvPr/>
+        </p:nvSpPr>
+        <p:spPr>
+          <a:xfrm>
+            <a:off x="5230368" y="3364992"/>
+            <a:ext cx="1554480" cy="475488"/>
           </a:xfrm>
           <a:prstGeom prst="rect">
             <a:avLst>
@@ -27477,14 +28340,14 @@
       </p:sp>
       <p:sp>
         <p:nvSpPr>
-          <p:cNvPr id="35" name="Text 33"/>
-          <p:cNvSpPr/>
-          <p:nvPr/>
-        </p:nvSpPr>
-        <p:spPr>
-          <a:xfrm>
-            <a:off x="6428232" y="3364992"/>
-            <a:ext cx="1645920" cy="475488"/>
+          <p:cNvPr id="38" name="Text 36"/>
+          <p:cNvSpPr/>
+          <p:nvPr/>
+        </p:nvSpPr>
+        <p:spPr>
+          <a:xfrm>
+            <a:off x="5230368" y="3364992"/>
+            <a:ext cx="1554480" cy="475488"/>
           </a:xfrm>
           <a:prstGeom prst="rect">
             <a:avLst/>
@@ -27508,7 +28371,7 @@
                 <a:ea typeface="Trebuchet MS" pitchFamily="34" charset="-122"/>
                 <a:cs typeface="Trebuchet MS" pitchFamily="34" charset="-120"/>
               </a:rPr>
-              <a:t>struct</a:t>
+              <a:t>struc</a:t>
             </a:r>
             <a:endParaRPr lang="en-US" sz="1400" dirty="0"/>
           </a:p>
@@ -27516,7 +28379,112 @@
       </p:sp>
       <p:sp>
         <p:nvSpPr>
-          <p:cNvPr id="36" name="Shape 34"/>
+          <p:cNvPr id="39" name="Text 37"/>
+          <p:cNvSpPr/>
+          <p:nvPr/>
+        </p:nvSpPr>
+        <p:spPr>
+          <a:xfrm>
+            <a:off x="6784848" y="3364992"/>
+            <a:ext cx="73152" cy="475488"/>
+          </a:xfrm>
+          <a:prstGeom prst="rect">
+            <a:avLst/>
+          </a:prstGeom>
+          <a:noFill/>
+          <a:ln/>
+        </p:spPr>
+        <p:txBody>
+          <a:bodyPr wrap="square" lIns="0" tIns="0" rIns="0" bIns="0" rtlCol="0" anchor="ctr"/>
+          <a:lstStyle/>
+          <a:p>
+            <a:pPr algn="ctr" indent="0" marL="0">
+              <a:buNone/>
+            </a:pPr>
+            <a:r>
+              <a:rPr lang="en-US" sz="1600" b="1" dirty="0">
+                <a:solidFill>
+                  <a:srgbClr val="0D9488"/>
+                </a:solidFill>
+                <a:latin typeface="Trebuchet MS" pitchFamily="34" charset="0"/>
+                <a:ea typeface="Trebuchet MS" pitchFamily="34" charset="-122"/>
+                <a:cs typeface="Trebuchet MS" pitchFamily="34" charset="-120"/>
+              </a:rPr>
+              <a:t>·</a:t>
+            </a:r>
+            <a:endParaRPr lang="en-US" sz="1600" dirty="0"/>
+          </a:p>
+        </p:txBody>
+      </p:sp>
+      <p:sp>
+        <p:nvSpPr>
+          <p:cNvPr id="40" name="Shape 38"/>
+          <p:cNvSpPr/>
+          <p:nvPr/>
+        </p:nvSpPr>
+        <p:spPr>
+          <a:xfrm>
+            <a:off x="6858000" y="3364992"/>
+            <a:ext cx="1554480" cy="475488"/>
+          </a:xfrm>
+          <a:prstGeom prst="rect">
+            <a:avLst>
+              <a:gd name="adj" fmla="val 9615"/>
+            </a:avLst>
+          </a:prstGeom>
+          <a:solidFill>
+            <a:srgbClr val="FFFFFF"/>
+          </a:solidFill>
+          <a:ln w="12700">
+            <a:solidFill>
+              <a:srgbClr val="0D9488"/>
+            </a:solidFill>
+            <a:prstDash val="solid"/>
+          </a:ln>
+        </p:spPr>
+      </p:sp>
+      <p:sp>
+        <p:nvSpPr>
+          <p:cNvPr id="41" name="Text 39"/>
+          <p:cNvSpPr/>
+          <p:nvPr/>
+        </p:nvSpPr>
+        <p:spPr>
+          <a:xfrm>
+            <a:off x="6858000" y="3364992"/>
+            <a:ext cx="1554480" cy="475488"/>
+          </a:xfrm>
+          <a:prstGeom prst="rect">
+            <a:avLst/>
+          </a:prstGeom>
+          <a:noFill/>
+          <a:ln/>
+        </p:spPr>
+        <p:txBody>
+          <a:bodyPr wrap="square" lIns="0" tIns="0" rIns="0" bIns="0" rtlCol="0" anchor="ctr"/>
+          <a:lstStyle/>
+          <a:p>
+            <a:pPr algn="ctr" indent="0" marL="0">
+              <a:buNone/>
+            </a:pPr>
+            <a:r>
+              <a:rPr lang="en-US" sz="1400" b="1" dirty="0">
+                <a:solidFill>
+                  <a:srgbClr val="0D9488"/>
+                </a:solidFill>
+                <a:latin typeface="Trebuchet MS" pitchFamily="34" charset="0"/>
+                <a:ea typeface="Trebuchet MS" pitchFamily="34" charset="-122"/>
+                <a:cs typeface="Trebuchet MS" pitchFamily="34" charset="-120"/>
+              </a:rPr>
+              <a:t>tion</a:t>
+            </a:r>
+            <a:endParaRPr lang="en-US" sz="1400" dirty="0"/>
+          </a:p>
+        </p:txBody>
+      </p:sp>
+      <p:sp>
+        <p:nvSpPr>
+          <p:cNvPr id="42" name="Shape 40"/>
           <p:cNvSpPr/>
           <p:nvPr/>
         </p:nvSpPr>
@@ -27543,7 +28511,7 @@
       </p:sp>
       <p:sp>
         <p:nvSpPr>
-          <p:cNvPr id="37" name="Text 35"/>
+          <p:cNvPr id="43" name="Text 41"/>
           <p:cNvSpPr/>
           <p:nvPr/>
         </p:nvSpPr>
@@ -27582,7 +28550,7 @@
       </p:sp>
       <p:sp>
         <p:nvSpPr>
-          <p:cNvPr id="38" name="Shape 36"/>
+          <p:cNvPr id="44" name="Shape 42"/>
           <p:cNvSpPr/>
           <p:nvPr/>
         </p:nvSpPr>
@@ -27609,7 +28577,7 @@
       </p:sp>
       <p:sp>
         <p:nvSpPr>
-          <p:cNvPr id="39" name="Text 37"/>
+          <p:cNvPr id="45" name="Text 43"/>
           <p:cNvSpPr/>
           <p:nvPr/>
         </p:nvSpPr>
@@ -28071,7 +29039,7 @@
                 <a:ea typeface="Trebuchet MS" pitchFamily="34" charset="-122"/>
                 <a:cs typeface="Trebuchet MS" pitchFamily="34" charset="-120"/>
               </a:rPr>
-              <a:t>reconstruct</a:t>
+              <a:t>reconstruction</a:t>
             </a:r>
             <a:endParaRPr lang="en-US" sz="2800" dirty="0"/>
           </a:p>
@@ -28151,8 +29119,8 @@
         </p:nvSpPr>
         <p:spPr>
           <a:xfrm>
-            <a:off x="2221992" y="2258568"/>
-            <a:ext cx="1828800" cy="292608"/>
+            <a:off x="1989734" y="2258568"/>
+            <a:ext cx="1581912" cy="292608"/>
           </a:xfrm>
           <a:prstGeom prst="rect">
             <a:avLst>
@@ -28185,8 +29153,8 @@
         </p:nvSpPr>
         <p:spPr>
           <a:xfrm>
-            <a:off x="2221992" y="2258568"/>
-            <a:ext cx="1828800" cy="292608"/>
+            <a:off x="1989734" y="2258568"/>
+            <a:ext cx="1581912" cy="292608"/>
           </a:xfrm>
           <a:prstGeom prst="rect">
             <a:avLst/>
@@ -28224,8 +29192,8 @@
         </p:nvSpPr>
         <p:spPr>
           <a:xfrm>
-            <a:off x="2221992" y="2569464"/>
-            <a:ext cx="1828800" cy="201168"/>
+            <a:off x="1989734" y="2569464"/>
+            <a:ext cx="1581912" cy="201168"/>
           </a:xfrm>
           <a:prstGeom prst="rect">
             <a:avLst/>
@@ -28263,8 +29231,8 @@
         </p:nvSpPr>
         <p:spPr>
           <a:xfrm>
-            <a:off x="4370832" y="2258568"/>
-            <a:ext cx="1828800" cy="292608"/>
+            <a:off x="3659429" y="2258568"/>
+            <a:ext cx="1581912" cy="292608"/>
           </a:xfrm>
           <a:prstGeom prst="rect">
             <a:avLst>
@@ -28297,8 +29265,8 @@
         </p:nvSpPr>
         <p:spPr>
           <a:xfrm>
-            <a:off x="4370832" y="2258568"/>
-            <a:ext cx="1828800" cy="292608"/>
+            <a:off x="3659429" y="2258568"/>
+            <a:ext cx="1581912" cy="292608"/>
           </a:xfrm>
           <a:prstGeom prst="rect">
             <a:avLst/>
@@ -28336,8 +29304,8 @@
         </p:nvSpPr>
         <p:spPr>
           <a:xfrm>
-            <a:off x="4370832" y="2569464"/>
-            <a:ext cx="1828800" cy="201168"/>
+            <a:off x="3659429" y="2569464"/>
+            <a:ext cx="1581912" cy="201168"/>
           </a:xfrm>
           <a:prstGeom prst="rect">
             <a:avLst/>
@@ -28361,7 +29329,7 @@
                 <a:ea typeface="Calibri" pitchFamily="34" charset="-122"/>
                 <a:cs typeface="Calibri" pitchFamily="34" charset="-120"/>
               </a:rPr>
-              <a:t>together, with</a:t>
+              <a:t>together or with</a:t>
             </a:r>
             <a:endParaRPr lang="en-US" sz="850" dirty="0"/>
           </a:p>
@@ -28375,8 +29343,8 @@
         </p:nvSpPr>
         <p:spPr>
           <a:xfrm>
-            <a:off x="6519672" y="2258568"/>
-            <a:ext cx="1828800" cy="292608"/>
+            <a:off x="5329123" y="2258568"/>
+            <a:ext cx="1581912" cy="292608"/>
           </a:xfrm>
           <a:prstGeom prst="rect">
             <a:avLst>
@@ -28409,8 +29377,8 @@
         </p:nvSpPr>
         <p:spPr>
           <a:xfrm>
-            <a:off x="6519672" y="2258568"/>
-            <a:ext cx="1828800" cy="292608"/>
+            <a:off x="5329123" y="2258568"/>
+            <a:ext cx="1581912" cy="292608"/>
           </a:xfrm>
           <a:prstGeom prst="rect">
             <a:avLst/>
@@ -28448,8 +29416,8 @@
         </p:nvSpPr>
         <p:spPr>
           <a:xfrm>
-            <a:off x="6519672" y="2569464"/>
-            <a:ext cx="1828800" cy="201168"/>
+            <a:off x="5329123" y="2569464"/>
+            <a:ext cx="1581912" cy="201168"/>
           </a:xfrm>
           <a:prstGeom prst="rect">
             <a:avLst/>
@@ -28473,7 +29441,7 @@
                 <a:ea typeface="Calibri" pitchFamily="34" charset="-122"/>
                 <a:cs typeface="Calibri" pitchFamily="34" charset="-120"/>
               </a:rPr>
-              <a:t>to build or arrange</a:t>
+              <a:t>to build</a:t>
             </a:r>
             <a:endParaRPr lang="en-US" sz="850" dirty="0"/>
           </a:p>
@@ -28482,6 +29450,118 @@
       <p:sp>
         <p:nvSpPr>
           <p:cNvPr id="25" name="Shape 23"/>
+          <p:cNvSpPr/>
+          <p:nvPr/>
+        </p:nvSpPr>
+        <p:spPr>
+          <a:xfrm>
+            <a:off x="6998818" y="2258568"/>
+            <a:ext cx="1581912" cy="292608"/>
+          </a:xfrm>
+          <a:prstGeom prst="rect">
+            <a:avLst>
+              <a:gd name="adj" fmla="val 25000"/>
+            </a:avLst>
+          </a:prstGeom>
+          <a:solidFill>
+            <a:srgbClr val="FCE7F3"/>
+          </a:solidFill>
+          <a:ln w="19050">
+            <a:solidFill>
+              <a:srgbClr val="DB2777"/>
+            </a:solidFill>
+            <a:prstDash val="solid"/>
+          </a:ln>
+          <a:effectLst>
+            <a:outerShdw sx="100000" sy="100000" kx="0" ky="0" algn="bl" rotWithShape="0" blurRad="101600" dist="38100" dir="8100000">
+              <a:srgbClr val="000000">
+                <a:alpha val="12000"/>
+              </a:srgbClr>
+            </a:outerShdw>
+          </a:effectLst>
+        </p:spPr>
+      </p:sp>
+      <p:sp>
+        <p:nvSpPr>
+          <p:cNvPr id="26" name="Text 24"/>
+          <p:cNvSpPr/>
+          <p:nvPr/>
+        </p:nvSpPr>
+        <p:spPr>
+          <a:xfrm>
+            <a:off x="6998818" y="2258568"/>
+            <a:ext cx="1581912" cy="292608"/>
+          </a:xfrm>
+          <a:prstGeom prst="rect">
+            <a:avLst/>
+          </a:prstGeom>
+          <a:noFill/>
+          <a:ln/>
+        </p:spPr>
+        <p:txBody>
+          <a:bodyPr wrap="square" lIns="0" tIns="0" rIns="0" bIns="0" rtlCol="0" anchor="ctr"/>
+          <a:lstStyle/>
+          <a:p>
+            <a:pPr algn="ctr" indent="0" marL="0">
+              <a:buNone/>
+            </a:pPr>
+            <a:r>
+              <a:rPr lang="en-US" sz="1300" b="1" dirty="0">
+                <a:solidFill>
+                  <a:srgbClr val="9D174D"/>
+                </a:solidFill>
+                <a:latin typeface="Trebuchet MS" pitchFamily="34" charset="0"/>
+                <a:ea typeface="Trebuchet MS" pitchFamily="34" charset="-122"/>
+                <a:cs typeface="Trebuchet MS" pitchFamily="34" charset="-120"/>
+              </a:rPr>
+              <a:t>ion</a:t>
+            </a:r>
+            <a:endParaRPr lang="en-US" sz="1300" dirty="0"/>
+          </a:p>
+        </p:txBody>
+      </p:sp>
+      <p:sp>
+        <p:nvSpPr>
+          <p:cNvPr id="27" name="Text 25"/>
+          <p:cNvSpPr/>
+          <p:nvPr/>
+        </p:nvSpPr>
+        <p:spPr>
+          <a:xfrm>
+            <a:off x="6998818" y="2569464"/>
+            <a:ext cx="1581912" cy="201168"/>
+          </a:xfrm>
+          <a:prstGeom prst="rect">
+            <a:avLst/>
+          </a:prstGeom>
+          <a:noFill/>
+          <a:ln/>
+        </p:spPr>
+        <p:txBody>
+          <a:bodyPr wrap="square" lIns="0" tIns="0" rIns="0" bIns="0" rtlCol="0" anchor="t"/>
+          <a:lstStyle/>
+          <a:p>
+            <a:pPr algn="ctr" indent="0" marL="0">
+              <a:buNone/>
+            </a:pPr>
+            <a:r>
+              <a:rPr lang="en-US" sz="850" dirty="0">
+                <a:solidFill>
+                  <a:srgbClr val="475569"/>
+                </a:solidFill>
+                <a:latin typeface="Calibri" pitchFamily="34" charset="0"/>
+                <a:ea typeface="Calibri" pitchFamily="34" charset="-122"/>
+                <a:cs typeface="Calibri" pitchFamily="34" charset="-120"/>
+              </a:rPr>
+              <a:t>the act or result of</a:t>
+            </a:r>
+            <a:endParaRPr lang="en-US" sz="850" dirty="0"/>
+          </a:p>
+        </p:txBody>
+      </p:sp>
+      <p:sp>
+        <p:nvSpPr>
+          <p:cNvPr id="28" name="Shape 26"/>
           <p:cNvSpPr/>
           <p:nvPr/>
         </p:nvSpPr>
@@ -28508,7 +29588,7 @@
       </p:sp>
       <p:sp>
         <p:nvSpPr>
-          <p:cNvPr id="26" name="Text 24"/>
+          <p:cNvPr id="29" name="Text 27"/>
           <p:cNvSpPr/>
           <p:nvPr/>
         </p:nvSpPr>
@@ -28547,7 +29627,7 @@
       </p:sp>
       <p:sp>
         <p:nvSpPr>
-          <p:cNvPr id="27" name="Shape 25"/>
+          <p:cNvPr id="30" name="Shape 28"/>
           <p:cNvSpPr/>
           <p:nvPr/>
         </p:nvSpPr>
@@ -28574,14 +29654,14 @@
       </p:sp>
       <p:sp>
         <p:nvSpPr>
-          <p:cNvPr id="28" name="Shape 26"/>
-          <p:cNvSpPr/>
-          <p:nvPr/>
-        </p:nvSpPr>
-        <p:spPr>
-          <a:xfrm>
-            <a:off x="2313432" y="3364992"/>
-            <a:ext cx="1645920" cy="475488"/>
+          <p:cNvPr id="31" name="Shape 29"/>
+          <p:cNvSpPr/>
+          <p:nvPr/>
+        </p:nvSpPr>
+        <p:spPr>
+          <a:xfrm>
+            <a:off x="1975104" y="3364992"/>
+            <a:ext cx="1554480" cy="475488"/>
           </a:xfrm>
           <a:prstGeom prst="rect">
             <a:avLst>
@@ -28601,14 +29681,14 @@
       </p:sp>
       <p:sp>
         <p:nvSpPr>
-          <p:cNvPr id="29" name="Text 27"/>
-          <p:cNvSpPr/>
-          <p:nvPr/>
-        </p:nvSpPr>
-        <p:spPr>
-          <a:xfrm>
-            <a:off x="2313432" y="3364992"/>
-            <a:ext cx="1645920" cy="475488"/>
+          <p:cNvPr id="32" name="Text 30"/>
+          <p:cNvSpPr/>
+          <p:nvPr/>
+        </p:nvSpPr>
+        <p:spPr>
+          <a:xfrm>
+            <a:off x="1975104" y="3364992"/>
+            <a:ext cx="1554480" cy="475488"/>
           </a:xfrm>
           <a:prstGeom prst="rect">
             <a:avLst/>
@@ -28640,14 +29720,14 @@
       </p:sp>
       <p:sp>
         <p:nvSpPr>
-          <p:cNvPr id="30" name="Text 28"/>
-          <p:cNvSpPr/>
-          <p:nvPr/>
-        </p:nvSpPr>
-        <p:spPr>
-          <a:xfrm>
-            <a:off x="3959352" y="3364992"/>
-            <a:ext cx="411480" cy="475488"/>
+          <p:cNvPr id="33" name="Text 31"/>
+          <p:cNvSpPr/>
+          <p:nvPr/>
+        </p:nvSpPr>
+        <p:spPr>
+          <a:xfrm>
+            <a:off x="3529584" y="3364992"/>
+            <a:ext cx="73152" cy="475488"/>
           </a:xfrm>
           <a:prstGeom prst="rect">
             <a:avLst/>
@@ -28679,14 +29759,14 @@
       </p:sp>
       <p:sp>
         <p:nvSpPr>
-          <p:cNvPr id="31" name="Shape 29"/>
-          <p:cNvSpPr/>
-          <p:nvPr/>
-        </p:nvSpPr>
-        <p:spPr>
-          <a:xfrm>
-            <a:off x="4370832" y="3364992"/>
-            <a:ext cx="1645920" cy="475488"/>
+          <p:cNvPr id="34" name="Shape 32"/>
+          <p:cNvSpPr/>
+          <p:nvPr/>
+        </p:nvSpPr>
+        <p:spPr>
+          <a:xfrm>
+            <a:off x="3602736" y="3364992"/>
+            <a:ext cx="1554480" cy="475488"/>
           </a:xfrm>
           <a:prstGeom prst="rect">
             <a:avLst>
@@ -28706,14 +29786,14 @@
       </p:sp>
       <p:sp>
         <p:nvSpPr>
-          <p:cNvPr id="32" name="Text 30"/>
-          <p:cNvSpPr/>
-          <p:nvPr/>
-        </p:nvSpPr>
-        <p:spPr>
-          <a:xfrm>
-            <a:off x="4370832" y="3364992"/>
-            <a:ext cx="1645920" cy="475488"/>
+          <p:cNvPr id="35" name="Text 33"/>
+          <p:cNvSpPr/>
+          <p:nvPr/>
+        </p:nvSpPr>
+        <p:spPr>
+          <a:xfrm>
+            <a:off x="3602736" y="3364992"/>
+            <a:ext cx="1554480" cy="475488"/>
           </a:xfrm>
           <a:prstGeom prst="rect">
             <a:avLst/>
@@ -28745,14 +29825,14 @@
       </p:sp>
       <p:sp>
         <p:nvSpPr>
-          <p:cNvPr id="33" name="Text 31"/>
-          <p:cNvSpPr/>
-          <p:nvPr/>
-        </p:nvSpPr>
-        <p:spPr>
-          <a:xfrm>
-            <a:off x="6016752" y="3364992"/>
-            <a:ext cx="411480" cy="475488"/>
+          <p:cNvPr id="36" name="Text 34"/>
+          <p:cNvSpPr/>
+          <p:nvPr/>
+        </p:nvSpPr>
+        <p:spPr>
+          <a:xfrm>
+            <a:off x="5157216" y="3364992"/>
+            <a:ext cx="73152" cy="475488"/>
           </a:xfrm>
           <a:prstGeom prst="rect">
             <a:avLst/>
@@ -28784,14 +29864,14 @@
       </p:sp>
       <p:sp>
         <p:nvSpPr>
-          <p:cNvPr id="34" name="Shape 32"/>
-          <p:cNvSpPr/>
-          <p:nvPr/>
-        </p:nvSpPr>
-        <p:spPr>
-          <a:xfrm>
-            <a:off x="6428232" y="3364992"/>
-            <a:ext cx="1645920" cy="475488"/>
+          <p:cNvPr id="37" name="Shape 35"/>
+          <p:cNvSpPr/>
+          <p:nvPr/>
+        </p:nvSpPr>
+        <p:spPr>
+          <a:xfrm>
+            <a:off x="5230368" y="3364992"/>
+            <a:ext cx="1554480" cy="475488"/>
           </a:xfrm>
           <a:prstGeom prst="rect">
             <a:avLst>
@@ -28811,14 +29891,14 @@
       </p:sp>
       <p:sp>
         <p:nvSpPr>
-          <p:cNvPr id="35" name="Text 33"/>
-          <p:cNvSpPr/>
-          <p:nvPr/>
-        </p:nvSpPr>
-        <p:spPr>
-          <a:xfrm>
-            <a:off x="6428232" y="3364992"/>
-            <a:ext cx="1645920" cy="475488"/>
+          <p:cNvPr id="38" name="Text 36"/>
+          <p:cNvSpPr/>
+          <p:nvPr/>
+        </p:nvSpPr>
+        <p:spPr>
+          <a:xfrm>
+            <a:off x="5230368" y="3364992"/>
+            <a:ext cx="1554480" cy="475488"/>
           </a:xfrm>
           <a:prstGeom prst="rect">
             <a:avLst/>
@@ -28842,7 +29922,7 @@
                 <a:ea typeface="Trebuchet MS" pitchFamily="34" charset="-122"/>
                 <a:cs typeface="Trebuchet MS" pitchFamily="34" charset="-120"/>
               </a:rPr>
-              <a:t>struct</a:t>
+              <a:t>struc</a:t>
             </a:r>
             <a:endParaRPr lang="en-US" sz="1400" dirty="0"/>
           </a:p>
@@ -28850,7 +29930,112 @@
       </p:sp>
       <p:sp>
         <p:nvSpPr>
-          <p:cNvPr id="36" name="Shape 34"/>
+          <p:cNvPr id="39" name="Text 37"/>
+          <p:cNvSpPr/>
+          <p:nvPr/>
+        </p:nvSpPr>
+        <p:spPr>
+          <a:xfrm>
+            <a:off x="6784848" y="3364992"/>
+            <a:ext cx="73152" cy="475488"/>
+          </a:xfrm>
+          <a:prstGeom prst="rect">
+            <a:avLst/>
+          </a:prstGeom>
+          <a:noFill/>
+          <a:ln/>
+        </p:spPr>
+        <p:txBody>
+          <a:bodyPr wrap="square" lIns="0" tIns="0" rIns="0" bIns="0" rtlCol="0" anchor="ctr"/>
+          <a:lstStyle/>
+          <a:p>
+            <a:pPr algn="ctr" indent="0" marL="0">
+              <a:buNone/>
+            </a:pPr>
+            <a:r>
+              <a:rPr lang="en-US" sz="1600" b="1" dirty="0">
+                <a:solidFill>
+                  <a:srgbClr val="0D9488"/>
+                </a:solidFill>
+                <a:latin typeface="Trebuchet MS" pitchFamily="34" charset="0"/>
+                <a:ea typeface="Trebuchet MS" pitchFamily="34" charset="-122"/>
+                <a:cs typeface="Trebuchet MS" pitchFamily="34" charset="-120"/>
+              </a:rPr>
+              <a:t>·</a:t>
+            </a:r>
+            <a:endParaRPr lang="en-US" sz="1600" dirty="0"/>
+          </a:p>
+        </p:txBody>
+      </p:sp>
+      <p:sp>
+        <p:nvSpPr>
+          <p:cNvPr id="40" name="Shape 38"/>
+          <p:cNvSpPr/>
+          <p:nvPr/>
+        </p:nvSpPr>
+        <p:spPr>
+          <a:xfrm>
+            <a:off x="6858000" y="3364992"/>
+            <a:ext cx="1554480" cy="475488"/>
+          </a:xfrm>
+          <a:prstGeom prst="rect">
+            <a:avLst>
+              <a:gd name="adj" fmla="val 9615"/>
+            </a:avLst>
+          </a:prstGeom>
+          <a:solidFill>
+            <a:srgbClr val="FFFFFF"/>
+          </a:solidFill>
+          <a:ln w="12700">
+            <a:solidFill>
+              <a:srgbClr val="0D9488"/>
+            </a:solidFill>
+            <a:prstDash val="solid"/>
+          </a:ln>
+        </p:spPr>
+      </p:sp>
+      <p:sp>
+        <p:nvSpPr>
+          <p:cNvPr id="41" name="Text 39"/>
+          <p:cNvSpPr/>
+          <p:nvPr/>
+        </p:nvSpPr>
+        <p:spPr>
+          <a:xfrm>
+            <a:off x="6858000" y="3364992"/>
+            <a:ext cx="1554480" cy="475488"/>
+          </a:xfrm>
+          <a:prstGeom prst="rect">
+            <a:avLst/>
+          </a:prstGeom>
+          <a:noFill/>
+          <a:ln/>
+        </p:spPr>
+        <p:txBody>
+          <a:bodyPr wrap="square" lIns="0" tIns="0" rIns="0" bIns="0" rtlCol="0" anchor="ctr"/>
+          <a:lstStyle/>
+          <a:p>
+            <a:pPr algn="ctr" indent="0" marL="0">
+              <a:buNone/>
+            </a:pPr>
+            <a:r>
+              <a:rPr lang="en-US" sz="1400" b="1" dirty="0">
+                <a:solidFill>
+                  <a:srgbClr val="0D9488"/>
+                </a:solidFill>
+                <a:latin typeface="Trebuchet MS" pitchFamily="34" charset="0"/>
+                <a:ea typeface="Trebuchet MS" pitchFamily="34" charset="-122"/>
+                <a:cs typeface="Trebuchet MS" pitchFamily="34" charset="-120"/>
+              </a:rPr>
+              <a:t>tion</a:t>
+            </a:r>
+            <a:endParaRPr lang="en-US" sz="1400" dirty="0"/>
+          </a:p>
+        </p:txBody>
+      </p:sp>
+      <p:sp>
+        <p:nvSpPr>
+          <p:cNvPr id="42" name="Shape 40"/>
           <p:cNvSpPr/>
           <p:nvPr/>
         </p:nvSpPr>
@@ -28877,7 +30062,7 @@
       </p:sp>
       <p:sp>
         <p:nvSpPr>
-          <p:cNvPr id="37" name="Text 35"/>
+          <p:cNvPr id="43" name="Text 41"/>
           <p:cNvSpPr/>
           <p:nvPr/>
         </p:nvSpPr>
@@ -28916,7 +30101,7 @@
       </p:sp>
       <p:sp>
         <p:nvSpPr>
-          <p:cNvPr id="38" name="Shape 36"/>
+          <p:cNvPr id="44" name="Shape 42"/>
           <p:cNvSpPr/>
           <p:nvPr/>
         </p:nvSpPr>
@@ -28943,18 +30128,18 @@
       </p:sp>
       <p:sp>
         <p:nvSpPr>
-          <p:cNvPr id="39" name="Shape 37"/>
-          <p:cNvSpPr/>
-          <p:nvPr/>
-        </p:nvSpPr>
-        <p:spPr>
-          <a:xfrm>
-            <a:off x="1952244" y="4169664"/>
-            <a:ext cx="543652" cy="475488"/>
+          <p:cNvPr id="45" name="Shape 43"/>
+          <p:cNvSpPr/>
+          <p:nvPr/>
+        </p:nvSpPr>
+        <p:spPr>
+          <a:xfrm>
+            <a:off x="1953158" y="4169664"/>
+            <a:ext cx="415399" cy="475488"/>
           </a:xfrm>
           <a:prstGeom prst="rect">
             <a:avLst>
-              <a:gd name="adj" fmla="val 7692"/>
+              <a:gd name="adj" fmla="val 8805"/>
             </a:avLst>
           </a:prstGeom>
           <a:solidFill>
@@ -28970,14 +30155,14 @@
       </p:sp>
       <p:sp>
         <p:nvSpPr>
-          <p:cNvPr id="40" name="Text 38"/>
-          <p:cNvSpPr/>
-          <p:nvPr/>
-        </p:nvSpPr>
-        <p:spPr>
-          <a:xfrm>
-            <a:off x="1952244" y="4169664"/>
-            <a:ext cx="543652" cy="475488"/>
+          <p:cNvPr id="46" name="Text 44"/>
+          <p:cNvSpPr/>
+          <p:nvPr/>
+        </p:nvSpPr>
+        <p:spPr>
+          <a:xfrm>
+            <a:off x="1953158" y="4169664"/>
+            <a:ext cx="415399" cy="475488"/>
           </a:xfrm>
           <a:prstGeom prst="rect">
             <a:avLst/>
@@ -29009,18 +30194,18 @@
       </p:sp>
       <p:sp>
         <p:nvSpPr>
-          <p:cNvPr id="41" name="Shape 39"/>
-          <p:cNvSpPr/>
-          <p:nvPr/>
-        </p:nvSpPr>
-        <p:spPr>
-          <a:xfrm>
-            <a:off x="2546188" y="4169664"/>
-            <a:ext cx="543652" cy="475488"/>
+          <p:cNvPr id="47" name="Shape 45"/>
+          <p:cNvSpPr/>
+          <p:nvPr/>
+        </p:nvSpPr>
+        <p:spPr>
+          <a:xfrm>
+            <a:off x="2419764" y="4169664"/>
+            <a:ext cx="415399" cy="475488"/>
           </a:xfrm>
           <a:prstGeom prst="rect">
             <a:avLst>
-              <a:gd name="adj" fmla="val 7692"/>
+              <a:gd name="adj" fmla="val 8805"/>
             </a:avLst>
           </a:prstGeom>
           <a:solidFill>
@@ -29036,14 +30221,14 @@
       </p:sp>
       <p:sp>
         <p:nvSpPr>
-          <p:cNvPr id="42" name="Text 40"/>
-          <p:cNvSpPr/>
-          <p:nvPr/>
-        </p:nvSpPr>
-        <p:spPr>
-          <a:xfrm>
-            <a:off x="2546188" y="4169664"/>
-            <a:ext cx="543652" cy="475488"/>
+          <p:cNvPr id="48" name="Text 46"/>
+          <p:cNvSpPr/>
+          <p:nvPr/>
+        </p:nvSpPr>
+        <p:spPr>
+          <a:xfrm>
+            <a:off x="2419764" y="4169664"/>
+            <a:ext cx="415399" cy="475488"/>
           </a:xfrm>
           <a:prstGeom prst="rect">
             <a:avLst/>
@@ -29075,18 +30260,18 @@
       </p:sp>
       <p:sp>
         <p:nvSpPr>
-          <p:cNvPr id="43" name="Shape 41"/>
-          <p:cNvSpPr/>
-          <p:nvPr/>
-        </p:nvSpPr>
-        <p:spPr>
-          <a:xfrm>
-            <a:off x="3140133" y="4169664"/>
-            <a:ext cx="543652" cy="475488"/>
+          <p:cNvPr id="49" name="Shape 47"/>
+          <p:cNvSpPr/>
+          <p:nvPr/>
+        </p:nvSpPr>
+        <p:spPr>
+          <a:xfrm>
+            <a:off x="2886369" y="4169664"/>
+            <a:ext cx="415399" cy="475488"/>
           </a:xfrm>
           <a:prstGeom prst="rect">
             <a:avLst>
-              <a:gd name="adj" fmla="val 7692"/>
+              <a:gd name="adj" fmla="val 8805"/>
             </a:avLst>
           </a:prstGeom>
           <a:solidFill>
@@ -29102,14 +30287,14 @@
       </p:sp>
       <p:sp>
         <p:nvSpPr>
-          <p:cNvPr id="44" name="Text 42"/>
-          <p:cNvSpPr/>
-          <p:nvPr/>
-        </p:nvSpPr>
-        <p:spPr>
-          <a:xfrm>
-            <a:off x="3140133" y="4169664"/>
-            <a:ext cx="543652" cy="475488"/>
+          <p:cNvPr id="50" name="Text 48"/>
+          <p:cNvSpPr/>
+          <p:nvPr/>
+        </p:nvSpPr>
+        <p:spPr>
+          <a:xfrm>
+            <a:off x="2886369" y="4169664"/>
+            <a:ext cx="415399" cy="475488"/>
           </a:xfrm>
           <a:prstGeom prst="rect">
             <a:avLst/>
@@ -29141,18 +30326,18 @@
       </p:sp>
       <p:sp>
         <p:nvSpPr>
-          <p:cNvPr id="45" name="Shape 43"/>
-          <p:cNvSpPr/>
-          <p:nvPr/>
-        </p:nvSpPr>
-        <p:spPr>
-          <a:xfrm>
-            <a:off x="3734077" y="4169664"/>
-            <a:ext cx="543652" cy="475488"/>
+          <p:cNvPr id="51" name="Shape 49"/>
+          <p:cNvSpPr/>
+          <p:nvPr/>
+        </p:nvSpPr>
+        <p:spPr>
+          <a:xfrm>
+            <a:off x="3352974" y="4169664"/>
+            <a:ext cx="415399" cy="475488"/>
           </a:xfrm>
           <a:prstGeom prst="rect">
             <a:avLst>
-              <a:gd name="adj" fmla="val 7692"/>
+              <a:gd name="adj" fmla="val 8805"/>
             </a:avLst>
           </a:prstGeom>
           <a:solidFill>
@@ -29168,14 +30353,14 @@
       </p:sp>
       <p:sp>
         <p:nvSpPr>
-          <p:cNvPr id="46" name="Text 44"/>
-          <p:cNvSpPr/>
-          <p:nvPr/>
-        </p:nvSpPr>
-        <p:spPr>
-          <a:xfrm>
-            <a:off x="3734077" y="4169664"/>
-            <a:ext cx="543652" cy="475488"/>
+          <p:cNvPr id="52" name="Text 50"/>
+          <p:cNvSpPr/>
+          <p:nvPr/>
+        </p:nvSpPr>
+        <p:spPr>
+          <a:xfrm>
+            <a:off x="3352974" y="4169664"/>
+            <a:ext cx="415399" cy="475488"/>
           </a:xfrm>
           <a:prstGeom prst="rect">
             <a:avLst/>
@@ -29207,18 +30392,18 @@
       </p:sp>
       <p:sp>
         <p:nvSpPr>
-          <p:cNvPr id="47" name="Shape 45"/>
-          <p:cNvSpPr/>
-          <p:nvPr/>
-        </p:nvSpPr>
-        <p:spPr>
-          <a:xfrm>
-            <a:off x="4328021" y="4169664"/>
-            <a:ext cx="543652" cy="475488"/>
+          <p:cNvPr id="53" name="Shape 51"/>
+          <p:cNvSpPr/>
+          <p:nvPr/>
+        </p:nvSpPr>
+        <p:spPr>
+          <a:xfrm>
+            <a:off x="3819579" y="4169664"/>
+            <a:ext cx="415399" cy="475488"/>
           </a:xfrm>
           <a:prstGeom prst="rect">
             <a:avLst>
-              <a:gd name="adj" fmla="val 7692"/>
+              <a:gd name="adj" fmla="val 8805"/>
             </a:avLst>
           </a:prstGeom>
           <a:solidFill>
@@ -29234,14 +30419,14 @@
       </p:sp>
       <p:sp>
         <p:nvSpPr>
-          <p:cNvPr id="48" name="Text 46"/>
-          <p:cNvSpPr/>
-          <p:nvPr/>
-        </p:nvSpPr>
-        <p:spPr>
-          <a:xfrm>
-            <a:off x="4328021" y="4169664"/>
-            <a:ext cx="543652" cy="475488"/>
+          <p:cNvPr id="54" name="Text 52"/>
+          <p:cNvSpPr/>
+          <p:nvPr/>
+        </p:nvSpPr>
+        <p:spPr>
+          <a:xfrm>
+            <a:off x="3819579" y="4169664"/>
+            <a:ext cx="415399" cy="475488"/>
           </a:xfrm>
           <a:prstGeom prst="rect">
             <a:avLst/>
@@ -29273,18 +30458,18 @@
       </p:sp>
       <p:sp>
         <p:nvSpPr>
-          <p:cNvPr id="49" name="Shape 47"/>
-          <p:cNvSpPr/>
-          <p:nvPr/>
-        </p:nvSpPr>
-        <p:spPr>
-          <a:xfrm>
-            <a:off x="4921966" y="4169664"/>
-            <a:ext cx="543652" cy="475488"/>
+          <p:cNvPr id="55" name="Shape 53"/>
+          <p:cNvSpPr/>
+          <p:nvPr/>
+        </p:nvSpPr>
+        <p:spPr>
+          <a:xfrm>
+            <a:off x="4286185" y="4169664"/>
+            <a:ext cx="415399" cy="475488"/>
           </a:xfrm>
           <a:prstGeom prst="rect">
             <a:avLst>
-              <a:gd name="adj" fmla="val 7692"/>
+              <a:gd name="adj" fmla="val 8805"/>
             </a:avLst>
           </a:prstGeom>
           <a:solidFill>
@@ -29300,14 +30485,14 @@
       </p:sp>
       <p:sp>
         <p:nvSpPr>
-          <p:cNvPr id="50" name="Text 48"/>
-          <p:cNvSpPr/>
-          <p:nvPr/>
-        </p:nvSpPr>
-        <p:spPr>
-          <a:xfrm>
-            <a:off x="4921966" y="4169664"/>
-            <a:ext cx="543652" cy="475488"/>
+          <p:cNvPr id="56" name="Text 54"/>
+          <p:cNvSpPr/>
+          <p:nvPr/>
+        </p:nvSpPr>
+        <p:spPr>
+          <a:xfrm>
+            <a:off x="4286185" y="4169664"/>
+            <a:ext cx="415399" cy="475488"/>
           </a:xfrm>
           <a:prstGeom prst="rect">
             <a:avLst/>
@@ -29339,18 +30524,18 @@
       </p:sp>
       <p:sp>
         <p:nvSpPr>
-          <p:cNvPr id="51" name="Shape 49"/>
-          <p:cNvSpPr/>
-          <p:nvPr/>
-        </p:nvSpPr>
-        <p:spPr>
-          <a:xfrm>
-            <a:off x="5515910" y="4169664"/>
-            <a:ext cx="543652" cy="475488"/>
+          <p:cNvPr id="57" name="Shape 55"/>
+          <p:cNvSpPr/>
+          <p:nvPr/>
+        </p:nvSpPr>
+        <p:spPr>
+          <a:xfrm>
+            <a:off x="4752790" y="4169664"/>
+            <a:ext cx="415399" cy="475488"/>
           </a:xfrm>
           <a:prstGeom prst="rect">
             <a:avLst>
-              <a:gd name="adj" fmla="val 7692"/>
+              <a:gd name="adj" fmla="val 8805"/>
             </a:avLst>
           </a:prstGeom>
           <a:solidFill>
@@ -29366,14 +30551,14 @@
       </p:sp>
       <p:sp>
         <p:nvSpPr>
-          <p:cNvPr id="52" name="Text 50"/>
-          <p:cNvSpPr/>
-          <p:nvPr/>
-        </p:nvSpPr>
-        <p:spPr>
-          <a:xfrm>
-            <a:off x="5515910" y="4169664"/>
-            <a:ext cx="543652" cy="475488"/>
+          <p:cNvPr id="58" name="Text 56"/>
+          <p:cNvSpPr/>
+          <p:nvPr/>
+        </p:nvSpPr>
+        <p:spPr>
+          <a:xfrm>
+            <a:off x="4752790" y="4169664"/>
+            <a:ext cx="415399" cy="475488"/>
           </a:xfrm>
           <a:prstGeom prst="rect">
             <a:avLst/>
@@ -29405,18 +30590,18 @@
       </p:sp>
       <p:sp>
         <p:nvSpPr>
-          <p:cNvPr id="53" name="Shape 51"/>
-          <p:cNvSpPr/>
-          <p:nvPr/>
-        </p:nvSpPr>
-        <p:spPr>
-          <a:xfrm>
-            <a:off x="6109855" y="4169664"/>
-            <a:ext cx="543652" cy="475488"/>
+          <p:cNvPr id="59" name="Shape 57"/>
+          <p:cNvSpPr/>
+          <p:nvPr/>
+        </p:nvSpPr>
+        <p:spPr>
+          <a:xfrm>
+            <a:off x="5219395" y="4169664"/>
+            <a:ext cx="415399" cy="475488"/>
           </a:xfrm>
           <a:prstGeom prst="rect">
             <a:avLst>
-              <a:gd name="adj" fmla="val 7692"/>
+              <a:gd name="adj" fmla="val 8805"/>
             </a:avLst>
           </a:prstGeom>
           <a:solidFill>
@@ -29432,14 +30617,14 @@
       </p:sp>
       <p:sp>
         <p:nvSpPr>
-          <p:cNvPr id="54" name="Text 52"/>
-          <p:cNvSpPr/>
-          <p:nvPr/>
-        </p:nvSpPr>
-        <p:spPr>
-          <a:xfrm>
-            <a:off x="6109855" y="4169664"/>
-            <a:ext cx="543652" cy="475488"/>
+          <p:cNvPr id="60" name="Text 58"/>
+          <p:cNvSpPr/>
+          <p:nvPr/>
+        </p:nvSpPr>
+        <p:spPr>
+          <a:xfrm>
+            <a:off x="5219395" y="4169664"/>
+            <a:ext cx="415399" cy="475488"/>
           </a:xfrm>
           <a:prstGeom prst="rect">
             <a:avLst/>
@@ -29471,18 +30656,18 @@
       </p:sp>
       <p:sp>
         <p:nvSpPr>
-          <p:cNvPr id="55" name="Shape 53"/>
-          <p:cNvSpPr/>
-          <p:nvPr/>
-        </p:nvSpPr>
-        <p:spPr>
-          <a:xfrm>
-            <a:off x="6703799" y="4169664"/>
-            <a:ext cx="543652" cy="475488"/>
+          <p:cNvPr id="61" name="Shape 59"/>
+          <p:cNvSpPr/>
+          <p:nvPr/>
+        </p:nvSpPr>
+        <p:spPr>
+          <a:xfrm>
+            <a:off x="5686000" y="4169664"/>
+            <a:ext cx="415399" cy="475488"/>
           </a:xfrm>
           <a:prstGeom prst="rect">
             <a:avLst>
-              <a:gd name="adj" fmla="val 7692"/>
+              <a:gd name="adj" fmla="val 8805"/>
             </a:avLst>
           </a:prstGeom>
           <a:solidFill>
@@ -29498,14 +30683,14 @@
       </p:sp>
       <p:sp>
         <p:nvSpPr>
-          <p:cNvPr id="56" name="Text 54"/>
-          <p:cNvSpPr/>
-          <p:nvPr/>
-        </p:nvSpPr>
-        <p:spPr>
-          <a:xfrm>
-            <a:off x="6703799" y="4169664"/>
-            <a:ext cx="543652" cy="475488"/>
+          <p:cNvPr id="62" name="Text 60"/>
+          <p:cNvSpPr/>
+          <p:nvPr/>
+        </p:nvSpPr>
+        <p:spPr>
+          <a:xfrm>
+            <a:off x="5686000" y="4169664"/>
+            <a:ext cx="415399" cy="475488"/>
           </a:xfrm>
           <a:prstGeom prst="rect">
             <a:avLst/>
@@ -29537,18 +30722,18 @@
       </p:sp>
       <p:sp>
         <p:nvSpPr>
-          <p:cNvPr id="57" name="Shape 55"/>
-          <p:cNvSpPr/>
-          <p:nvPr/>
-        </p:nvSpPr>
-        <p:spPr>
-          <a:xfrm>
-            <a:off x="7297743" y="4169664"/>
-            <a:ext cx="543652" cy="475488"/>
+          <p:cNvPr id="63" name="Shape 61"/>
+          <p:cNvSpPr/>
+          <p:nvPr/>
+        </p:nvSpPr>
+        <p:spPr>
+          <a:xfrm>
+            <a:off x="6152606" y="4169664"/>
+            <a:ext cx="415399" cy="475488"/>
           </a:xfrm>
           <a:prstGeom prst="rect">
             <a:avLst>
-              <a:gd name="adj" fmla="val 7692"/>
+              <a:gd name="adj" fmla="val 8805"/>
             </a:avLst>
           </a:prstGeom>
           <a:solidFill>
@@ -29564,14 +30749,14 @@
       </p:sp>
       <p:sp>
         <p:nvSpPr>
-          <p:cNvPr id="58" name="Text 56"/>
-          <p:cNvSpPr/>
-          <p:nvPr/>
-        </p:nvSpPr>
-        <p:spPr>
-          <a:xfrm>
-            <a:off x="7297743" y="4169664"/>
-            <a:ext cx="543652" cy="475488"/>
+          <p:cNvPr id="64" name="Text 62"/>
+          <p:cNvSpPr/>
+          <p:nvPr/>
+        </p:nvSpPr>
+        <p:spPr>
+          <a:xfrm>
+            <a:off x="6152606" y="4169664"/>
+            <a:ext cx="415399" cy="475488"/>
           </a:xfrm>
           <a:prstGeom prst="rect">
             <a:avLst/>
@@ -29603,18 +30788,18 @@
       </p:sp>
       <p:sp>
         <p:nvSpPr>
-          <p:cNvPr id="59" name="Shape 57"/>
-          <p:cNvSpPr/>
-          <p:nvPr/>
-        </p:nvSpPr>
-        <p:spPr>
-          <a:xfrm>
-            <a:off x="7891688" y="4169664"/>
-            <a:ext cx="543652" cy="475488"/>
+          <p:cNvPr id="65" name="Shape 63"/>
+          <p:cNvSpPr/>
+          <p:nvPr/>
+        </p:nvSpPr>
+        <p:spPr>
+          <a:xfrm>
+            <a:off x="6619211" y="4169664"/>
+            <a:ext cx="415399" cy="475488"/>
           </a:xfrm>
           <a:prstGeom prst="rect">
             <a:avLst>
-              <a:gd name="adj" fmla="val 7692"/>
+              <a:gd name="adj" fmla="val 8805"/>
             </a:avLst>
           </a:prstGeom>
           <a:solidFill>
@@ -29630,14 +30815,14 @@
       </p:sp>
       <p:sp>
         <p:nvSpPr>
-          <p:cNvPr id="60" name="Text 58"/>
-          <p:cNvSpPr/>
-          <p:nvPr/>
-        </p:nvSpPr>
-        <p:spPr>
-          <a:xfrm>
-            <a:off x="7891688" y="4169664"/>
-            <a:ext cx="543652" cy="475488"/>
+          <p:cNvPr id="66" name="Text 64"/>
+          <p:cNvSpPr/>
+          <p:nvPr/>
+        </p:nvSpPr>
+        <p:spPr>
+          <a:xfrm>
+            <a:off x="6619211" y="4169664"/>
+            <a:ext cx="415399" cy="475488"/>
           </a:xfrm>
           <a:prstGeom prst="rect">
             <a:avLst/>
@@ -29662,6 +30847,204 @@
                 <a:cs typeface="Trebuchet MS" pitchFamily="34" charset="-120"/>
               </a:rPr>
               <a:t>t</a:t>
+            </a:r>
+            <a:endParaRPr lang="en-US" sz="900" dirty="0"/>
+          </a:p>
+        </p:txBody>
+      </p:sp>
+      <p:sp>
+        <p:nvSpPr>
+          <p:cNvPr id="67" name="Shape 65"/>
+          <p:cNvSpPr/>
+          <p:nvPr/>
+        </p:nvSpPr>
+        <p:spPr>
+          <a:xfrm>
+            <a:off x="7085816" y="4169664"/>
+            <a:ext cx="415399" cy="475488"/>
+          </a:xfrm>
+          <a:prstGeom prst="rect">
+            <a:avLst>
+              <a:gd name="adj" fmla="val 8805"/>
+            </a:avLst>
+          </a:prstGeom>
+          <a:solidFill>
+            <a:srgbClr val="FFFFFF"/>
+          </a:solidFill>
+          <a:ln w="12700">
+            <a:solidFill>
+              <a:srgbClr val="DB2777"/>
+            </a:solidFill>
+            <a:prstDash val="solid"/>
+          </a:ln>
+        </p:spPr>
+      </p:sp>
+      <p:sp>
+        <p:nvSpPr>
+          <p:cNvPr id="68" name="Text 66"/>
+          <p:cNvSpPr/>
+          <p:nvPr/>
+        </p:nvSpPr>
+        <p:spPr>
+          <a:xfrm>
+            <a:off x="7085816" y="4169664"/>
+            <a:ext cx="415399" cy="475488"/>
+          </a:xfrm>
+          <a:prstGeom prst="rect">
+            <a:avLst/>
+          </a:prstGeom>
+          <a:noFill/>
+          <a:ln/>
+        </p:spPr>
+        <p:txBody>
+          <a:bodyPr wrap="square" lIns="0" tIns="0" rIns="0" bIns="0" rtlCol="0" anchor="ctr"/>
+          <a:lstStyle/>
+          <a:p>
+            <a:pPr algn="ctr" indent="0" marL="0">
+              <a:buNone/>
+            </a:pPr>
+            <a:r>
+              <a:rPr lang="en-US" sz="900" b="1" dirty="0">
+                <a:solidFill>
+                  <a:srgbClr val="9D174D"/>
+                </a:solidFill>
+                <a:latin typeface="Trebuchet MS" pitchFamily="34" charset="0"/>
+                <a:ea typeface="Trebuchet MS" pitchFamily="34" charset="-122"/>
+                <a:cs typeface="Trebuchet MS" pitchFamily="34" charset="-120"/>
+              </a:rPr>
+              <a:t>i</a:t>
+            </a:r>
+            <a:endParaRPr lang="en-US" sz="900" dirty="0"/>
+          </a:p>
+        </p:txBody>
+      </p:sp>
+      <p:sp>
+        <p:nvSpPr>
+          <p:cNvPr id="69" name="Shape 67"/>
+          <p:cNvSpPr/>
+          <p:nvPr/>
+        </p:nvSpPr>
+        <p:spPr>
+          <a:xfrm>
+            <a:off x="7552421" y="4169664"/>
+            <a:ext cx="415399" cy="475488"/>
+          </a:xfrm>
+          <a:prstGeom prst="rect">
+            <a:avLst>
+              <a:gd name="adj" fmla="val 8805"/>
+            </a:avLst>
+          </a:prstGeom>
+          <a:solidFill>
+            <a:srgbClr val="FFFFFF"/>
+          </a:solidFill>
+          <a:ln w="12700">
+            <a:solidFill>
+              <a:srgbClr val="DB2777"/>
+            </a:solidFill>
+            <a:prstDash val="solid"/>
+          </a:ln>
+        </p:spPr>
+      </p:sp>
+      <p:sp>
+        <p:nvSpPr>
+          <p:cNvPr id="70" name="Text 68"/>
+          <p:cNvSpPr/>
+          <p:nvPr/>
+        </p:nvSpPr>
+        <p:spPr>
+          <a:xfrm>
+            <a:off x="7552421" y="4169664"/>
+            <a:ext cx="415399" cy="475488"/>
+          </a:xfrm>
+          <a:prstGeom prst="rect">
+            <a:avLst/>
+          </a:prstGeom>
+          <a:noFill/>
+          <a:ln/>
+        </p:spPr>
+        <p:txBody>
+          <a:bodyPr wrap="square" lIns="0" tIns="0" rIns="0" bIns="0" rtlCol="0" anchor="ctr"/>
+          <a:lstStyle/>
+          <a:p>
+            <a:pPr algn="ctr" indent="0" marL="0">
+              <a:buNone/>
+            </a:pPr>
+            <a:r>
+              <a:rPr lang="en-US" sz="900" b="1" dirty="0">
+                <a:solidFill>
+                  <a:srgbClr val="9D174D"/>
+                </a:solidFill>
+                <a:latin typeface="Trebuchet MS" pitchFamily="34" charset="0"/>
+                <a:ea typeface="Trebuchet MS" pitchFamily="34" charset="-122"/>
+                <a:cs typeface="Trebuchet MS" pitchFamily="34" charset="-120"/>
+              </a:rPr>
+              <a:t>o</a:t>
+            </a:r>
+            <a:endParaRPr lang="en-US" sz="900" dirty="0"/>
+          </a:p>
+        </p:txBody>
+      </p:sp>
+      <p:sp>
+        <p:nvSpPr>
+          <p:cNvPr id="71" name="Shape 69"/>
+          <p:cNvSpPr/>
+          <p:nvPr/>
+        </p:nvSpPr>
+        <p:spPr>
+          <a:xfrm>
+            <a:off x="8019027" y="4169664"/>
+            <a:ext cx="415399" cy="475488"/>
+          </a:xfrm>
+          <a:prstGeom prst="rect">
+            <a:avLst>
+              <a:gd name="adj" fmla="val 8805"/>
+            </a:avLst>
+          </a:prstGeom>
+          <a:solidFill>
+            <a:srgbClr val="FFFFFF"/>
+          </a:solidFill>
+          <a:ln w="12700">
+            <a:solidFill>
+              <a:srgbClr val="DB2777"/>
+            </a:solidFill>
+            <a:prstDash val="solid"/>
+          </a:ln>
+        </p:spPr>
+      </p:sp>
+      <p:sp>
+        <p:nvSpPr>
+          <p:cNvPr id="72" name="Text 70"/>
+          <p:cNvSpPr/>
+          <p:nvPr/>
+        </p:nvSpPr>
+        <p:spPr>
+          <a:xfrm>
+            <a:off x="8019027" y="4169664"/>
+            <a:ext cx="415399" cy="475488"/>
+          </a:xfrm>
+          <a:prstGeom prst="rect">
+            <a:avLst/>
+          </a:prstGeom>
+          <a:noFill/>
+          <a:ln/>
+        </p:spPr>
+        <p:txBody>
+          <a:bodyPr wrap="square" lIns="0" tIns="0" rIns="0" bIns="0" rtlCol="0" anchor="ctr"/>
+          <a:lstStyle/>
+          <a:p>
+            <a:pPr algn="ctr" indent="0" marL="0">
+              <a:buNone/>
+            </a:pPr>
+            <a:r>
+              <a:rPr lang="en-US" sz="900" b="1" dirty="0">
+                <a:solidFill>
+                  <a:srgbClr val="9D174D"/>
+                </a:solidFill>
+                <a:latin typeface="Trebuchet MS" pitchFamily="34" charset="0"/>
+                <a:ea typeface="Trebuchet MS" pitchFamily="34" charset="-122"/>
+                <a:cs typeface="Trebuchet MS" pitchFamily="34" charset="-120"/>
+              </a:rPr>
+              <a:t>n</a:t>
             </a:r>
             <a:endParaRPr lang="en-US" sz="900" dirty="0"/>
           </a:p>
@@ -31097,7 +32480,7 @@
                 <a:ea typeface="Calibri" pitchFamily="34" charset="-122"/>
                 <a:cs typeface="Calibri" pitchFamily="34" charset="-120"/>
               </a:rPr>
-              <a:t>to build or arrange</a:t>
+              <a:t>to build</a:t>
             </a:r>
             <a:endParaRPr lang="en-US" sz="850" dirty="0"/>
           </a:p>
@@ -31209,7 +32592,7 @@
                 <a:ea typeface="Calibri" pitchFamily="34" charset="-122"/>
                 <a:cs typeface="Calibri" pitchFamily="34" charset="-120"/>
               </a:rPr>
-              <a:t>result or process of</a:t>
+              <a:t>the result or state of</a:t>
             </a:r>
             <a:endParaRPr lang="en-US" sz="850" dirty="0"/>
           </a:p>
@@ -32082,7 +33465,7 @@
                 <a:ea typeface="Calibri" pitchFamily="34" charset="-122"/>
                 <a:cs typeface="Calibri" pitchFamily="34" charset="-120"/>
               </a:rPr>
-              <a:t>to build or arrange</a:t>
+              <a:t>to build</a:t>
             </a:r>
             <a:endParaRPr lang="en-US" sz="850" dirty="0"/>
           </a:p>
@@ -32194,7 +33577,7 @@
                 <a:ea typeface="Calibri" pitchFamily="34" charset="-122"/>
                 <a:cs typeface="Calibri" pitchFamily="34" charset="-120"/>
               </a:rPr>
-              <a:t>result or process of</a:t>
+              <a:t>the result or state of</a:t>
             </a:r>
             <a:endParaRPr lang="en-US" sz="850" dirty="0"/>
           </a:p>
@@ -33199,7 +34582,7 @@
                 <a:ea typeface="Calibri" pitchFamily="34" charset="-122"/>
                 <a:cs typeface="Calibri" pitchFamily="34" charset="-120"/>
               </a:rPr>
-              <a:t>to build or arrange</a:t>
+              <a:t>to build</a:t>
             </a:r>
             <a:endParaRPr lang="en-US" sz="850" dirty="0"/>
           </a:p>
@@ -33311,7 +34694,7 @@
                 <a:ea typeface="Calibri" pitchFamily="34" charset="-122"/>
                 <a:cs typeface="Calibri" pitchFamily="34" charset="-120"/>
               </a:rPr>
-              <a:t>result or process of</a:t>
+              <a:t>the result or state of</a:t>
             </a:r>
             <a:endParaRPr lang="en-US" sz="850" dirty="0"/>
           </a:p>
@@ -36869,7 +38252,7 @@
                 <a:ea typeface="Trebuchet MS" pitchFamily="34" charset="-122"/>
                 <a:cs typeface="Trebuchet MS" pitchFamily="34" charset="-120"/>
               </a:rPr>
-              <a:t>structure</a:t>
+              <a:t>destruction</a:t>
             </a:r>
             <a:endParaRPr lang="en-US" sz="1200" dirty="0"/>
           </a:p>
@@ -36935,7 +38318,7 @@
                 <a:ea typeface="Trebuchet MS" pitchFamily="34" charset="-122"/>
                 <a:cs typeface="Trebuchet MS" pitchFamily="34" charset="-120"/>
               </a:rPr>
-              <a:t>instruct</a:t>
+              <a:t>instruction</a:t>
             </a:r>
             <a:endParaRPr lang="en-US" sz="1200" dirty="0"/>
           </a:p>
@@ -37001,7 +38384,7 @@
                 <a:ea typeface="Trebuchet MS" pitchFamily="34" charset="-122"/>
                 <a:cs typeface="Trebuchet MS" pitchFamily="34" charset="-120"/>
               </a:rPr>
-              <a:t>destruction</a:t>
+              <a:t>structure</a:t>
             </a:r>
             <a:endParaRPr lang="en-US" sz="1200" dirty="0"/>
           </a:p>
@@ -37067,7 +38450,7 @@
                 <a:ea typeface="Trebuchet MS" pitchFamily="34" charset="-122"/>
                 <a:cs typeface="Trebuchet MS" pitchFamily="34" charset="-120"/>
               </a:rPr>
-              <a:t>instruction</a:t>
+              <a:t>reconstruction</a:t>
             </a:r>
             <a:endParaRPr lang="en-US" sz="1200" dirty="0"/>
           </a:p>
@@ -37199,7 +38582,7 @@
                 <a:ea typeface="Trebuchet MS" pitchFamily="34" charset="-122"/>
                 <a:cs typeface="Trebuchet MS" pitchFamily="34" charset="-120"/>
               </a:rPr>
-              <a:t>reconstruct</a:t>
+              <a:t>instructor</a:t>
             </a:r>
             <a:endParaRPr lang="en-US" sz="1200" dirty="0"/>
           </a:p>
@@ -37265,7 +38648,7 @@
                 <a:ea typeface="Trebuchet MS" pitchFamily="34" charset="-122"/>
                 <a:cs typeface="Trebuchet MS" pitchFamily="34" charset="-120"/>
               </a:rPr>
-              <a:t>constructor</a:t>
+              <a:t>constructive</a:t>
             </a:r>
             <a:endParaRPr lang="en-US" sz="1200" dirty="0"/>
           </a:p>
@@ -38592,7 +39975,7 @@
                 <a:ea typeface="Calibri" pitchFamily="34" charset="-122"/>
                 <a:cs typeface="Calibri" pitchFamily="34" charset="-120"/>
               </a:rPr>
-              <a:t>2.  The word 'instruct' means to knock something down.</a:t>
+              <a:t>2.  The word 'obstruct' means to help people move forward easily.</a:t>
             </a:r>
             <a:endParaRPr lang="en-US" sz="1300" dirty="0"/>
           </a:p>
@@ -38731,7 +40114,7 @@
                 <a:ea typeface="Calibri" pitchFamily="34" charset="-122"/>
                 <a:cs typeface="Calibri" pitchFamily="34" charset="-120"/>
               </a:rPr>
-              <a:t>3.  The word 'obstruct' contains the root 'struct'.</a:t>
+              <a:t>3.  An instructor is a person who teaches or shows others how to do something.</a:t>
             </a:r>
             <a:endParaRPr lang="en-US" sz="1300" dirty="0"/>
           </a:p>
@@ -38870,7 +40253,7 @@
                 <a:ea typeface="Calibri" pitchFamily="34" charset="-122"/>
                 <a:cs typeface="Calibri" pitchFamily="34" charset="-120"/>
               </a:rPr>
-              <a:t>4.  A structure is something that has been built or arranged in a particular way.</a:t>
+              <a:t>4.  The word 'destruction' means to carefully build something new.</a:t>
             </a:r>
             <a:endParaRPr lang="en-US" sz="1300" dirty="0"/>
           </a:p>
@@ -38893,11 +40276,11 @@
             </a:avLst>
           </a:prstGeom>
           <a:solidFill>
-            <a:srgbClr val="DCFCE7"/>
-          </a:solidFill>
-          <a:ln w="12700">
-            <a:solidFill>
-              <a:srgbClr val="16A34A"/>
+            <a:srgbClr val="FEE2E2"/>
+          </a:solidFill>
+          <a:ln w="12700">
+            <a:solidFill>
+              <a:srgbClr val="DC2626"/>
             </a:solidFill>
             <a:prstDash val="solid"/>
           </a:ln>
@@ -38930,13 +40313,13 @@
             <a:r>
               <a:rPr lang="en-US" sz="1100" b="1" dirty="0">
                 <a:solidFill>
-                  <a:srgbClr val="16A34A"/>
+                  <a:srgbClr val="DC2626"/>
                 </a:solidFill>
                 <a:latin typeface="Trebuchet MS" pitchFamily="34" charset="0"/>
                 <a:ea typeface="Trebuchet MS" pitchFamily="34" charset="-122"/>
                 <a:cs typeface="Trebuchet MS" pitchFamily="34" charset="-120"/>
               </a:rPr>
-              <a:t>TRUE</a:t>
+              <a:t>FALSE</a:t>
             </a:r>
             <a:endParaRPr lang="en-US" sz="1100" dirty="0"/>
           </a:p>
@@ -39009,7 +40392,7 @@
                 <a:ea typeface="Calibri" pitchFamily="34" charset="-122"/>
                 <a:cs typeface="Calibri" pitchFamily="34" charset="-120"/>
               </a:rPr>
-              <a:t>5.  The root 'struct' originally came from Greek.</a:t>
+              <a:t>5.  The prefix 'de' in 'destruction' means to undo or take apart.</a:t>
             </a:r>
             <a:endParaRPr lang="en-US" sz="1300" dirty="0"/>
           </a:p>
@@ -39032,11 +40415,11 @@
             </a:avLst>
           </a:prstGeom>
           <a:solidFill>
-            <a:srgbClr val="FEE2E2"/>
-          </a:solidFill>
-          <a:ln w="12700">
-            <a:solidFill>
-              <a:srgbClr val="DC2626"/>
+            <a:srgbClr val="DCFCE7"/>
+          </a:solidFill>
+          <a:ln w="12700">
+            <a:solidFill>
+              <a:srgbClr val="16A34A"/>
             </a:solidFill>
             <a:prstDash val="solid"/>
           </a:ln>
@@ -39069,13 +40452,13 @@
             <a:r>
               <a:rPr lang="en-US" sz="1100" b="1" dirty="0">
                 <a:solidFill>
-                  <a:srgbClr val="DC2626"/>
+                  <a:srgbClr val="16A34A"/>
                 </a:solidFill>
                 <a:latin typeface="Trebuchet MS" pitchFamily="34" charset="0"/>
                 <a:ea typeface="Trebuchet MS" pitchFamily="34" charset="-122"/>
                 <a:cs typeface="Trebuchet MS" pitchFamily="34" charset="-120"/>
               </a:rPr>
-              <a:t>FALSE</a:t>
+              <a:t>TRUE</a:t>
             </a:r>
             <a:endParaRPr lang="en-US" sz="1100" dirty="0"/>
           </a:p>
@@ -39714,7 +41097,7 @@
                 <a:ea typeface="Trebuchet MS" pitchFamily="34" charset="-122"/>
                 <a:cs typeface="Trebuchet MS" pitchFamily="34" charset="-120"/>
               </a:rPr>
-              <a:t>structure</a:t>
+              <a:t>destruction</a:t>
             </a:r>
             <a:endParaRPr lang="en-US" sz="1300" dirty="0"/>
           </a:p>
@@ -39780,7 +41163,7 @@
                 <a:ea typeface="Trebuchet MS" pitchFamily="34" charset="-122"/>
                 <a:cs typeface="Trebuchet MS" pitchFamily="34" charset="-120"/>
               </a:rPr>
-              <a:t>instruct</a:t>
+              <a:t>instruction</a:t>
             </a:r>
             <a:endParaRPr lang="en-US" sz="1300" dirty="0"/>
           </a:p>
@@ -39846,7 +41229,7 @@
                 <a:ea typeface="Trebuchet MS" pitchFamily="34" charset="-122"/>
                 <a:cs typeface="Trebuchet MS" pitchFamily="34" charset="-120"/>
               </a:rPr>
-              <a:t>destruction</a:t>
+              <a:t>structure</a:t>
             </a:r>
             <a:endParaRPr lang="en-US" sz="1300" dirty="0"/>
           </a:p>
@@ -39912,7 +41295,7 @@
                 <a:ea typeface="Trebuchet MS" pitchFamily="34" charset="-122"/>
                 <a:cs typeface="Trebuchet MS" pitchFamily="34" charset="-120"/>
               </a:rPr>
-              <a:t>instruction</a:t>
+              <a:t>reconstruction</a:t>
             </a:r>
             <a:endParaRPr lang="en-US" sz="1300" dirty="0"/>
           </a:p>
@@ -40044,7 +41427,7 @@
                 <a:ea typeface="Trebuchet MS" pitchFamily="34" charset="-122"/>
                 <a:cs typeface="Trebuchet MS" pitchFamily="34" charset="-120"/>
               </a:rPr>
-              <a:t>reconstruct</a:t>
+              <a:t>instructor</a:t>
             </a:r>
             <a:endParaRPr lang="en-US" sz="1300" dirty="0"/>
           </a:p>
@@ -42288,7 +43671,7 @@
                 <a:ea typeface="Calibri" pitchFamily="34" charset="-122"/>
                 <a:cs typeface="Calibri" pitchFamily="34" charset="-120"/>
               </a:rPr>
-              <a:t>To build something again after it has been damaged or taken apart.</a:t>
+              <a:t>A person who teaches or shows others how to do something.</a:t>
             </a:r>
             <a:endParaRPr lang="en-US" sz="1200" dirty="0"/>
           </a:p>
@@ -42361,7 +43744,7 @@
                 <a:ea typeface="Trebuchet MS" pitchFamily="34" charset="-122"/>
                 <a:cs typeface="Trebuchet MS" pitchFamily="34" charset="-120"/>
               </a:rPr>
-              <a:t>structure</a:t>
+              <a:t>destruction</a:t>
             </a:r>
             <a:endParaRPr lang="en-US" sz="1200" dirty="0"/>
           </a:p>
@@ -42427,7 +43810,7 @@
                 <a:ea typeface="Calibri" pitchFamily="34" charset="-122"/>
                 <a:cs typeface="Calibri" pitchFamily="34" charset="-120"/>
               </a:rPr>
-              <a:t>A set of steps or directions that tell you how to do something.</a:t>
+              <a:t>Building or putting something back together after it has been damaged.</a:t>
             </a:r>
             <a:endParaRPr lang="en-US" sz="1200" dirty="0"/>
           </a:p>
@@ -42500,7 +43883,7 @@
                 <a:ea typeface="Trebuchet MS" pitchFamily="34" charset="-122"/>
                 <a:cs typeface="Trebuchet MS" pitchFamily="34" charset="-120"/>
               </a:rPr>
-              <a:t>instruct</a:t>
+              <a:t>instruction</a:t>
             </a:r>
             <a:endParaRPr lang="en-US" sz="1200" dirty="0"/>
           </a:p>
@@ -42566,7 +43949,7 @@
                 <a:ea typeface="Calibri" pitchFamily="34" charset="-122"/>
                 <a:cs typeface="Calibri" pitchFamily="34" charset="-120"/>
               </a:rPr>
-              <a:t>The act of breaking something down or ruining it completely.</a:t>
+              <a:t>The way something is built or organised, like the frame of a building.</a:t>
             </a:r>
             <a:endParaRPr lang="en-US" sz="1200" dirty="0"/>
           </a:p>
@@ -42639,7 +44022,7 @@
                 <a:ea typeface="Trebuchet MS" pitchFamily="34" charset="-122"/>
                 <a:cs typeface="Trebuchet MS" pitchFamily="34" charset="-120"/>
               </a:rPr>
-              <a:t>destruction</a:t>
+              <a:t>structure</a:t>
             </a:r>
             <a:endParaRPr lang="en-US" sz="1200" dirty="0"/>
           </a:p>
@@ -42705,7 +44088,7 @@
                 <a:ea typeface="Calibri" pitchFamily="34" charset="-122"/>
                 <a:cs typeface="Calibri" pitchFamily="34" charset="-120"/>
               </a:rPr>
-              <a:t>To block something or get in the way so it cannot move freely.</a:t>
+              <a:t>To block something so that people or things cannot get through.</a:t>
             </a:r>
             <a:endParaRPr lang="en-US" sz="1200" dirty="0"/>
           </a:p>
@@ -42778,7 +44161,7 @@
                 <a:ea typeface="Trebuchet MS" pitchFamily="34" charset="-122"/>
                 <a:cs typeface="Trebuchet MS" pitchFamily="34" charset="-120"/>
               </a:rPr>
-              <a:t>instruction</a:t>
+              <a:t>reconstruction</a:t>
             </a:r>
             <a:endParaRPr lang="en-US" sz="1200" dirty="0"/>
           </a:p>
@@ -42844,7 +44227,7 @@
                 <a:ea typeface="Calibri" pitchFamily="34" charset="-122"/>
                 <a:cs typeface="Calibri" pitchFamily="34" charset="-120"/>
               </a:rPr>
-              <a:t>To teach or give someone directions on how to do something.</a:t>
+              <a:t>Directions that tell you how to do something step by step.</a:t>
             </a:r>
             <a:endParaRPr lang="en-US" sz="1200" dirty="0"/>
           </a:p>
@@ -42983,7 +44366,7 @@
                 <a:ea typeface="Calibri" pitchFamily="34" charset="-122"/>
                 <a:cs typeface="Calibri" pitchFamily="34" charset="-120"/>
               </a:rPr>
-              <a:t>To build or put something together, like a model or a building.</a:t>
+              <a:t>To build or put something together, like building a model or a house.</a:t>
             </a:r>
             <a:endParaRPr lang="en-US" sz="1200" dirty="0"/>
           </a:p>
@@ -43056,7 +44439,7 @@
                 <a:ea typeface="Trebuchet MS" pitchFamily="34" charset="-122"/>
                 <a:cs typeface="Trebuchet MS" pitchFamily="34" charset="-120"/>
               </a:rPr>
-              <a:t>reconstruct</a:t>
+              <a:t>instructor</a:t>
             </a:r>
             <a:endParaRPr lang="en-US" sz="1200" dirty="0"/>
           </a:p>
@@ -43122,7 +44505,7 @@
                 <a:ea typeface="Calibri" pitchFamily="34" charset="-122"/>
                 <a:cs typeface="Calibri" pitchFamily="34" charset="-120"/>
               </a:rPr>
-              <a:t>The way something is built or organised, like the frame of a house.</a:t>
+              <a:t>When something is completely broken apart or ruined.</a:t>
             </a:r>
             <a:endParaRPr lang="en-US" sz="1200" dirty="0"/>
           </a:p>
@@ -43617,7 +45000,7 @@
                 <a:ea typeface="Calibri" pitchFamily="34" charset="-122"/>
                 <a:cs typeface="Calibri" pitchFamily="34" charset="-120"/>
               </a:rPr>
-              <a:t>The engineer had to construct a new bridge across the river after the old one was damaged.</a:t>
+              <a:t>The students were given clear instructions before starting the science experiment.</a:t>
             </a:r>
             <a:endParaRPr lang="en-US" sz="1500" dirty="0"/>
           </a:p>
@@ -43781,7 +45164,7 @@
                 <a:ea typeface="Calibri" pitchFamily="34" charset="-122"/>
                 <a:cs typeface="Calibri" pitchFamily="34" charset="-120"/>
               </a:rPr>
-              <a:t>Our teacher will instruct us on how to complete the science experiment safely.</a:t>
+              <a:t>Heavy rain caused the destruction of the sandcastles on the beach.</a:t>
             </a:r>
             <a:endParaRPr lang="en-US" sz="1500" dirty="0"/>
           </a:p>
@@ -43945,7 +45328,7 @@
                 <a:ea typeface="Calibri" pitchFamily="34" charset="-122"/>
                 <a:cs typeface="Calibri" pitchFamily="34" charset="-120"/>
               </a:rPr>
-              <a:t>The fallen tree began to obstruct the path through the national park.</a:t>
+              <a:t>The engineer designed a strong structure that could survive an earthquake.</a:t>
             </a:r>
             <a:endParaRPr lang="en-US" sz="1500" dirty="0"/>
           </a:p>
